--- a/examples/todos-os-modelos.pptx
+++ b/examples/todos-os-modelos.pptx
@@ -240,7 +240,7 @@
       <c:catAx>
         <c:axId val="-2068027336"/>
         <c:scaling>
-          <c:orientation val="minMax"/>
+          <c:orientation val="maxMin"/>
         </c:scaling>
         <c:delete val="0"/>
         <c:axPos val="l"/>
@@ -310,7 +310,7 @@
           </a:p>
         </c:txPr>
         <c:crossAx val="-2068027336"/>
-        <c:crosses val="autoZero"/>
+        <c:crosses val="max"/>
       </c:valAx>
     </c:plotArea>
     <c:dispBlanksAs val="gap"/>
@@ -13427,7 +13427,7 @@
           <a:p>
             <a:pPr algn="l"/>
             <a:r>
-              <a:rPr sz="3000" b="1" i="0">
+              <a:rPr sz="2300" b="1" i="0">
                 <a:solidFill>
                   <a:srgbClr val="333333"/>
                 </a:solidFill>

--- a/examples/todos-os-modelos.pptx
+++ b/examples/todos-os-modelos.pptx
@@ -34,6 +34,8 @@
     <p:sldId id="282" r:id="rId34"/>
     <p:sldId id="283" r:id="rId35"/>
     <p:sldId id="284" r:id="rId36"/>
+    <p:sldId id="285" r:id="rId37"/>
+    <p:sldId id="286" r:id="rId38"/>
   </p:sldIdLst>
   <p:sldSz cx="12191695" cy="6858000" type="screen4x3"/>
   <p:notesSz cx="6858000" cy="9144000"/>
@@ -5343,7 +5345,7 @@
       </p:sp>
       <p:graphicFrame>
         <p:nvGraphicFramePr>
-          <p:cNvPr id="13" name="Chart 12"/>
+          <p:cNvPr id="13" name="Chart 12" descr="Linha com meta tracejada, comentários e callout de recomendação"/>
           <p:cNvGraphicFramePr>
             <a:graphicFrameLocks noGrp="1"/>
           </p:cNvGraphicFramePr>
@@ -5659,7 +5661,7 @@
       </p:pic>
       <p:graphicFrame>
         <p:nvGraphicFramePr>
-          <p:cNvPr id="8" name="Chart 7"/>
+          <p:cNvPr id="8" name="Chart 7" descr="Composição com colunas empilhadas (sem kicker)"/>
           <p:cNvGraphicFramePr>
             <a:graphicFrameLocks noGrp="1"/>
           </p:cNvGraphicFramePr>
@@ -5927,7 +5929,7 @@
       </p:pic>
       <p:graphicFrame>
         <p:nvGraphicFramePr>
-          <p:cNvPr id="9" name="Chart 8"/>
+          <p:cNvPr id="9" name="Chart 8" descr="Rosca com até 4 fatias"/>
           <p:cNvGraphicFramePr>
             <a:graphicFrameLocks noGrp="1"/>
           </p:cNvGraphicFramePr>
@@ -9947,7 +9949,7 @@
                 </a:solidFill>
                 <a:latin typeface="Calibri"/>
               </a:rPr>
-              <a:t>Duas colunas: certo vs. errado</a:t>
+              <a:t>Print de tela com destaques numerados e bullets ao lado</a:t>
             </a:r>
           </a:p>
         </p:txBody>
@@ -10052,7 +10054,7 @@
                 </a:solidFill>
                 <a:latin typeface="Calibri"/>
               </a:rPr>
-              <a:t>DUAS COLUNAS</a:t>
+              <a:t>PASSO A PASSO</a:t>
             </a:r>
           </a:p>
         </p:txBody>
@@ -10151,41 +10153,35 @@
           </a:prstGeom>
         </p:spPr>
       </p:pic>
-      <p:sp>
-        <p:nvSpPr>
-          <p:cNvPr id="9" name="TextBox 8"/>
-          <p:cNvSpPr txBox="1"/>
-          <p:nvPr/>
-        </p:nvSpPr>
-        <p:spPr>
-          <a:xfrm>
-            <a:off x="457200" y="1737360"/>
-            <a:ext cx="5500116" cy="548640"/>
-          </a:xfrm>
-          <a:prstGeom prst="rect">
-            <a:avLst/>
-          </a:prstGeom>
-          <a:noFill/>
-        </p:spPr>
-        <p:txBody>
-          <a:bodyPr wrap="square" anchor="b" lIns="45720" rIns="45720" tIns="27432" bIns="27432">
-            <a:spAutoFit/>
-          </a:bodyPr>
-          <a:lstStyle/>
-          <a:p>
-            <a:pPr algn="l"/>
-            <a:r>
-              <a:rPr sz="1800" b="1" i="0">
-                <a:solidFill>
-                  <a:srgbClr val="2E7D32"/>
-                </a:solidFill>
-                <a:latin typeface="Calibri"/>
-              </a:rPr>
-              <a:t>Certo</a:t>
-            </a:r>
-          </a:p>
-        </p:txBody>
-      </p:sp>
+      <p:pic>
+        <p:nvPicPr>
+          <p:cNvPr id="9" name="Picture 8" descr="Formulário de registro de parada"/>
+          <p:cNvPicPr>
+            <a:picLocks noChangeAspect="1"/>
+          </p:cNvPicPr>
+          <p:nvPr/>
+        </p:nvPicPr>
+        <p:blipFill>
+          <a:blip r:embed="rId3"/>
+          <a:stretch>
+            <a:fillRect/>
+          </a:stretch>
+        </p:blipFill>
+        <p:spPr>
+          <a:xfrm>
+            <a:off x="579120" y="1737360"/>
+            <a:ext cx="7071360" cy="3977640"/>
+          </a:xfrm>
+          <a:prstGeom prst="rect">
+            <a:avLst/>
+          </a:prstGeom>
+          <a:ln w="9525">
+            <a:solidFill>
+              <a:srgbClr val="F2F2F2"/>
+            </a:solidFill>
+          </a:ln>
+        </p:spPr>
+      </p:pic>
       <p:sp>
         <p:nvSpPr>
           <p:cNvPr id="10" name="Rectangle 9"/>
@@ -10194,17 +10190,17 @@
         </p:nvSpPr>
         <p:spPr>
           <a:xfrm>
-            <a:off x="457200" y="2331720"/>
-            <a:ext cx="5500116" cy="27432"/>
-          </a:xfrm>
-          <a:prstGeom prst="rect">
-            <a:avLst/>
-          </a:prstGeom>
-          <a:solidFill>
-            <a:srgbClr val="2E7D32"/>
-          </a:solidFill>
-          <a:ln>
-            <a:noFill/>
+            <a:off x="1993392" y="2612440"/>
+            <a:ext cx="3889248" cy="278434"/>
+          </a:xfrm>
+          <a:prstGeom prst="rect">
+            <a:avLst/>
+          </a:prstGeom>
+          <a:noFill/>
+          <a:ln w="28575">
+            <a:solidFill>
+              <a:srgbClr val="F2A900"/>
+            </a:solidFill>
           </a:ln>
           <a:effectLst/>
         </p:spPr>
@@ -10232,14 +10228,302 @@
       </p:sp>
       <p:sp>
         <p:nvSpPr>
-          <p:cNvPr id="11" name="TextBox 10"/>
-          <p:cNvSpPr txBox="1"/>
-          <p:nvPr/>
-        </p:nvSpPr>
-        <p:spPr>
-          <a:xfrm>
-            <a:off x="457200" y="2514600"/>
-            <a:ext cx="5500116" cy="3611880"/>
+          <p:cNvPr id="11" name="Oval 10"/>
+          <p:cNvSpPr/>
+          <p:nvPr/>
+        </p:nvSpPr>
+        <p:spPr>
+          <a:xfrm>
+            <a:off x="1828800" y="2447848"/>
+            <a:ext cx="329184" cy="329184"/>
+          </a:xfrm>
+          <a:prstGeom prst="ellipse">
+            <a:avLst/>
+          </a:prstGeom>
+          <a:solidFill>
+            <a:srgbClr val="F2A900"/>
+          </a:solidFill>
+          <a:ln w="12700">
+            <a:solidFill>
+              <a:srgbClr val="FFFFFF"/>
+            </a:solidFill>
+          </a:ln>
+          <a:effectLst/>
+        </p:spPr>
+        <p:style>
+          <a:lnRef idx="1">
+            <a:schemeClr val="accent1"/>
+          </a:lnRef>
+          <a:fillRef idx="3">
+            <a:schemeClr val="accent1"/>
+          </a:fillRef>
+          <a:effectRef idx="2">
+            <a:schemeClr val="accent1"/>
+          </a:effectRef>
+          <a:fontRef idx="minor">
+            <a:schemeClr val="lt1"/>
+          </a:fontRef>
+        </p:style>
+        <p:txBody>
+          <a:bodyPr rtlCol="0" anchor="ctr" lIns="0" rIns="0"/>
+          <a:lstStyle/>
+          <a:p>
+            <a:pPr algn="ctr"/>
+            <a:r>
+              <a:rPr sz="1100" b="1" i="0">
+                <a:solidFill>
+                  <a:srgbClr val="FFFFFF"/>
+                </a:solidFill>
+                <a:latin typeface="Calibri"/>
+              </a:rPr>
+              <a:t>1</a:t>
+            </a:r>
+          </a:p>
+        </p:txBody>
+      </p:sp>
+      <p:sp>
+        <p:nvSpPr>
+          <p:cNvPr id="12" name="Rectangle 11"/>
+          <p:cNvSpPr/>
+          <p:nvPr/>
+        </p:nvSpPr>
+        <p:spPr>
+          <a:xfrm>
+            <a:off x="1993392" y="3089757"/>
+            <a:ext cx="3889248" cy="278434"/>
+          </a:xfrm>
+          <a:prstGeom prst="rect">
+            <a:avLst/>
+          </a:prstGeom>
+          <a:noFill/>
+          <a:ln w="28575">
+            <a:solidFill>
+              <a:srgbClr val="F2A900"/>
+            </a:solidFill>
+          </a:ln>
+          <a:effectLst/>
+        </p:spPr>
+        <p:style>
+          <a:lnRef idx="1">
+            <a:schemeClr val="accent1"/>
+          </a:lnRef>
+          <a:fillRef idx="3">
+            <a:schemeClr val="accent1"/>
+          </a:fillRef>
+          <a:effectRef idx="2">
+            <a:schemeClr val="accent1"/>
+          </a:effectRef>
+          <a:fontRef idx="minor">
+            <a:schemeClr val="lt1"/>
+          </a:fontRef>
+        </p:style>
+        <p:txBody>
+          <a:bodyPr rtlCol="0" anchor="ctr"/>
+          <a:lstStyle/>
+          <a:p>
+            <a:pPr algn="ctr"/>
+          </a:p>
+        </p:txBody>
+      </p:sp>
+      <p:sp>
+        <p:nvSpPr>
+          <p:cNvPr id="13" name="Oval 12"/>
+          <p:cNvSpPr/>
+          <p:nvPr/>
+        </p:nvSpPr>
+        <p:spPr>
+          <a:xfrm>
+            <a:off x="1828800" y="2925165"/>
+            <a:ext cx="329184" cy="329184"/>
+          </a:xfrm>
+          <a:prstGeom prst="ellipse">
+            <a:avLst/>
+          </a:prstGeom>
+          <a:solidFill>
+            <a:srgbClr val="F2A900"/>
+          </a:solidFill>
+          <a:ln w="12700">
+            <a:solidFill>
+              <a:srgbClr val="FFFFFF"/>
+            </a:solidFill>
+          </a:ln>
+          <a:effectLst/>
+        </p:spPr>
+        <p:style>
+          <a:lnRef idx="1">
+            <a:schemeClr val="accent1"/>
+          </a:lnRef>
+          <a:fillRef idx="3">
+            <a:schemeClr val="accent1"/>
+          </a:fillRef>
+          <a:effectRef idx="2">
+            <a:schemeClr val="accent1"/>
+          </a:effectRef>
+          <a:fontRef idx="minor">
+            <a:schemeClr val="lt1"/>
+          </a:fontRef>
+        </p:style>
+        <p:txBody>
+          <a:bodyPr rtlCol="0" anchor="ctr" lIns="0" rIns="0"/>
+          <a:lstStyle/>
+          <a:p>
+            <a:pPr algn="ctr"/>
+            <a:r>
+              <a:rPr sz="1100" b="1" i="0">
+                <a:solidFill>
+                  <a:srgbClr val="FFFFFF"/>
+                </a:solidFill>
+                <a:latin typeface="Calibri"/>
+              </a:rPr>
+              <a:t>2</a:t>
+            </a:r>
+          </a:p>
+        </p:txBody>
+      </p:sp>
+      <p:sp>
+        <p:nvSpPr>
+          <p:cNvPr id="14" name="Rectangle 13"/>
+          <p:cNvSpPr/>
+          <p:nvPr/>
+        </p:nvSpPr>
+        <p:spPr>
+          <a:xfrm>
+            <a:off x="1993392" y="4641037"/>
+            <a:ext cx="1060704" cy="318211"/>
+          </a:xfrm>
+          <a:prstGeom prst="rect">
+            <a:avLst/>
+          </a:prstGeom>
+          <a:noFill/>
+          <a:ln w="28575">
+            <a:solidFill>
+              <a:srgbClr val="F2A900"/>
+            </a:solidFill>
+          </a:ln>
+          <a:effectLst/>
+        </p:spPr>
+        <p:style>
+          <a:lnRef idx="1">
+            <a:schemeClr val="accent1"/>
+          </a:lnRef>
+          <a:fillRef idx="3">
+            <a:schemeClr val="accent1"/>
+          </a:fillRef>
+          <a:effectRef idx="2">
+            <a:schemeClr val="accent1"/>
+          </a:effectRef>
+          <a:fontRef idx="minor">
+            <a:schemeClr val="lt1"/>
+          </a:fontRef>
+        </p:style>
+        <p:txBody>
+          <a:bodyPr rtlCol="0" anchor="ctr"/>
+          <a:lstStyle/>
+          <a:p>
+            <a:pPr algn="ctr"/>
+          </a:p>
+        </p:txBody>
+      </p:sp>
+      <p:sp>
+        <p:nvSpPr>
+          <p:cNvPr id="15" name="Oval 14"/>
+          <p:cNvSpPr/>
+          <p:nvPr/>
+        </p:nvSpPr>
+        <p:spPr>
+          <a:xfrm>
+            <a:off x="1828800" y="4476445"/>
+            <a:ext cx="329184" cy="329184"/>
+          </a:xfrm>
+          <a:prstGeom prst="ellipse">
+            <a:avLst/>
+          </a:prstGeom>
+          <a:solidFill>
+            <a:srgbClr val="F2A900"/>
+          </a:solidFill>
+          <a:ln w="12700">
+            <a:solidFill>
+              <a:srgbClr val="FFFFFF"/>
+            </a:solidFill>
+          </a:ln>
+          <a:effectLst/>
+        </p:spPr>
+        <p:style>
+          <a:lnRef idx="1">
+            <a:schemeClr val="accent1"/>
+          </a:lnRef>
+          <a:fillRef idx="3">
+            <a:schemeClr val="accent1"/>
+          </a:fillRef>
+          <a:effectRef idx="2">
+            <a:schemeClr val="accent1"/>
+          </a:effectRef>
+          <a:fontRef idx="minor">
+            <a:schemeClr val="lt1"/>
+          </a:fontRef>
+        </p:style>
+        <p:txBody>
+          <a:bodyPr rtlCol="0" anchor="ctr" lIns="0" rIns="0"/>
+          <a:lstStyle/>
+          <a:p>
+            <a:pPr algn="ctr"/>
+            <a:r>
+              <a:rPr sz="1100" b="1" i="0">
+                <a:solidFill>
+                  <a:srgbClr val="FFFFFF"/>
+                </a:solidFill>
+                <a:latin typeface="Calibri"/>
+              </a:rPr>
+              <a:t>3</a:t>
+            </a:r>
+          </a:p>
+        </p:txBody>
+      </p:sp>
+      <p:sp>
+        <p:nvSpPr>
+          <p:cNvPr id="16" name="TextBox 15"/>
+          <p:cNvSpPr txBox="1"/>
+          <p:nvPr/>
+        </p:nvSpPr>
+        <p:spPr>
+          <a:xfrm>
+            <a:off x="457200" y="5760720"/>
+            <a:ext cx="7315200" cy="365760"/>
+          </a:xfrm>
+          <a:prstGeom prst="rect">
+            <a:avLst/>
+          </a:prstGeom>
+          <a:noFill/>
+        </p:spPr>
+        <p:txBody>
+          <a:bodyPr wrap="square" anchor="t" lIns="45720" rIns="45720" tIns="27432" bIns="27432">
+            <a:spAutoFit/>
+          </a:bodyPr>
+          <a:lstStyle/>
+          <a:p>
+            <a:pPr algn="ctr"/>
+            <a:r>
+              <a:rPr sz="1100" b="0" i="1">
+                <a:solidFill>
+                  <a:srgbClr val="8C8C8C"/>
+                </a:solidFill>
+                <a:latin typeface="Calibri"/>
+              </a:rPr>
+              <a:t>Tela Paradas &gt; Nova parada (ambiente de teste)</a:t>
+            </a:r>
+          </a:p>
+        </p:txBody>
+      </p:sp>
+      <p:sp>
+        <p:nvSpPr>
+          <p:cNvPr id="17" name="TextBox 16"/>
+          <p:cNvSpPr txBox="1"/>
+          <p:nvPr/>
+        </p:nvSpPr>
+        <p:spPr>
+          <a:xfrm>
+            <a:off x="8046720" y="1737360"/>
+            <a:ext cx="3685032" cy="3977640"/>
           </a:xfrm>
           <a:prstGeom prst="rect">
             <a:avLst/>
@@ -10257,18 +10541,27 @@
                 <a:spcPts val="800"/>
               </a:spcAft>
               <a:buClr>
-                <a:srgbClr val="2E7D32"/>
+                <a:srgbClr val="1F3A5F"/>
               </a:buClr>
               <a:buChar char="•"/>
             </a:pPr>
             <a:r>
-              <a:rPr sz="1500" b="0" i="0">
+              <a:rPr sz="1400" b="1" i="0">
                 <a:solidFill>
                   <a:srgbClr val="333333"/>
                 </a:solidFill>
                 <a:latin typeface="Calibri"/>
               </a:rPr>
-              <a:t>Causa específica</a:t>
+              <a:t>1.</a:t>
+            </a:r>
+            <a:r>
+              <a:rPr sz="1400" b="0" i="0">
+                <a:solidFill>
+                  <a:srgbClr val="333333"/>
+                </a:solidFill>
+                <a:latin typeface="Calibri"/>
+              </a:rPr>
+              <a:t> Selecionar a máquina</a:t>
             </a:r>
           </a:p>
           <a:p>
@@ -10277,18 +10570,27 @@
                 <a:spcPts val="800"/>
               </a:spcAft>
               <a:buClr>
-                <a:srgbClr val="2E7D32"/>
+                <a:srgbClr val="1F3A5F"/>
               </a:buClr>
               <a:buChar char="•"/>
             </a:pPr>
             <a:r>
-              <a:rPr sz="1500" b="0" i="0">
+              <a:rPr sz="1400" b="1" i="0">
                 <a:solidFill>
                   <a:srgbClr val="333333"/>
                 </a:solidFill>
                 <a:latin typeface="Calibri"/>
               </a:rPr>
-              <a:t>Registrar na hora</a:t>
+              <a:t>2.</a:t>
+            </a:r>
+            <a:r>
+              <a:rPr sz="1400" b="0" i="0">
+                <a:solidFill>
+                  <a:srgbClr val="333333"/>
+                </a:solidFill>
+                <a:latin typeface="Calibri"/>
+              </a:rPr>
+              <a:t> Escolher a causa na lista</a:t>
             </a:r>
           </a:p>
           <a:p>
@@ -10297,180 +10599,27 @@
                 <a:spcPts val="800"/>
               </a:spcAft>
               <a:buClr>
-                <a:srgbClr val="2E7D32"/>
+                <a:srgbClr val="1F3A5F"/>
               </a:buClr>
               <a:buChar char="•"/>
             </a:pPr>
             <a:r>
-              <a:rPr sz="1500" b="0" i="0">
+              <a:rPr sz="1400" b="1" i="0">
                 <a:solidFill>
                   <a:srgbClr val="333333"/>
                 </a:solidFill>
                 <a:latin typeface="Calibri"/>
               </a:rPr>
-              <a:t>Duração real</a:t>
-            </a:r>
-          </a:p>
-        </p:txBody>
-      </p:sp>
-      <p:sp>
-        <p:nvSpPr>
-          <p:cNvPr id="12" name="TextBox 11"/>
-          <p:cNvSpPr txBox="1"/>
-          <p:nvPr/>
-        </p:nvSpPr>
-        <p:spPr>
-          <a:xfrm>
-            <a:off x="6231636" y="1737360"/>
-            <a:ext cx="5500116" cy="548640"/>
-          </a:xfrm>
-          <a:prstGeom prst="rect">
-            <a:avLst/>
-          </a:prstGeom>
-          <a:noFill/>
-        </p:spPr>
-        <p:txBody>
-          <a:bodyPr wrap="square" anchor="b" lIns="45720" rIns="45720" tIns="27432" bIns="27432">
-            <a:spAutoFit/>
-          </a:bodyPr>
-          <a:lstStyle/>
-          <a:p>
-            <a:pPr algn="l"/>
-            <a:r>
-              <a:rPr sz="1800" b="1" i="0">
-                <a:solidFill>
-                  <a:srgbClr val="C62828"/>
-                </a:solidFill>
-                <a:latin typeface="Calibri"/>
-              </a:rPr>
-              <a:t>Errado</a:t>
-            </a:r>
-          </a:p>
-        </p:txBody>
-      </p:sp>
-      <p:sp>
-        <p:nvSpPr>
-          <p:cNvPr id="13" name="Rectangle 12"/>
-          <p:cNvSpPr/>
-          <p:nvPr/>
-        </p:nvSpPr>
-        <p:spPr>
-          <a:xfrm>
-            <a:off x="6231636" y="2331720"/>
-            <a:ext cx="5500116" cy="27432"/>
-          </a:xfrm>
-          <a:prstGeom prst="rect">
-            <a:avLst/>
-          </a:prstGeom>
-          <a:solidFill>
-            <a:srgbClr val="C62828"/>
-          </a:solidFill>
-          <a:ln>
-            <a:noFill/>
-          </a:ln>
-          <a:effectLst/>
-        </p:spPr>
-        <p:style>
-          <a:lnRef idx="1">
-            <a:schemeClr val="accent1"/>
-          </a:lnRef>
-          <a:fillRef idx="3">
-            <a:schemeClr val="accent1"/>
-          </a:fillRef>
-          <a:effectRef idx="2">
-            <a:schemeClr val="accent1"/>
-          </a:effectRef>
-          <a:fontRef idx="minor">
-            <a:schemeClr val="lt1"/>
-          </a:fontRef>
-        </p:style>
-        <p:txBody>
-          <a:bodyPr rtlCol="0" anchor="ctr"/>
-          <a:lstStyle/>
-          <a:p>
-            <a:pPr algn="ctr"/>
-          </a:p>
-        </p:txBody>
-      </p:sp>
-      <p:sp>
-        <p:nvSpPr>
-          <p:cNvPr id="14" name="TextBox 13"/>
-          <p:cNvSpPr txBox="1"/>
-          <p:nvPr/>
-        </p:nvSpPr>
-        <p:spPr>
-          <a:xfrm>
-            <a:off x="6231636" y="2514600"/>
-            <a:ext cx="5500116" cy="3611880"/>
-          </a:xfrm>
-          <a:prstGeom prst="rect">
-            <a:avLst/>
-          </a:prstGeom>
-          <a:noFill/>
-        </p:spPr>
-        <p:txBody>
-          <a:bodyPr wrap="square" lIns="45720" rIns="45720">
-            <a:spAutoFit/>
-          </a:bodyPr>
-          <a:lstStyle/>
-          <a:p>
-            <a:pPr marL="228600" indent="-228600">
-              <a:spcAft>
-                <a:spcPts val="800"/>
-              </a:spcAft>
-              <a:buClr>
-                <a:srgbClr val="C62828"/>
-              </a:buClr>
-              <a:buChar char="•"/>
-            </a:pPr>
-            <a:r>
-              <a:rPr sz="1500" b="0" i="0">
+              <a:t>3.</a:t>
+            </a:r>
+            <a:r>
+              <a:rPr sz="1400" b="0" i="0">
                 <a:solidFill>
                   <a:srgbClr val="333333"/>
                 </a:solidFill>
                 <a:latin typeface="Calibri"/>
               </a:rPr>
-              <a:t>'Outros'</a:t>
-            </a:r>
-          </a:p>
-          <a:p>
-            <a:pPr marL="228600" indent="-228600">
-              <a:spcAft>
-                <a:spcPts val="800"/>
-              </a:spcAft>
-              <a:buClr>
-                <a:srgbClr val="C62828"/>
-              </a:buClr>
-              <a:buChar char="•"/>
-            </a:pPr>
-            <a:r>
-              <a:rPr sz="1500" b="0" i="0">
-                <a:solidFill>
-                  <a:srgbClr val="333333"/>
-                </a:solidFill>
-                <a:latin typeface="Calibri"/>
-              </a:rPr>
-              <a:t>Registrar no fim do turno</a:t>
-            </a:r>
-          </a:p>
-          <a:p>
-            <a:pPr marL="228600" indent="-228600">
-              <a:spcAft>
-                <a:spcPts val="800"/>
-              </a:spcAft>
-              <a:buClr>
-                <a:srgbClr val="C62828"/>
-              </a:buClr>
-              <a:buChar char="•"/>
-            </a:pPr>
-            <a:r>
-              <a:rPr sz="1500" b="0" i="0">
-                <a:solidFill>
-                  <a:srgbClr val="333333"/>
-                </a:solidFill>
-                <a:latin typeface="Calibri"/>
-              </a:rPr>
-              <a:t>Arredondar para 30 min</a:t>
+              <a:t> Confirmar e informar a duração</a:t>
             </a:r>
           </a:p>
         </p:txBody>
@@ -10521,7 +10670,7 @@
                 </a:solidFill>
                 <a:latin typeface="Calibri"/>
               </a:rPr>
-              <a:t>Comparação de três opções com uma recomendada</a:t>
+              <a:t>Imagem em largura total com legenda</a:t>
             </a:r>
           </a:p>
         </p:txBody>
@@ -10626,7 +10775,7 @@
                 </a:solidFill>
                 <a:latin typeface="Calibri"/>
               </a:rPr>
-              <a:t>COMPARAÇÃO</a:t>
+              <a:t>IMAGEM</a:t>
             </a:r>
           </a:p>
         </p:txBody>
@@ -10733,8 +10882,8 @@
         </p:nvSpPr>
         <p:spPr>
           <a:xfrm>
-            <a:off x="457200" y="1737360"/>
-            <a:ext cx="3575304" cy="4297680"/>
+            <a:off x="457200" y="5349240"/>
+            <a:ext cx="11274552" cy="731520"/>
           </a:xfrm>
           <a:prstGeom prst="rect">
             <a:avLst/>
@@ -10777,8 +10926,8 @@
         </p:nvSpPr>
         <p:spPr>
           <a:xfrm>
-            <a:off x="457200" y="1737360"/>
-            <a:ext cx="3575304" cy="640080"/>
+            <a:off x="457200" y="5349240"/>
+            <a:ext cx="73152" cy="731520"/>
           </a:xfrm>
           <a:prstGeom prst="rect">
             <a:avLst/>
@@ -10821,8 +10970,8 @@
         </p:nvSpPr>
         <p:spPr>
           <a:xfrm>
-            <a:off x="457200" y="1737360"/>
-            <a:ext cx="3575304" cy="640080"/>
+            <a:off x="685800" y="5349240"/>
+            <a:ext cx="2103120" cy="731520"/>
           </a:xfrm>
           <a:prstGeom prst="rect">
             <a:avLst/>
@@ -10835,15 +10984,15 @@
           </a:bodyPr>
           <a:lstStyle/>
           <a:p>
-            <a:pPr algn="ctr"/>
-            <a:r>
-              <a:rPr sz="1700" b="1" i="0">
-                <a:solidFill>
-                  <a:srgbClr val="FFFFFF"/>
-                </a:solidFill>
-                <a:latin typeface="Calibri"/>
-              </a:rPr>
-              <a:t>Não fazer</a:t>
+            <a:pPr algn="l"/>
+            <a:r>
+              <a:rPr sz="1000" b="1" i="0">
+                <a:solidFill>
+                  <a:srgbClr val="1F3A5F"/>
+                </a:solidFill>
+                <a:latin typeface="Calibri"/>
+              </a:rPr>
+              <a:t>LEITURA</a:t>
             </a:r>
           </a:p>
         </p:txBody>
@@ -10856,570 +11005,93 @@
         </p:nvSpPr>
         <p:spPr>
           <a:xfrm>
-            <a:off x="594360" y="2560320"/>
-            <a:ext cx="3300984" cy="3383280"/>
-          </a:xfrm>
-          <a:prstGeom prst="rect">
-            <a:avLst/>
-          </a:prstGeom>
-          <a:noFill/>
-        </p:spPr>
-        <p:txBody>
-          <a:bodyPr wrap="square" lIns="45720" rIns="45720">
-            <a:spAutoFit/>
-          </a:bodyPr>
-          <a:lstStyle/>
-          <a:p>
-            <a:pPr marL="228600" indent="-228600">
-              <a:spcAft>
-                <a:spcPts val="800"/>
-              </a:spcAft>
-              <a:buClr>
-                <a:srgbClr val="1F3A5F"/>
-              </a:buClr>
-              <a:buChar char="•"/>
-            </a:pPr>
-            <a:r>
-              <a:rPr sz="1500" b="0" i="0">
+            <a:off x="2788920" y="5349240"/>
+            <a:ext cx="8759952" cy="731520"/>
+          </a:xfrm>
+          <a:prstGeom prst="rect">
+            <a:avLst/>
+          </a:prstGeom>
+          <a:noFill/>
+        </p:spPr>
+        <p:txBody>
+          <a:bodyPr wrap="square" anchor="ctr" lIns="45720" rIns="45720" tIns="27432" bIns="27432">
+            <a:spAutoFit/>
+          </a:bodyPr>
+          <a:lstStyle/>
+          <a:p>
+            <a:pPr algn="l"/>
+            <a:r>
+              <a:rPr sz="1400" b="1" i="0">
                 <a:solidFill>
                   <a:srgbClr val="333333"/>
                 </a:solidFill>
                 <a:latin typeface="Calibri"/>
               </a:rPr>
-              <a:t>Custo: R$ 0</a:t>
-            </a:r>
-          </a:p>
-          <a:p>
-            <a:pPr marL="228600" indent="-228600">
-              <a:spcAft>
-                <a:spcPts val="800"/>
-              </a:spcAft>
-              <a:buClr>
-                <a:srgbClr val="1F3A5F"/>
-              </a:buClr>
-              <a:buChar char="•"/>
-            </a:pPr>
-            <a:r>
-              <a:rPr sz="1500" b="0" i="0">
-                <a:solidFill>
-                  <a:srgbClr val="333333"/>
-                </a:solidFill>
-                <a:latin typeface="Calibri"/>
-              </a:rPr>
-              <a:t>Perda: R$ 1,8 mi/ano</a:t>
-            </a:r>
-          </a:p>
-          <a:p>
-            <a:pPr marL="228600" indent="-228600">
-              <a:spcAft>
-                <a:spcPts val="800"/>
-              </a:spcAft>
-              <a:buClr>
-                <a:srgbClr val="1F3A5F"/>
-              </a:buClr>
-              <a:buChar char="•"/>
-            </a:pPr>
-            <a:r>
-              <a:rPr sz="1500" b="0" i="0">
-                <a:solidFill>
-                  <a:srgbClr val="333333"/>
-                </a:solidFill>
-                <a:latin typeface="Calibri"/>
-              </a:rPr>
-              <a:t>Risco: parada total</a:t>
-            </a:r>
-          </a:p>
-        </p:txBody>
-      </p:sp>
-      <p:sp>
-        <p:nvSpPr>
-          <p:cNvPr id="13" name="Rectangle 12"/>
-          <p:cNvSpPr/>
-          <p:nvPr/>
-        </p:nvSpPr>
-        <p:spPr>
-          <a:xfrm>
-            <a:off x="4306824" y="1737360"/>
-            <a:ext cx="3575304" cy="4297680"/>
-          </a:xfrm>
-          <a:prstGeom prst="rect">
-            <a:avLst/>
-          </a:prstGeom>
-          <a:solidFill>
-            <a:srgbClr val="F2F2F2"/>
-          </a:solidFill>
-          <a:ln>
-            <a:noFill/>
-          </a:ln>
-          <a:effectLst/>
-        </p:spPr>
-        <p:style>
-          <a:lnRef idx="1">
-            <a:schemeClr val="accent1"/>
-          </a:lnRef>
-          <a:fillRef idx="3">
-            <a:schemeClr val="accent1"/>
-          </a:fillRef>
-          <a:effectRef idx="2">
-            <a:schemeClr val="accent1"/>
-          </a:effectRef>
-          <a:fontRef idx="minor">
-            <a:schemeClr val="lt1"/>
-          </a:fontRef>
-        </p:style>
-        <p:txBody>
-          <a:bodyPr rtlCol="0" anchor="ctr"/>
-          <a:lstStyle/>
-          <a:p>
-            <a:pPr algn="ctr"/>
-          </a:p>
-        </p:txBody>
-      </p:sp>
-      <p:sp>
-        <p:nvSpPr>
-          <p:cNvPr id="14" name="Rectangle 13"/>
-          <p:cNvSpPr/>
-          <p:nvPr/>
-        </p:nvSpPr>
-        <p:spPr>
-          <a:xfrm>
-            <a:off x="4306824" y="1737360"/>
-            <a:ext cx="3575304" cy="640080"/>
-          </a:xfrm>
-          <a:prstGeom prst="rect">
-            <a:avLst/>
-          </a:prstGeom>
-          <a:solidFill>
-            <a:srgbClr val="1F3A5F"/>
-          </a:solidFill>
-          <a:ln>
-            <a:noFill/>
-          </a:ln>
-          <a:effectLst/>
-        </p:spPr>
-        <p:style>
-          <a:lnRef idx="1">
-            <a:schemeClr val="accent1"/>
-          </a:lnRef>
-          <a:fillRef idx="3">
-            <a:schemeClr val="accent1"/>
-          </a:fillRef>
-          <a:effectRef idx="2">
-            <a:schemeClr val="accent1"/>
-          </a:effectRef>
-          <a:fontRef idx="minor">
-            <a:schemeClr val="lt1"/>
-          </a:fontRef>
-        </p:style>
-        <p:txBody>
-          <a:bodyPr rtlCol="0" anchor="ctr"/>
-          <a:lstStyle/>
-          <a:p>
-            <a:pPr algn="ctr"/>
-          </a:p>
-        </p:txBody>
-      </p:sp>
-      <p:sp>
-        <p:nvSpPr>
-          <p:cNvPr id="15" name="TextBox 14"/>
-          <p:cNvSpPr txBox="1"/>
-          <p:nvPr/>
-        </p:nvSpPr>
-        <p:spPr>
-          <a:xfrm>
-            <a:off x="4306824" y="1737360"/>
-            <a:ext cx="3575304" cy="640080"/>
-          </a:xfrm>
-          <a:prstGeom prst="rect">
-            <a:avLst/>
-          </a:prstGeom>
-          <a:noFill/>
-        </p:spPr>
-        <p:txBody>
-          <a:bodyPr wrap="square" anchor="ctr" lIns="45720" rIns="45720" tIns="27432" bIns="27432">
-            <a:spAutoFit/>
-          </a:bodyPr>
-          <a:lstStyle/>
-          <a:p>
-            <a:pPr algn="ctr"/>
-            <a:r>
-              <a:rPr sz="1700" b="1" i="0">
-                <a:solidFill>
-                  <a:srgbClr val="FFFFFF"/>
-                </a:solidFill>
-                <a:latin typeface="Calibri"/>
-              </a:rPr>
-              <a:t>A: Reforma</a:t>
-            </a:r>
-          </a:p>
-        </p:txBody>
-      </p:sp>
-      <p:sp>
-        <p:nvSpPr>
-          <p:cNvPr id="16" name="TextBox 15"/>
-          <p:cNvSpPr txBox="1"/>
-          <p:nvPr/>
-        </p:nvSpPr>
-        <p:spPr>
-          <a:xfrm>
-            <a:off x="4443984" y="2560320"/>
-            <a:ext cx="3300984" cy="3383280"/>
-          </a:xfrm>
-          <a:prstGeom prst="rect">
-            <a:avLst/>
-          </a:prstGeom>
-          <a:noFill/>
-        </p:spPr>
-        <p:txBody>
-          <a:bodyPr wrap="square" lIns="45720" rIns="45720">
-            <a:spAutoFit/>
-          </a:bodyPr>
-          <a:lstStyle/>
-          <a:p>
-            <a:pPr marL="228600" indent="-228600">
-              <a:spcAft>
-                <a:spcPts val="800"/>
-              </a:spcAft>
-              <a:buClr>
-                <a:srgbClr val="1F3A5F"/>
-              </a:buClr>
-              <a:buChar char="•"/>
-            </a:pPr>
-            <a:r>
-              <a:rPr sz="1500" b="0" i="0">
-                <a:solidFill>
-                  <a:srgbClr val="333333"/>
-                </a:solidFill>
-                <a:latin typeface="Calibri"/>
-              </a:rPr>
-              <a:t>Custo: R$ 0,9 mi</a:t>
-            </a:r>
-          </a:p>
-          <a:p>
-            <a:pPr marL="228600" indent="-228600">
-              <a:spcAft>
-                <a:spcPts val="800"/>
-              </a:spcAft>
-              <a:buClr>
-                <a:srgbClr val="1F3A5F"/>
-              </a:buClr>
-              <a:buChar char="•"/>
-            </a:pPr>
-            <a:r>
-              <a:rPr sz="1500" b="0" i="0">
-                <a:solidFill>
-                  <a:srgbClr val="333333"/>
-                </a:solidFill>
-                <a:latin typeface="Calibri"/>
-              </a:rPr>
-              <a:t>Economia: R$ 0,7 mi/ano</a:t>
-            </a:r>
-          </a:p>
-          <a:p>
-            <a:pPr marL="228600" indent="-228600">
-              <a:spcAft>
-                <a:spcPts val="800"/>
-              </a:spcAft>
-              <a:buClr>
-                <a:srgbClr val="1F3A5F"/>
-              </a:buClr>
-              <a:buChar char="•"/>
-            </a:pPr>
-            <a:r>
-              <a:rPr sz="1500" b="0" i="0">
-                <a:solidFill>
-                  <a:srgbClr val="333333"/>
-                </a:solidFill>
-                <a:latin typeface="Calibri"/>
-              </a:rPr>
-              <a:t>Risco: sem peças</a:t>
-            </a:r>
-          </a:p>
-        </p:txBody>
-      </p:sp>
-      <p:sp>
-        <p:nvSpPr>
-          <p:cNvPr id="17" name="Rectangle 16"/>
-          <p:cNvSpPr/>
-          <p:nvPr/>
-        </p:nvSpPr>
-        <p:spPr>
-          <a:xfrm>
-            <a:off x="8156448" y="1737360"/>
-            <a:ext cx="3575304" cy="4297680"/>
-          </a:xfrm>
-          <a:prstGeom prst="rect">
-            <a:avLst/>
-          </a:prstGeom>
-          <a:solidFill>
-            <a:srgbClr val="F2F2F2"/>
-          </a:solidFill>
-          <a:ln w="25400">
+              <a:t>Uma imagem por slide; o título continua sendo a conclusão.</a:t>
+            </a:r>
+          </a:p>
+        </p:txBody>
+      </p:sp>
+      <p:pic>
+        <p:nvPicPr>
+          <p:cNvPr id="13" name="Picture 12" descr="Print ajustado à área de conteúdo, proporção preservada"/>
+          <p:cNvPicPr>
+            <a:picLocks noChangeAspect="1"/>
+          </p:cNvPicPr>
+          <p:nvPr/>
+        </p:nvPicPr>
+        <p:blipFill>
+          <a:blip r:embed="rId3"/>
+          <a:stretch>
+            <a:fillRect/>
+          </a:stretch>
+        </p:blipFill>
+        <p:spPr>
+          <a:xfrm>
+            <a:off x="3371596" y="1737360"/>
+            <a:ext cx="5445760" cy="3063240"/>
+          </a:xfrm>
+          <a:prstGeom prst="rect">
+            <a:avLst/>
+          </a:prstGeom>
+          <a:ln w="9525">
             <a:solidFill>
-              <a:srgbClr val="F2A900"/>
+              <a:srgbClr val="F2F2F2"/>
             </a:solidFill>
           </a:ln>
-          <a:effectLst/>
-        </p:spPr>
-        <p:style>
-          <a:lnRef idx="1">
-            <a:schemeClr val="accent1"/>
-          </a:lnRef>
-          <a:fillRef idx="3">
-            <a:schemeClr val="accent1"/>
-          </a:fillRef>
-          <a:effectRef idx="2">
-            <a:schemeClr val="accent1"/>
-          </a:effectRef>
-          <a:fontRef idx="minor">
-            <a:schemeClr val="lt1"/>
-          </a:fontRef>
-        </p:style>
-        <p:txBody>
-          <a:bodyPr rtlCol="0" anchor="ctr"/>
+        </p:spPr>
+      </p:pic>
+      <p:sp>
+        <p:nvSpPr>
+          <p:cNvPr id="14" name="TextBox 13"/>
+          <p:cNvSpPr txBox="1"/>
+          <p:nvPr/>
+        </p:nvSpPr>
+        <p:spPr>
+          <a:xfrm>
+            <a:off x="457200" y="4846320"/>
+            <a:ext cx="11274552" cy="365760"/>
+          </a:xfrm>
+          <a:prstGeom prst="rect">
+            <a:avLst/>
+          </a:prstGeom>
+          <a:noFill/>
+        </p:spPr>
+        <p:txBody>
+          <a:bodyPr wrap="square" anchor="t" lIns="45720" rIns="45720" tIns="27432" bIns="27432">
+            <a:spAutoFit/>
+          </a:bodyPr>
           <a:lstStyle/>
           <a:p>
             <a:pPr algn="ctr"/>
-          </a:p>
-        </p:txBody>
-      </p:sp>
-      <p:sp>
-        <p:nvSpPr>
-          <p:cNvPr id="18" name="Rectangle 17"/>
-          <p:cNvSpPr/>
-          <p:nvPr/>
-        </p:nvSpPr>
-        <p:spPr>
-          <a:xfrm>
-            <a:off x="8156448" y="1737360"/>
-            <a:ext cx="3575304" cy="640080"/>
-          </a:xfrm>
-          <a:prstGeom prst="rect">
-            <a:avLst/>
-          </a:prstGeom>
-          <a:solidFill>
-            <a:srgbClr val="1F3A5F"/>
-          </a:solidFill>
-          <a:ln>
-            <a:noFill/>
-          </a:ln>
-          <a:effectLst/>
-        </p:spPr>
-        <p:style>
-          <a:lnRef idx="1">
-            <a:schemeClr val="accent1"/>
-          </a:lnRef>
-          <a:fillRef idx="3">
-            <a:schemeClr val="accent1"/>
-          </a:fillRef>
-          <a:effectRef idx="2">
-            <a:schemeClr val="accent1"/>
-          </a:effectRef>
-          <a:fontRef idx="minor">
-            <a:schemeClr val="lt1"/>
-          </a:fontRef>
-        </p:style>
-        <p:txBody>
-          <a:bodyPr rtlCol="0" anchor="ctr"/>
-          <a:lstStyle/>
-          <a:p>
-            <a:pPr algn="ctr"/>
-          </a:p>
-        </p:txBody>
-      </p:sp>
-      <p:sp>
-        <p:nvSpPr>
-          <p:cNvPr id="19" name="TextBox 18"/>
-          <p:cNvSpPr txBox="1"/>
-          <p:nvPr/>
-        </p:nvSpPr>
-        <p:spPr>
-          <a:xfrm>
-            <a:off x="8156448" y="1737360"/>
-            <a:ext cx="3575304" cy="640080"/>
-          </a:xfrm>
-          <a:prstGeom prst="rect">
-            <a:avLst/>
-          </a:prstGeom>
-          <a:noFill/>
-        </p:spPr>
-        <p:txBody>
-          <a:bodyPr wrap="square" anchor="ctr" lIns="45720" rIns="45720" tIns="27432" bIns="27432">
-            <a:spAutoFit/>
-          </a:bodyPr>
-          <a:lstStyle/>
-          <a:p>
-            <a:pPr algn="ctr"/>
-            <a:r>
-              <a:rPr sz="1700" b="1" i="0">
-                <a:solidFill>
-                  <a:srgbClr val="FFFFFF"/>
-                </a:solidFill>
-                <a:latin typeface="Calibri"/>
-              </a:rPr>
-              <a:t>B: Prensa nova</a:t>
-            </a:r>
-          </a:p>
-        </p:txBody>
-      </p:sp>
-      <p:sp>
-        <p:nvSpPr>
-          <p:cNvPr id="20" name="Rectangle 19"/>
-          <p:cNvSpPr/>
-          <p:nvPr/>
-        </p:nvSpPr>
-        <p:spPr>
-          <a:xfrm>
-            <a:off x="10268712" y="1554480"/>
-            <a:ext cx="1371600" cy="320040"/>
-          </a:xfrm>
-          <a:prstGeom prst="rect">
-            <a:avLst/>
-          </a:prstGeom>
-          <a:solidFill>
-            <a:srgbClr val="F2A900"/>
-          </a:solidFill>
-          <a:ln>
-            <a:noFill/>
-          </a:ln>
-          <a:effectLst/>
-        </p:spPr>
-        <p:style>
-          <a:lnRef idx="1">
-            <a:schemeClr val="accent1"/>
-          </a:lnRef>
-          <a:fillRef idx="3">
-            <a:schemeClr val="accent1"/>
-          </a:fillRef>
-          <a:effectRef idx="2">
-            <a:schemeClr val="accent1"/>
-          </a:effectRef>
-          <a:fontRef idx="minor">
-            <a:schemeClr val="lt1"/>
-          </a:fontRef>
-        </p:style>
-        <p:txBody>
-          <a:bodyPr rtlCol="0" anchor="ctr"/>
-          <a:lstStyle/>
-          <a:p>
-            <a:pPr algn="ctr"/>
-          </a:p>
-        </p:txBody>
-      </p:sp>
-      <p:sp>
-        <p:nvSpPr>
-          <p:cNvPr id="21" name="TextBox 20"/>
-          <p:cNvSpPr txBox="1"/>
-          <p:nvPr/>
-        </p:nvSpPr>
-        <p:spPr>
-          <a:xfrm>
-            <a:off x="10268712" y="1554480"/>
-            <a:ext cx="1371600" cy="320040"/>
-          </a:xfrm>
-          <a:prstGeom prst="rect">
-            <a:avLst/>
-          </a:prstGeom>
-          <a:noFill/>
-        </p:spPr>
-        <p:txBody>
-          <a:bodyPr wrap="square" anchor="ctr" lIns="45720" rIns="45720" tIns="27432" bIns="27432">
-            <a:spAutoFit/>
-          </a:bodyPr>
-          <a:lstStyle/>
-          <a:p>
-            <a:pPr algn="ctr"/>
-            <a:r>
-              <a:rPr sz="1000" b="1" i="0">
-                <a:solidFill>
-                  <a:srgbClr val="FFFFFF"/>
-                </a:solidFill>
-                <a:latin typeface="Calibri"/>
-              </a:rPr>
-              <a:t>Recomendada</a:t>
-            </a:r>
-          </a:p>
-        </p:txBody>
-      </p:sp>
-      <p:sp>
-        <p:nvSpPr>
-          <p:cNvPr id="22" name="TextBox 21"/>
-          <p:cNvSpPr txBox="1"/>
-          <p:nvPr/>
-        </p:nvSpPr>
-        <p:spPr>
-          <a:xfrm>
-            <a:off x="8293608" y="2560320"/>
-            <a:ext cx="3300984" cy="3383280"/>
-          </a:xfrm>
-          <a:prstGeom prst="rect">
-            <a:avLst/>
-          </a:prstGeom>
-          <a:noFill/>
-        </p:spPr>
-        <p:txBody>
-          <a:bodyPr wrap="square" lIns="45720" rIns="45720">
-            <a:spAutoFit/>
-          </a:bodyPr>
-          <a:lstStyle/>
-          <a:p>
-            <a:pPr marL="228600" indent="-228600">
-              <a:spcAft>
-                <a:spcPts val="800"/>
-              </a:spcAft>
-              <a:buClr>
-                <a:srgbClr val="1F3A5F"/>
-              </a:buClr>
-              <a:buChar char="•"/>
-            </a:pPr>
-            <a:r>
-              <a:rPr sz="1500" b="0" i="0">
-                <a:solidFill>
-                  <a:srgbClr val="333333"/>
-                </a:solidFill>
-                <a:latin typeface="Calibri"/>
-              </a:rPr>
-              <a:t>Custo: R$ 2,4 mi</a:t>
-            </a:r>
-          </a:p>
-          <a:p>
-            <a:pPr marL="228600" indent="-228600">
-              <a:spcAft>
-                <a:spcPts val="800"/>
-              </a:spcAft>
-              <a:buClr>
-                <a:srgbClr val="1F3A5F"/>
-              </a:buClr>
-              <a:buChar char="•"/>
-            </a:pPr>
-            <a:r>
-              <a:rPr sz="1500" b="0" i="0">
-                <a:solidFill>
-                  <a:srgbClr val="333333"/>
-                </a:solidFill>
-                <a:latin typeface="Calibri"/>
-              </a:rPr>
-              <a:t>Economia: R$ 1,45 mi/ano</a:t>
-            </a:r>
-          </a:p>
-          <a:p>
-            <a:pPr marL="228600" indent="-228600">
-              <a:spcAft>
-                <a:spcPts val="800"/>
-              </a:spcAft>
-              <a:buClr>
-                <a:srgbClr val="1F3A5F"/>
-              </a:buClr>
-              <a:buChar char="•"/>
-            </a:pPr>
-            <a:r>
-              <a:rPr sz="1500" b="0" i="0">
-                <a:solidFill>
-                  <a:srgbClr val="333333"/>
-                </a:solidFill>
-                <a:latin typeface="Calibri"/>
-              </a:rPr>
-              <a:t>Risco: 5 dias parada</a:t>
+            <a:r>
+              <a:rPr sz="1100" b="0" i="1">
+                <a:solidFill>
+                  <a:srgbClr val="8C8C8C"/>
+                </a:solidFill>
+                <a:latin typeface="Calibri"/>
+              </a:rPr>
+              <a:t>Print ajustado à área de conteúdo, proporção preservada</a:t>
             </a:r>
           </a:p>
         </p:txBody>
@@ -12177,7 +11849,7 @@
                 </a:solidFill>
                 <a:latin typeface="Calibri"/>
               </a:rPr>
-              <a:t>Takeaways numerados em três colunas</a:t>
+              <a:t>Duas colunas: certo vs. errado</a:t>
             </a:r>
           </a:p>
         </p:txBody>
@@ -12282,7 +11954,7 @@
                 </a:solidFill>
                 <a:latin typeface="Calibri"/>
               </a:rPr>
-              <a:t>LEITURA EXECUTIVA</a:t>
+              <a:t>DUAS COLUNAS</a:t>
             </a:r>
           </a:p>
         </p:txBody>
@@ -12383,20 +12055,55 @@
       </p:pic>
       <p:sp>
         <p:nvSpPr>
-          <p:cNvPr id="9" name="Rectangle 8"/>
+          <p:cNvPr id="9" name="TextBox 8"/>
+          <p:cNvSpPr txBox="1"/>
+          <p:nvPr/>
+        </p:nvSpPr>
+        <p:spPr>
+          <a:xfrm>
+            <a:off x="457200" y="1737360"/>
+            <a:ext cx="5500116" cy="548640"/>
+          </a:xfrm>
+          <a:prstGeom prst="rect">
+            <a:avLst/>
+          </a:prstGeom>
+          <a:noFill/>
+        </p:spPr>
+        <p:txBody>
+          <a:bodyPr wrap="square" anchor="b" lIns="45720" rIns="45720" tIns="27432" bIns="27432">
+            <a:spAutoFit/>
+          </a:bodyPr>
+          <a:lstStyle/>
+          <a:p>
+            <a:pPr algn="l"/>
+            <a:r>
+              <a:rPr sz="1800" b="1" i="0">
+                <a:solidFill>
+                  <a:srgbClr val="2E7D32"/>
+                </a:solidFill>
+                <a:latin typeface="Calibri"/>
+              </a:rPr>
+              <a:t>Certo</a:t>
+            </a:r>
+          </a:p>
+        </p:txBody>
+      </p:sp>
+      <p:sp>
+        <p:nvSpPr>
+          <p:cNvPr id="10" name="Rectangle 9"/>
           <p:cNvSpPr/>
           <p:nvPr/>
         </p:nvSpPr>
         <p:spPr>
           <a:xfrm>
-            <a:off x="457200" y="5349240"/>
-            <a:ext cx="11274552" cy="731520"/>
+            <a:off x="457200" y="2331720"/>
+            <a:ext cx="5500116" cy="27432"/>
           </a:xfrm>
           <a:prstGeom prst="rect">
             <a:avLst/>
           </a:prstGeom>
           <a:solidFill>
-            <a:srgbClr val="F2F2F2"/>
+            <a:srgbClr val="2E7D32"/>
           </a:solidFill>
           <a:ln>
             <a:noFill/>
@@ -12427,20 +12134,138 @@
       </p:sp>
       <p:sp>
         <p:nvSpPr>
-          <p:cNvPr id="10" name="Rectangle 9"/>
+          <p:cNvPr id="11" name="TextBox 10"/>
+          <p:cNvSpPr txBox="1"/>
+          <p:nvPr/>
+        </p:nvSpPr>
+        <p:spPr>
+          <a:xfrm>
+            <a:off x="457200" y="2514600"/>
+            <a:ext cx="5500116" cy="3611880"/>
+          </a:xfrm>
+          <a:prstGeom prst="rect">
+            <a:avLst/>
+          </a:prstGeom>
+          <a:noFill/>
+        </p:spPr>
+        <p:txBody>
+          <a:bodyPr wrap="square" lIns="45720" rIns="45720">
+            <a:spAutoFit/>
+          </a:bodyPr>
+          <a:lstStyle/>
+          <a:p>
+            <a:pPr marL="228600" indent="-228600">
+              <a:spcAft>
+                <a:spcPts val="800"/>
+              </a:spcAft>
+              <a:buClr>
+                <a:srgbClr val="2E7D32"/>
+              </a:buClr>
+              <a:buChar char="•"/>
+            </a:pPr>
+            <a:r>
+              <a:rPr sz="1500" b="0" i="0">
+                <a:solidFill>
+                  <a:srgbClr val="333333"/>
+                </a:solidFill>
+                <a:latin typeface="Calibri"/>
+              </a:rPr>
+              <a:t>Causa específica</a:t>
+            </a:r>
+          </a:p>
+          <a:p>
+            <a:pPr marL="228600" indent="-228600">
+              <a:spcAft>
+                <a:spcPts val="800"/>
+              </a:spcAft>
+              <a:buClr>
+                <a:srgbClr val="2E7D32"/>
+              </a:buClr>
+              <a:buChar char="•"/>
+            </a:pPr>
+            <a:r>
+              <a:rPr sz="1500" b="0" i="0">
+                <a:solidFill>
+                  <a:srgbClr val="333333"/>
+                </a:solidFill>
+                <a:latin typeface="Calibri"/>
+              </a:rPr>
+              <a:t>Registrar na hora</a:t>
+            </a:r>
+          </a:p>
+          <a:p>
+            <a:pPr marL="228600" indent="-228600">
+              <a:spcAft>
+                <a:spcPts val="800"/>
+              </a:spcAft>
+              <a:buClr>
+                <a:srgbClr val="2E7D32"/>
+              </a:buClr>
+              <a:buChar char="•"/>
+            </a:pPr>
+            <a:r>
+              <a:rPr sz="1500" b="0" i="0">
+                <a:solidFill>
+                  <a:srgbClr val="333333"/>
+                </a:solidFill>
+                <a:latin typeface="Calibri"/>
+              </a:rPr>
+              <a:t>Duração real</a:t>
+            </a:r>
+          </a:p>
+        </p:txBody>
+      </p:sp>
+      <p:sp>
+        <p:nvSpPr>
+          <p:cNvPr id="12" name="TextBox 11"/>
+          <p:cNvSpPr txBox="1"/>
+          <p:nvPr/>
+        </p:nvSpPr>
+        <p:spPr>
+          <a:xfrm>
+            <a:off x="6231636" y="1737360"/>
+            <a:ext cx="5500116" cy="548640"/>
+          </a:xfrm>
+          <a:prstGeom prst="rect">
+            <a:avLst/>
+          </a:prstGeom>
+          <a:noFill/>
+        </p:spPr>
+        <p:txBody>
+          <a:bodyPr wrap="square" anchor="b" lIns="45720" rIns="45720" tIns="27432" bIns="27432">
+            <a:spAutoFit/>
+          </a:bodyPr>
+          <a:lstStyle/>
+          <a:p>
+            <a:pPr algn="l"/>
+            <a:r>
+              <a:rPr sz="1800" b="1" i="0">
+                <a:solidFill>
+                  <a:srgbClr val="C62828"/>
+                </a:solidFill>
+                <a:latin typeface="Calibri"/>
+              </a:rPr>
+              <a:t>Errado</a:t>
+            </a:r>
+          </a:p>
+        </p:txBody>
+      </p:sp>
+      <p:sp>
+        <p:nvSpPr>
+          <p:cNvPr id="13" name="Rectangle 12"/>
           <p:cNvSpPr/>
           <p:nvPr/>
         </p:nvSpPr>
         <p:spPr>
           <a:xfrm>
-            <a:off x="457200" y="5349240"/>
-            <a:ext cx="73152" cy="731520"/>
+            <a:off x="6231636" y="2331720"/>
+            <a:ext cx="5500116" cy="27432"/>
           </a:xfrm>
           <a:prstGeom prst="rect">
             <a:avLst/>
           </a:prstGeom>
           <a:solidFill>
-            <a:srgbClr val="1F3A5F"/>
+            <a:srgbClr val="C62828"/>
           </a:solidFill>
           <a:ln>
             <a:noFill/>
@@ -12471,649 +12296,83 @@
       </p:sp>
       <p:sp>
         <p:nvSpPr>
-          <p:cNvPr id="11" name="TextBox 10"/>
-          <p:cNvSpPr txBox="1"/>
-          <p:nvPr/>
-        </p:nvSpPr>
-        <p:spPr>
-          <a:xfrm>
-            <a:off x="685800" y="5349240"/>
-            <a:ext cx="2103120" cy="731520"/>
-          </a:xfrm>
-          <a:prstGeom prst="rect">
-            <a:avLst/>
-          </a:prstGeom>
-          <a:noFill/>
-        </p:spPr>
-        <p:txBody>
-          <a:bodyPr wrap="square" anchor="ctr" lIns="45720" rIns="45720" tIns="27432" bIns="27432">
-            <a:spAutoFit/>
-          </a:bodyPr>
-          <a:lstStyle/>
-          <a:p>
-            <a:pPr algn="l"/>
-            <a:r>
-              <a:rPr sz="1000" b="1" i="0">
-                <a:solidFill>
-                  <a:srgbClr val="1F3A5F"/>
-                </a:solidFill>
-                <a:latin typeface="Calibri"/>
-              </a:rPr>
-              <a:t>PRINCÍPIO</a:t>
-            </a:r>
-          </a:p>
-        </p:txBody>
-      </p:sp>
-      <p:sp>
-        <p:nvSpPr>
-          <p:cNvPr id="12" name="TextBox 11"/>
-          <p:cNvSpPr txBox="1"/>
-          <p:nvPr/>
-        </p:nvSpPr>
-        <p:spPr>
-          <a:xfrm>
-            <a:off x="2788920" y="5349240"/>
-            <a:ext cx="8759952" cy="731520"/>
-          </a:xfrm>
-          <a:prstGeom prst="rect">
-            <a:avLst/>
-          </a:prstGeom>
-          <a:noFill/>
-        </p:spPr>
-        <p:txBody>
-          <a:bodyPr wrap="square" anchor="ctr" lIns="45720" rIns="45720" tIns="27432" bIns="27432">
-            <a:spAutoFit/>
-          </a:bodyPr>
-          <a:lstStyle/>
-          <a:p>
-            <a:pPr algn="l"/>
-            <a:r>
-              <a:rPr sz="1400" b="1" i="0">
+          <p:cNvPr id="14" name="TextBox 13"/>
+          <p:cNvSpPr txBox="1"/>
+          <p:nvPr/>
+        </p:nvSpPr>
+        <p:spPr>
+          <a:xfrm>
+            <a:off x="6231636" y="2514600"/>
+            <a:ext cx="5500116" cy="3611880"/>
+          </a:xfrm>
+          <a:prstGeom prst="rect">
+            <a:avLst/>
+          </a:prstGeom>
+          <a:noFill/>
+        </p:spPr>
+        <p:txBody>
+          <a:bodyPr wrap="square" lIns="45720" rIns="45720">
+            <a:spAutoFit/>
+          </a:bodyPr>
+          <a:lstStyle/>
+          <a:p>
+            <a:pPr marL="228600" indent="-228600">
+              <a:spcAft>
+                <a:spcPts val="800"/>
+              </a:spcAft>
+              <a:buClr>
+                <a:srgbClr val="C62828"/>
+              </a:buClr>
+              <a:buChar char="•"/>
+            </a:pPr>
+            <a:r>
+              <a:rPr sz="1500" b="0" i="0">
                 <a:solidFill>
                   <a:srgbClr val="333333"/>
                 </a:solidFill>
                 <a:latin typeface="Calibri"/>
               </a:rPr>
-              <a:t>Nenhuma iniciativa avança sem responder claramente aos três filtros.</a:t>
-            </a:r>
-          </a:p>
-        </p:txBody>
-      </p:sp>
-      <p:sp>
-        <p:nvSpPr>
-          <p:cNvPr id="13" name="Rectangle 12"/>
-          <p:cNvSpPr/>
-          <p:nvPr/>
-        </p:nvSpPr>
-        <p:spPr>
-          <a:xfrm>
-            <a:off x="457200" y="1828800"/>
-            <a:ext cx="3575304" cy="3291840"/>
-          </a:xfrm>
-          <a:prstGeom prst="rect">
-            <a:avLst/>
-          </a:prstGeom>
-          <a:solidFill>
-            <a:srgbClr val="F2F2F2"/>
-          </a:solidFill>
-          <a:ln>
-            <a:noFill/>
-          </a:ln>
-          <a:effectLst/>
-        </p:spPr>
-        <p:style>
-          <a:lnRef idx="1">
-            <a:schemeClr val="accent1"/>
-          </a:lnRef>
-          <a:fillRef idx="3">
-            <a:schemeClr val="accent1"/>
-          </a:fillRef>
-          <a:effectRef idx="2">
-            <a:schemeClr val="accent1"/>
-          </a:effectRef>
-          <a:fontRef idx="minor">
-            <a:schemeClr val="lt1"/>
-          </a:fontRef>
-        </p:style>
-        <p:txBody>
-          <a:bodyPr rtlCol="0" anchor="ctr"/>
-          <a:lstStyle/>
-          <a:p>
-            <a:pPr algn="ctr"/>
-          </a:p>
-        </p:txBody>
-      </p:sp>
-      <p:sp>
-        <p:nvSpPr>
-          <p:cNvPr id="14" name="Rectangle 13"/>
-          <p:cNvSpPr/>
-          <p:nvPr/>
-        </p:nvSpPr>
-        <p:spPr>
-          <a:xfrm>
-            <a:off x="457200" y="1828800"/>
-            <a:ext cx="3575304" cy="54864"/>
-          </a:xfrm>
-          <a:prstGeom prst="rect">
-            <a:avLst/>
-          </a:prstGeom>
-          <a:solidFill>
-            <a:srgbClr val="1F3A5F"/>
-          </a:solidFill>
-          <a:ln>
-            <a:noFill/>
-          </a:ln>
-          <a:effectLst/>
-        </p:spPr>
-        <p:style>
-          <a:lnRef idx="1">
-            <a:schemeClr val="accent1"/>
-          </a:lnRef>
-          <a:fillRef idx="3">
-            <a:schemeClr val="accent1"/>
-          </a:fillRef>
-          <a:effectRef idx="2">
-            <a:schemeClr val="accent1"/>
-          </a:effectRef>
-          <a:fontRef idx="minor">
-            <a:schemeClr val="lt1"/>
-          </a:fontRef>
-        </p:style>
-        <p:txBody>
-          <a:bodyPr rtlCol="0" anchor="ctr"/>
-          <a:lstStyle/>
-          <a:p>
-            <a:pPr algn="ctr"/>
-          </a:p>
-        </p:txBody>
-      </p:sp>
-      <p:sp>
-        <p:nvSpPr>
-          <p:cNvPr id="15" name="TextBox 14"/>
-          <p:cNvSpPr txBox="1"/>
-          <p:nvPr/>
-        </p:nvSpPr>
-        <p:spPr>
-          <a:xfrm>
-            <a:off x="685800" y="2011680"/>
-            <a:ext cx="1371600" cy="457200"/>
-          </a:xfrm>
-          <a:prstGeom prst="rect">
-            <a:avLst/>
-          </a:prstGeom>
-          <a:noFill/>
-        </p:spPr>
-        <p:txBody>
-          <a:bodyPr wrap="square" anchor="t" lIns="45720" rIns="45720" tIns="27432" bIns="27432">
-            <a:spAutoFit/>
-          </a:bodyPr>
-          <a:lstStyle/>
-          <a:p>
-            <a:pPr algn="l"/>
-            <a:r>
-              <a:rPr sz="2200" b="1" i="0">
-                <a:solidFill>
-                  <a:srgbClr val="1F3A5F"/>
-                </a:solidFill>
-                <a:latin typeface="Calibri"/>
-              </a:rPr>
-              <a:t>01</a:t>
-            </a:r>
-          </a:p>
-        </p:txBody>
-      </p:sp>
-      <p:sp>
-        <p:nvSpPr>
-          <p:cNvPr id="16" name="TextBox 15"/>
-          <p:cNvSpPr txBox="1"/>
-          <p:nvPr/>
-        </p:nvSpPr>
-        <p:spPr>
-          <a:xfrm>
-            <a:off x="685800" y="2560320"/>
-            <a:ext cx="3118104" cy="685800"/>
-          </a:xfrm>
-          <a:prstGeom prst="rect">
-            <a:avLst/>
-          </a:prstGeom>
-          <a:noFill/>
-        </p:spPr>
-        <p:txBody>
-          <a:bodyPr wrap="square" anchor="t" lIns="45720" rIns="45720" tIns="27432" bIns="27432">
-            <a:spAutoFit/>
-          </a:bodyPr>
-          <a:lstStyle/>
-          <a:p>
-            <a:pPr algn="l"/>
-            <a:r>
-              <a:rPr sz="1800" b="1" i="0">
+              <a:t>'Outros'</a:t>
+            </a:r>
+          </a:p>
+          <a:p>
+            <a:pPr marL="228600" indent="-228600">
+              <a:spcAft>
+                <a:spcPts val="800"/>
+              </a:spcAft>
+              <a:buClr>
+                <a:srgbClr val="C62828"/>
+              </a:buClr>
+              <a:buChar char="•"/>
+            </a:pPr>
+            <a:r>
+              <a:rPr sz="1500" b="0" i="0">
                 <a:solidFill>
                   <a:srgbClr val="333333"/>
                 </a:solidFill>
                 <a:latin typeface="Calibri"/>
               </a:rPr>
-              <a:t>Execução</a:t>
-            </a:r>
-          </a:p>
-        </p:txBody>
-      </p:sp>
-      <p:sp>
-        <p:nvSpPr>
-          <p:cNvPr id="17" name="TextBox 16"/>
-          <p:cNvSpPr txBox="1"/>
-          <p:nvPr/>
-        </p:nvSpPr>
-        <p:spPr>
-          <a:xfrm>
-            <a:off x="685800" y="3246120"/>
-            <a:ext cx="3118104" cy="1737360"/>
-          </a:xfrm>
-          <a:prstGeom prst="rect">
-            <a:avLst/>
-          </a:prstGeom>
-          <a:noFill/>
-        </p:spPr>
-        <p:txBody>
-          <a:bodyPr wrap="square" anchor="t" lIns="45720" rIns="45720" tIns="27432" bIns="27432">
-            <a:spAutoFit/>
-          </a:bodyPr>
-          <a:lstStyle/>
-          <a:p>
-            <a:pPr algn="l"/>
-            <a:r>
-              <a:rPr sz="1400" b="0" i="0">
+              <a:t>Registrar no fim do turno</a:t>
+            </a:r>
+          </a:p>
+          <a:p>
+            <a:pPr marL="228600" indent="-228600">
+              <a:spcAft>
+                <a:spcPts val="800"/>
+              </a:spcAft>
+              <a:buClr>
+                <a:srgbClr val="C62828"/>
+              </a:buClr>
+              <a:buChar char="•"/>
+            </a:pPr>
+            <a:r>
+              <a:rPr sz="1500" b="0" i="0">
                 <a:solidFill>
                   <a:srgbClr val="333333"/>
                 </a:solidFill>
                 <a:latin typeface="Calibri"/>
               </a:rPr>
-              <a:t>A base contém 200 ensaios, dos quais 40 têm data até o corte.</a:t>
-            </a:r>
-          </a:p>
-        </p:txBody>
-      </p:sp>
-      <p:sp>
-        <p:nvSpPr>
-          <p:cNvPr id="18" name="Rectangle 17"/>
-          <p:cNvSpPr/>
-          <p:nvPr/>
-        </p:nvSpPr>
-        <p:spPr>
-          <a:xfrm>
-            <a:off x="4306824" y="1828800"/>
-            <a:ext cx="3575304" cy="3291840"/>
-          </a:xfrm>
-          <a:prstGeom prst="rect">
-            <a:avLst/>
-          </a:prstGeom>
-          <a:solidFill>
-            <a:srgbClr val="F2F2F2"/>
-          </a:solidFill>
-          <a:ln>
-            <a:noFill/>
-          </a:ln>
-          <a:effectLst/>
-        </p:spPr>
-        <p:style>
-          <a:lnRef idx="1">
-            <a:schemeClr val="accent1"/>
-          </a:lnRef>
-          <a:fillRef idx="3">
-            <a:schemeClr val="accent1"/>
-          </a:fillRef>
-          <a:effectRef idx="2">
-            <a:schemeClr val="accent1"/>
-          </a:effectRef>
-          <a:fontRef idx="minor">
-            <a:schemeClr val="lt1"/>
-          </a:fontRef>
-        </p:style>
-        <p:txBody>
-          <a:bodyPr rtlCol="0" anchor="ctr"/>
-          <a:lstStyle/>
-          <a:p>
-            <a:pPr algn="ctr"/>
-          </a:p>
-        </p:txBody>
-      </p:sp>
-      <p:sp>
-        <p:nvSpPr>
-          <p:cNvPr id="19" name="Rectangle 18"/>
-          <p:cNvSpPr/>
-          <p:nvPr/>
-        </p:nvSpPr>
-        <p:spPr>
-          <a:xfrm>
-            <a:off x="4306824" y="1828800"/>
-            <a:ext cx="3575304" cy="54864"/>
-          </a:xfrm>
-          <a:prstGeom prst="rect">
-            <a:avLst/>
-          </a:prstGeom>
-          <a:solidFill>
-            <a:srgbClr val="4F81BD"/>
-          </a:solidFill>
-          <a:ln>
-            <a:noFill/>
-          </a:ln>
-          <a:effectLst/>
-        </p:spPr>
-        <p:style>
-          <a:lnRef idx="1">
-            <a:schemeClr val="accent1"/>
-          </a:lnRef>
-          <a:fillRef idx="3">
-            <a:schemeClr val="accent1"/>
-          </a:fillRef>
-          <a:effectRef idx="2">
-            <a:schemeClr val="accent1"/>
-          </a:effectRef>
-          <a:fontRef idx="minor">
-            <a:schemeClr val="lt1"/>
-          </a:fontRef>
-        </p:style>
-        <p:txBody>
-          <a:bodyPr rtlCol="0" anchor="ctr"/>
-          <a:lstStyle/>
-          <a:p>
-            <a:pPr algn="ctr"/>
-          </a:p>
-        </p:txBody>
-      </p:sp>
-      <p:sp>
-        <p:nvSpPr>
-          <p:cNvPr id="20" name="TextBox 19"/>
-          <p:cNvSpPr txBox="1"/>
-          <p:nvPr/>
-        </p:nvSpPr>
-        <p:spPr>
-          <a:xfrm>
-            <a:off x="4535424" y="2011680"/>
-            <a:ext cx="1371600" cy="457200"/>
-          </a:xfrm>
-          <a:prstGeom prst="rect">
-            <a:avLst/>
-          </a:prstGeom>
-          <a:noFill/>
-        </p:spPr>
-        <p:txBody>
-          <a:bodyPr wrap="square" anchor="t" lIns="45720" rIns="45720" tIns="27432" bIns="27432">
-            <a:spAutoFit/>
-          </a:bodyPr>
-          <a:lstStyle/>
-          <a:p>
-            <a:pPr algn="l"/>
-            <a:r>
-              <a:rPr sz="2200" b="1" i="0">
-                <a:solidFill>
-                  <a:srgbClr val="4F81BD"/>
-                </a:solidFill>
-                <a:latin typeface="Calibri"/>
-              </a:rPr>
-              <a:t>02</a:t>
-            </a:r>
-          </a:p>
-        </p:txBody>
-      </p:sp>
-      <p:sp>
-        <p:nvSpPr>
-          <p:cNvPr id="21" name="TextBox 20"/>
-          <p:cNvSpPr txBox="1"/>
-          <p:nvPr/>
-        </p:nvSpPr>
-        <p:spPr>
-          <a:xfrm>
-            <a:off x="4535424" y="2560320"/>
-            <a:ext cx="3118104" cy="685800"/>
-          </a:xfrm>
-          <a:prstGeom prst="rect">
-            <a:avLst/>
-          </a:prstGeom>
-          <a:noFill/>
-        </p:spPr>
-        <p:txBody>
-          <a:bodyPr wrap="square" anchor="t" lIns="45720" rIns="45720" tIns="27432" bIns="27432">
-            <a:spAutoFit/>
-          </a:bodyPr>
-          <a:lstStyle/>
-          <a:p>
-            <a:pPr algn="l"/>
-            <a:r>
-              <a:rPr sz="1800" b="1" i="0">
-                <a:solidFill>
-                  <a:srgbClr val="333333"/>
-                </a:solidFill>
-                <a:latin typeface="Calibri"/>
-              </a:rPr>
-              <a:t>Qualidade</a:t>
-            </a:r>
-          </a:p>
-        </p:txBody>
-      </p:sp>
-      <p:sp>
-        <p:nvSpPr>
-          <p:cNvPr id="22" name="TextBox 21"/>
-          <p:cNvSpPr txBox="1"/>
-          <p:nvPr/>
-        </p:nvSpPr>
-        <p:spPr>
-          <a:xfrm>
-            <a:off x="4535424" y="3246120"/>
-            <a:ext cx="3118104" cy="1737360"/>
-          </a:xfrm>
-          <a:prstGeom prst="rect">
-            <a:avLst/>
-          </a:prstGeom>
-          <a:noFill/>
-        </p:spPr>
-        <p:txBody>
-          <a:bodyPr wrap="square" anchor="t" lIns="45720" rIns="45720" tIns="27432" bIns="27432">
-            <a:spAutoFit/>
-          </a:bodyPr>
-          <a:lstStyle/>
-          <a:p>
-            <a:pPr algn="l"/>
-            <a:r>
-              <a:rPr sz="1400" b="0" i="0">
-                <a:solidFill>
-                  <a:srgbClr val="333333"/>
-                </a:solidFill>
-                <a:latin typeface="Calibri"/>
-              </a:rPr>
-              <a:t>19 resultados ficaram abaixo da meta, 47,5% do realizado.</a:t>
-            </a:r>
-          </a:p>
-        </p:txBody>
-      </p:sp>
-      <p:sp>
-        <p:nvSpPr>
-          <p:cNvPr id="23" name="Rectangle 22"/>
-          <p:cNvSpPr/>
-          <p:nvPr/>
-        </p:nvSpPr>
-        <p:spPr>
-          <a:xfrm>
-            <a:off x="8156448" y="1828800"/>
-            <a:ext cx="3575304" cy="3291840"/>
-          </a:xfrm>
-          <a:prstGeom prst="rect">
-            <a:avLst/>
-          </a:prstGeom>
-          <a:solidFill>
-            <a:srgbClr val="F2F2F2"/>
-          </a:solidFill>
-          <a:ln>
-            <a:noFill/>
-          </a:ln>
-          <a:effectLst/>
-        </p:spPr>
-        <p:style>
-          <a:lnRef idx="1">
-            <a:schemeClr val="accent1"/>
-          </a:lnRef>
-          <a:fillRef idx="3">
-            <a:schemeClr val="accent1"/>
-          </a:fillRef>
-          <a:effectRef idx="2">
-            <a:schemeClr val="accent1"/>
-          </a:effectRef>
-          <a:fontRef idx="minor">
-            <a:schemeClr val="lt1"/>
-          </a:fontRef>
-        </p:style>
-        <p:txBody>
-          <a:bodyPr rtlCol="0" anchor="ctr"/>
-          <a:lstStyle/>
-          <a:p>
-            <a:pPr algn="ctr"/>
-          </a:p>
-        </p:txBody>
-      </p:sp>
-      <p:sp>
-        <p:nvSpPr>
-          <p:cNvPr id="24" name="Rectangle 23"/>
-          <p:cNvSpPr/>
-          <p:nvPr/>
-        </p:nvSpPr>
-        <p:spPr>
-          <a:xfrm>
-            <a:off x="8156448" y="1828800"/>
-            <a:ext cx="3575304" cy="54864"/>
-          </a:xfrm>
-          <a:prstGeom prst="rect">
-            <a:avLst/>
-          </a:prstGeom>
-          <a:solidFill>
-            <a:srgbClr val="F2A900"/>
-          </a:solidFill>
-          <a:ln>
-            <a:noFill/>
-          </a:ln>
-          <a:effectLst/>
-        </p:spPr>
-        <p:style>
-          <a:lnRef idx="1">
-            <a:schemeClr val="accent1"/>
-          </a:lnRef>
-          <a:fillRef idx="3">
-            <a:schemeClr val="accent1"/>
-          </a:fillRef>
-          <a:effectRef idx="2">
-            <a:schemeClr val="accent1"/>
-          </a:effectRef>
-          <a:fontRef idx="minor">
-            <a:schemeClr val="lt1"/>
-          </a:fontRef>
-        </p:style>
-        <p:txBody>
-          <a:bodyPr rtlCol="0" anchor="ctr"/>
-          <a:lstStyle/>
-          <a:p>
-            <a:pPr algn="ctr"/>
-          </a:p>
-        </p:txBody>
-      </p:sp>
-      <p:sp>
-        <p:nvSpPr>
-          <p:cNvPr id="25" name="TextBox 24"/>
-          <p:cNvSpPr txBox="1"/>
-          <p:nvPr/>
-        </p:nvSpPr>
-        <p:spPr>
-          <a:xfrm>
-            <a:off x="8385048" y="2011680"/>
-            <a:ext cx="1371600" cy="457200"/>
-          </a:xfrm>
-          <a:prstGeom prst="rect">
-            <a:avLst/>
-          </a:prstGeom>
-          <a:noFill/>
-        </p:spPr>
-        <p:txBody>
-          <a:bodyPr wrap="square" anchor="t" lIns="45720" rIns="45720" tIns="27432" bIns="27432">
-            <a:spAutoFit/>
-          </a:bodyPr>
-          <a:lstStyle/>
-          <a:p>
-            <a:pPr algn="l"/>
-            <a:r>
-              <a:rPr sz="2200" b="1" i="0">
-                <a:solidFill>
-                  <a:srgbClr val="F2A900"/>
-                </a:solidFill>
-                <a:latin typeface="Calibri"/>
-              </a:rPr>
-              <a:t>03</a:t>
-            </a:r>
-          </a:p>
-        </p:txBody>
-      </p:sp>
-      <p:sp>
-        <p:nvSpPr>
-          <p:cNvPr id="26" name="TextBox 25"/>
-          <p:cNvSpPr txBox="1"/>
-          <p:nvPr/>
-        </p:nvSpPr>
-        <p:spPr>
-          <a:xfrm>
-            <a:off x="8385048" y="2560320"/>
-            <a:ext cx="3118104" cy="685800"/>
-          </a:xfrm>
-          <a:prstGeom prst="rect">
-            <a:avLst/>
-          </a:prstGeom>
-          <a:noFill/>
-        </p:spPr>
-        <p:txBody>
-          <a:bodyPr wrap="square" anchor="t" lIns="45720" rIns="45720" tIns="27432" bIns="27432">
-            <a:spAutoFit/>
-          </a:bodyPr>
-          <a:lstStyle/>
-          <a:p>
-            <a:pPr algn="l"/>
-            <a:r>
-              <a:rPr sz="1800" b="1" i="0">
-                <a:solidFill>
-                  <a:srgbClr val="333333"/>
-                </a:solidFill>
-                <a:latin typeface="Calibri"/>
-              </a:rPr>
-              <a:t>Governança</a:t>
-            </a:r>
-          </a:p>
-        </p:txBody>
-      </p:sp>
-      <p:sp>
-        <p:nvSpPr>
-          <p:cNvPr id="27" name="TextBox 26"/>
-          <p:cNvSpPr txBox="1"/>
-          <p:nvPr/>
-        </p:nvSpPr>
-        <p:spPr>
-          <a:xfrm>
-            <a:off x="8385048" y="3246120"/>
-            <a:ext cx="3118104" cy="1737360"/>
-          </a:xfrm>
-          <a:prstGeom prst="rect">
-            <a:avLst/>
-          </a:prstGeom>
-          <a:noFill/>
-        </p:spPr>
-        <p:txBody>
-          <a:bodyPr wrap="square" anchor="t" lIns="45720" rIns="45720" tIns="27432" bIns="27432">
-            <a:spAutoFit/>
-          </a:bodyPr>
-          <a:lstStyle/>
-          <a:p>
-            <a:pPr algn="l"/>
-            <a:r>
-              <a:rPr sz="1400" b="0" i="0">
-                <a:solidFill>
-                  <a:srgbClr val="333333"/>
-                </a:solidFill>
-                <a:latin typeface="Calibri"/>
-              </a:rPr>
-              <a:t>Quatro ensaios aguardam revisão, dois já aprovados tecnicamente.</a:t>
+              <a:t>Arredondar para 30 min</a:t>
             </a:r>
           </a:p>
         </p:txBody>
@@ -13164,7 +12423,7 @@
                 </a:solidFill>
                 <a:latin typeface="Calibri"/>
               </a:rPr>
-              <a:t>Takeaways com tags de fase</a:t>
+              <a:t>Comparação de três opções com uma recomendada</a:t>
             </a:r>
           </a:p>
         </p:txBody>
@@ -13269,7 +12528,7 @@
                 </a:solidFill>
                 <a:latin typeface="Calibri"/>
               </a:rPr>
-              <a:t>PRÓXIMOS PASSOS</a:t>
+              <a:t>COMPARAÇÃO</a:t>
             </a:r>
           </a:p>
         </p:txBody>
@@ -13376,122 +12635,8 @@
         </p:nvSpPr>
         <p:spPr>
           <a:xfrm>
-            <a:off x="457200" y="5349240"/>
-            <a:ext cx="11274552" cy="731520"/>
-          </a:xfrm>
-          <a:prstGeom prst="rect">
-            <a:avLst/>
-          </a:prstGeom>
-          <a:solidFill>
-            <a:srgbClr val="14273F"/>
-          </a:solidFill>
-          <a:ln>
-            <a:noFill/>
-          </a:ln>
-          <a:effectLst/>
-        </p:spPr>
-        <p:style>
-          <a:lnRef idx="1">
-            <a:schemeClr val="accent1"/>
-          </a:lnRef>
-          <a:fillRef idx="3">
-            <a:schemeClr val="accent1"/>
-          </a:fillRef>
-          <a:effectRef idx="2">
-            <a:schemeClr val="accent1"/>
-          </a:effectRef>
-          <a:fontRef idx="minor">
-            <a:schemeClr val="lt1"/>
-          </a:fontRef>
-        </p:style>
-        <p:txBody>
-          <a:bodyPr rtlCol="0" anchor="ctr"/>
-          <a:lstStyle/>
-          <a:p>
-            <a:pPr algn="ctr"/>
-          </a:p>
-        </p:txBody>
-      </p:sp>
-      <p:sp>
-        <p:nvSpPr>
-          <p:cNvPr id="10" name="TextBox 9"/>
-          <p:cNvSpPr txBox="1"/>
-          <p:nvPr/>
-        </p:nvSpPr>
-        <p:spPr>
-          <a:xfrm>
-            <a:off x="685800" y="5349240"/>
-            <a:ext cx="2103120" cy="731520"/>
-          </a:xfrm>
-          <a:prstGeom prst="rect">
-            <a:avLst/>
-          </a:prstGeom>
-          <a:noFill/>
-        </p:spPr>
-        <p:txBody>
-          <a:bodyPr wrap="square" anchor="ctr" lIns="45720" rIns="45720" tIns="27432" bIns="27432">
-            <a:spAutoFit/>
-          </a:bodyPr>
-          <a:lstStyle/>
-          <a:p>
-            <a:pPr algn="l"/>
-            <a:r>
-              <a:rPr sz="1000" b="1" i="0">
-                <a:solidFill>
-                  <a:srgbClr val="F2A900"/>
-                </a:solidFill>
-                <a:latin typeface="Calibri"/>
-              </a:rPr>
-              <a:t>DECISÃO ESPERADA</a:t>
-            </a:r>
-          </a:p>
-        </p:txBody>
-      </p:sp>
-      <p:sp>
-        <p:nvSpPr>
-          <p:cNvPr id="11" name="TextBox 10"/>
-          <p:cNvSpPr txBox="1"/>
-          <p:nvPr/>
-        </p:nvSpPr>
-        <p:spPr>
-          <a:xfrm>
-            <a:off x="2788920" y="5349240"/>
-            <a:ext cx="8759952" cy="731520"/>
-          </a:xfrm>
-          <a:prstGeom prst="rect">
-            <a:avLst/>
-          </a:prstGeom>
-          <a:noFill/>
-        </p:spPr>
-        <p:txBody>
-          <a:bodyPr wrap="square" anchor="ctr" lIns="45720" rIns="45720" tIns="27432" bIns="27432">
-            <a:spAutoFit/>
-          </a:bodyPr>
-          <a:lstStyle/>
-          <a:p>
-            <a:pPr algn="l"/>
-            <a:r>
-              <a:rPr sz="1400" b="1" i="0">
-                <a:solidFill>
-                  <a:srgbClr val="FFFFFF"/>
-                </a:solidFill>
-                <a:latin typeface="Calibri"/>
-              </a:rPr>
-              <a:t>Aprovar a rotina semanal e nomear os donos dos quatro controles.</a:t>
-            </a:r>
-          </a:p>
-        </p:txBody>
-      </p:sp>
-      <p:sp>
-        <p:nvSpPr>
-          <p:cNvPr id="12" name="Rectangle 11"/>
-          <p:cNvSpPr/>
-          <p:nvPr/>
-        </p:nvSpPr>
-        <p:spPr>
-          <a:xfrm>
-            <a:off x="457200" y="1828800"/>
-            <a:ext cx="3575304" cy="3291840"/>
+            <a:off x="457200" y="1737360"/>
+            <a:ext cx="3575304" cy="4297680"/>
           </a:xfrm>
           <a:prstGeom prst="rect">
             <a:avLst/>
@@ -13528,14 +12673,14 @@
       </p:sp>
       <p:sp>
         <p:nvSpPr>
-          <p:cNvPr id="13" name="Rectangle 12"/>
+          <p:cNvPr id="10" name="Rectangle 9"/>
           <p:cNvSpPr/>
           <p:nvPr/>
         </p:nvSpPr>
         <p:spPr>
           <a:xfrm>
-            <a:off x="457200" y="1828800"/>
-            <a:ext cx="3575304" cy="54864"/>
+            <a:off x="457200" y="1737360"/>
+            <a:ext cx="3575304" cy="640080"/>
           </a:xfrm>
           <a:prstGeom prst="rect">
             <a:avLst/>
@@ -13572,14 +12717,176 @@
       </p:sp>
       <p:sp>
         <p:nvSpPr>
+          <p:cNvPr id="11" name="TextBox 10"/>
+          <p:cNvSpPr txBox="1"/>
+          <p:nvPr/>
+        </p:nvSpPr>
+        <p:spPr>
+          <a:xfrm>
+            <a:off x="457200" y="1737360"/>
+            <a:ext cx="3575304" cy="640080"/>
+          </a:xfrm>
+          <a:prstGeom prst="rect">
+            <a:avLst/>
+          </a:prstGeom>
+          <a:noFill/>
+        </p:spPr>
+        <p:txBody>
+          <a:bodyPr wrap="square" anchor="ctr" lIns="45720" rIns="45720" tIns="27432" bIns="27432">
+            <a:spAutoFit/>
+          </a:bodyPr>
+          <a:lstStyle/>
+          <a:p>
+            <a:pPr algn="ctr"/>
+            <a:r>
+              <a:rPr sz="1700" b="1" i="0">
+                <a:solidFill>
+                  <a:srgbClr val="FFFFFF"/>
+                </a:solidFill>
+                <a:latin typeface="Calibri"/>
+              </a:rPr>
+              <a:t>Não fazer</a:t>
+            </a:r>
+          </a:p>
+        </p:txBody>
+      </p:sp>
+      <p:sp>
+        <p:nvSpPr>
+          <p:cNvPr id="12" name="TextBox 11"/>
+          <p:cNvSpPr txBox="1"/>
+          <p:nvPr/>
+        </p:nvSpPr>
+        <p:spPr>
+          <a:xfrm>
+            <a:off x="594360" y="2560320"/>
+            <a:ext cx="3300984" cy="3383280"/>
+          </a:xfrm>
+          <a:prstGeom prst="rect">
+            <a:avLst/>
+          </a:prstGeom>
+          <a:noFill/>
+        </p:spPr>
+        <p:txBody>
+          <a:bodyPr wrap="square" lIns="45720" rIns="45720">
+            <a:spAutoFit/>
+          </a:bodyPr>
+          <a:lstStyle/>
+          <a:p>
+            <a:pPr marL="228600" indent="-228600">
+              <a:spcAft>
+                <a:spcPts val="800"/>
+              </a:spcAft>
+              <a:buClr>
+                <a:srgbClr val="1F3A5F"/>
+              </a:buClr>
+              <a:buChar char="•"/>
+            </a:pPr>
+            <a:r>
+              <a:rPr sz="1500" b="0" i="0">
+                <a:solidFill>
+                  <a:srgbClr val="333333"/>
+                </a:solidFill>
+                <a:latin typeface="Calibri"/>
+              </a:rPr>
+              <a:t>Custo: R$ 0</a:t>
+            </a:r>
+          </a:p>
+          <a:p>
+            <a:pPr marL="228600" indent="-228600">
+              <a:spcAft>
+                <a:spcPts val="800"/>
+              </a:spcAft>
+              <a:buClr>
+                <a:srgbClr val="1F3A5F"/>
+              </a:buClr>
+              <a:buChar char="•"/>
+            </a:pPr>
+            <a:r>
+              <a:rPr sz="1500" b="0" i="0">
+                <a:solidFill>
+                  <a:srgbClr val="333333"/>
+                </a:solidFill>
+                <a:latin typeface="Calibri"/>
+              </a:rPr>
+              <a:t>Perda: R$ 1,8 mi/ano</a:t>
+            </a:r>
+          </a:p>
+          <a:p>
+            <a:pPr marL="228600" indent="-228600">
+              <a:spcAft>
+                <a:spcPts val="800"/>
+              </a:spcAft>
+              <a:buClr>
+                <a:srgbClr val="1F3A5F"/>
+              </a:buClr>
+              <a:buChar char="•"/>
+            </a:pPr>
+            <a:r>
+              <a:rPr sz="1500" b="0" i="0">
+                <a:solidFill>
+                  <a:srgbClr val="333333"/>
+                </a:solidFill>
+                <a:latin typeface="Calibri"/>
+              </a:rPr>
+              <a:t>Risco: parada total</a:t>
+            </a:r>
+          </a:p>
+        </p:txBody>
+      </p:sp>
+      <p:sp>
+        <p:nvSpPr>
+          <p:cNvPr id="13" name="Rectangle 12"/>
+          <p:cNvSpPr/>
+          <p:nvPr/>
+        </p:nvSpPr>
+        <p:spPr>
+          <a:xfrm>
+            <a:off x="4306824" y="1737360"/>
+            <a:ext cx="3575304" cy="4297680"/>
+          </a:xfrm>
+          <a:prstGeom prst="rect">
+            <a:avLst/>
+          </a:prstGeom>
+          <a:solidFill>
+            <a:srgbClr val="F2F2F2"/>
+          </a:solidFill>
+          <a:ln>
+            <a:noFill/>
+          </a:ln>
+          <a:effectLst/>
+        </p:spPr>
+        <p:style>
+          <a:lnRef idx="1">
+            <a:schemeClr val="accent1"/>
+          </a:lnRef>
+          <a:fillRef idx="3">
+            <a:schemeClr val="accent1"/>
+          </a:fillRef>
+          <a:effectRef idx="2">
+            <a:schemeClr val="accent1"/>
+          </a:effectRef>
+          <a:fontRef idx="minor">
+            <a:schemeClr val="lt1"/>
+          </a:fontRef>
+        </p:style>
+        <p:txBody>
+          <a:bodyPr rtlCol="0" anchor="ctr"/>
+          <a:lstStyle/>
+          <a:p>
+            <a:pPr algn="ctr"/>
+          </a:p>
+        </p:txBody>
+      </p:sp>
+      <p:sp>
+        <p:nvSpPr>
           <p:cNvPr id="14" name="Rectangle 13"/>
           <p:cNvSpPr/>
           <p:nvPr/>
         </p:nvSpPr>
         <p:spPr>
           <a:xfrm>
-            <a:off x="685800" y="2057400"/>
-            <a:ext cx="2194560" cy="292608"/>
+            <a:off x="4306824" y="1737360"/>
+            <a:ext cx="3575304" cy="640080"/>
           </a:xfrm>
           <a:prstGeom prst="rect">
             <a:avLst/>
@@ -13622,8 +12929,8 @@
         </p:nvSpPr>
         <p:spPr>
           <a:xfrm>
-            <a:off x="685800" y="2057400"/>
-            <a:ext cx="2194560" cy="292608"/>
+            <a:off x="4306824" y="1737360"/>
+            <a:ext cx="3575304" cy="640080"/>
           </a:xfrm>
           <a:prstGeom prst="rect">
             <a:avLst/>
@@ -13638,13 +12945,13 @@
           <a:p>
             <a:pPr algn="ctr"/>
             <a:r>
-              <a:rPr sz="900" b="1" i="0">
+              <a:rPr sz="1700" b="1" i="0">
                 <a:solidFill>
                   <a:srgbClr val="FFFFFF"/>
                 </a:solidFill>
                 <a:latin typeface="Calibri"/>
               </a:rPr>
-              <a:t>AGORA</a:t>
+              <a:t>A: Reforma</a:t>
             </a:r>
           </a:p>
         </p:txBody>
@@ -13657,65 +12964,124 @@
         </p:nvSpPr>
         <p:spPr>
           <a:xfrm>
-            <a:off x="685800" y="2560320"/>
-            <a:ext cx="3118104" cy="685800"/>
-          </a:xfrm>
-          <a:prstGeom prst="rect">
-            <a:avLst/>
-          </a:prstGeom>
-          <a:noFill/>
-        </p:spPr>
-        <p:txBody>
-          <a:bodyPr wrap="square" anchor="t" lIns="45720" rIns="45720" tIns="27432" bIns="27432">
-            <a:spAutoFit/>
-          </a:bodyPr>
-          <a:lstStyle/>
-          <a:p>
-            <a:pPr algn="l"/>
-            <a:r>
-              <a:rPr sz="1800" b="1" i="0">
+            <a:off x="4443984" y="2560320"/>
+            <a:ext cx="3300984" cy="3383280"/>
+          </a:xfrm>
+          <a:prstGeom prst="rect">
+            <a:avLst/>
+          </a:prstGeom>
+          <a:noFill/>
+        </p:spPr>
+        <p:txBody>
+          <a:bodyPr wrap="square" lIns="45720" rIns="45720">
+            <a:spAutoFit/>
+          </a:bodyPr>
+          <a:lstStyle/>
+          <a:p>
+            <a:pPr marL="228600" indent="-228600">
+              <a:spcAft>
+                <a:spcPts val="800"/>
+              </a:spcAft>
+              <a:buClr>
+                <a:srgbClr val="1F3A5F"/>
+              </a:buClr>
+              <a:buChar char="•"/>
+            </a:pPr>
+            <a:r>
+              <a:rPr sz="1500" b="0" i="0">
                 <a:solidFill>
                   <a:srgbClr val="333333"/>
                 </a:solidFill>
                 <a:latin typeface="Calibri"/>
               </a:rPr>
-              <a:t>Sanear os itens atrasados</a:t>
-            </a:r>
-          </a:p>
-        </p:txBody>
-      </p:sp>
-      <p:sp>
-        <p:nvSpPr>
-          <p:cNvPr id="17" name="TextBox 16"/>
-          <p:cNvSpPr txBox="1"/>
-          <p:nvPr/>
-        </p:nvSpPr>
-        <p:spPr>
-          <a:xfrm>
-            <a:off x="685800" y="3246120"/>
-            <a:ext cx="3118104" cy="1737360"/>
-          </a:xfrm>
-          <a:prstGeom prst="rect">
-            <a:avLst/>
-          </a:prstGeom>
-          <a:noFill/>
-        </p:spPr>
-        <p:txBody>
-          <a:bodyPr wrap="square" anchor="t" lIns="45720" rIns="45720" tIns="27432" bIns="27432">
-            <a:spAutoFit/>
-          </a:bodyPr>
-          <a:lstStyle/>
-          <a:p>
-            <a:pPr algn="l"/>
-            <a:r>
-              <a:rPr sz="1400" b="0" i="0">
+              <a:t>Custo: R$ 0,9 mi</a:t>
+            </a:r>
+          </a:p>
+          <a:p>
+            <a:pPr marL="228600" indent="-228600">
+              <a:spcAft>
+                <a:spcPts val="800"/>
+              </a:spcAft>
+              <a:buClr>
+                <a:srgbClr val="1F3A5F"/>
+              </a:buClr>
+              <a:buChar char="•"/>
+            </a:pPr>
+            <a:r>
+              <a:rPr sz="1500" b="0" i="0">
                 <a:solidFill>
                   <a:srgbClr val="333333"/>
                 </a:solidFill>
                 <a:latin typeface="Calibri"/>
               </a:rPr>
-              <a:t>Definir próximo marco, responsável e motivo do desvio para cada item.</a:t>
-            </a:r>
+              <a:t>Economia: R$ 0,7 mi/ano</a:t>
+            </a:r>
+          </a:p>
+          <a:p>
+            <a:pPr marL="228600" indent="-228600">
+              <a:spcAft>
+                <a:spcPts val="800"/>
+              </a:spcAft>
+              <a:buClr>
+                <a:srgbClr val="1F3A5F"/>
+              </a:buClr>
+              <a:buChar char="•"/>
+            </a:pPr>
+            <a:r>
+              <a:rPr sz="1500" b="0" i="0">
+                <a:solidFill>
+                  <a:srgbClr val="333333"/>
+                </a:solidFill>
+                <a:latin typeface="Calibri"/>
+              </a:rPr>
+              <a:t>Risco: sem peças</a:t>
+            </a:r>
+          </a:p>
+        </p:txBody>
+      </p:sp>
+      <p:sp>
+        <p:nvSpPr>
+          <p:cNvPr id="17" name="Rectangle 16"/>
+          <p:cNvSpPr/>
+          <p:nvPr/>
+        </p:nvSpPr>
+        <p:spPr>
+          <a:xfrm>
+            <a:off x="8156448" y="1737360"/>
+            <a:ext cx="3575304" cy="4297680"/>
+          </a:xfrm>
+          <a:prstGeom prst="rect">
+            <a:avLst/>
+          </a:prstGeom>
+          <a:solidFill>
+            <a:srgbClr val="F2F2F2"/>
+          </a:solidFill>
+          <a:ln w="25400">
+            <a:solidFill>
+              <a:srgbClr val="F2A900"/>
+            </a:solidFill>
+          </a:ln>
+          <a:effectLst/>
+        </p:spPr>
+        <p:style>
+          <a:lnRef idx="1">
+            <a:schemeClr val="accent1"/>
+          </a:lnRef>
+          <a:fillRef idx="3">
+            <a:schemeClr val="accent1"/>
+          </a:fillRef>
+          <a:effectRef idx="2">
+            <a:schemeClr val="accent1"/>
+          </a:effectRef>
+          <a:fontRef idx="minor">
+            <a:schemeClr val="lt1"/>
+          </a:fontRef>
+        </p:style>
+        <p:txBody>
+          <a:bodyPr rtlCol="0" anchor="ctr"/>
+          <a:lstStyle/>
+          <a:p>
+            <a:pPr algn="ctr"/>
           </a:p>
         </p:txBody>
       </p:sp>
@@ -13727,14 +13093,14 @@
         </p:nvSpPr>
         <p:spPr>
           <a:xfrm>
-            <a:off x="4306824" y="1828800"/>
-            <a:ext cx="3575304" cy="3291840"/>
+            <a:off x="8156448" y="1737360"/>
+            <a:ext cx="3575304" cy="640080"/>
           </a:xfrm>
           <a:prstGeom prst="rect">
             <a:avLst/>
           </a:prstGeom>
           <a:solidFill>
-            <a:srgbClr val="F2F2F2"/>
+            <a:srgbClr val="1F3A5F"/>
           </a:solidFill>
           <a:ln>
             <a:noFill/>
@@ -13765,45 +13131,36 @@
       </p:sp>
       <p:sp>
         <p:nvSpPr>
-          <p:cNvPr id="19" name="Rectangle 18"/>
-          <p:cNvSpPr/>
-          <p:nvPr/>
-        </p:nvSpPr>
-        <p:spPr>
-          <a:xfrm>
-            <a:off x="4306824" y="1828800"/>
-            <a:ext cx="3575304" cy="54864"/>
-          </a:xfrm>
-          <a:prstGeom prst="rect">
-            <a:avLst/>
-          </a:prstGeom>
-          <a:solidFill>
-            <a:srgbClr val="4F81BD"/>
-          </a:solidFill>
-          <a:ln>
-            <a:noFill/>
-          </a:ln>
-          <a:effectLst/>
-        </p:spPr>
-        <p:style>
-          <a:lnRef idx="1">
-            <a:schemeClr val="accent1"/>
-          </a:lnRef>
-          <a:fillRef idx="3">
-            <a:schemeClr val="accent1"/>
-          </a:fillRef>
-          <a:effectRef idx="2">
-            <a:schemeClr val="accent1"/>
-          </a:effectRef>
-          <a:fontRef idx="minor">
-            <a:schemeClr val="lt1"/>
-          </a:fontRef>
-        </p:style>
-        <p:txBody>
-          <a:bodyPr rtlCol="0" anchor="ctr"/>
+          <p:cNvPr id="19" name="TextBox 18"/>
+          <p:cNvSpPr txBox="1"/>
+          <p:nvPr/>
+        </p:nvSpPr>
+        <p:spPr>
+          <a:xfrm>
+            <a:off x="8156448" y="1737360"/>
+            <a:ext cx="3575304" cy="640080"/>
+          </a:xfrm>
+          <a:prstGeom prst="rect">
+            <a:avLst/>
+          </a:prstGeom>
+          <a:noFill/>
+        </p:spPr>
+        <p:txBody>
+          <a:bodyPr wrap="square" anchor="ctr" lIns="45720" rIns="45720" tIns="27432" bIns="27432">
+            <a:spAutoFit/>
+          </a:bodyPr>
           <a:lstStyle/>
           <a:p>
             <a:pPr algn="ctr"/>
+            <a:r>
+              <a:rPr sz="1700" b="1" i="0">
+                <a:solidFill>
+                  <a:srgbClr val="FFFFFF"/>
+                </a:solidFill>
+                <a:latin typeface="Calibri"/>
+              </a:rPr>
+              <a:t>B: Prensa nova</a:t>
+            </a:r>
           </a:p>
         </p:txBody>
       </p:sp>
@@ -13815,201 +13172,8 @@
         </p:nvSpPr>
         <p:spPr>
           <a:xfrm>
-            <a:off x="4535424" y="2057400"/>
-            <a:ext cx="2194560" cy="292608"/>
-          </a:xfrm>
-          <a:prstGeom prst="rect">
-            <a:avLst/>
-          </a:prstGeom>
-          <a:solidFill>
-            <a:srgbClr val="4F81BD"/>
-          </a:solidFill>
-          <a:ln>
-            <a:noFill/>
-          </a:ln>
-          <a:effectLst/>
-        </p:spPr>
-        <p:style>
-          <a:lnRef idx="1">
-            <a:schemeClr val="accent1"/>
-          </a:lnRef>
-          <a:fillRef idx="3">
-            <a:schemeClr val="accent1"/>
-          </a:fillRef>
-          <a:effectRef idx="2">
-            <a:schemeClr val="accent1"/>
-          </a:effectRef>
-          <a:fontRef idx="minor">
-            <a:schemeClr val="lt1"/>
-          </a:fontRef>
-        </p:style>
-        <p:txBody>
-          <a:bodyPr rtlCol="0" anchor="ctr"/>
-          <a:lstStyle/>
-          <a:p>
-            <a:pPr algn="ctr"/>
-          </a:p>
-        </p:txBody>
-      </p:sp>
-      <p:sp>
-        <p:nvSpPr>
-          <p:cNvPr id="21" name="TextBox 20"/>
-          <p:cNvSpPr txBox="1"/>
-          <p:nvPr/>
-        </p:nvSpPr>
-        <p:spPr>
-          <a:xfrm>
-            <a:off x="4535424" y="2057400"/>
-            <a:ext cx="2194560" cy="292608"/>
-          </a:xfrm>
-          <a:prstGeom prst="rect">
-            <a:avLst/>
-          </a:prstGeom>
-          <a:noFill/>
-        </p:spPr>
-        <p:txBody>
-          <a:bodyPr wrap="square" anchor="ctr" lIns="45720" rIns="45720" tIns="27432" bIns="27432">
-            <a:spAutoFit/>
-          </a:bodyPr>
-          <a:lstStyle/>
-          <a:p>
-            <a:pPr algn="ctr"/>
-            <a:r>
-              <a:rPr sz="900" b="1" i="0">
-                <a:solidFill>
-                  <a:srgbClr val="FFFFFF"/>
-                </a:solidFill>
-                <a:latin typeface="Calibri"/>
-              </a:rPr>
-              <a:t>PRÓXIMAS 4 SEMANAS</a:t>
-            </a:r>
-          </a:p>
-        </p:txBody>
-      </p:sp>
-      <p:sp>
-        <p:nvSpPr>
-          <p:cNvPr id="22" name="TextBox 21"/>
-          <p:cNvSpPr txBox="1"/>
-          <p:nvPr/>
-        </p:nvSpPr>
-        <p:spPr>
-          <a:xfrm>
-            <a:off x="4535424" y="2560320"/>
-            <a:ext cx="3118104" cy="685800"/>
-          </a:xfrm>
-          <a:prstGeom prst="rect">
-            <a:avLst/>
-          </a:prstGeom>
-          <a:noFill/>
-        </p:spPr>
-        <p:txBody>
-          <a:bodyPr wrap="square" anchor="t" lIns="45720" rIns="45720" tIns="27432" bIns="27432">
-            <a:spAutoFit/>
-          </a:bodyPr>
-          <a:lstStyle/>
-          <a:p>
-            <a:pPr algn="l"/>
-            <a:r>
-              <a:rPr sz="1800" b="1" i="0">
-                <a:solidFill>
-                  <a:srgbClr val="333333"/>
-                </a:solidFill>
-                <a:latin typeface="Calibri"/>
-              </a:rPr>
-              <a:t>Implantar a gestão à vista</a:t>
-            </a:r>
-          </a:p>
-        </p:txBody>
-      </p:sp>
-      <p:sp>
-        <p:nvSpPr>
-          <p:cNvPr id="23" name="TextBox 22"/>
-          <p:cNvSpPr txBox="1"/>
-          <p:nvPr/>
-        </p:nvSpPr>
-        <p:spPr>
-          <a:xfrm>
-            <a:off x="4535424" y="3246120"/>
-            <a:ext cx="3118104" cy="1737360"/>
-          </a:xfrm>
-          <a:prstGeom prst="rect">
-            <a:avLst/>
-          </a:prstGeom>
-          <a:noFill/>
-        </p:spPr>
-        <p:txBody>
-          <a:bodyPr wrap="square" anchor="t" lIns="45720" rIns="45720" tIns="27432" bIns="27432">
-            <a:spAutoFit/>
-          </a:bodyPr>
-          <a:lstStyle/>
-          <a:p>
-            <a:pPr algn="l"/>
-            <a:r>
-              <a:rPr sz="1400" b="0" i="0">
-                <a:solidFill>
-                  <a:srgbClr val="333333"/>
-                </a:solidFill>
-                <a:latin typeface="Calibri"/>
-              </a:rPr>
-              <a:t>Acompanhar SLA, risco alto e confirmação do fornecedor.</a:t>
-            </a:r>
-          </a:p>
-        </p:txBody>
-      </p:sp>
-      <p:sp>
-        <p:nvSpPr>
-          <p:cNvPr id="24" name="Rectangle 23"/>
-          <p:cNvSpPr/>
-          <p:nvPr/>
-        </p:nvSpPr>
-        <p:spPr>
-          <a:xfrm>
-            <a:off x="8156448" y="1828800"/>
-            <a:ext cx="3575304" cy="3291840"/>
-          </a:xfrm>
-          <a:prstGeom prst="rect">
-            <a:avLst/>
-          </a:prstGeom>
-          <a:solidFill>
-            <a:srgbClr val="F2F2F2"/>
-          </a:solidFill>
-          <a:ln>
-            <a:noFill/>
-          </a:ln>
-          <a:effectLst/>
-        </p:spPr>
-        <p:style>
-          <a:lnRef idx="1">
-            <a:schemeClr val="accent1"/>
-          </a:lnRef>
-          <a:fillRef idx="3">
-            <a:schemeClr val="accent1"/>
-          </a:fillRef>
-          <a:effectRef idx="2">
-            <a:schemeClr val="accent1"/>
-          </a:effectRef>
-          <a:fontRef idx="minor">
-            <a:schemeClr val="lt1"/>
-          </a:fontRef>
-        </p:style>
-        <p:txBody>
-          <a:bodyPr rtlCol="0" anchor="ctr"/>
-          <a:lstStyle/>
-          <a:p>
-            <a:pPr algn="ctr"/>
-          </a:p>
-        </p:txBody>
-      </p:sp>
-      <p:sp>
-        <p:nvSpPr>
-          <p:cNvPr id="25" name="Rectangle 24"/>
-          <p:cNvSpPr/>
-          <p:nvPr/>
-        </p:nvSpPr>
-        <p:spPr>
-          <a:xfrm>
-            <a:off x="8156448" y="1828800"/>
-            <a:ext cx="3575304" cy="54864"/>
+            <a:off x="10268712" y="1554480"/>
+            <a:ext cx="1371600" cy="320040"/>
           </a:xfrm>
           <a:prstGeom prst="rect">
             <a:avLst/>
@@ -14046,149 +13210,118 @@
       </p:sp>
       <p:sp>
         <p:nvSpPr>
-          <p:cNvPr id="26" name="Rectangle 25"/>
-          <p:cNvSpPr/>
-          <p:nvPr/>
-        </p:nvSpPr>
-        <p:spPr>
-          <a:xfrm>
-            <a:off x="8385048" y="2057400"/>
-            <a:ext cx="2194560" cy="292608"/>
-          </a:xfrm>
-          <a:prstGeom prst="rect">
-            <a:avLst/>
-          </a:prstGeom>
-          <a:solidFill>
-            <a:srgbClr val="F2A900"/>
-          </a:solidFill>
-          <a:ln>
-            <a:noFill/>
-          </a:ln>
-          <a:effectLst/>
-        </p:spPr>
-        <p:style>
-          <a:lnRef idx="1">
-            <a:schemeClr val="accent1"/>
-          </a:lnRef>
-          <a:fillRef idx="3">
-            <a:schemeClr val="accent1"/>
-          </a:fillRef>
-          <a:effectRef idx="2">
-            <a:schemeClr val="accent1"/>
-          </a:effectRef>
-          <a:fontRef idx="minor">
-            <a:schemeClr val="lt1"/>
-          </a:fontRef>
-        </p:style>
-        <p:txBody>
-          <a:bodyPr rtlCol="0" anchor="ctr"/>
+          <p:cNvPr id="21" name="TextBox 20"/>
+          <p:cNvSpPr txBox="1"/>
+          <p:nvPr/>
+        </p:nvSpPr>
+        <p:spPr>
+          <a:xfrm>
+            <a:off x="10268712" y="1554480"/>
+            <a:ext cx="1371600" cy="320040"/>
+          </a:xfrm>
+          <a:prstGeom prst="rect">
+            <a:avLst/>
+          </a:prstGeom>
+          <a:noFill/>
+        </p:spPr>
+        <p:txBody>
+          <a:bodyPr wrap="square" anchor="ctr" lIns="45720" rIns="45720" tIns="27432" bIns="27432">
+            <a:spAutoFit/>
+          </a:bodyPr>
           <a:lstStyle/>
           <a:p>
             <a:pPr algn="ctr"/>
-          </a:p>
-        </p:txBody>
-      </p:sp>
-      <p:sp>
-        <p:nvSpPr>
-          <p:cNvPr id="27" name="TextBox 26"/>
-          <p:cNvSpPr txBox="1"/>
-          <p:nvPr/>
-        </p:nvSpPr>
-        <p:spPr>
-          <a:xfrm>
-            <a:off x="8385048" y="2057400"/>
-            <a:ext cx="2194560" cy="292608"/>
-          </a:xfrm>
-          <a:prstGeom prst="rect">
-            <a:avLst/>
-          </a:prstGeom>
-          <a:noFill/>
-        </p:spPr>
-        <p:txBody>
-          <a:bodyPr wrap="square" anchor="ctr" lIns="45720" rIns="45720" tIns="27432" bIns="27432">
-            <a:spAutoFit/>
-          </a:bodyPr>
-          <a:lstStyle/>
-          <a:p>
-            <a:pPr algn="ctr"/>
-            <a:r>
-              <a:rPr sz="900" b="1" i="0">
+            <a:r>
+              <a:rPr sz="1000" b="1" i="0">
                 <a:solidFill>
                   <a:srgbClr val="FFFFFF"/>
                 </a:solidFill>
                 <a:latin typeface="Calibri"/>
               </a:rPr>
-              <a:t>APÓS 30 DIAS</a:t>
-            </a:r>
-          </a:p>
-        </p:txBody>
-      </p:sp>
-      <p:sp>
-        <p:nvSpPr>
-          <p:cNvPr id="28" name="TextBox 27"/>
-          <p:cNvSpPr txBox="1"/>
-          <p:nvPr/>
-        </p:nvSpPr>
-        <p:spPr>
-          <a:xfrm>
-            <a:off x="8385048" y="2560320"/>
-            <a:ext cx="3118104" cy="685800"/>
-          </a:xfrm>
-          <a:prstGeom prst="rect">
-            <a:avLst/>
-          </a:prstGeom>
-          <a:noFill/>
-        </p:spPr>
-        <p:txBody>
-          <a:bodyPr wrap="square" anchor="t" lIns="45720" rIns="45720" tIns="27432" bIns="27432">
-            <a:spAutoFit/>
-          </a:bodyPr>
-          <a:lstStyle/>
-          <a:p>
-            <a:pPr algn="l"/>
-            <a:r>
-              <a:rPr sz="1800" b="1" i="0">
+              <a:t>Recomendada</a:t>
+            </a:r>
+          </a:p>
+        </p:txBody>
+      </p:sp>
+      <p:sp>
+        <p:nvSpPr>
+          <p:cNvPr id="22" name="TextBox 21"/>
+          <p:cNvSpPr txBox="1"/>
+          <p:nvPr/>
+        </p:nvSpPr>
+        <p:spPr>
+          <a:xfrm>
+            <a:off x="8293608" y="2560320"/>
+            <a:ext cx="3300984" cy="3383280"/>
+          </a:xfrm>
+          <a:prstGeom prst="rect">
+            <a:avLst/>
+          </a:prstGeom>
+          <a:noFill/>
+        </p:spPr>
+        <p:txBody>
+          <a:bodyPr wrap="square" lIns="45720" rIns="45720">
+            <a:spAutoFit/>
+          </a:bodyPr>
+          <a:lstStyle/>
+          <a:p>
+            <a:pPr marL="228600" indent="-228600">
+              <a:spcAft>
+                <a:spcPts val="800"/>
+              </a:spcAft>
+              <a:buClr>
+                <a:srgbClr val="1F3A5F"/>
+              </a:buClr>
+              <a:buChar char="•"/>
+            </a:pPr>
+            <a:r>
+              <a:rPr sz="1500" b="0" i="0">
                 <a:solidFill>
                   <a:srgbClr val="333333"/>
                 </a:solidFill>
                 <a:latin typeface="Calibri"/>
               </a:rPr>
-              <a:t>Revisar causa e capacidade</a:t>
-            </a:r>
-          </a:p>
-        </p:txBody>
-      </p:sp>
-      <p:sp>
-        <p:nvSpPr>
-          <p:cNvPr id="29" name="TextBox 28"/>
-          <p:cNvSpPr txBox="1"/>
-          <p:nvPr/>
-        </p:nvSpPr>
-        <p:spPr>
-          <a:xfrm>
-            <a:off x="8385048" y="3246120"/>
-            <a:ext cx="3118104" cy="1737360"/>
-          </a:xfrm>
-          <a:prstGeom prst="rect">
-            <a:avLst/>
-          </a:prstGeom>
-          <a:noFill/>
-        </p:spPr>
-        <p:txBody>
-          <a:bodyPr wrap="square" anchor="t" lIns="45720" rIns="45720" tIns="27432" bIns="27432">
-            <a:spAutoFit/>
-          </a:bodyPr>
-          <a:lstStyle/>
-          <a:p>
-            <a:pPr algn="l"/>
-            <a:r>
-              <a:rPr sz="1400" b="0" i="0">
+              <a:t>Custo: R$ 2,4 mi</a:t>
+            </a:r>
+          </a:p>
+          <a:p>
+            <a:pPr marL="228600" indent="-228600">
+              <a:spcAft>
+                <a:spcPts val="800"/>
+              </a:spcAft>
+              <a:buClr>
+                <a:srgbClr val="1F3A5F"/>
+              </a:buClr>
+              <a:buChar char="•"/>
+            </a:pPr>
+            <a:r>
+              <a:rPr sz="1500" b="0" i="0">
                 <a:solidFill>
                   <a:srgbClr val="333333"/>
                 </a:solidFill>
                 <a:latin typeface="Calibri"/>
               </a:rPr>
-              <a:t>Comparar coortes, modalidades e carga por equipe.</a:t>
+              <a:t>Economia: R$ 1,45 mi/ano</a:t>
+            </a:r>
+          </a:p>
+          <a:p>
+            <a:pPr marL="228600" indent="-228600">
+              <a:spcAft>
+                <a:spcPts val="800"/>
+              </a:spcAft>
+              <a:buClr>
+                <a:srgbClr val="1F3A5F"/>
+              </a:buClr>
+              <a:buChar char="•"/>
+            </a:pPr>
+            <a:r>
+              <a:rPr sz="1500" b="0" i="0">
+                <a:solidFill>
+                  <a:srgbClr val="333333"/>
+                </a:solidFill>
+                <a:latin typeface="Calibri"/>
+              </a:rPr>
+              <a:t>Risco: 5 dias parada</a:t>
             </a:r>
           </a:p>
         </p:txBody>
@@ -14239,7 +13372,7 @@
                 </a:solidFill>
                 <a:latin typeface="Calibri"/>
               </a:rPr>
-              <a:t>Timeline com marcador de hoje e legenda</a:t>
+              <a:t>Takeaways numerados em três colunas</a:t>
             </a:r>
           </a:p>
         </p:txBody>
@@ -14344,7 +13477,7 @@
                 </a:solidFill>
                 <a:latin typeface="Calibri"/>
               </a:rPr>
-              <a:t>TIMELINE</a:t>
+              <a:t>LEITURA EXECUTIVA</a:t>
             </a:r>
           </a:p>
         </p:txBody>
@@ -14451,14 +13584,14 @@
         </p:nvSpPr>
         <p:spPr>
           <a:xfrm>
-            <a:off x="731520" y="3858768"/>
-            <a:ext cx="10698480" cy="54864"/>
+            <a:off x="457200" y="5349240"/>
+            <a:ext cx="11274552" cy="731520"/>
           </a:xfrm>
           <a:prstGeom prst="rect">
             <a:avLst/>
           </a:prstGeom>
           <a:solidFill>
-            <a:srgbClr val="8C8C8C"/>
+            <a:srgbClr val="F2F2F2"/>
           </a:solidFill>
           <a:ln>
             <a:noFill/>
@@ -14489,25 +13622,23 @@
       </p:sp>
       <p:sp>
         <p:nvSpPr>
-          <p:cNvPr id="10" name="Oval 9"/>
+          <p:cNvPr id="10" name="Rectangle 9"/>
           <p:cNvSpPr/>
           <p:nvPr/>
         </p:nvSpPr>
         <p:spPr>
           <a:xfrm>
-            <a:off x="1005840" y="3703320"/>
-            <a:ext cx="365760" cy="365760"/>
-          </a:xfrm>
-          <a:prstGeom prst="ellipse">
+            <a:off x="457200" y="5349240"/>
+            <a:ext cx="73152" cy="731520"/>
+          </a:xfrm>
+          <a:prstGeom prst="rect">
             <a:avLst/>
           </a:prstGeom>
           <a:solidFill>
-            <a:srgbClr val="2E7D32"/>
+            <a:srgbClr val="1F3A5F"/>
           </a:solidFill>
-          <a:ln w="19050">
-            <a:solidFill>
-              <a:srgbClr val="FFFFFF"/>
-            </a:solidFill>
+          <a:ln>
+            <a:noFill/>
           </a:ln>
           <a:effectLst/>
         </p:spPr>
@@ -14541,29 +13672,29 @@
         </p:nvSpPr>
         <p:spPr>
           <a:xfrm>
-            <a:off x="365760" y="2971800"/>
-            <a:ext cx="1645920" cy="365760"/>
-          </a:xfrm>
-          <a:prstGeom prst="rect">
-            <a:avLst/>
-          </a:prstGeom>
-          <a:noFill/>
-        </p:spPr>
-        <p:txBody>
-          <a:bodyPr wrap="square" anchor="b" lIns="45720" rIns="45720" tIns="27432" bIns="27432">
-            <a:spAutoFit/>
-          </a:bodyPr>
-          <a:lstStyle/>
-          <a:p>
-            <a:pPr algn="ctr"/>
-            <a:r>
-              <a:rPr sz="1300" b="0" i="0">
-                <a:solidFill>
-                  <a:srgbClr val="8C8C8C"/>
-                </a:solidFill>
-                <a:latin typeface="Calibri"/>
-              </a:rPr>
-              <a:t>Jun/26</a:t>
+            <a:off x="685800" y="5349240"/>
+            <a:ext cx="2103120" cy="731520"/>
+          </a:xfrm>
+          <a:prstGeom prst="rect">
+            <a:avLst/>
+          </a:prstGeom>
+          <a:noFill/>
+        </p:spPr>
+        <p:txBody>
+          <a:bodyPr wrap="square" anchor="ctr" lIns="45720" rIns="45720" tIns="27432" bIns="27432">
+            <a:spAutoFit/>
+          </a:bodyPr>
+          <a:lstStyle/>
+          <a:p>
+            <a:pPr algn="l"/>
+            <a:r>
+              <a:rPr sz="1000" b="1" i="0">
+                <a:solidFill>
+                  <a:srgbClr val="1F3A5F"/>
+                </a:solidFill>
+                <a:latin typeface="Calibri"/>
+              </a:rPr>
+              <a:t>PRINCÍPIO</a:t>
             </a:r>
           </a:p>
         </p:txBody>
@@ -14576,54 +13707,52 @@
         </p:nvSpPr>
         <p:spPr>
           <a:xfrm>
-            <a:off x="365760" y="4206240"/>
-            <a:ext cx="1645920" cy="1097280"/>
-          </a:xfrm>
-          <a:prstGeom prst="rect">
-            <a:avLst/>
-          </a:prstGeom>
-          <a:noFill/>
-        </p:spPr>
-        <p:txBody>
-          <a:bodyPr wrap="square" anchor="t" lIns="45720" rIns="45720" tIns="27432" bIns="27432">
-            <a:spAutoFit/>
-          </a:bodyPr>
-          <a:lstStyle/>
-          <a:p>
-            <a:pPr algn="ctr"/>
-            <a:r>
-              <a:rPr sz="1300" b="0" i="0">
+            <a:off x="2788920" y="5349240"/>
+            <a:ext cx="8759952" cy="731520"/>
+          </a:xfrm>
+          <a:prstGeom prst="rect">
+            <a:avLst/>
+          </a:prstGeom>
+          <a:noFill/>
+        </p:spPr>
+        <p:txBody>
+          <a:bodyPr wrap="square" anchor="ctr" lIns="45720" rIns="45720" tIns="27432" bIns="27432">
+            <a:spAutoFit/>
+          </a:bodyPr>
+          <a:lstStyle/>
+          <a:p>
+            <a:pPr algn="l"/>
+            <a:r>
+              <a:rPr sz="1400" b="1" i="0">
                 <a:solidFill>
                   <a:srgbClr val="333333"/>
                 </a:solidFill>
                 <a:latin typeface="Calibri"/>
               </a:rPr>
-              <a:t>Kickoff</a:t>
-            </a:r>
-          </a:p>
-        </p:txBody>
-      </p:sp>
-      <p:sp>
-        <p:nvSpPr>
-          <p:cNvPr id="13" name="Oval 12"/>
+              <a:t>Nenhuma iniciativa avança sem responder claramente aos três filtros.</a:t>
+            </a:r>
+          </a:p>
+        </p:txBody>
+      </p:sp>
+      <p:sp>
+        <p:nvSpPr>
+          <p:cNvPr id="13" name="Rectangle 12"/>
           <p:cNvSpPr/>
           <p:nvPr/>
         </p:nvSpPr>
         <p:spPr>
           <a:xfrm>
-            <a:off x="3451859" y="3703320"/>
-            <a:ext cx="365760" cy="365760"/>
-          </a:xfrm>
-          <a:prstGeom prst="ellipse">
+            <a:off x="457200" y="1828800"/>
+            <a:ext cx="3575304" cy="3291840"/>
+          </a:xfrm>
+          <a:prstGeom prst="rect">
             <a:avLst/>
           </a:prstGeom>
           <a:solidFill>
-            <a:srgbClr val="2E7D32"/>
+            <a:srgbClr val="F2F2F2"/>
           </a:solidFill>
-          <a:ln w="19050">
-            <a:solidFill>
-              <a:srgbClr val="FFFFFF"/>
-            </a:solidFill>
+          <a:ln>
+            <a:noFill/>
           </a:ln>
           <a:effectLst/>
         </p:spPr>
@@ -14651,95 +13780,23 @@
       </p:sp>
       <p:sp>
         <p:nvSpPr>
-          <p:cNvPr id="14" name="TextBox 13"/>
-          <p:cNvSpPr txBox="1"/>
-          <p:nvPr/>
-        </p:nvSpPr>
-        <p:spPr>
-          <a:xfrm>
-            <a:off x="2811779" y="2971800"/>
-            <a:ext cx="1645920" cy="365760"/>
-          </a:xfrm>
-          <a:prstGeom prst="rect">
-            <a:avLst/>
-          </a:prstGeom>
-          <a:noFill/>
-        </p:spPr>
-        <p:txBody>
-          <a:bodyPr wrap="square" anchor="b" lIns="45720" rIns="45720" tIns="27432" bIns="27432">
-            <a:spAutoFit/>
-          </a:bodyPr>
-          <a:lstStyle/>
-          <a:p>
-            <a:pPr algn="ctr"/>
-            <a:r>
-              <a:rPr sz="1300" b="0" i="0">
-                <a:solidFill>
-                  <a:srgbClr val="8C8C8C"/>
-                </a:solidFill>
-                <a:latin typeface="Calibri"/>
-              </a:rPr>
-              <a:t>Jul/26</a:t>
-            </a:r>
-          </a:p>
-        </p:txBody>
-      </p:sp>
-      <p:sp>
-        <p:nvSpPr>
-          <p:cNvPr id="15" name="TextBox 14"/>
-          <p:cNvSpPr txBox="1"/>
-          <p:nvPr/>
-        </p:nvSpPr>
-        <p:spPr>
-          <a:xfrm>
-            <a:off x="2811779" y="4206240"/>
-            <a:ext cx="1645920" cy="1097280"/>
-          </a:xfrm>
-          <a:prstGeom prst="rect">
-            <a:avLst/>
-          </a:prstGeom>
-          <a:noFill/>
-        </p:spPr>
-        <p:txBody>
-          <a:bodyPr wrap="square" anchor="t" lIns="45720" rIns="45720" tIns="27432" bIns="27432">
-            <a:spAutoFit/>
-          </a:bodyPr>
-          <a:lstStyle/>
-          <a:p>
-            <a:pPr algn="ctr"/>
-            <a:r>
-              <a:rPr sz="1300" b="0" i="0">
-                <a:solidFill>
-                  <a:srgbClr val="333333"/>
-                </a:solidFill>
-                <a:latin typeface="Calibri"/>
-              </a:rPr>
-              <a:t>Design aprovado</a:t>
-            </a:r>
-          </a:p>
-        </p:txBody>
-      </p:sp>
-      <p:sp>
-        <p:nvSpPr>
-          <p:cNvPr id="16" name="Oval 15"/>
+          <p:cNvPr id="14" name="Rectangle 13"/>
           <p:cNvSpPr/>
           <p:nvPr/>
         </p:nvSpPr>
         <p:spPr>
           <a:xfrm>
-            <a:off x="5897879" y="3703320"/>
-            <a:ext cx="365760" cy="365760"/>
-          </a:xfrm>
-          <a:prstGeom prst="ellipse">
+            <a:off x="457200" y="1828800"/>
+            <a:ext cx="3575304" cy="54864"/>
+          </a:xfrm>
+          <a:prstGeom prst="rect">
             <a:avLst/>
           </a:prstGeom>
           <a:solidFill>
-            <a:srgbClr val="F9A825"/>
+            <a:srgbClr val="1F3A5F"/>
           </a:solidFill>
-          <a:ln w="19050">
-            <a:solidFill>
-              <a:srgbClr val="FFFFFF"/>
-            </a:solidFill>
+          <a:ln>
+            <a:noFill/>
           </a:ln>
           <a:effectLst/>
         </p:spPr>
@@ -14767,49 +13824,84 @@
       </p:sp>
       <p:sp>
         <p:nvSpPr>
+          <p:cNvPr id="15" name="TextBox 14"/>
+          <p:cNvSpPr txBox="1"/>
+          <p:nvPr/>
+        </p:nvSpPr>
+        <p:spPr>
+          <a:xfrm>
+            <a:off x="685800" y="2011680"/>
+            <a:ext cx="1371600" cy="457200"/>
+          </a:xfrm>
+          <a:prstGeom prst="rect">
+            <a:avLst/>
+          </a:prstGeom>
+          <a:noFill/>
+        </p:spPr>
+        <p:txBody>
+          <a:bodyPr wrap="square" anchor="t" lIns="45720" rIns="45720" tIns="27432" bIns="27432">
+            <a:spAutoFit/>
+          </a:bodyPr>
+          <a:lstStyle/>
+          <a:p>
+            <a:pPr algn="l"/>
+            <a:r>
+              <a:rPr sz="2200" b="1" i="0">
+                <a:solidFill>
+                  <a:srgbClr val="1F3A5F"/>
+                </a:solidFill>
+                <a:latin typeface="Calibri"/>
+              </a:rPr>
+              <a:t>01</a:t>
+            </a:r>
+          </a:p>
+        </p:txBody>
+      </p:sp>
+      <p:sp>
+        <p:nvSpPr>
+          <p:cNvPr id="16" name="TextBox 15"/>
+          <p:cNvSpPr txBox="1"/>
+          <p:nvPr/>
+        </p:nvSpPr>
+        <p:spPr>
+          <a:xfrm>
+            <a:off x="685800" y="2560320"/>
+            <a:ext cx="3118104" cy="685800"/>
+          </a:xfrm>
+          <a:prstGeom prst="rect">
+            <a:avLst/>
+          </a:prstGeom>
+          <a:noFill/>
+        </p:spPr>
+        <p:txBody>
+          <a:bodyPr wrap="square" anchor="t" lIns="45720" rIns="45720" tIns="27432" bIns="27432">
+            <a:spAutoFit/>
+          </a:bodyPr>
+          <a:lstStyle/>
+          <a:p>
+            <a:pPr algn="l"/>
+            <a:r>
+              <a:rPr sz="1800" b="1" i="0">
+                <a:solidFill>
+                  <a:srgbClr val="333333"/>
+                </a:solidFill>
+                <a:latin typeface="Calibri"/>
+              </a:rPr>
+              <a:t>Execução</a:t>
+            </a:r>
+          </a:p>
+        </p:txBody>
+      </p:sp>
+      <p:sp>
+        <p:nvSpPr>
           <p:cNvPr id="17" name="TextBox 16"/>
           <p:cNvSpPr txBox="1"/>
           <p:nvPr/>
         </p:nvSpPr>
         <p:spPr>
           <a:xfrm>
-            <a:off x="5257799" y="2971800"/>
-            <a:ext cx="1645920" cy="365760"/>
-          </a:xfrm>
-          <a:prstGeom prst="rect">
-            <a:avLst/>
-          </a:prstGeom>
-          <a:noFill/>
-        </p:spPr>
-        <p:txBody>
-          <a:bodyPr wrap="square" anchor="b" lIns="45720" rIns="45720" tIns="27432" bIns="27432">
-            <a:spAutoFit/>
-          </a:bodyPr>
-          <a:lstStyle/>
-          <a:p>
-            <a:pPr algn="ctr"/>
-            <a:r>
-              <a:rPr sz="1300" b="0" i="0">
-                <a:solidFill>
-                  <a:srgbClr val="8C8C8C"/>
-                </a:solidFill>
-                <a:latin typeface="Calibri"/>
-              </a:rPr>
-              <a:t>Set/26</a:t>
-            </a:r>
-          </a:p>
-        </p:txBody>
-      </p:sp>
-      <p:sp>
-        <p:nvSpPr>
-          <p:cNvPr id="18" name="TextBox 17"/>
-          <p:cNvSpPr txBox="1"/>
-          <p:nvPr/>
-        </p:nvSpPr>
-        <p:spPr>
-          <a:xfrm>
-            <a:off x="5257799" y="4206240"/>
-            <a:ext cx="1645920" cy="1097280"/>
+            <a:off x="685800" y="3246120"/>
+            <a:ext cx="3118104" cy="1737360"/>
           </a:xfrm>
           <a:prstGeom prst="rect">
             <a:avLst/>
@@ -14822,40 +13914,38 @@
           </a:bodyPr>
           <a:lstStyle/>
           <a:p>
-            <a:pPr algn="ctr"/>
-            <a:r>
-              <a:rPr sz="1300" b="0" i="0">
+            <a:pPr algn="l"/>
+            <a:r>
+              <a:rPr sz="1400" b="0" i="0">
                 <a:solidFill>
                   <a:srgbClr val="333333"/>
                 </a:solidFill>
                 <a:latin typeface="Calibri"/>
               </a:rPr>
-              <a:t>Homologação</a:t>
-            </a:r>
-          </a:p>
-        </p:txBody>
-      </p:sp>
-      <p:sp>
-        <p:nvSpPr>
-          <p:cNvPr id="19" name="Oval 18"/>
+              <a:t>A base contém 200 ensaios, dos quais 40 têm data até o corte.</a:t>
+            </a:r>
+          </a:p>
+        </p:txBody>
+      </p:sp>
+      <p:sp>
+        <p:nvSpPr>
+          <p:cNvPr id="18" name="Rectangle 17"/>
           <p:cNvSpPr/>
           <p:nvPr/>
         </p:nvSpPr>
         <p:spPr>
           <a:xfrm>
-            <a:off x="8343900" y="3703320"/>
-            <a:ext cx="365760" cy="365760"/>
-          </a:xfrm>
-          <a:prstGeom prst="ellipse">
+            <a:off x="4306824" y="1828800"/>
+            <a:ext cx="3575304" cy="3291840"/>
+          </a:xfrm>
+          <a:prstGeom prst="rect">
             <a:avLst/>
           </a:prstGeom>
           <a:solidFill>
-            <a:srgbClr val="C62828"/>
+            <a:srgbClr val="F2F2F2"/>
           </a:solidFill>
-          <a:ln w="19050">
-            <a:solidFill>
-              <a:srgbClr val="FFFFFF"/>
-            </a:solidFill>
+          <a:ln>
+            <a:noFill/>
           </a:ln>
           <a:effectLst/>
         </p:spPr>
@@ -14883,95 +13973,23 @@
       </p:sp>
       <p:sp>
         <p:nvSpPr>
-          <p:cNvPr id="20" name="TextBox 19"/>
-          <p:cNvSpPr txBox="1"/>
-          <p:nvPr/>
-        </p:nvSpPr>
-        <p:spPr>
-          <a:xfrm>
-            <a:off x="7703819" y="2971800"/>
-            <a:ext cx="1645920" cy="365760"/>
-          </a:xfrm>
-          <a:prstGeom prst="rect">
-            <a:avLst/>
-          </a:prstGeom>
-          <a:noFill/>
-        </p:spPr>
-        <p:txBody>
-          <a:bodyPr wrap="square" anchor="b" lIns="45720" rIns="45720" tIns="27432" bIns="27432">
-            <a:spAutoFit/>
-          </a:bodyPr>
-          <a:lstStyle/>
-          <a:p>
-            <a:pPr algn="ctr"/>
-            <a:r>
-              <a:rPr sz="1300" b="0" i="0">
-                <a:solidFill>
-                  <a:srgbClr val="8C8C8C"/>
-                </a:solidFill>
-                <a:latin typeface="Calibri"/>
-              </a:rPr>
-              <a:t>Out/26</a:t>
-            </a:r>
-          </a:p>
-        </p:txBody>
-      </p:sp>
-      <p:sp>
-        <p:nvSpPr>
-          <p:cNvPr id="21" name="TextBox 20"/>
-          <p:cNvSpPr txBox="1"/>
-          <p:nvPr/>
-        </p:nvSpPr>
-        <p:spPr>
-          <a:xfrm>
-            <a:off x="7703819" y="4206240"/>
-            <a:ext cx="1645920" cy="1097280"/>
-          </a:xfrm>
-          <a:prstGeom prst="rect">
-            <a:avLst/>
-          </a:prstGeom>
-          <a:noFill/>
-        </p:spPr>
-        <p:txBody>
-          <a:bodyPr wrap="square" anchor="t" lIns="45720" rIns="45720" tIns="27432" bIns="27432">
-            <a:spAutoFit/>
-          </a:bodyPr>
-          <a:lstStyle/>
-          <a:p>
-            <a:pPr algn="ctr"/>
-            <a:r>
-              <a:rPr sz="1300" b="0" i="0">
-                <a:solidFill>
-                  <a:srgbClr val="333333"/>
-                </a:solidFill>
-                <a:latin typeface="Calibri"/>
-              </a:rPr>
-              <a:t>Testes</a:t>
-            </a:r>
-          </a:p>
-        </p:txBody>
-      </p:sp>
-      <p:sp>
-        <p:nvSpPr>
-          <p:cNvPr id="22" name="Oval 21"/>
+          <p:cNvPr id="19" name="Rectangle 18"/>
           <p:cNvSpPr/>
           <p:nvPr/>
         </p:nvSpPr>
         <p:spPr>
           <a:xfrm>
-            <a:off x="10789920" y="3703320"/>
-            <a:ext cx="365760" cy="365760"/>
-          </a:xfrm>
-          <a:prstGeom prst="ellipse">
+            <a:off x="4306824" y="1828800"/>
+            <a:ext cx="3575304" cy="54864"/>
+          </a:xfrm>
+          <a:prstGeom prst="rect">
             <a:avLst/>
           </a:prstGeom>
           <a:solidFill>
-            <a:srgbClr val="1F3A5F"/>
+            <a:srgbClr val="4F81BD"/>
           </a:solidFill>
-          <a:ln w="19050">
-            <a:solidFill>
-              <a:srgbClr val="FFFFFF"/>
-            </a:solidFill>
+          <a:ln>
+            <a:noFill/>
           </a:ln>
           <a:effectLst/>
         </p:spPr>
@@ -14999,84 +14017,163 @@
       </p:sp>
       <p:sp>
         <p:nvSpPr>
-          <p:cNvPr id="23" name="TextBox 22"/>
-          <p:cNvSpPr txBox="1"/>
-          <p:nvPr/>
-        </p:nvSpPr>
-        <p:spPr>
-          <a:xfrm>
-            <a:off x="10149840" y="2971800"/>
-            <a:ext cx="1645920" cy="365760"/>
-          </a:xfrm>
-          <a:prstGeom prst="rect">
-            <a:avLst/>
-          </a:prstGeom>
-          <a:noFill/>
-        </p:spPr>
-        <p:txBody>
-          <a:bodyPr wrap="square" anchor="b" lIns="45720" rIns="45720" tIns="27432" bIns="27432">
-            <a:spAutoFit/>
-          </a:bodyPr>
+          <p:cNvPr id="20" name="TextBox 19"/>
+          <p:cNvSpPr txBox="1"/>
+          <p:nvPr/>
+        </p:nvSpPr>
+        <p:spPr>
+          <a:xfrm>
+            <a:off x="4535424" y="2011680"/>
+            <a:ext cx="1371600" cy="457200"/>
+          </a:xfrm>
+          <a:prstGeom prst="rect">
+            <a:avLst/>
+          </a:prstGeom>
+          <a:noFill/>
+        </p:spPr>
+        <p:txBody>
+          <a:bodyPr wrap="square" anchor="t" lIns="45720" rIns="45720" tIns="27432" bIns="27432">
+            <a:spAutoFit/>
+          </a:bodyPr>
+          <a:lstStyle/>
+          <a:p>
+            <a:pPr algn="l"/>
+            <a:r>
+              <a:rPr sz="2200" b="1" i="0">
+                <a:solidFill>
+                  <a:srgbClr val="4F81BD"/>
+                </a:solidFill>
+                <a:latin typeface="Calibri"/>
+              </a:rPr>
+              <a:t>02</a:t>
+            </a:r>
+          </a:p>
+        </p:txBody>
+      </p:sp>
+      <p:sp>
+        <p:nvSpPr>
+          <p:cNvPr id="21" name="TextBox 20"/>
+          <p:cNvSpPr txBox="1"/>
+          <p:nvPr/>
+        </p:nvSpPr>
+        <p:spPr>
+          <a:xfrm>
+            <a:off x="4535424" y="2560320"/>
+            <a:ext cx="3118104" cy="685800"/>
+          </a:xfrm>
+          <a:prstGeom prst="rect">
+            <a:avLst/>
+          </a:prstGeom>
+          <a:noFill/>
+        </p:spPr>
+        <p:txBody>
+          <a:bodyPr wrap="square" anchor="t" lIns="45720" rIns="45720" tIns="27432" bIns="27432">
+            <a:spAutoFit/>
+          </a:bodyPr>
+          <a:lstStyle/>
+          <a:p>
+            <a:pPr algn="l"/>
+            <a:r>
+              <a:rPr sz="1800" b="1" i="0">
+                <a:solidFill>
+                  <a:srgbClr val="333333"/>
+                </a:solidFill>
+                <a:latin typeface="Calibri"/>
+              </a:rPr>
+              <a:t>Qualidade</a:t>
+            </a:r>
+          </a:p>
+        </p:txBody>
+      </p:sp>
+      <p:sp>
+        <p:nvSpPr>
+          <p:cNvPr id="22" name="TextBox 21"/>
+          <p:cNvSpPr txBox="1"/>
+          <p:nvPr/>
+        </p:nvSpPr>
+        <p:spPr>
+          <a:xfrm>
+            <a:off x="4535424" y="3246120"/>
+            <a:ext cx="3118104" cy="1737360"/>
+          </a:xfrm>
+          <a:prstGeom prst="rect">
+            <a:avLst/>
+          </a:prstGeom>
+          <a:noFill/>
+        </p:spPr>
+        <p:txBody>
+          <a:bodyPr wrap="square" anchor="t" lIns="45720" rIns="45720" tIns="27432" bIns="27432">
+            <a:spAutoFit/>
+          </a:bodyPr>
+          <a:lstStyle/>
+          <a:p>
+            <a:pPr algn="l"/>
+            <a:r>
+              <a:rPr sz="1400" b="0" i="0">
+                <a:solidFill>
+                  <a:srgbClr val="333333"/>
+                </a:solidFill>
+                <a:latin typeface="Calibri"/>
+              </a:rPr>
+              <a:t>19 resultados ficaram abaixo da meta, 47,5% do realizado.</a:t>
+            </a:r>
+          </a:p>
+        </p:txBody>
+      </p:sp>
+      <p:sp>
+        <p:nvSpPr>
+          <p:cNvPr id="23" name="Rectangle 22"/>
+          <p:cNvSpPr/>
+          <p:nvPr/>
+        </p:nvSpPr>
+        <p:spPr>
+          <a:xfrm>
+            <a:off x="8156448" y="1828800"/>
+            <a:ext cx="3575304" cy="3291840"/>
+          </a:xfrm>
+          <a:prstGeom prst="rect">
+            <a:avLst/>
+          </a:prstGeom>
+          <a:solidFill>
+            <a:srgbClr val="F2F2F2"/>
+          </a:solidFill>
+          <a:ln>
+            <a:noFill/>
+          </a:ln>
+          <a:effectLst/>
+        </p:spPr>
+        <p:style>
+          <a:lnRef idx="1">
+            <a:schemeClr val="accent1"/>
+          </a:lnRef>
+          <a:fillRef idx="3">
+            <a:schemeClr val="accent1"/>
+          </a:fillRef>
+          <a:effectRef idx="2">
+            <a:schemeClr val="accent1"/>
+          </a:effectRef>
+          <a:fontRef idx="minor">
+            <a:schemeClr val="lt1"/>
+          </a:fontRef>
+        </p:style>
+        <p:txBody>
+          <a:bodyPr rtlCol="0" anchor="ctr"/>
           <a:lstStyle/>
           <a:p>
             <a:pPr algn="ctr"/>
-            <a:r>
-              <a:rPr sz="1300" b="0" i="0">
-                <a:solidFill>
-                  <a:srgbClr val="8C8C8C"/>
-                </a:solidFill>
-                <a:latin typeface="Calibri"/>
-              </a:rPr>
-              <a:t>Nov/26</a:t>
-            </a:r>
-          </a:p>
-        </p:txBody>
-      </p:sp>
-      <p:sp>
-        <p:nvSpPr>
-          <p:cNvPr id="24" name="TextBox 23"/>
-          <p:cNvSpPr txBox="1"/>
-          <p:nvPr/>
-        </p:nvSpPr>
-        <p:spPr>
-          <a:xfrm>
-            <a:off x="10149840" y="4206240"/>
-            <a:ext cx="1645920" cy="1097280"/>
-          </a:xfrm>
-          <a:prstGeom prst="rect">
-            <a:avLst/>
-          </a:prstGeom>
-          <a:noFill/>
-        </p:spPr>
-        <p:txBody>
-          <a:bodyPr wrap="square" anchor="t" lIns="45720" rIns="45720" tIns="27432" bIns="27432">
-            <a:spAutoFit/>
-          </a:bodyPr>
-          <a:lstStyle/>
-          <a:p>
-            <a:pPr algn="ctr"/>
-            <a:r>
-              <a:rPr sz="1300" b="0" i="0">
-                <a:solidFill>
-                  <a:srgbClr val="333333"/>
-                </a:solidFill>
-                <a:latin typeface="Calibri"/>
-              </a:rPr>
-              <a:t>Go-live</a:t>
-            </a:r>
-          </a:p>
-        </p:txBody>
-      </p:sp>
-      <p:sp>
-        <p:nvSpPr>
-          <p:cNvPr id="25" name="Rectangle 24"/>
+          </a:p>
+        </p:txBody>
+      </p:sp>
+      <p:sp>
+        <p:nvSpPr>
+          <p:cNvPr id="24" name="Rectangle 23"/>
           <p:cNvSpPr/>
           <p:nvPr/>
         </p:nvSpPr>
         <p:spPr>
           <a:xfrm>
-            <a:off x="7303769" y="3246120"/>
-            <a:ext cx="27432" cy="1280160"/>
+            <a:off x="8156448" y="1828800"/>
+            <a:ext cx="3575304" cy="54864"/>
           </a:xfrm>
           <a:prstGeom prst="rect">
             <a:avLst/>
@@ -15113,14 +14210,49 @@
       </p:sp>
       <p:sp>
         <p:nvSpPr>
+          <p:cNvPr id="25" name="TextBox 24"/>
+          <p:cNvSpPr txBox="1"/>
+          <p:nvPr/>
+        </p:nvSpPr>
+        <p:spPr>
+          <a:xfrm>
+            <a:off x="8385048" y="2011680"/>
+            <a:ext cx="1371600" cy="457200"/>
+          </a:xfrm>
+          <a:prstGeom prst="rect">
+            <a:avLst/>
+          </a:prstGeom>
+          <a:noFill/>
+        </p:spPr>
+        <p:txBody>
+          <a:bodyPr wrap="square" anchor="t" lIns="45720" rIns="45720" tIns="27432" bIns="27432">
+            <a:spAutoFit/>
+          </a:bodyPr>
+          <a:lstStyle/>
+          <a:p>
+            <a:pPr algn="l"/>
+            <a:r>
+              <a:rPr sz="2200" b="1" i="0">
+                <a:solidFill>
+                  <a:srgbClr val="F2A900"/>
+                </a:solidFill>
+                <a:latin typeface="Calibri"/>
+              </a:rPr>
+              <a:t>03</a:t>
+            </a:r>
+          </a:p>
+        </p:txBody>
+      </p:sp>
+      <p:sp>
+        <p:nvSpPr>
           <p:cNvPr id="26" name="TextBox 25"/>
           <p:cNvSpPr txBox="1"/>
           <p:nvPr/>
         </p:nvSpPr>
         <p:spPr>
           <a:xfrm>
-            <a:off x="6846569" y="2926080"/>
-            <a:ext cx="914400" cy="274320"/>
+            <a:off x="8385048" y="2560320"/>
+            <a:ext cx="3118104" cy="685800"/>
           </a:xfrm>
           <a:prstGeom prst="rect">
             <a:avLst/>
@@ -15133,331 +14265,50 @@
           </a:bodyPr>
           <a:lstStyle/>
           <a:p>
-            <a:pPr algn="ctr"/>
-            <a:r>
-              <a:rPr sz="1100" b="1" i="0">
-                <a:solidFill>
-                  <a:srgbClr val="F2A900"/>
-                </a:solidFill>
-                <a:latin typeface="Calibri"/>
-              </a:rPr>
-              <a:t>Hoje</a:t>
-            </a:r>
-          </a:p>
-        </p:txBody>
-      </p:sp>
-      <p:sp>
-        <p:nvSpPr>
-          <p:cNvPr id="27" name="Oval 26"/>
-          <p:cNvSpPr/>
-          <p:nvPr/>
-        </p:nvSpPr>
-        <p:spPr>
-          <a:xfrm>
-            <a:off x="457200" y="5852160"/>
-            <a:ext cx="182880" cy="182880"/>
-          </a:xfrm>
-          <a:prstGeom prst="ellipse">
-            <a:avLst/>
-          </a:prstGeom>
-          <a:solidFill>
-            <a:srgbClr val="2E7D32"/>
-          </a:solidFill>
-          <a:ln>
-            <a:noFill/>
-          </a:ln>
-          <a:effectLst/>
-        </p:spPr>
-        <p:style>
-          <a:lnRef idx="1">
-            <a:schemeClr val="accent1"/>
-          </a:lnRef>
-          <a:fillRef idx="3">
-            <a:schemeClr val="accent1"/>
-          </a:fillRef>
-          <a:effectRef idx="2">
-            <a:schemeClr val="accent1"/>
-          </a:effectRef>
-          <a:fontRef idx="minor">
-            <a:schemeClr val="lt1"/>
-          </a:fontRef>
-        </p:style>
-        <p:txBody>
-          <a:bodyPr rtlCol="0" anchor="ctr"/>
-          <a:lstStyle/>
-          <a:p>
-            <a:pPr algn="ctr"/>
-          </a:p>
-        </p:txBody>
-      </p:sp>
-      <p:sp>
-        <p:nvSpPr>
-          <p:cNvPr id="28" name="TextBox 27"/>
-          <p:cNvSpPr txBox="1"/>
-          <p:nvPr/>
-        </p:nvSpPr>
-        <p:spPr>
-          <a:xfrm>
-            <a:off x="685800" y="5806440"/>
-            <a:ext cx="1371600" cy="274320"/>
-          </a:xfrm>
-          <a:prstGeom prst="rect">
-            <a:avLst/>
-          </a:prstGeom>
-          <a:noFill/>
-        </p:spPr>
-        <p:txBody>
-          <a:bodyPr wrap="square" anchor="ctr" lIns="45720" rIns="45720" tIns="27432" bIns="27432">
-            <a:spAutoFit/>
-          </a:bodyPr>
-          <a:lstStyle/>
-          <a:p>
             <a:pPr algn="l"/>
             <a:r>
-              <a:rPr sz="1100" b="0" i="0">
-                <a:solidFill>
-                  <a:srgbClr val="8C8C8C"/>
-                </a:solidFill>
-                <a:latin typeface="Calibri"/>
-              </a:rPr>
-              <a:t>Concluído</a:t>
-            </a:r>
-          </a:p>
-        </p:txBody>
-      </p:sp>
-      <p:sp>
-        <p:nvSpPr>
-          <p:cNvPr id="29" name="Oval 28"/>
-          <p:cNvSpPr/>
-          <p:nvPr/>
-        </p:nvSpPr>
-        <p:spPr>
-          <a:xfrm>
-            <a:off x="2011680" y="5852160"/>
-            <a:ext cx="182880" cy="182880"/>
-          </a:xfrm>
-          <a:prstGeom prst="ellipse">
-            <a:avLst/>
-          </a:prstGeom>
-          <a:solidFill>
-            <a:srgbClr val="F9A825"/>
-          </a:solidFill>
-          <a:ln>
-            <a:noFill/>
-          </a:ln>
-          <a:effectLst/>
-        </p:spPr>
-        <p:style>
-          <a:lnRef idx="1">
-            <a:schemeClr val="accent1"/>
-          </a:lnRef>
-          <a:fillRef idx="3">
-            <a:schemeClr val="accent1"/>
-          </a:fillRef>
-          <a:effectRef idx="2">
-            <a:schemeClr val="accent1"/>
-          </a:effectRef>
-          <a:fontRef idx="minor">
-            <a:schemeClr val="lt1"/>
-          </a:fontRef>
-        </p:style>
-        <p:txBody>
-          <a:bodyPr rtlCol="0" anchor="ctr"/>
-          <a:lstStyle/>
-          <a:p>
-            <a:pPr algn="ctr"/>
-          </a:p>
-        </p:txBody>
-      </p:sp>
-      <p:sp>
-        <p:nvSpPr>
-          <p:cNvPr id="30" name="TextBox 29"/>
-          <p:cNvSpPr txBox="1"/>
-          <p:nvPr/>
-        </p:nvSpPr>
-        <p:spPr>
-          <a:xfrm>
-            <a:off x="2240280" y="5806440"/>
-            <a:ext cx="1371600" cy="274320"/>
-          </a:xfrm>
-          <a:prstGeom prst="rect">
-            <a:avLst/>
-          </a:prstGeom>
-          <a:noFill/>
-        </p:spPr>
-        <p:txBody>
-          <a:bodyPr wrap="square" anchor="ctr" lIns="45720" rIns="45720" tIns="27432" bIns="27432">
+              <a:rPr sz="1800" b="1" i="0">
+                <a:solidFill>
+                  <a:srgbClr val="333333"/>
+                </a:solidFill>
+                <a:latin typeface="Calibri"/>
+              </a:rPr>
+              <a:t>Governança</a:t>
+            </a:r>
+          </a:p>
+        </p:txBody>
+      </p:sp>
+      <p:sp>
+        <p:nvSpPr>
+          <p:cNvPr id="27" name="TextBox 26"/>
+          <p:cNvSpPr txBox="1"/>
+          <p:nvPr/>
+        </p:nvSpPr>
+        <p:spPr>
+          <a:xfrm>
+            <a:off x="8385048" y="3246120"/>
+            <a:ext cx="3118104" cy="1737360"/>
+          </a:xfrm>
+          <a:prstGeom prst="rect">
+            <a:avLst/>
+          </a:prstGeom>
+          <a:noFill/>
+        </p:spPr>
+        <p:txBody>
+          <a:bodyPr wrap="square" anchor="t" lIns="45720" rIns="45720" tIns="27432" bIns="27432">
             <a:spAutoFit/>
           </a:bodyPr>
           <a:lstStyle/>
           <a:p>
             <a:pPr algn="l"/>
             <a:r>
-              <a:rPr sz="1100" b="0" i="0">
-                <a:solidFill>
-                  <a:srgbClr val="8C8C8C"/>
-                </a:solidFill>
-                <a:latin typeface="Calibri"/>
-              </a:rPr>
-              <a:t>Em risco</a:t>
-            </a:r>
-          </a:p>
-        </p:txBody>
-      </p:sp>
-      <p:sp>
-        <p:nvSpPr>
-          <p:cNvPr id="31" name="Oval 30"/>
-          <p:cNvSpPr/>
-          <p:nvPr/>
-        </p:nvSpPr>
-        <p:spPr>
-          <a:xfrm>
-            <a:off x="3566160" y="5852160"/>
-            <a:ext cx="182880" cy="182880"/>
-          </a:xfrm>
-          <a:prstGeom prst="ellipse">
-            <a:avLst/>
-          </a:prstGeom>
-          <a:solidFill>
-            <a:srgbClr val="C62828"/>
-          </a:solidFill>
-          <a:ln>
-            <a:noFill/>
-          </a:ln>
-          <a:effectLst/>
-        </p:spPr>
-        <p:style>
-          <a:lnRef idx="1">
-            <a:schemeClr val="accent1"/>
-          </a:lnRef>
-          <a:fillRef idx="3">
-            <a:schemeClr val="accent1"/>
-          </a:fillRef>
-          <a:effectRef idx="2">
-            <a:schemeClr val="accent1"/>
-          </a:effectRef>
-          <a:fontRef idx="minor">
-            <a:schemeClr val="lt1"/>
-          </a:fontRef>
-        </p:style>
-        <p:txBody>
-          <a:bodyPr rtlCol="0" anchor="ctr"/>
-          <a:lstStyle/>
-          <a:p>
-            <a:pPr algn="ctr"/>
-          </a:p>
-        </p:txBody>
-      </p:sp>
-      <p:sp>
-        <p:nvSpPr>
-          <p:cNvPr id="32" name="TextBox 31"/>
-          <p:cNvSpPr txBox="1"/>
-          <p:nvPr/>
-        </p:nvSpPr>
-        <p:spPr>
-          <a:xfrm>
-            <a:off x="3794760" y="5806440"/>
-            <a:ext cx="1371600" cy="274320"/>
-          </a:xfrm>
-          <a:prstGeom prst="rect">
-            <a:avLst/>
-          </a:prstGeom>
-          <a:noFill/>
-        </p:spPr>
-        <p:txBody>
-          <a:bodyPr wrap="square" anchor="ctr" lIns="45720" rIns="45720" tIns="27432" bIns="27432">
-            <a:spAutoFit/>
-          </a:bodyPr>
-          <a:lstStyle/>
-          <a:p>
-            <a:pPr algn="l"/>
-            <a:r>
-              <a:rPr sz="1100" b="0" i="0">
-                <a:solidFill>
-                  <a:srgbClr val="8C8C8C"/>
-                </a:solidFill>
-                <a:latin typeface="Calibri"/>
-              </a:rPr>
-              <a:t>Atrasado</a:t>
-            </a:r>
-          </a:p>
-        </p:txBody>
-      </p:sp>
-      <p:sp>
-        <p:nvSpPr>
-          <p:cNvPr id="33" name="Oval 32"/>
-          <p:cNvSpPr/>
-          <p:nvPr/>
-        </p:nvSpPr>
-        <p:spPr>
-          <a:xfrm>
-            <a:off x="5120640" y="5852160"/>
-            <a:ext cx="182880" cy="182880"/>
-          </a:xfrm>
-          <a:prstGeom prst="ellipse">
-            <a:avLst/>
-          </a:prstGeom>
-          <a:solidFill>
-            <a:srgbClr val="1F3A5F"/>
-          </a:solidFill>
-          <a:ln>
-            <a:noFill/>
-          </a:ln>
-          <a:effectLst/>
-        </p:spPr>
-        <p:style>
-          <a:lnRef idx="1">
-            <a:schemeClr val="accent1"/>
-          </a:lnRef>
-          <a:fillRef idx="3">
-            <a:schemeClr val="accent1"/>
-          </a:fillRef>
-          <a:effectRef idx="2">
-            <a:schemeClr val="accent1"/>
-          </a:effectRef>
-          <a:fontRef idx="minor">
-            <a:schemeClr val="lt1"/>
-          </a:fontRef>
-        </p:style>
-        <p:txBody>
-          <a:bodyPr rtlCol="0" anchor="ctr"/>
-          <a:lstStyle/>
-          <a:p>
-            <a:pPr algn="ctr"/>
-          </a:p>
-        </p:txBody>
-      </p:sp>
-      <p:sp>
-        <p:nvSpPr>
-          <p:cNvPr id="34" name="TextBox 33"/>
-          <p:cNvSpPr txBox="1"/>
-          <p:nvPr/>
-        </p:nvSpPr>
-        <p:spPr>
-          <a:xfrm>
-            <a:off x="5349240" y="5806440"/>
-            <a:ext cx="1371600" cy="274320"/>
-          </a:xfrm>
-          <a:prstGeom prst="rect">
-            <a:avLst/>
-          </a:prstGeom>
-          <a:noFill/>
-        </p:spPr>
-        <p:txBody>
-          <a:bodyPr wrap="square" anchor="ctr" lIns="45720" rIns="45720" tIns="27432" bIns="27432">
-            <a:spAutoFit/>
-          </a:bodyPr>
-          <a:lstStyle/>
-          <a:p>
-            <a:pPr algn="l"/>
-            <a:r>
-              <a:rPr sz="1100" b="0" i="0">
-                <a:solidFill>
-                  <a:srgbClr val="8C8C8C"/>
-                </a:solidFill>
-                <a:latin typeface="Calibri"/>
-              </a:rPr>
-              <a:t>Planejado</a:t>
+              <a:rPr sz="1400" b="0" i="0">
+                <a:solidFill>
+                  <a:srgbClr val="333333"/>
+                </a:solidFill>
+                <a:latin typeface="Calibri"/>
+              </a:rPr>
+              <a:t>Quatro ensaios aguardam revisão, dois já aprovados tecnicamente.</a:t>
             </a:r>
           </a:p>
         </p:txBody>
@@ -15508,7 +14359,7 @@
                 </a:solidFill>
                 <a:latin typeface="Calibri"/>
               </a:rPr>
-              <a:t>Processo em chevrons com métrica por etapa e etapa atual destacada</a:t>
+              <a:t>Takeaways com tags de fase</a:t>
             </a:r>
           </a:p>
         </p:txBody>
@@ -15613,7 +14464,7 @@
                 </a:solidFill>
                 <a:latin typeface="Calibri"/>
               </a:rPr>
-              <a:t>FLUXO</a:t>
+              <a:t>PRÓXIMOS PASSOS</a:t>
             </a:r>
           </a:p>
         </p:txBody>
@@ -15727,7 +14578,7 @@
             <a:avLst/>
           </a:prstGeom>
           <a:solidFill>
-            <a:srgbClr val="EAF5EA"/>
+            <a:srgbClr val="14273F"/>
           </a:solidFill>
           <a:ln>
             <a:noFill/>
@@ -15758,20 +14609,90 @@
       </p:sp>
       <p:sp>
         <p:nvSpPr>
-          <p:cNvPr id="10" name="Rectangle 9"/>
+          <p:cNvPr id="10" name="TextBox 9"/>
+          <p:cNvSpPr txBox="1"/>
+          <p:nvPr/>
+        </p:nvSpPr>
+        <p:spPr>
+          <a:xfrm>
+            <a:off x="685800" y="5349240"/>
+            <a:ext cx="2103120" cy="731520"/>
+          </a:xfrm>
+          <a:prstGeom prst="rect">
+            <a:avLst/>
+          </a:prstGeom>
+          <a:noFill/>
+        </p:spPr>
+        <p:txBody>
+          <a:bodyPr wrap="square" anchor="ctr" lIns="45720" rIns="45720" tIns="27432" bIns="27432">
+            <a:spAutoFit/>
+          </a:bodyPr>
+          <a:lstStyle/>
+          <a:p>
+            <a:pPr algn="l"/>
+            <a:r>
+              <a:rPr sz="1000" b="1" i="0">
+                <a:solidFill>
+                  <a:srgbClr val="F2A900"/>
+                </a:solidFill>
+                <a:latin typeface="Calibri"/>
+              </a:rPr>
+              <a:t>DECISÃO ESPERADA</a:t>
+            </a:r>
+          </a:p>
+        </p:txBody>
+      </p:sp>
+      <p:sp>
+        <p:nvSpPr>
+          <p:cNvPr id="11" name="TextBox 10"/>
+          <p:cNvSpPr txBox="1"/>
+          <p:nvPr/>
+        </p:nvSpPr>
+        <p:spPr>
+          <a:xfrm>
+            <a:off x="2788920" y="5349240"/>
+            <a:ext cx="8759952" cy="731520"/>
+          </a:xfrm>
+          <a:prstGeom prst="rect">
+            <a:avLst/>
+          </a:prstGeom>
+          <a:noFill/>
+        </p:spPr>
+        <p:txBody>
+          <a:bodyPr wrap="square" anchor="ctr" lIns="45720" rIns="45720" tIns="27432" bIns="27432">
+            <a:spAutoFit/>
+          </a:bodyPr>
+          <a:lstStyle/>
+          <a:p>
+            <a:pPr algn="l"/>
+            <a:r>
+              <a:rPr sz="1400" b="1" i="0">
+                <a:solidFill>
+                  <a:srgbClr val="FFFFFF"/>
+                </a:solidFill>
+                <a:latin typeface="Calibri"/>
+              </a:rPr>
+              <a:t>Aprovar a rotina semanal e nomear os donos dos quatro controles.</a:t>
+            </a:r>
+          </a:p>
+        </p:txBody>
+      </p:sp>
+      <p:sp>
+        <p:nvSpPr>
+          <p:cNvPr id="12" name="Rectangle 11"/>
           <p:cNvSpPr/>
           <p:nvPr/>
         </p:nvSpPr>
         <p:spPr>
           <a:xfrm>
-            <a:off x="457200" y="5349240"/>
-            <a:ext cx="73152" cy="731520"/>
+            <a:off x="457200" y="1828800"/>
+            <a:ext cx="3575304" cy="3291840"/>
           </a:xfrm>
           <a:prstGeom prst="rect">
             <a:avLst/>
           </a:prstGeom>
           <a:solidFill>
-            <a:srgbClr val="2E7D32"/>
+            <a:srgbClr val="F2F2F2"/>
           </a:solidFill>
           <a:ln>
             <a:noFill/>
@@ -15802,86 +14723,16 @@
       </p:sp>
       <p:sp>
         <p:nvSpPr>
-          <p:cNvPr id="11" name="TextBox 10"/>
-          <p:cNvSpPr txBox="1"/>
-          <p:nvPr/>
-        </p:nvSpPr>
-        <p:spPr>
-          <a:xfrm>
-            <a:off x="685800" y="5349240"/>
-            <a:ext cx="2103120" cy="731520"/>
-          </a:xfrm>
-          <a:prstGeom prst="rect">
-            <a:avLst/>
-          </a:prstGeom>
-          <a:noFill/>
-        </p:spPr>
-        <p:txBody>
-          <a:bodyPr wrap="square" anchor="ctr" lIns="45720" rIns="45720" tIns="27432" bIns="27432">
-            <a:spAutoFit/>
-          </a:bodyPr>
-          <a:lstStyle/>
-          <a:p>
-            <a:pPr algn="l"/>
-            <a:r>
-              <a:rPr sz="1000" b="1" i="0">
-                <a:solidFill>
-                  <a:srgbClr val="2E7D32"/>
-                </a:solidFill>
-                <a:latin typeface="Calibri"/>
-              </a:rPr>
-              <a:t>FOCO DE MELHORIA</a:t>
-            </a:r>
-          </a:p>
-        </p:txBody>
-      </p:sp>
-      <p:sp>
-        <p:nvSpPr>
-          <p:cNvPr id="12" name="TextBox 11"/>
-          <p:cNvSpPr txBox="1"/>
-          <p:nvPr/>
-        </p:nvSpPr>
-        <p:spPr>
-          <a:xfrm>
-            <a:off x="2788920" y="5349240"/>
-            <a:ext cx="8759952" cy="731520"/>
-          </a:xfrm>
-          <a:prstGeom prst="rect">
-            <a:avLst/>
-          </a:prstGeom>
-          <a:noFill/>
-        </p:spPr>
-        <p:txBody>
-          <a:bodyPr wrap="square" anchor="ctr" lIns="45720" rIns="45720" tIns="27432" bIns="27432">
-            <a:spAutoFit/>
-          </a:bodyPr>
-          <a:lstStyle/>
-          <a:p>
-            <a:pPr algn="l"/>
-            <a:r>
-              <a:rPr sz="1400" b="1" i="0">
-                <a:solidFill>
-                  <a:srgbClr val="333333"/>
-                </a:solidFill>
-                <a:latin typeface="Calibri"/>
-              </a:rPr>
-              <a:t>Confirmar data do fornecedor no pedido e escalar desvios antes do vencimento.</a:t>
-            </a:r>
-          </a:p>
-        </p:txBody>
-      </p:sp>
-      <p:sp>
-        <p:nvSpPr>
-          <p:cNvPr id="13" name="Pentagon 12"/>
+          <p:cNvPr id="13" name="Rectangle 12"/>
           <p:cNvSpPr/>
           <p:nvPr/>
         </p:nvSpPr>
         <p:spPr>
           <a:xfrm>
-            <a:off x="457200" y="2194560"/>
-            <a:ext cx="2727198" cy="1280160"/>
-          </a:xfrm>
-          <a:prstGeom prst="homePlate">
+            <a:off x="457200" y="1828800"/>
+            <a:ext cx="3575304" cy="54864"/>
+          </a:xfrm>
+          <a:prstGeom prst="rect">
             <a:avLst/>
           </a:prstGeom>
           <a:solidFill>
@@ -15907,34 +14758,25 @@
           </a:fontRef>
         </p:style>
         <p:txBody>
-          <a:bodyPr rtlCol="0" anchor="ctr" wrap="square" lIns="137160" rIns="274320"/>
+          <a:bodyPr rtlCol="0" anchor="ctr"/>
           <a:lstStyle/>
           <a:p>
             <a:pPr algn="ctr"/>
-            <a:r>
-              <a:rPr sz="1400" b="1" i="0">
-                <a:solidFill>
-                  <a:srgbClr val="FFFFFF"/>
-                </a:solidFill>
-                <a:latin typeface="Calibri"/>
-              </a:rPr>
-              <a:t>1. Solicitação</a:t>
-            </a:r>
-          </a:p>
-        </p:txBody>
-      </p:sp>
-      <p:sp>
-        <p:nvSpPr>
-          <p:cNvPr id="14" name="Chevron 13"/>
+          </a:p>
+        </p:txBody>
+      </p:sp>
+      <p:sp>
+        <p:nvSpPr>
+          <p:cNvPr id="14" name="Rectangle 13"/>
           <p:cNvSpPr/>
           <p:nvPr/>
         </p:nvSpPr>
         <p:spPr>
           <a:xfrm>
-            <a:off x="3275838" y="2194560"/>
-            <a:ext cx="2727198" cy="1280160"/>
-          </a:xfrm>
-          <a:prstGeom prst="chevron">
+            <a:off x="685800" y="2057400"/>
+            <a:ext cx="2194560" cy="292608"/>
+          </a:xfrm>
+          <a:prstGeom prst="rect">
             <a:avLst/>
           </a:prstGeom>
           <a:solidFill>
@@ -15960,32 +14802,58 @@
           </a:fontRef>
         </p:style>
         <p:txBody>
-          <a:bodyPr rtlCol="0" anchor="ctr" wrap="square" lIns="320040" rIns="274320"/>
+          <a:bodyPr rtlCol="0" anchor="ctr"/>
           <a:lstStyle/>
           <a:p>
             <a:pPr algn="ctr"/>
-            <a:r>
-              <a:rPr sz="1400" b="1" i="0">
+          </a:p>
+        </p:txBody>
+      </p:sp>
+      <p:sp>
+        <p:nvSpPr>
+          <p:cNvPr id="15" name="TextBox 14"/>
+          <p:cNvSpPr txBox="1"/>
+          <p:nvPr/>
+        </p:nvSpPr>
+        <p:spPr>
+          <a:xfrm>
+            <a:off x="685800" y="2057400"/>
+            <a:ext cx="2194560" cy="292608"/>
+          </a:xfrm>
+          <a:prstGeom prst="rect">
+            <a:avLst/>
+          </a:prstGeom>
+          <a:noFill/>
+        </p:spPr>
+        <p:txBody>
+          <a:bodyPr wrap="square" anchor="ctr" lIns="45720" rIns="45720" tIns="27432" bIns="27432">
+            <a:spAutoFit/>
+          </a:bodyPr>
+          <a:lstStyle/>
+          <a:p>
+            <a:pPr algn="ctr"/>
+            <a:r>
+              <a:rPr sz="900" b="1" i="0">
                 <a:solidFill>
                   <a:srgbClr val="FFFFFF"/>
                 </a:solidFill>
                 <a:latin typeface="Calibri"/>
               </a:rPr>
-              <a:t>2. Aprovação</a:t>
-            </a:r>
-          </a:p>
-        </p:txBody>
-      </p:sp>
-      <p:sp>
-        <p:nvSpPr>
-          <p:cNvPr id="15" name="TextBox 14"/>
-          <p:cNvSpPr txBox="1"/>
-          <p:nvPr/>
-        </p:nvSpPr>
-        <p:spPr>
-          <a:xfrm>
-            <a:off x="3367278" y="3657600"/>
-            <a:ext cx="2544318" cy="548640"/>
+              <a:t>AGORA</a:t>
+            </a:r>
+          </a:p>
+        </p:txBody>
+      </p:sp>
+      <p:sp>
+        <p:nvSpPr>
+          <p:cNvPr id="16" name="TextBox 15"/>
+          <p:cNvSpPr txBox="1"/>
+          <p:nvPr/>
+        </p:nvSpPr>
+        <p:spPr>
+          <a:xfrm>
+            <a:off x="685800" y="2560320"/>
+            <a:ext cx="3118104" cy="685800"/>
           </a:xfrm>
           <a:prstGeom prst="rect">
             <a:avLst/>
@@ -16000,27 +14868,27 @@
           <a:p>
             <a:pPr algn="l"/>
             <a:r>
-              <a:rPr sz="2600" b="1" i="0">
-                <a:solidFill>
-                  <a:srgbClr val="1F3A5F"/>
-                </a:solidFill>
-                <a:latin typeface="Calibri"/>
-              </a:rPr>
-              <a:t>7,2 d</a:t>
-            </a:r>
-          </a:p>
-        </p:txBody>
-      </p:sp>
-      <p:sp>
-        <p:nvSpPr>
-          <p:cNvPr id="16" name="TextBox 15"/>
-          <p:cNvSpPr txBox="1"/>
-          <p:nvPr/>
-        </p:nvSpPr>
-        <p:spPr>
-          <a:xfrm>
-            <a:off x="3367278" y="4251960"/>
-            <a:ext cx="2544318" cy="1280160"/>
+              <a:rPr sz="1800" b="1" i="0">
+                <a:solidFill>
+                  <a:srgbClr val="333333"/>
+                </a:solidFill>
+                <a:latin typeface="Calibri"/>
+              </a:rPr>
+              <a:t>Sanear os itens atrasados</a:t>
+            </a:r>
+          </a:p>
+        </p:txBody>
+      </p:sp>
+      <p:sp>
+        <p:nvSpPr>
+          <p:cNvPr id="17" name="TextBox 16"/>
+          <p:cNvSpPr txBox="1"/>
+          <p:nvPr/>
+        </p:nvSpPr>
+        <p:spPr>
+          <a:xfrm>
+            <a:off x="685800" y="3246120"/>
+            <a:ext cx="3118104" cy="1737360"/>
           </a:xfrm>
           <a:prstGeom prst="rect">
             <a:avLst/>
@@ -16035,33 +14903,33 @@
           <a:p>
             <a:pPr algn="l"/>
             <a:r>
-              <a:rPr sz="1300" b="0" i="0">
+              <a:rPr sz="1400" b="0" i="0">
                 <a:solidFill>
                   <a:srgbClr val="333333"/>
                 </a:solidFill>
                 <a:latin typeface="Calibri"/>
               </a:rPr>
-              <a:t>até aprovação (n=40)</a:t>
-            </a:r>
-          </a:p>
-        </p:txBody>
-      </p:sp>
-      <p:sp>
-        <p:nvSpPr>
-          <p:cNvPr id="17" name="Chevron 16"/>
+              <a:t>Definir próximo marco, responsável e motivo do desvio para cada item.</a:t>
+            </a:r>
+          </a:p>
+        </p:txBody>
+      </p:sp>
+      <p:sp>
+        <p:nvSpPr>
+          <p:cNvPr id="18" name="Rectangle 17"/>
           <p:cNvSpPr/>
           <p:nvPr/>
         </p:nvSpPr>
         <p:spPr>
           <a:xfrm>
-            <a:off x="6094476" y="2194560"/>
-            <a:ext cx="2727198" cy="1280160"/>
-          </a:xfrm>
-          <a:prstGeom prst="chevron">
+            <a:off x="4306824" y="1828800"/>
+            <a:ext cx="3575304" cy="3291840"/>
+          </a:xfrm>
+          <a:prstGeom prst="rect">
             <a:avLst/>
           </a:prstGeom>
           <a:solidFill>
-            <a:srgbClr val="1F3A5F"/>
+            <a:srgbClr val="F2F2F2"/>
           </a:solidFill>
           <a:ln>
             <a:noFill/>
@@ -16083,32 +14951,146 @@
           </a:fontRef>
         </p:style>
         <p:txBody>
-          <a:bodyPr rtlCol="0" anchor="ctr" wrap="square" lIns="320040" rIns="274320"/>
+          <a:bodyPr rtlCol="0" anchor="ctr"/>
           <a:lstStyle/>
           <a:p>
             <a:pPr algn="ctr"/>
-            <a:r>
-              <a:rPr sz="1400" b="1" i="0">
+          </a:p>
+        </p:txBody>
+      </p:sp>
+      <p:sp>
+        <p:nvSpPr>
+          <p:cNvPr id="19" name="Rectangle 18"/>
+          <p:cNvSpPr/>
+          <p:nvPr/>
+        </p:nvSpPr>
+        <p:spPr>
+          <a:xfrm>
+            <a:off x="4306824" y="1828800"/>
+            <a:ext cx="3575304" cy="54864"/>
+          </a:xfrm>
+          <a:prstGeom prst="rect">
+            <a:avLst/>
+          </a:prstGeom>
+          <a:solidFill>
+            <a:srgbClr val="4F81BD"/>
+          </a:solidFill>
+          <a:ln>
+            <a:noFill/>
+          </a:ln>
+          <a:effectLst/>
+        </p:spPr>
+        <p:style>
+          <a:lnRef idx="1">
+            <a:schemeClr val="accent1"/>
+          </a:lnRef>
+          <a:fillRef idx="3">
+            <a:schemeClr val="accent1"/>
+          </a:fillRef>
+          <a:effectRef idx="2">
+            <a:schemeClr val="accent1"/>
+          </a:effectRef>
+          <a:fontRef idx="minor">
+            <a:schemeClr val="lt1"/>
+          </a:fontRef>
+        </p:style>
+        <p:txBody>
+          <a:bodyPr rtlCol="0" anchor="ctr"/>
+          <a:lstStyle/>
+          <a:p>
+            <a:pPr algn="ctr"/>
+          </a:p>
+        </p:txBody>
+      </p:sp>
+      <p:sp>
+        <p:nvSpPr>
+          <p:cNvPr id="20" name="Rectangle 19"/>
+          <p:cNvSpPr/>
+          <p:nvPr/>
+        </p:nvSpPr>
+        <p:spPr>
+          <a:xfrm>
+            <a:off x="4535424" y="2057400"/>
+            <a:ext cx="2194560" cy="292608"/>
+          </a:xfrm>
+          <a:prstGeom prst="rect">
+            <a:avLst/>
+          </a:prstGeom>
+          <a:solidFill>
+            <a:srgbClr val="4F81BD"/>
+          </a:solidFill>
+          <a:ln>
+            <a:noFill/>
+          </a:ln>
+          <a:effectLst/>
+        </p:spPr>
+        <p:style>
+          <a:lnRef idx="1">
+            <a:schemeClr val="accent1"/>
+          </a:lnRef>
+          <a:fillRef idx="3">
+            <a:schemeClr val="accent1"/>
+          </a:fillRef>
+          <a:effectRef idx="2">
+            <a:schemeClr val="accent1"/>
+          </a:effectRef>
+          <a:fontRef idx="minor">
+            <a:schemeClr val="lt1"/>
+          </a:fontRef>
+        </p:style>
+        <p:txBody>
+          <a:bodyPr rtlCol="0" anchor="ctr"/>
+          <a:lstStyle/>
+          <a:p>
+            <a:pPr algn="ctr"/>
+          </a:p>
+        </p:txBody>
+      </p:sp>
+      <p:sp>
+        <p:nvSpPr>
+          <p:cNvPr id="21" name="TextBox 20"/>
+          <p:cNvSpPr txBox="1"/>
+          <p:nvPr/>
+        </p:nvSpPr>
+        <p:spPr>
+          <a:xfrm>
+            <a:off x="4535424" y="2057400"/>
+            <a:ext cx="2194560" cy="292608"/>
+          </a:xfrm>
+          <a:prstGeom prst="rect">
+            <a:avLst/>
+          </a:prstGeom>
+          <a:noFill/>
+        </p:spPr>
+        <p:txBody>
+          <a:bodyPr wrap="square" anchor="ctr" lIns="45720" rIns="45720" tIns="27432" bIns="27432">
+            <a:spAutoFit/>
+          </a:bodyPr>
+          <a:lstStyle/>
+          <a:p>
+            <a:pPr algn="ctr"/>
+            <a:r>
+              <a:rPr sz="900" b="1" i="0">
                 <a:solidFill>
                   <a:srgbClr val="FFFFFF"/>
                 </a:solidFill>
                 <a:latin typeface="Calibri"/>
               </a:rPr>
-              <a:t>3. Pedido</a:t>
-            </a:r>
-          </a:p>
-        </p:txBody>
-      </p:sp>
-      <p:sp>
-        <p:nvSpPr>
-          <p:cNvPr id="18" name="TextBox 17"/>
-          <p:cNvSpPr txBox="1"/>
-          <p:nvPr/>
-        </p:nvSpPr>
-        <p:spPr>
-          <a:xfrm>
-            <a:off x="6185916" y="3657600"/>
-            <a:ext cx="2544318" cy="548640"/>
+              <a:t>PRÓXIMAS 4 SEMANAS</a:t>
+            </a:r>
+          </a:p>
+        </p:txBody>
+      </p:sp>
+      <p:sp>
+        <p:nvSpPr>
+          <p:cNvPr id="22" name="TextBox 21"/>
+          <p:cNvSpPr txBox="1"/>
+          <p:nvPr/>
+        </p:nvSpPr>
+        <p:spPr>
+          <a:xfrm>
+            <a:off x="4535424" y="2560320"/>
+            <a:ext cx="3118104" cy="685800"/>
           </a:xfrm>
           <a:prstGeom prst="rect">
             <a:avLst/>
@@ -16123,27 +15105,27 @@
           <a:p>
             <a:pPr algn="l"/>
             <a:r>
-              <a:rPr sz="2600" b="1" i="0">
-                <a:solidFill>
-                  <a:srgbClr val="1F3A5F"/>
-                </a:solidFill>
-                <a:latin typeface="Calibri"/>
-              </a:rPr>
-              <a:t>4,3 d</a:t>
-            </a:r>
-          </a:p>
-        </p:txBody>
-      </p:sp>
-      <p:sp>
-        <p:nvSpPr>
-          <p:cNvPr id="19" name="TextBox 18"/>
-          <p:cNvSpPr txBox="1"/>
-          <p:nvPr/>
-        </p:nvSpPr>
-        <p:spPr>
-          <a:xfrm>
-            <a:off x="6185916" y="4251960"/>
-            <a:ext cx="2544318" cy="1280160"/>
+              <a:rPr sz="1800" b="1" i="0">
+                <a:solidFill>
+                  <a:srgbClr val="333333"/>
+                </a:solidFill>
+                <a:latin typeface="Calibri"/>
+              </a:rPr>
+              <a:t>Implantar a gestão à vista</a:t>
+            </a:r>
+          </a:p>
+        </p:txBody>
+      </p:sp>
+      <p:sp>
+        <p:nvSpPr>
+          <p:cNvPr id="23" name="TextBox 22"/>
+          <p:cNvSpPr txBox="1"/>
+          <p:nvPr/>
+        </p:nvSpPr>
+        <p:spPr>
+          <a:xfrm>
+            <a:off x="4535424" y="3246120"/>
+            <a:ext cx="3118104" cy="1737360"/>
           </a:xfrm>
           <a:prstGeom prst="rect">
             <a:avLst/>
@@ -16158,29 +15140,73 @@
           <a:p>
             <a:pPr algn="l"/>
             <a:r>
-              <a:rPr sz="1300" b="0" i="0">
+              <a:rPr sz="1400" b="0" i="0">
                 <a:solidFill>
                   <a:srgbClr val="333333"/>
                 </a:solidFill>
                 <a:latin typeface="Calibri"/>
               </a:rPr>
-              <a:t>até pedido (n=27)</a:t>
-            </a:r>
-          </a:p>
-        </p:txBody>
-      </p:sp>
-      <p:sp>
-        <p:nvSpPr>
-          <p:cNvPr id="20" name="Chevron 19"/>
+              <a:t>Acompanhar SLA, risco alto e confirmação do fornecedor.</a:t>
+            </a:r>
+          </a:p>
+        </p:txBody>
+      </p:sp>
+      <p:sp>
+        <p:nvSpPr>
+          <p:cNvPr id="24" name="Rectangle 23"/>
           <p:cNvSpPr/>
           <p:nvPr/>
         </p:nvSpPr>
         <p:spPr>
           <a:xfrm>
-            <a:off x="8913114" y="2194560"/>
-            <a:ext cx="2727198" cy="1280160"/>
-          </a:xfrm>
-          <a:prstGeom prst="chevron">
+            <a:off x="8156448" y="1828800"/>
+            <a:ext cx="3575304" cy="3291840"/>
+          </a:xfrm>
+          <a:prstGeom prst="rect">
+            <a:avLst/>
+          </a:prstGeom>
+          <a:solidFill>
+            <a:srgbClr val="F2F2F2"/>
+          </a:solidFill>
+          <a:ln>
+            <a:noFill/>
+          </a:ln>
+          <a:effectLst/>
+        </p:spPr>
+        <p:style>
+          <a:lnRef idx="1">
+            <a:schemeClr val="accent1"/>
+          </a:lnRef>
+          <a:fillRef idx="3">
+            <a:schemeClr val="accent1"/>
+          </a:fillRef>
+          <a:effectRef idx="2">
+            <a:schemeClr val="accent1"/>
+          </a:effectRef>
+          <a:fontRef idx="minor">
+            <a:schemeClr val="lt1"/>
+          </a:fontRef>
+        </p:style>
+        <p:txBody>
+          <a:bodyPr rtlCol="0" anchor="ctr"/>
+          <a:lstStyle/>
+          <a:p>
+            <a:pPr algn="ctr"/>
+          </a:p>
+        </p:txBody>
+      </p:sp>
+      <p:sp>
+        <p:nvSpPr>
+          <p:cNvPr id="25" name="Rectangle 24"/>
+          <p:cNvSpPr/>
+          <p:nvPr/>
+        </p:nvSpPr>
+        <p:spPr>
+          <a:xfrm>
+            <a:off x="8156448" y="1828800"/>
+            <a:ext cx="3575304" cy="54864"/>
+          </a:xfrm>
+          <a:prstGeom prst="rect">
             <a:avLst/>
           </a:prstGeom>
           <a:solidFill>
@@ -16206,32 +15232,102 @@
           </a:fontRef>
         </p:style>
         <p:txBody>
-          <a:bodyPr rtlCol="0" anchor="ctr" wrap="square" lIns="320040" rIns="274320"/>
+          <a:bodyPr rtlCol="0" anchor="ctr"/>
           <a:lstStyle/>
           <a:p>
             <a:pPr algn="ctr"/>
-            <a:r>
-              <a:rPr sz="1400" b="1" i="0">
+          </a:p>
+        </p:txBody>
+      </p:sp>
+      <p:sp>
+        <p:nvSpPr>
+          <p:cNvPr id="26" name="Rectangle 25"/>
+          <p:cNvSpPr/>
+          <p:nvPr/>
+        </p:nvSpPr>
+        <p:spPr>
+          <a:xfrm>
+            <a:off x="8385048" y="2057400"/>
+            <a:ext cx="2194560" cy="292608"/>
+          </a:xfrm>
+          <a:prstGeom prst="rect">
+            <a:avLst/>
+          </a:prstGeom>
+          <a:solidFill>
+            <a:srgbClr val="F2A900"/>
+          </a:solidFill>
+          <a:ln>
+            <a:noFill/>
+          </a:ln>
+          <a:effectLst/>
+        </p:spPr>
+        <p:style>
+          <a:lnRef idx="1">
+            <a:schemeClr val="accent1"/>
+          </a:lnRef>
+          <a:fillRef idx="3">
+            <a:schemeClr val="accent1"/>
+          </a:fillRef>
+          <a:effectRef idx="2">
+            <a:schemeClr val="accent1"/>
+          </a:effectRef>
+          <a:fontRef idx="minor">
+            <a:schemeClr val="lt1"/>
+          </a:fontRef>
+        </p:style>
+        <p:txBody>
+          <a:bodyPr rtlCol="0" anchor="ctr"/>
+          <a:lstStyle/>
+          <a:p>
+            <a:pPr algn="ctr"/>
+          </a:p>
+        </p:txBody>
+      </p:sp>
+      <p:sp>
+        <p:nvSpPr>
+          <p:cNvPr id="27" name="TextBox 26"/>
+          <p:cNvSpPr txBox="1"/>
+          <p:nvPr/>
+        </p:nvSpPr>
+        <p:spPr>
+          <a:xfrm>
+            <a:off x="8385048" y="2057400"/>
+            <a:ext cx="2194560" cy="292608"/>
+          </a:xfrm>
+          <a:prstGeom prst="rect">
+            <a:avLst/>
+          </a:prstGeom>
+          <a:noFill/>
+        </p:spPr>
+        <p:txBody>
+          <a:bodyPr wrap="square" anchor="ctr" lIns="45720" rIns="45720" tIns="27432" bIns="27432">
+            <a:spAutoFit/>
+          </a:bodyPr>
+          <a:lstStyle/>
+          <a:p>
+            <a:pPr algn="ctr"/>
+            <a:r>
+              <a:rPr sz="900" b="1" i="0">
                 <a:solidFill>
                   <a:srgbClr val="FFFFFF"/>
                 </a:solidFill>
                 <a:latin typeface="Calibri"/>
               </a:rPr>
-              <a:t>4. Entrega</a:t>
-            </a:r>
-          </a:p>
-        </p:txBody>
-      </p:sp>
-      <p:sp>
-        <p:nvSpPr>
-          <p:cNvPr id="21" name="TextBox 20"/>
-          <p:cNvSpPr txBox="1"/>
-          <p:nvPr/>
-        </p:nvSpPr>
-        <p:spPr>
-          <a:xfrm>
-            <a:off x="9004554" y="3657600"/>
-            <a:ext cx="2544318" cy="548640"/>
+              <a:t>APÓS 30 DIAS</a:t>
+            </a:r>
+          </a:p>
+        </p:txBody>
+      </p:sp>
+      <p:sp>
+        <p:nvSpPr>
+          <p:cNvPr id="28" name="TextBox 27"/>
+          <p:cNvSpPr txBox="1"/>
+          <p:nvPr/>
+        </p:nvSpPr>
+        <p:spPr>
+          <a:xfrm>
+            <a:off x="8385048" y="2560320"/>
+            <a:ext cx="3118104" cy="685800"/>
           </a:xfrm>
           <a:prstGeom prst="rect">
             <a:avLst/>
@@ -16246,27 +15342,27 @@
           <a:p>
             <a:pPr algn="l"/>
             <a:r>
-              <a:rPr sz="2600" b="1" i="0">
-                <a:solidFill>
-                  <a:srgbClr val="F2A900"/>
-                </a:solidFill>
-                <a:latin typeface="Calibri"/>
-              </a:rPr>
-              <a:t>39,9 d</a:t>
-            </a:r>
-          </a:p>
-        </p:txBody>
-      </p:sp>
-      <p:sp>
-        <p:nvSpPr>
-          <p:cNvPr id="22" name="TextBox 21"/>
-          <p:cNvSpPr txBox="1"/>
-          <p:nvPr/>
-        </p:nvSpPr>
-        <p:spPr>
-          <a:xfrm>
-            <a:off x="9004554" y="4251960"/>
-            <a:ext cx="2544318" cy="1280160"/>
+              <a:rPr sz="1800" b="1" i="0">
+                <a:solidFill>
+                  <a:srgbClr val="333333"/>
+                </a:solidFill>
+                <a:latin typeface="Calibri"/>
+              </a:rPr>
+              <a:t>Revisar causa e capacidade</a:t>
+            </a:r>
+          </a:p>
+        </p:txBody>
+      </p:sp>
+      <p:sp>
+        <p:nvSpPr>
+          <p:cNvPr id="29" name="TextBox 28"/>
+          <p:cNvSpPr txBox="1"/>
+          <p:nvPr/>
+        </p:nvSpPr>
+        <p:spPr>
+          <a:xfrm>
+            <a:off x="8385048" y="3246120"/>
+            <a:ext cx="3118104" cy="1737360"/>
           </a:xfrm>
           <a:prstGeom prst="rect">
             <a:avLst/>
@@ -16281,13 +15377,13 @@
           <a:p>
             <a:pPr algn="l"/>
             <a:r>
-              <a:rPr sz="1300" b="0" i="0">
+              <a:rPr sz="1400" b="0" i="0">
                 <a:solidFill>
                   <a:srgbClr val="333333"/>
                 </a:solidFill>
                 <a:latin typeface="Calibri"/>
               </a:rPr>
-              <a:t>até entrega real (n=13)</a:t>
+              <a:t>Comparar coortes, modalidades e carga por equipe.</a:t>
             </a:r>
           </a:p>
         </p:txBody>
@@ -16338,7 +15434,7 @@
                 </a:solidFill>
                 <a:latin typeface="Calibri"/>
               </a:rPr>
-              <a:t>Matriz 2×2 com quadrante destacado</a:t>
+              <a:t>Timeline com marcador de hoje e legenda</a:t>
             </a:r>
           </a:p>
         </p:txBody>
@@ -16443,7 +15539,7 @@
                 </a:solidFill>
                 <a:latin typeface="Calibri"/>
               </a:rPr>
-              <a:t>MATRIZ</a:t>
+              <a:t>TIMELINE</a:t>
             </a:r>
           </a:p>
         </p:txBody>
@@ -16514,6 +15610,2105 @@
                 <a:latin typeface="Calibri"/>
               </a:rPr>
               <a:t>24</a:t>
+            </a:r>
+          </a:p>
+        </p:txBody>
+      </p:sp>
+      <p:pic>
+        <p:nvPicPr>
+          <p:cNvPr id="8" name="Picture 7" descr="logo-placeholder.png"/>
+          <p:cNvPicPr>
+            <a:picLocks noChangeAspect="1"/>
+          </p:cNvPicPr>
+          <p:nvPr/>
+        </p:nvPicPr>
+        <p:blipFill>
+          <a:blip r:embed="rId2"/>
+          <a:stretch>
+            <a:fillRect/>
+          </a:stretch>
+        </p:blipFill>
+        <p:spPr>
+          <a:xfrm>
+            <a:off x="9692640" y="6245352"/>
+            <a:ext cx="822960" cy="274320"/>
+          </a:xfrm>
+          <a:prstGeom prst="rect">
+            <a:avLst/>
+          </a:prstGeom>
+        </p:spPr>
+      </p:pic>
+      <p:sp>
+        <p:nvSpPr>
+          <p:cNvPr id="9" name="Rectangle 8"/>
+          <p:cNvSpPr/>
+          <p:nvPr/>
+        </p:nvSpPr>
+        <p:spPr>
+          <a:xfrm>
+            <a:off x="731520" y="3858768"/>
+            <a:ext cx="10698480" cy="54864"/>
+          </a:xfrm>
+          <a:prstGeom prst="rect">
+            <a:avLst/>
+          </a:prstGeom>
+          <a:solidFill>
+            <a:srgbClr val="8C8C8C"/>
+          </a:solidFill>
+          <a:ln>
+            <a:noFill/>
+          </a:ln>
+          <a:effectLst/>
+        </p:spPr>
+        <p:style>
+          <a:lnRef idx="1">
+            <a:schemeClr val="accent1"/>
+          </a:lnRef>
+          <a:fillRef idx="3">
+            <a:schemeClr val="accent1"/>
+          </a:fillRef>
+          <a:effectRef idx="2">
+            <a:schemeClr val="accent1"/>
+          </a:effectRef>
+          <a:fontRef idx="minor">
+            <a:schemeClr val="lt1"/>
+          </a:fontRef>
+        </p:style>
+        <p:txBody>
+          <a:bodyPr rtlCol="0" anchor="ctr"/>
+          <a:lstStyle/>
+          <a:p>
+            <a:pPr algn="ctr"/>
+          </a:p>
+        </p:txBody>
+      </p:sp>
+      <p:sp>
+        <p:nvSpPr>
+          <p:cNvPr id="10" name="Oval 9"/>
+          <p:cNvSpPr/>
+          <p:nvPr/>
+        </p:nvSpPr>
+        <p:spPr>
+          <a:xfrm>
+            <a:off x="1005840" y="3703320"/>
+            <a:ext cx="365760" cy="365760"/>
+          </a:xfrm>
+          <a:prstGeom prst="ellipse">
+            <a:avLst/>
+          </a:prstGeom>
+          <a:solidFill>
+            <a:srgbClr val="2E7D32"/>
+          </a:solidFill>
+          <a:ln w="19050">
+            <a:solidFill>
+              <a:srgbClr val="FFFFFF"/>
+            </a:solidFill>
+          </a:ln>
+          <a:effectLst/>
+        </p:spPr>
+        <p:style>
+          <a:lnRef idx="1">
+            <a:schemeClr val="accent1"/>
+          </a:lnRef>
+          <a:fillRef idx="3">
+            <a:schemeClr val="accent1"/>
+          </a:fillRef>
+          <a:effectRef idx="2">
+            <a:schemeClr val="accent1"/>
+          </a:effectRef>
+          <a:fontRef idx="minor">
+            <a:schemeClr val="lt1"/>
+          </a:fontRef>
+        </p:style>
+        <p:txBody>
+          <a:bodyPr rtlCol="0" anchor="ctr"/>
+          <a:lstStyle/>
+          <a:p>
+            <a:pPr algn="ctr"/>
+          </a:p>
+        </p:txBody>
+      </p:sp>
+      <p:sp>
+        <p:nvSpPr>
+          <p:cNvPr id="11" name="TextBox 10"/>
+          <p:cNvSpPr txBox="1"/>
+          <p:nvPr/>
+        </p:nvSpPr>
+        <p:spPr>
+          <a:xfrm>
+            <a:off x="365760" y="2971800"/>
+            <a:ext cx="1645920" cy="365760"/>
+          </a:xfrm>
+          <a:prstGeom prst="rect">
+            <a:avLst/>
+          </a:prstGeom>
+          <a:noFill/>
+        </p:spPr>
+        <p:txBody>
+          <a:bodyPr wrap="square" anchor="b" lIns="45720" rIns="45720" tIns="27432" bIns="27432">
+            <a:spAutoFit/>
+          </a:bodyPr>
+          <a:lstStyle/>
+          <a:p>
+            <a:pPr algn="ctr"/>
+            <a:r>
+              <a:rPr sz="1300" b="0" i="0">
+                <a:solidFill>
+                  <a:srgbClr val="8C8C8C"/>
+                </a:solidFill>
+                <a:latin typeface="Calibri"/>
+              </a:rPr>
+              <a:t>Jun/26</a:t>
+            </a:r>
+          </a:p>
+        </p:txBody>
+      </p:sp>
+      <p:sp>
+        <p:nvSpPr>
+          <p:cNvPr id="12" name="TextBox 11"/>
+          <p:cNvSpPr txBox="1"/>
+          <p:nvPr/>
+        </p:nvSpPr>
+        <p:spPr>
+          <a:xfrm>
+            <a:off x="365760" y="4206240"/>
+            <a:ext cx="1645920" cy="1097280"/>
+          </a:xfrm>
+          <a:prstGeom prst="rect">
+            <a:avLst/>
+          </a:prstGeom>
+          <a:noFill/>
+        </p:spPr>
+        <p:txBody>
+          <a:bodyPr wrap="square" anchor="t" lIns="45720" rIns="45720" tIns="27432" bIns="27432">
+            <a:spAutoFit/>
+          </a:bodyPr>
+          <a:lstStyle/>
+          <a:p>
+            <a:pPr algn="ctr"/>
+            <a:r>
+              <a:rPr sz="1300" b="0" i="0">
+                <a:solidFill>
+                  <a:srgbClr val="333333"/>
+                </a:solidFill>
+                <a:latin typeface="Calibri"/>
+              </a:rPr>
+              <a:t>Kickoff</a:t>
+            </a:r>
+          </a:p>
+        </p:txBody>
+      </p:sp>
+      <p:sp>
+        <p:nvSpPr>
+          <p:cNvPr id="13" name="Oval 12"/>
+          <p:cNvSpPr/>
+          <p:nvPr/>
+        </p:nvSpPr>
+        <p:spPr>
+          <a:xfrm>
+            <a:off x="3451859" y="3703320"/>
+            <a:ext cx="365760" cy="365760"/>
+          </a:xfrm>
+          <a:prstGeom prst="ellipse">
+            <a:avLst/>
+          </a:prstGeom>
+          <a:solidFill>
+            <a:srgbClr val="2E7D32"/>
+          </a:solidFill>
+          <a:ln w="19050">
+            <a:solidFill>
+              <a:srgbClr val="FFFFFF"/>
+            </a:solidFill>
+          </a:ln>
+          <a:effectLst/>
+        </p:spPr>
+        <p:style>
+          <a:lnRef idx="1">
+            <a:schemeClr val="accent1"/>
+          </a:lnRef>
+          <a:fillRef idx="3">
+            <a:schemeClr val="accent1"/>
+          </a:fillRef>
+          <a:effectRef idx="2">
+            <a:schemeClr val="accent1"/>
+          </a:effectRef>
+          <a:fontRef idx="minor">
+            <a:schemeClr val="lt1"/>
+          </a:fontRef>
+        </p:style>
+        <p:txBody>
+          <a:bodyPr rtlCol="0" anchor="ctr"/>
+          <a:lstStyle/>
+          <a:p>
+            <a:pPr algn="ctr"/>
+          </a:p>
+        </p:txBody>
+      </p:sp>
+      <p:sp>
+        <p:nvSpPr>
+          <p:cNvPr id="14" name="TextBox 13"/>
+          <p:cNvSpPr txBox="1"/>
+          <p:nvPr/>
+        </p:nvSpPr>
+        <p:spPr>
+          <a:xfrm>
+            <a:off x="2811779" y="2971800"/>
+            <a:ext cx="1645920" cy="365760"/>
+          </a:xfrm>
+          <a:prstGeom prst="rect">
+            <a:avLst/>
+          </a:prstGeom>
+          <a:noFill/>
+        </p:spPr>
+        <p:txBody>
+          <a:bodyPr wrap="square" anchor="b" lIns="45720" rIns="45720" tIns="27432" bIns="27432">
+            <a:spAutoFit/>
+          </a:bodyPr>
+          <a:lstStyle/>
+          <a:p>
+            <a:pPr algn="ctr"/>
+            <a:r>
+              <a:rPr sz="1300" b="0" i="0">
+                <a:solidFill>
+                  <a:srgbClr val="8C8C8C"/>
+                </a:solidFill>
+                <a:latin typeface="Calibri"/>
+              </a:rPr>
+              <a:t>Jul/26</a:t>
+            </a:r>
+          </a:p>
+        </p:txBody>
+      </p:sp>
+      <p:sp>
+        <p:nvSpPr>
+          <p:cNvPr id="15" name="TextBox 14"/>
+          <p:cNvSpPr txBox="1"/>
+          <p:nvPr/>
+        </p:nvSpPr>
+        <p:spPr>
+          <a:xfrm>
+            <a:off x="2811779" y="4206240"/>
+            <a:ext cx="1645920" cy="1097280"/>
+          </a:xfrm>
+          <a:prstGeom prst="rect">
+            <a:avLst/>
+          </a:prstGeom>
+          <a:noFill/>
+        </p:spPr>
+        <p:txBody>
+          <a:bodyPr wrap="square" anchor="t" lIns="45720" rIns="45720" tIns="27432" bIns="27432">
+            <a:spAutoFit/>
+          </a:bodyPr>
+          <a:lstStyle/>
+          <a:p>
+            <a:pPr algn="ctr"/>
+            <a:r>
+              <a:rPr sz="1300" b="0" i="0">
+                <a:solidFill>
+                  <a:srgbClr val="333333"/>
+                </a:solidFill>
+                <a:latin typeface="Calibri"/>
+              </a:rPr>
+              <a:t>Design aprovado</a:t>
+            </a:r>
+          </a:p>
+        </p:txBody>
+      </p:sp>
+      <p:sp>
+        <p:nvSpPr>
+          <p:cNvPr id="16" name="Oval 15"/>
+          <p:cNvSpPr/>
+          <p:nvPr/>
+        </p:nvSpPr>
+        <p:spPr>
+          <a:xfrm>
+            <a:off x="5897879" y="3703320"/>
+            <a:ext cx="365760" cy="365760"/>
+          </a:xfrm>
+          <a:prstGeom prst="ellipse">
+            <a:avLst/>
+          </a:prstGeom>
+          <a:solidFill>
+            <a:srgbClr val="F9A825"/>
+          </a:solidFill>
+          <a:ln w="19050">
+            <a:solidFill>
+              <a:srgbClr val="FFFFFF"/>
+            </a:solidFill>
+          </a:ln>
+          <a:effectLst/>
+        </p:spPr>
+        <p:style>
+          <a:lnRef idx="1">
+            <a:schemeClr val="accent1"/>
+          </a:lnRef>
+          <a:fillRef idx="3">
+            <a:schemeClr val="accent1"/>
+          </a:fillRef>
+          <a:effectRef idx="2">
+            <a:schemeClr val="accent1"/>
+          </a:effectRef>
+          <a:fontRef idx="minor">
+            <a:schemeClr val="lt1"/>
+          </a:fontRef>
+        </p:style>
+        <p:txBody>
+          <a:bodyPr rtlCol="0" anchor="ctr"/>
+          <a:lstStyle/>
+          <a:p>
+            <a:pPr algn="ctr"/>
+          </a:p>
+        </p:txBody>
+      </p:sp>
+      <p:sp>
+        <p:nvSpPr>
+          <p:cNvPr id="17" name="TextBox 16"/>
+          <p:cNvSpPr txBox="1"/>
+          <p:nvPr/>
+        </p:nvSpPr>
+        <p:spPr>
+          <a:xfrm>
+            <a:off x="5257799" y="2971800"/>
+            <a:ext cx="1645920" cy="365760"/>
+          </a:xfrm>
+          <a:prstGeom prst="rect">
+            <a:avLst/>
+          </a:prstGeom>
+          <a:noFill/>
+        </p:spPr>
+        <p:txBody>
+          <a:bodyPr wrap="square" anchor="b" lIns="45720" rIns="45720" tIns="27432" bIns="27432">
+            <a:spAutoFit/>
+          </a:bodyPr>
+          <a:lstStyle/>
+          <a:p>
+            <a:pPr algn="ctr"/>
+            <a:r>
+              <a:rPr sz="1300" b="0" i="0">
+                <a:solidFill>
+                  <a:srgbClr val="8C8C8C"/>
+                </a:solidFill>
+                <a:latin typeface="Calibri"/>
+              </a:rPr>
+              <a:t>Set/26</a:t>
+            </a:r>
+          </a:p>
+        </p:txBody>
+      </p:sp>
+      <p:sp>
+        <p:nvSpPr>
+          <p:cNvPr id="18" name="TextBox 17"/>
+          <p:cNvSpPr txBox="1"/>
+          <p:nvPr/>
+        </p:nvSpPr>
+        <p:spPr>
+          <a:xfrm>
+            <a:off x="5257799" y="4206240"/>
+            <a:ext cx="1645920" cy="1097280"/>
+          </a:xfrm>
+          <a:prstGeom prst="rect">
+            <a:avLst/>
+          </a:prstGeom>
+          <a:noFill/>
+        </p:spPr>
+        <p:txBody>
+          <a:bodyPr wrap="square" anchor="t" lIns="45720" rIns="45720" tIns="27432" bIns="27432">
+            <a:spAutoFit/>
+          </a:bodyPr>
+          <a:lstStyle/>
+          <a:p>
+            <a:pPr algn="ctr"/>
+            <a:r>
+              <a:rPr sz="1300" b="0" i="0">
+                <a:solidFill>
+                  <a:srgbClr val="333333"/>
+                </a:solidFill>
+                <a:latin typeface="Calibri"/>
+              </a:rPr>
+              <a:t>Homologação</a:t>
+            </a:r>
+          </a:p>
+        </p:txBody>
+      </p:sp>
+      <p:sp>
+        <p:nvSpPr>
+          <p:cNvPr id="19" name="Oval 18"/>
+          <p:cNvSpPr/>
+          <p:nvPr/>
+        </p:nvSpPr>
+        <p:spPr>
+          <a:xfrm>
+            <a:off x="8343900" y="3703320"/>
+            <a:ext cx="365760" cy="365760"/>
+          </a:xfrm>
+          <a:prstGeom prst="ellipse">
+            <a:avLst/>
+          </a:prstGeom>
+          <a:solidFill>
+            <a:srgbClr val="C62828"/>
+          </a:solidFill>
+          <a:ln w="19050">
+            <a:solidFill>
+              <a:srgbClr val="FFFFFF"/>
+            </a:solidFill>
+          </a:ln>
+          <a:effectLst/>
+        </p:spPr>
+        <p:style>
+          <a:lnRef idx="1">
+            <a:schemeClr val="accent1"/>
+          </a:lnRef>
+          <a:fillRef idx="3">
+            <a:schemeClr val="accent1"/>
+          </a:fillRef>
+          <a:effectRef idx="2">
+            <a:schemeClr val="accent1"/>
+          </a:effectRef>
+          <a:fontRef idx="minor">
+            <a:schemeClr val="lt1"/>
+          </a:fontRef>
+        </p:style>
+        <p:txBody>
+          <a:bodyPr rtlCol="0" anchor="ctr"/>
+          <a:lstStyle/>
+          <a:p>
+            <a:pPr algn="ctr"/>
+          </a:p>
+        </p:txBody>
+      </p:sp>
+      <p:sp>
+        <p:nvSpPr>
+          <p:cNvPr id="20" name="TextBox 19"/>
+          <p:cNvSpPr txBox="1"/>
+          <p:nvPr/>
+        </p:nvSpPr>
+        <p:spPr>
+          <a:xfrm>
+            <a:off x="7703819" y="2971800"/>
+            <a:ext cx="1645920" cy="365760"/>
+          </a:xfrm>
+          <a:prstGeom prst="rect">
+            <a:avLst/>
+          </a:prstGeom>
+          <a:noFill/>
+        </p:spPr>
+        <p:txBody>
+          <a:bodyPr wrap="square" anchor="b" lIns="45720" rIns="45720" tIns="27432" bIns="27432">
+            <a:spAutoFit/>
+          </a:bodyPr>
+          <a:lstStyle/>
+          <a:p>
+            <a:pPr algn="ctr"/>
+            <a:r>
+              <a:rPr sz="1300" b="0" i="0">
+                <a:solidFill>
+                  <a:srgbClr val="8C8C8C"/>
+                </a:solidFill>
+                <a:latin typeface="Calibri"/>
+              </a:rPr>
+              <a:t>Out/26</a:t>
+            </a:r>
+          </a:p>
+        </p:txBody>
+      </p:sp>
+      <p:sp>
+        <p:nvSpPr>
+          <p:cNvPr id="21" name="TextBox 20"/>
+          <p:cNvSpPr txBox="1"/>
+          <p:nvPr/>
+        </p:nvSpPr>
+        <p:spPr>
+          <a:xfrm>
+            <a:off x="7703819" y="4206240"/>
+            <a:ext cx="1645920" cy="1097280"/>
+          </a:xfrm>
+          <a:prstGeom prst="rect">
+            <a:avLst/>
+          </a:prstGeom>
+          <a:noFill/>
+        </p:spPr>
+        <p:txBody>
+          <a:bodyPr wrap="square" anchor="t" lIns="45720" rIns="45720" tIns="27432" bIns="27432">
+            <a:spAutoFit/>
+          </a:bodyPr>
+          <a:lstStyle/>
+          <a:p>
+            <a:pPr algn="ctr"/>
+            <a:r>
+              <a:rPr sz="1300" b="0" i="0">
+                <a:solidFill>
+                  <a:srgbClr val="333333"/>
+                </a:solidFill>
+                <a:latin typeface="Calibri"/>
+              </a:rPr>
+              <a:t>Testes</a:t>
+            </a:r>
+          </a:p>
+        </p:txBody>
+      </p:sp>
+      <p:sp>
+        <p:nvSpPr>
+          <p:cNvPr id="22" name="Oval 21"/>
+          <p:cNvSpPr/>
+          <p:nvPr/>
+        </p:nvSpPr>
+        <p:spPr>
+          <a:xfrm>
+            <a:off x="10789920" y="3703320"/>
+            <a:ext cx="365760" cy="365760"/>
+          </a:xfrm>
+          <a:prstGeom prst="ellipse">
+            <a:avLst/>
+          </a:prstGeom>
+          <a:solidFill>
+            <a:srgbClr val="1F3A5F"/>
+          </a:solidFill>
+          <a:ln w="19050">
+            <a:solidFill>
+              <a:srgbClr val="FFFFFF"/>
+            </a:solidFill>
+          </a:ln>
+          <a:effectLst/>
+        </p:spPr>
+        <p:style>
+          <a:lnRef idx="1">
+            <a:schemeClr val="accent1"/>
+          </a:lnRef>
+          <a:fillRef idx="3">
+            <a:schemeClr val="accent1"/>
+          </a:fillRef>
+          <a:effectRef idx="2">
+            <a:schemeClr val="accent1"/>
+          </a:effectRef>
+          <a:fontRef idx="minor">
+            <a:schemeClr val="lt1"/>
+          </a:fontRef>
+        </p:style>
+        <p:txBody>
+          <a:bodyPr rtlCol="0" anchor="ctr"/>
+          <a:lstStyle/>
+          <a:p>
+            <a:pPr algn="ctr"/>
+          </a:p>
+        </p:txBody>
+      </p:sp>
+      <p:sp>
+        <p:nvSpPr>
+          <p:cNvPr id="23" name="TextBox 22"/>
+          <p:cNvSpPr txBox="1"/>
+          <p:nvPr/>
+        </p:nvSpPr>
+        <p:spPr>
+          <a:xfrm>
+            <a:off x="10149840" y="2971800"/>
+            <a:ext cx="1645920" cy="365760"/>
+          </a:xfrm>
+          <a:prstGeom prst="rect">
+            <a:avLst/>
+          </a:prstGeom>
+          <a:noFill/>
+        </p:spPr>
+        <p:txBody>
+          <a:bodyPr wrap="square" anchor="b" lIns="45720" rIns="45720" tIns="27432" bIns="27432">
+            <a:spAutoFit/>
+          </a:bodyPr>
+          <a:lstStyle/>
+          <a:p>
+            <a:pPr algn="ctr"/>
+            <a:r>
+              <a:rPr sz="1300" b="0" i="0">
+                <a:solidFill>
+                  <a:srgbClr val="8C8C8C"/>
+                </a:solidFill>
+                <a:latin typeface="Calibri"/>
+              </a:rPr>
+              <a:t>Nov/26</a:t>
+            </a:r>
+          </a:p>
+        </p:txBody>
+      </p:sp>
+      <p:sp>
+        <p:nvSpPr>
+          <p:cNvPr id="24" name="TextBox 23"/>
+          <p:cNvSpPr txBox="1"/>
+          <p:nvPr/>
+        </p:nvSpPr>
+        <p:spPr>
+          <a:xfrm>
+            <a:off x="10149840" y="4206240"/>
+            <a:ext cx="1645920" cy="1097280"/>
+          </a:xfrm>
+          <a:prstGeom prst="rect">
+            <a:avLst/>
+          </a:prstGeom>
+          <a:noFill/>
+        </p:spPr>
+        <p:txBody>
+          <a:bodyPr wrap="square" anchor="t" lIns="45720" rIns="45720" tIns="27432" bIns="27432">
+            <a:spAutoFit/>
+          </a:bodyPr>
+          <a:lstStyle/>
+          <a:p>
+            <a:pPr algn="ctr"/>
+            <a:r>
+              <a:rPr sz="1300" b="0" i="0">
+                <a:solidFill>
+                  <a:srgbClr val="333333"/>
+                </a:solidFill>
+                <a:latin typeface="Calibri"/>
+              </a:rPr>
+              <a:t>Go-live</a:t>
+            </a:r>
+          </a:p>
+        </p:txBody>
+      </p:sp>
+      <p:sp>
+        <p:nvSpPr>
+          <p:cNvPr id="25" name="Rectangle 24"/>
+          <p:cNvSpPr/>
+          <p:nvPr/>
+        </p:nvSpPr>
+        <p:spPr>
+          <a:xfrm>
+            <a:off x="7303769" y="3246120"/>
+            <a:ext cx="27432" cy="1280160"/>
+          </a:xfrm>
+          <a:prstGeom prst="rect">
+            <a:avLst/>
+          </a:prstGeom>
+          <a:solidFill>
+            <a:srgbClr val="F2A900"/>
+          </a:solidFill>
+          <a:ln>
+            <a:noFill/>
+          </a:ln>
+          <a:effectLst/>
+        </p:spPr>
+        <p:style>
+          <a:lnRef idx="1">
+            <a:schemeClr val="accent1"/>
+          </a:lnRef>
+          <a:fillRef idx="3">
+            <a:schemeClr val="accent1"/>
+          </a:fillRef>
+          <a:effectRef idx="2">
+            <a:schemeClr val="accent1"/>
+          </a:effectRef>
+          <a:fontRef idx="minor">
+            <a:schemeClr val="lt1"/>
+          </a:fontRef>
+        </p:style>
+        <p:txBody>
+          <a:bodyPr rtlCol="0" anchor="ctr"/>
+          <a:lstStyle/>
+          <a:p>
+            <a:pPr algn="ctr"/>
+          </a:p>
+        </p:txBody>
+      </p:sp>
+      <p:sp>
+        <p:nvSpPr>
+          <p:cNvPr id="26" name="TextBox 25"/>
+          <p:cNvSpPr txBox="1"/>
+          <p:nvPr/>
+        </p:nvSpPr>
+        <p:spPr>
+          <a:xfrm>
+            <a:off x="6846569" y="2926080"/>
+            <a:ext cx="914400" cy="274320"/>
+          </a:xfrm>
+          <a:prstGeom prst="rect">
+            <a:avLst/>
+          </a:prstGeom>
+          <a:noFill/>
+        </p:spPr>
+        <p:txBody>
+          <a:bodyPr wrap="square" anchor="t" lIns="45720" rIns="45720" tIns="27432" bIns="27432">
+            <a:spAutoFit/>
+          </a:bodyPr>
+          <a:lstStyle/>
+          <a:p>
+            <a:pPr algn="ctr"/>
+            <a:r>
+              <a:rPr sz="1100" b="1" i="0">
+                <a:solidFill>
+                  <a:srgbClr val="F2A900"/>
+                </a:solidFill>
+                <a:latin typeface="Calibri"/>
+              </a:rPr>
+              <a:t>Hoje</a:t>
+            </a:r>
+          </a:p>
+        </p:txBody>
+      </p:sp>
+      <p:sp>
+        <p:nvSpPr>
+          <p:cNvPr id="27" name="Oval 26"/>
+          <p:cNvSpPr/>
+          <p:nvPr/>
+        </p:nvSpPr>
+        <p:spPr>
+          <a:xfrm>
+            <a:off x="457200" y="5852160"/>
+            <a:ext cx="182880" cy="182880"/>
+          </a:xfrm>
+          <a:prstGeom prst="ellipse">
+            <a:avLst/>
+          </a:prstGeom>
+          <a:solidFill>
+            <a:srgbClr val="2E7D32"/>
+          </a:solidFill>
+          <a:ln>
+            <a:noFill/>
+          </a:ln>
+          <a:effectLst/>
+        </p:spPr>
+        <p:style>
+          <a:lnRef idx="1">
+            <a:schemeClr val="accent1"/>
+          </a:lnRef>
+          <a:fillRef idx="3">
+            <a:schemeClr val="accent1"/>
+          </a:fillRef>
+          <a:effectRef idx="2">
+            <a:schemeClr val="accent1"/>
+          </a:effectRef>
+          <a:fontRef idx="minor">
+            <a:schemeClr val="lt1"/>
+          </a:fontRef>
+        </p:style>
+        <p:txBody>
+          <a:bodyPr rtlCol="0" anchor="ctr"/>
+          <a:lstStyle/>
+          <a:p>
+            <a:pPr algn="ctr"/>
+          </a:p>
+        </p:txBody>
+      </p:sp>
+      <p:sp>
+        <p:nvSpPr>
+          <p:cNvPr id="28" name="TextBox 27"/>
+          <p:cNvSpPr txBox="1"/>
+          <p:nvPr/>
+        </p:nvSpPr>
+        <p:spPr>
+          <a:xfrm>
+            <a:off x="685800" y="5806440"/>
+            <a:ext cx="1371600" cy="274320"/>
+          </a:xfrm>
+          <a:prstGeom prst="rect">
+            <a:avLst/>
+          </a:prstGeom>
+          <a:noFill/>
+        </p:spPr>
+        <p:txBody>
+          <a:bodyPr wrap="square" anchor="ctr" lIns="45720" rIns="45720" tIns="27432" bIns="27432">
+            <a:spAutoFit/>
+          </a:bodyPr>
+          <a:lstStyle/>
+          <a:p>
+            <a:pPr algn="l"/>
+            <a:r>
+              <a:rPr sz="1100" b="0" i="0">
+                <a:solidFill>
+                  <a:srgbClr val="8C8C8C"/>
+                </a:solidFill>
+                <a:latin typeface="Calibri"/>
+              </a:rPr>
+              <a:t>Concluído</a:t>
+            </a:r>
+          </a:p>
+        </p:txBody>
+      </p:sp>
+      <p:sp>
+        <p:nvSpPr>
+          <p:cNvPr id="29" name="Oval 28"/>
+          <p:cNvSpPr/>
+          <p:nvPr/>
+        </p:nvSpPr>
+        <p:spPr>
+          <a:xfrm>
+            <a:off x="2011680" y="5852160"/>
+            <a:ext cx="182880" cy="182880"/>
+          </a:xfrm>
+          <a:prstGeom prst="ellipse">
+            <a:avLst/>
+          </a:prstGeom>
+          <a:solidFill>
+            <a:srgbClr val="F9A825"/>
+          </a:solidFill>
+          <a:ln>
+            <a:noFill/>
+          </a:ln>
+          <a:effectLst/>
+        </p:spPr>
+        <p:style>
+          <a:lnRef idx="1">
+            <a:schemeClr val="accent1"/>
+          </a:lnRef>
+          <a:fillRef idx="3">
+            <a:schemeClr val="accent1"/>
+          </a:fillRef>
+          <a:effectRef idx="2">
+            <a:schemeClr val="accent1"/>
+          </a:effectRef>
+          <a:fontRef idx="minor">
+            <a:schemeClr val="lt1"/>
+          </a:fontRef>
+        </p:style>
+        <p:txBody>
+          <a:bodyPr rtlCol="0" anchor="ctr"/>
+          <a:lstStyle/>
+          <a:p>
+            <a:pPr algn="ctr"/>
+          </a:p>
+        </p:txBody>
+      </p:sp>
+      <p:sp>
+        <p:nvSpPr>
+          <p:cNvPr id="30" name="TextBox 29"/>
+          <p:cNvSpPr txBox="1"/>
+          <p:nvPr/>
+        </p:nvSpPr>
+        <p:spPr>
+          <a:xfrm>
+            <a:off x="2240280" y="5806440"/>
+            <a:ext cx="1371600" cy="274320"/>
+          </a:xfrm>
+          <a:prstGeom prst="rect">
+            <a:avLst/>
+          </a:prstGeom>
+          <a:noFill/>
+        </p:spPr>
+        <p:txBody>
+          <a:bodyPr wrap="square" anchor="ctr" lIns="45720" rIns="45720" tIns="27432" bIns="27432">
+            <a:spAutoFit/>
+          </a:bodyPr>
+          <a:lstStyle/>
+          <a:p>
+            <a:pPr algn="l"/>
+            <a:r>
+              <a:rPr sz="1100" b="0" i="0">
+                <a:solidFill>
+                  <a:srgbClr val="8C8C8C"/>
+                </a:solidFill>
+                <a:latin typeface="Calibri"/>
+              </a:rPr>
+              <a:t>Em risco</a:t>
+            </a:r>
+          </a:p>
+        </p:txBody>
+      </p:sp>
+      <p:sp>
+        <p:nvSpPr>
+          <p:cNvPr id="31" name="Oval 30"/>
+          <p:cNvSpPr/>
+          <p:nvPr/>
+        </p:nvSpPr>
+        <p:spPr>
+          <a:xfrm>
+            <a:off x="3566160" y="5852160"/>
+            <a:ext cx="182880" cy="182880"/>
+          </a:xfrm>
+          <a:prstGeom prst="ellipse">
+            <a:avLst/>
+          </a:prstGeom>
+          <a:solidFill>
+            <a:srgbClr val="C62828"/>
+          </a:solidFill>
+          <a:ln>
+            <a:noFill/>
+          </a:ln>
+          <a:effectLst/>
+        </p:spPr>
+        <p:style>
+          <a:lnRef idx="1">
+            <a:schemeClr val="accent1"/>
+          </a:lnRef>
+          <a:fillRef idx="3">
+            <a:schemeClr val="accent1"/>
+          </a:fillRef>
+          <a:effectRef idx="2">
+            <a:schemeClr val="accent1"/>
+          </a:effectRef>
+          <a:fontRef idx="minor">
+            <a:schemeClr val="lt1"/>
+          </a:fontRef>
+        </p:style>
+        <p:txBody>
+          <a:bodyPr rtlCol="0" anchor="ctr"/>
+          <a:lstStyle/>
+          <a:p>
+            <a:pPr algn="ctr"/>
+          </a:p>
+        </p:txBody>
+      </p:sp>
+      <p:sp>
+        <p:nvSpPr>
+          <p:cNvPr id="32" name="TextBox 31"/>
+          <p:cNvSpPr txBox="1"/>
+          <p:nvPr/>
+        </p:nvSpPr>
+        <p:spPr>
+          <a:xfrm>
+            <a:off x="3794760" y="5806440"/>
+            <a:ext cx="1371600" cy="274320"/>
+          </a:xfrm>
+          <a:prstGeom prst="rect">
+            <a:avLst/>
+          </a:prstGeom>
+          <a:noFill/>
+        </p:spPr>
+        <p:txBody>
+          <a:bodyPr wrap="square" anchor="ctr" lIns="45720" rIns="45720" tIns="27432" bIns="27432">
+            <a:spAutoFit/>
+          </a:bodyPr>
+          <a:lstStyle/>
+          <a:p>
+            <a:pPr algn="l"/>
+            <a:r>
+              <a:rPr sz="1100" b="0" i="0">
+                <a:solidFill>
+                  <a:srgbClr val="8C8C8C"/>
+                </a:solidFill>
+                <a:latin typeface="Calibri"/>
+              </a:rPr>
+              <a:t>Atrasado</a:t>
+            </a:r>
+          </a:p>
+        </p:txBody>
+      </p:sp>
+      <p:sp>
+        <p:nvSpPr>
+          <p:cNvPr id="33" name="Oval 32"/>
+          <p:cNvSpPr/>
+          <p:nvPr/>
+        </p:nvSpPr>
+        <p:spPr>
+          <a:xfrm>
+            <a:off x="5120640" y="5852160"/>
+            <a:ext cx="182880" cy="182880"/>
+          </a:xfrm>
+          <a:prstGeom prst="ellipse">
+            <a:avLst/>
+          </a:prstGeom>
+          <a:solidFill>
+            <a:srgbClr val="1F3A5F"/>
+          </a:solidFill>
+          <a:ln>
+            <a:noFill/>
+          </a:ln>
+          <a:effectLst/>
+        </p:spPr>
+        <p:style>
+          <a:lnRef idx="1">
+            <a:schemeClr val="accent1"/>
+          </a:lnRef>
+          <a:fillRef idx="3">
+            <a:schemeClr val="accent1"/>
+          </a:fillRef>
+          <a:effectRef idx="2">
+            <a:schemeClr val="accent1"/>
+          </a:effectRef>
+          <a:fontRef idx="minor">
+            <a:schemeClr val="lt1"/>
+          </a:fontRef>
+        </p:style>
+        <p:txBody>
+          <a:bodyPr rtlCol="0" anchor="ctr"/>
+          <a:lstStyle/>
+          <a:p>
+            <a:pPr algn="ctr"/>
+          </a:p>
+        </p:txBody>
+      </p:sp>
+      <p:sp>
+        <p:nvSpPr>
+          <p:cNvPr id="34" name="TextBox 33"/>
+          <p:cNvSpPr txBox="1"/>
+          <p:nvPr/>
+        </p:nvSpPr>
+        <p:spPr>
+          <a:xfrm>
+            <a:off x="5349240" y="5806440"/>
+            <a:ext cx="1371600" cy="274320"/>
+          </a:xfrm>
+          <a:prstGeom prst="rect">
+            <a:avLst/>
+          </a:prstGeom>
+          <a:noFill/>
+        </p:spPr>
+        <p:txBody>
+          <a:bodyPr wrap="square" anchor="ctr" lIns="45720" rIns="45720" tIns="27432" bIns="27432">
+            <a:spAutoFit/>
+          </a:bodyPr>
+          <a:lstStyle/>
+          <a:p>
+            <a:pPr algn="l"/>
+            <a:r>
+              <a:rPr sz="1100" b="0" i="0">
+                <a:solidFill>
+                  <a:srgbClr val="8C8C8C"/>
+                </a:solidFill>
+                <a:latin typeface="Calibri"/>
+              </a:rPr>
+              <a:t>Planejado</a:t>
+            </a:r>
+          </a:p>
+        </p:txBody>
+      </p:sp>
+    </p:spTree>
+  </p:cSld>
+  <p:clrMapOvr>
+    <a:masterClrMapping/>
+  </p:clrMapOvr>
+</p:sld>
+</file>
+
+<file path=ppt/slides/slide25.xml><?xml version="1.0" encoding="utf-8"?>
+<p:sld xmlns:a="http://schemas.openxmlformats.org/drawingml/2006/main" xmlns:p="http://schemas.openxmlformats.org/presentationml/2006/main" xmlns:r="http://schemas.openxmlformats.org/officeDocument/2006/relationships">
+  <p:cSld>
+    <p:spTree>
+      <p:nvGrpSpPr>
+        <p:cNvPr id="1" name=""/>
+        <p:cNvGrpSpPr/>
+        <p:nvPr/>
+      </p:nvGrpSpPr>
+      <p:grpSpPr/>
+      <p:sp>
+        <p:nvSpPr>
+          <p:cNvPr id="2" name="Title 1"/>
+          <p:cNvSpPr>
+            <a:spLocks noGrp="1"/>
+          </p:cNvSpPr>
+          <p:nvPr>
+            <p:ph type="title"/>
+          </p:nvPr>
+        </p:nvSpPr>
+        <p:spPr>
+          <a:xfrm>
+            <a:off x="457200" y="621792"/>
+            <a:ext cx="11274552" cy="822960"/>
+          </a:xfrm>
+        </p:spPr>
+        <p:txBody>
+          <a:bodyPr wrap="square" anchor="t" lIns="45720" rIns="45720"/>
+          <a:lstStyle/>
+          <a:p>
+            <a:pPr algn="l"/>
+            <a:r>
+              <a:rPr sz="2800" b="1" i="0">
+                <a:solidFill>
+                  <a:srgbClr val="1F3A5F"/>
+                </a:solidFill>
+                <a:latin typeface="Calibri"/>
+              </a:rPr>
+              <a:t>Processo em chevrons com métrica por etapa e etapa atual destacada</a:t>
+            </a:r>
+          </a:p>
+        </p:txBody>
+      </p:sp>
+      <p:sp>
+        <p:nvSpPr>
+          <p:cNvPr id="3" name="TextBox 2"/>
+          <p:cNvSpPr txBox="1"/>
+          <p:nvPr/>
+        </p:nvSpPr>
+        <p:spPr>
+          <a:xfrm>
+            <a:off x="457200" y="91440"/>
+            <a:ext cx="7315200" cy="228600"/>
+          </a:xfrm>
+          <a:prstGeom prst="rect">
+            <a:avLst/>
+          </a:prstGeom>
+          <a:noFill/>
+        </p:spPr>
+        <p:txBody>
+          <a:bodyPr wrap="square" anchor="ctr" lIns="45720" rIns="45720" tIns="27432" bIns="27432">
+            <a:spAutoFit/>
+          </a:bodyPr>
+          <a:lstStyle/>
+          <a:p>
+            <a:pPr algn="l"/>
+            <a:r>
+              <a:rPr sz="900" b="1" i="0">
+                <a:solidFill>
+                  <a:srgbClr val="8C8C8C"/>
+                </a:solidFill>
+                <a:latin typeface="Calibri"/>
+              </a:rPr>
+              <a:t>EMPRESA EXEMPLO  |  CATÁLOGO DE MODELOS</a:t>
+            </a:r>
+          </a:p>
+        </p:txBody>
+      </p:sp>
+      <p:sp>
+        <p:nvSpPr>
+          <p:cNvPr id="4" name="TextBox 3"/>
+          <p:cNvSpPr txBox="1"/>
+          <p:nvPr/>
+        </p:nvSpPr>
+        <p:spPr>
+          <a:xfrm>
+            <a:off x="7772400" y="91440"/>
+            <a:ext cx="3959352" cy="228600"/>
+          </a:xfrm>
+          <a:prstGeom prst="rect">
+            <a:avLst/>
+          </a:prstGeom>
+          <a:noFill/>
+        </p:spPr>
+        <p:txBody>
+          <a:bodyPr wrap="square" anchor="ctr" lIns="45720" rIns="45720" tIns="27432" bIns="27432">
+            <a:spAutoFit/>
+          </a:bodyPr>
+          <a:lstStyle/>
+          <a:p>
+            <a:pPr algn="r"/>
+            <a:r>
+              <a:rPr sz="900" b="0" i="0">
+                <a:solidFill>
+                  <a:srgbClr val="8C8C8C"/>
+                </a:solidFill>
+                <a:latin typeface="Calibri"/>
+              </a:rPr>
+              <a:t>set/2026</a:t>
+            </a:r>
+          </a:p>
+        </p:txBody>
+      </p:sp>
+      <p:sp>
+        <p:nvSpPr>
+          <p:cNvPr id="5" name="TextBox 4"/>
+          <p:cNvSpPr txBox="1"/>
+          <p:nvPr/>
+        </p:nvSpPr>
+        <p:spPr>
+          <a:xfrm>
+            <a:off x="457200" y="384048"/>
+            <a:ext cx="11274552" cy="256032"/>
+          </a:xfrm>
+          <a:prstGeom prst="rect">
+            <a:avLst/>
+          </a:prstGeom>
+          <a:noFill/>
+        </p:spPr>
+        <p:txBody>
+          <a:bodyPr wrap="square" anchor="b" lIns="45720" rIns="45720" tIns="27432" bIns="27432">
+            <a:spAutoFit/>
+          </a:bodyPr>
+          <a:lstStyle/>
+          <a:p>
+            <a:pPr algn="l"/>
+            <a:r>
+              <a:rPr sz="1000" b="1" i="0">
+                <a:solidFill>
+                  <a:srgbClr val="4F81BD"/>
+                </a:solidFill>
+                <a:latin typeface="Calibri"/>
+              </a:rPr>
+              <a:t>FLUXO</a:t>
+            </a:r>
+          </a:p>
+        </p:txBody>
+      </p:sp>
+      <p:sp>
+        <p:nvSpPr>
+          <p:cNvPr id="6" name="TextBox 5"/>
+          <p:cNvSpPr txBox="1"/>
+          <p:nvPr/>
+        </p:nvSpPr>
+        <p:spPr>
+          <a:xfrm>
+            <a:off x="457200" y="6217920"/>
+            <a:ext cx="8531352" cy="365760"/>
+          </a:xfrm>
+          <a:prstGeom prst="rect">
+            <a:avLst/>
+          </a:prstGeom>
+          <a:noFill/>
+        </p:spPr>
+        <p:txBody>
+          <a:bodyPr wrap="square" anchor="ctr" lIns="45720" rIns="45720" tIns="27432" bIns="27432">
+            <a:spAutoFit/>
+          </a:bodyPr>
+          <a:lstStyle/>
+          <a:p>
+            <a:pPr algn="l"/>
+            <a:r>
+              <a:rPr sz="1000" b="0" i="0">
+                <a:solidFill>
+                  <a:srgbClr val="8C8C8C"/>
+                </a:solidFill>
+                <a:latin typeface="Calibri"/>
+              </a:rPr>
+              <a:t>Uso interno</a:t>
+            </a:r>
+          </a:p>
+        </p:txBody>
+      </p:sp>
+      <p:sp>
+        <p:nvSpPr>
+          <p:cNvPr id="7" name="TextBox 6"/>
+          <p:cNvSpPr txBox="1"/>
+          <p:nvPr/>
+        </p:nvSpPr>
+        <p:spPr>
+          <a:xfrm>
+            <a:off x="10817352" y="6217920"/>
+            <a:ext cx="914400" cy="365760"/>
+          </a:xfrm>
+          <a:prstGeom prst="rect">
+            <a:avLst/>
+          </a:prstGeom>
+          <a:noFill/>
+        </p:spPr>
+        <p:txBody>
+          <a:bodyPr wrap="square" anchor="ctr" lIns="45720" rIns="45720" tIns="27432" bIns="27432">
+            <a:spAutoFit/>
+          </a:bodyPr>
+          <a:lstStyle/>
+          <a:p>
+            <a:pPr algn="r"/>
+            <a:r>
+              <a:rPr sz="1000" b="0" i="0">
+                <a:solidFill>
+                  <a:srgbClr val="8C8C8C"/>
+                </a:solidFill>
+                <a:latin typeface="Calibri"/>
+              </a:rPr>
+              <a:t>25</a:t>
+            </a:r>
+          </a:p>
+        </p:txBody>
+      </p:sp>
+      <p:pic>
+        <p:nvPicPr>
+          <p:cNvPr id="8" name="Picture 7" descr="logo-placeholder.png"/>
+          <p:cNvPicPr>
+            <a:picLocks noChangeAspect="1"/>
+          </p:cNvPicPr>
+          <p:nvPr/>
+        </p:nvPicPr>
+        <p:blipFill>
+          <a:blip r:embed="rId2"/>
+          <a:stretch>
+            <a:fillRect/>
+          </a:stretch>
+        </p:blipFill>
+        <p:spPr>
+          <a:xfrm>
+            <a:off x="9692640" y="6245352"/>
+            <a:ext cx="822960" cy="274320"/>
+          </a:xfrm>
+          <a:prstGeom prst="rect">
+            <a:avLst/>
+          </a:prstGeom>
+        </p:spPr>
+      </p:pic>
+      <p:sp>
+        <p:nvSpPr>
+          <p:cNvPr id="9" name="Rectangle 8"/>
+          <p:cNvSpPr/>
+          <p:nvPr/>
+        </p:nvSpPr>
+        <p:spPr>
+          <a:xfrm>
+            <a:off x="457200" y="5349240"/>
+            <a:ext cx="11274552" cy="731520"/>
+          </a:xfrm>
+          <a:prstGeom prst="rect">
+            <a:avLst/>
+          </a:prstGeom>
+          <a:solidFill>
+            <a:srgbClr val="EAF5EA"/>
+          </a:solidFill>
+          <a:ln>
+            <a:noFill/>
+          </a:ln>
+          <a:effectLst/>
+        </p:spPr>
+        <p:style>
+          <a:lnRef idx="1">
+            <a:schemeClr val="accent1"/>
+          </a:lnRef>
+          <a:fillRef idx="3">
+            <a:schemeClr val="accent1"/>
+          </a:fillRef>
+          <a:effectRef idx="2">
+            <a:schemeClr val="accent1"/>
+          </a:effectRef>
+          <a:fontRef idx="minor">
+            <a:schemeClr val="lt1"/>
+          </a:fontRef>
+        </p:style>
+        <p:txBody>
+          <a:bodyPr rtlCol="0" anchor="ctr"/>
+          <a:lstStyle/>
+          <a:p>
+            <a:pPr algn="ctr"/>
+          </a:p>
+        </p:txBody>
+      </p:sp>
+      <p:sp>
+        <p:nvSpPr>
+          <p:cNvPr id="10" name="Rectangle 9"/>
+          <p:cNvSpPr/>
+          <p:nvPr/>
+        </p:nvSpPr>
+        <p:spPr>
+          <a:xfrm>
+            <a:off x="457200" y="5349240"/>
+            <a:ext cx="73152" cy="731520"/>
+          </a:xfrm>
+          <a:prstGeom prst="rect">
+            <a:avLst/>
+          </a:prstGeom>
+          <a:solidFill>
+            <a:srgbClr val="2E7D32"/>
+          </a:solidFill>
+          <a:ln>
+            <a:noFill/>
+          </a:ln>
+          <a:effectLst/>
+        </p:spPr>
+        <p:style>
+          <a:lnRef idx="1">
+            <a:schemeClr val="accent1"/>
+          </a:lnRef>
+          <a:fillRef idx="3">
+            <a:schemeClr val="accent1"/>
+          </a:fillRef>
+          <a:effectRef idx="2">
+            <a:schemeClr val="accent1"/>
+          </a:effectRef>
+          <a:fontRef idx="minor">
+            <a:schemeClr val="lt1"/>
+          </a:fontRef>
+        </p:style>
+        <p:txBody>
+          <a:bodyPr rtlCol="0" anchor="ctr"/>
+          <a:lstStyle/>
+          <a:p>
+            <a:pPr algn="ctr"/>
+          </a:p>
+        </p:txBody>
+      </p:sp>
+      <p:sp>
+        <p:nvSpPr>
+          <p:cNvPr id="11" name="TextBox 10"/>
+          <p:cNvSpPr txBox="1"/>
+          <p:nvPr/>
+        </p:nvSpPr>
+        <p:spPr>
+          <a:xfrm>
+            <a:off x="685800" y="5349240"/>
+            <a:ext cx="2103120" cy="731520"/>
+          </a:xfrm>
+          <a:prstGeom prst="rect">
+            <a:avLst/>
+          </a:prstGeom>
+          <a:noFill/>
+        </p:spPr>
+        <p:txBody>
+          <a:bodyPr wrap="square" anchor="ctr" lIns="45720" rIns="45720" tIns="27432" bIns="27432">
+            <a:spAutoFit/>
+          </a:bodyPr>
+          <a:lstStyle/>
+          <a:p>
+            <a:pPr algn="l"/>
+            <a:r>
+              <a:rPr sz="1000" b="1" i="0">
+                <a:solidFill>
+                  <a:srgbClr val="2E7D32"/>
+                </a:solidFill>
+                <a:latin typeface="Calibri"/>
+              </a:rPr>
+              <a:t>FOCO DE MELHORIA</a:t>
+            </a:r>
+          </a:p>
+        </p:txBody>
+      </p:sp>
+      <p:sp>
+        <p:nvSpPr>
+          <p:cNvPr id="12" name="TextBox 11"/>
+          <p:cNvSpPr txBox="1"/>
+          <p:nvPr/>
+        </p:nvSpPr>
+        <p:spPr>
+          <a:xfrm>
+            <a:off x="2788920" y="5349240"/>
+            <a:ext cx="8759952" cy="731520"/>
+          </a:xfrm>
+          <a:prstGeom prst="rect">
+            <a:avLst/>
+          </a:prstGeom>
+          <a:noFill/>
+        </p:spPr>
+        <p:txBody>
+          <a:bodyPr wrap="square" anchor="ctr" lIns="45720" rIns="45720" tIns="27432" bIns="27432">
+            <a:spAutoFit/>
+          </a:bodyPr>
+          <a:lstStyle/>
+          <a:p>
+            <a:pPr algn="l"/>
+            <a:r>
+              <a:rPr sz="1400" b="1" i="0">
+                <a:solidFill>
+                  <a:srgbClr val="333333"/>
+                </a:solidFill>
+                <a:latin typeface="Calibri"/>
+              </a:rPr>
+              <a:t>Confirmar data do fornecedor no pedido e escalar desvios antes do vencimento.</a:t>
+            </a:r>
+          </a:p>
+        </p:txBody>
+      </p:sp>
+      <p:sp>
+        <p:nvSpPr>
+          <p:cNvPr id="13" name="Pentagon 12"/>
+          <p:cNvSpPr/>
+          <p:nvPr/>
+        </p:nvSpPr>
+        <p:spPr>
+          <a:xfrm>
+            <a:off x="457200" y="2194560"/>
+            <a:ext cx="2727198" cy="1280160"/>
+          </a:xfrm>
+          <a:prstGeom prst="homePlate">
+            <a:avLst/>
+          </a:prstGeom>
+          <a:solidFill>
+            <a:srgbClr val="1F3A5F"/>
+          </a:solidFill>
+          <a:ln>
+            <a:noFill/>
+          </a:ln>
+          <a:effectLst/>
+        </p:spPr>
+        <p:style>
+          <a:lnRef idx="1">
+            <a:schemeClr val="accent1"/>
+          </a:lnRef>
+          <a:fillRef idx="3">
+            <a:schemeClr val="accent1"/>
+          </a:fillRef>
+          <a:effectRef idx="2">
+            <a:schemeClr val="accent1"/>
+          </a:effectRef>
+          <a:fontRef idx="minor">
+            <a:schemeClr val="lt1"/>
+          </a:fontRef>
+        </p:style>
+        <p:txBody>
+          <a:bodyPr rtlCol="0" anchor="ctr" wrap="square" lIns="137160" rIns="274320"/>
+          <a:lstStyle/>
+          <a:p>
+            <a:pPr algn="ctr"/>
+            <a:r>
+              <a:rPr sz="1400" b="1" i="0">
+                <a:solidFill>
+                  <a:srgbClr val="FFFFFF"/>
+                </a:solidFill>
+                <a:latin typeface="Calibri"/>
+              </a:rPr>
+              <a:t>1. Solicitação</a:t>
+            </a:r>
+          </a:p>
+        </p:txBody>
+      </p:sp>
+      <p:sp>
+        <p:nvSpPr>
+          <p:cNvPr id="14" name="Chevron 13"/>
+          <p:cNvSpPr/>
+          <p:nvPr/>
+        </p:nvSpPr>
+        <p:spPr>
+          <a:xfrm>
+            <a:off x="3275838" y="2194560"/>
+            <a:ext cx="2727198" cy="1280160"/>
+          </a:xfrm>
+          <a:prstGeom prst="chevron">
+            <a:avLst/>
+          </a:prstGeom>
+          <a:solidFill>
+            <a:srgbClr val="1F3A5F"/>
+          </a:solidFill>
+          <a:ln>
+            <a:noFill/>
+          </a:ln>
+          <a:effectLst/>
+        </p:spPr>
+        <p:style>
+          <a:lnRef idx="1">
+            <a:schemeClr val="accent1"/>
+          </a:lnRef>
+          <a:fillRef idx="3">
+            <a:schemeClr val="accent1"/>
+          </a:fillRef>
+          <a:effectRef idx="2">
+            <a:schemeClr val="accent1"/>
+          </a:effectRef>
+          <a:fontRef idx="minor">
+            <a:schemeClr val="lt1"/>
+          </a:fontRef>
+        </p:style>
+        <p:txBody>
+          <a:bodyPr rtlCol="0" anchor="ctr" wrap="square" lIns="320040" rIns="274320"/>
+          <a:lstStyle/>
+          <a:p>
+            <a:pPr algn="ctr"/>
+            <a:r>
+              <a:rPr sz="1400" b="1" i="0">
+                <a:solidFill>
+                  <a:srgbClr val="FFFFFF"/>
+                </a:solidFill>
+                <a:latin typeface="Calibri"/>
+              </a:rPr>
+              <a:t>2. Aprovação</a:t>
+            </a:r>
+          </a:p>
+        </p:txBody>
+      </p:sp>
+      <p:sp>
+        <p:nvSpPr>
+          <p:cNvPr id="15" name="TextBox 14"/>
+          <p:cNvSpPr txBox="1"/>
+          <p:nvPr/>
+        </p:nvSpPr>
+        <p:spPr>
+          <a:xfrm>
+            <a:off x="3367278" y="3657600"/>
+            <a:ext cx="2544318" cy="548640"/>
+          </a:xfrm>
+          <a:prstGeom prst="rect">
+            <a:avLst/>
+          </a:prstGeom>
+          <a:noFill/>
+        </p:spPr>
+        <p:txBody>
+          <a:bodyPr wrap="square" anchor="t" lIns="45720" rIns="45720" tIns="27432" bIns="27432">
+            <a:spAutoFit/>
+          </a:bodyPr>
+          <a:lstStyle/>
+          <a:p>
+            <a:pPr algn="l"/>
+            <a:r>
+              <a:rPr sz="2600" b="1" i="0">
+                <a:solidFill>
+                  <a:srgbClr val="1F3A5F"/>
+                </a:solidFill>
+                <a:latin typeface="Calibri"/>
+              </a:rPr>
+              <a:t>7,2 d</a:t>
+            </a:r>
+          </a:p>
+        </p:txBody>
+      </p:sp>
+      <p:sp>
+        <p:nvSpPr>
+          <p:cNvPr id="16" name="TextBox 15"/>
+          <p:cNvSpPr txBox="1"/>
+          <p:nvPr/>
+        </p:nvSpPr>
+        <p:spPr>
+          <a:xfrm>
+            <a:off x="3367278" y="4251960"/>
+            <a:ext cx="2544318" cy="1280160"/>
+          </a:xfrm>
+          <a:prstGeom prst="rect">
+            <a:avLst/>
+          </a:prstGeom>
+          <a:noFill/>
+        </p:spPr>
+        <p:txBody>
+          <a:bodyPr wrap="square" anchor="t" lIns="45720" rIns="45720" tIns="27432" bIns="27432">
+            <a:spAutoFit/>
+          </a:bodyPr>
+          <a:lstStyle/>
+          <a:p>
+            <a:pPr algn="l"/>
+            <a:r>
+              <a:rPr sz="1300" b="0" i="0">
+                <a:solidFill>
+                  <a:srgbClr val="333333"/>
+                </a:solidFill>
+                <a:latin typeface="Calibri"/>
+              </a:rPr>
+              <a:t>até aprovação (n=40)</a:t>
+            </a:r>
+          </a:p>
+        </p:txBody>
+      </p:sp>
+      <p:sp>
+        <p:nvSpPr>
+          <p:cNvPr id="17" name="Chevron 16"/>
+          <p:cNvSpPr/>
+          <p:nvPr/>
+        </p:nvSpPr>
+        <p:spPr>
+          <a:xfrm>
+            <a:off x="6094476" y="2194560"/>
+            <a:ext cx="2727198" cy="1280160"/>
+          </a:xfrm>
+          <a:prstGeom prst="chevron">
+            <a:avLst/>
+          </a:prstGeom>
+          <a:solidFill>
+            <a:srgbClr val="1F3A5F"/>
+          </a:solidFill>
+          <a:ln>
+            <a:noFill/>
+          </a:ln>
+          <a:effectLst/>
+        </p:spPr>
+        <p:style>
+          <a:lnRef idx="1">
+            <a:schemeClr val="accent1"/>
+          </a:lnRef>
+          <a:fillRef idx="3">
+            <a:schemeClr val="accent1"/>
+          </a:fillRef>
+          <a:effectRef idx="2">
+            <a:schemeClr val="accent1"/>
+          </a:effectRef>
+          <a:fontRef idx="minor">
+            <a:schemeClr val="lt1"/>
+          </a:fontRef>
+        </p:style>
+        <p:txBody>
+          <a:bodyPr rtlCol="0" anchor="ctr" wrap="square" lIns="320040" rIns="274320"/>
+          <a:lstStyle/>
+          <a:p>
+            <a:pPr algn="ctr"/>
+            <a:r>
+              <a:rPr sz="1400" b="1" i="0">
+                <a:solidFill>
+                  <a:srgbClr val="FFFFFF"/>
+                </a:solidFill>
+                <a:latin typeface="Calibri"/>
+              </a:rPr>
+              <a:t>3. Pedido</a:t>
+            </a:r>
+          </a:p>
+        </p:txBody>
+      </p:sp>
+      <p:sp>
+        <p:nvSpPr>
+          <p:cNvPr id="18" name="TextBox 17"/>
+          <p:cNvSpPr txBox="1"/>
+          <p:nvPr/>
+        </p:nvSpPr>
+        <p:spPr>
+          <a:xfrm>
+            <a:off x="6185916" y="3657600"/>
+            <a:ext cx="2544318" cy="548640"/>
+          </a:xfrm>
+          <a:prstGeom prst="rect">
+            <a:avLst/>
+          </a:prstGeom>
+          <a:noFill/>
+        </p:spPr>
+        <p:txBody>
+          <a:bodyPr wrap="square" anchor="t" lIns="45720" rIns="45720" tIns="27432" bIns="27432">
+            <a:spAutoFit/>
+          </a:bodyPr>
+          <a:lstStyle/>
+          <a:p>
+            <a:pPr algn="l"/>
+            <a:r>
+              <a:rPr sz="2600" b="1" i="0">
+                <a:solidFill>
+                  <a:srgbClr val="1F3A5F"/>
+                </a:solidFill>
+                <a:latin typeface="Calibri"/>
+              </a:rPr>
+              <a:t>4,3 d</a:t>
+            </a:r>
+          </a:p>
+        </p:txBody>
+      </p:sp>
+      <p:sp>
+        <p:nvSpPr>
+          <p:cNvPr id="19" name="TextBox 18"/>
+          <p:cNvSpPr txBox="1"/>
+          <p:nvPr/>
+        </p:nvSpPr>
+        <p:spPr>
+          <a:xfrm>
+            <a:off x="6185916" y="4251960"/>
+            <a:ext cx="2544318" cy="1280160"/>
+          </a:xfrm>
+          <a:prstGeom prst="rect">
+            <a:avLst/>
+          </a:prstGeom>
+          <a:noFill/>
+        </p:spPr>
+        <p:txBody>
+          <a:bodyPr wrap="square" anchor="t" lIns="45720" rIns="45720" tIns="27432" bIns="27432">
+            <a:spAutoFit/>
+          </a:bodyPr>
+          <a:lstStyle/>
+          <a:p>
+            <a:pPr algn="l"/>
+            <a:r>
+              <a:rPr sz="1300" b="0" i="0">
+                <a:solidFill>
+                  <a:srgbClr val="333333"/>
+                </a:solidFill>
+                <a:latin typeface="Calibri"/>
+              </a:rPr>
+              <a:t>até pedido (n=27)</a:t>
+            </a:r>
+          </a:p>
+        </p:txBody>
+      </p:sp>
+      <p:sp>
+        <p:nvSpPr>
+          <p:cNvPr id="20" name="Chevron 19"/>
+          <p:cNvSpPr/>
+          <p:nvPr/>
+        </p:nvSpPr>
+        <p:spPr>
+          <a:xfrm>
+            <a:off x="8913114" y="2194560"/>
+            <a:ext cx="2727198" cy="1280160"/>
+          </a:xfrm>
+          <a:prstGeom prst="chevron">
+            <a:avLst/>
+          </a:prstGeom>
+          <a:solidFill>
+            <a:srgbClr val="F2A900"/>
+          </a:solidFill>
+          <a:ln>
+            <a:noFill/>
+          </a:ln>
+          <a:effectLst/>
+        </p:spPr>
+        <p:style>
+          <a:lnRef idx="1">
+            <a:schemeClr val="accent1"/>
+          </a:lnRef>
+          <a:fillRef idx="3">
+            <a:schemeClr val="accent1"/>
+          </a:fillRef>
+          <a:effectRef idx="2">
+            <a:schemeClr val="accent1"/>
+          </a:effectRef>
+          <a:fontRef idx="minor">
+            <a:schemeClr val="lt1"/>
+          </a:fontRef>
+        </p:style>
+        <p:txBody>
+          <a:bodyPr rtlCol="0" anchor="ctr" wrap="square" lIns="320040" rIns="274320"/>
+          <a:lstStyle/>
+          <a:p>
+            <a:pPr algn="ctr"/>
+            <a:r>
+              <a:rPr sz="1400" b="1" i="0">
+                <a:solidFill>
+                  <a:srgbClr val="FFFFFF"/>
+                </a:solidFill>
+                <a:latin typeface="Calibri"/>
+              </a:rPr>
+              <a:t>4. Entrega</a:t>
+            </a:r>
+          </a:p>
+        </p:txBody>
+      </p:sp>
+      <p:sp>
+        <p:nvSpPr>
+          <p:cNvPr id="21" name="TextBox 20"/>
+          <p:cNvSpPr txBox="1"/>
+          <p:nvPr/>
+        </p:nvSpPr>
+        <p:spPr>
+          <a:xfrm>
+            <a:off x="9004554" y="3657600"/>
+            <a:ext cx="2544318" cy="548640"/>
+          </a:xfrm>
+          <a:prstGeom prst="rect">
+            <a:avLst/>
+          </a:prstGeom>
+          <a:noFill/>
+        </p:spPr>
+        <p:txBody>
+          <a:bodyPr wrap="square" anchor="t" lIns="45720" rIns="45720" tIns="27432" bIns="27432">
+            <a:spAutoFit/>
+          </a:bodyPr>
+          <a:lstStyle/>
+          <a:p>
+            <a:pPr algn="l"/>
+            <a:r>
+              <a:rPr sz="2600" b="1" i="0">
+                <a:solidFill>
+                  <a:srgbClr val="F2A900"/>
+                </a:solidFill>
+                <a:latin typeface="Calibri"/>
+              </a:rPr>
+              <a:t>39,9 d</a:t>
+            </a:r>
+          </a:p>
+        </p:txBody>
+      </p:sp>
+      <p:sp>
+        <p:nvSpPr>
+          <p:cNvPr id="22" name="TextBox 21"/>
+          <p:cNvSpPr txBox="1"/>
+          <p:nvPr/>
+        </p:nvSpPr>
+        <p:spPr>
+          <a:xfrm>
+            <a:off x="9004554" y="4251960"/>
+            <a:ext cx="2544318" cy="1280160"/>
+          </a:xfrm>
+          <a:prstGeom prst="rect">
+            <a:avLst/>
+          </a:prstGeom>
+          <a:noFill/>
+        </p:spPr>
+        <p:txBody>
+          <a:bodyPr wrap="square" anchor="t" lIns="45720" rIns="45720" tIns="27432" bIns="27432">
+            <a:spAutoFit/>
+          </a:bodyPr>
+          <a:lstStyle/>
+          <a:p>
+            <a:pPr algn="l"/>
+            <a:r>
+              <a:rPr sz="1300" b="0" i="0">
+                <a:solidFill>
+                  <a:srgbClr val="333333"/>
+                </a:solidFill>
+                <a:latin typeface="Calibri"/>
+              </a:rPr>
+              <a:t>até entrega real (n=13)</a:t>
+            </a:r>
+          </a:p>
+        </p:txBody>
+      </p:sp>
+    </p:spTree>
+  </p:cSld>
+  <p:clrMapOvr>
+    <a:masterClrMapping/>
+  </p:clrMapOvr>
+</p:sld>
+</file>
+
+<file path=ppt/slides/slide26.xml><?xml version="1.0" encoding="utf-8"?>
+<p:sld xmlns:a="http://schemas.openxmlformats.org/drawingml/2006/main" xmlns:p="http://schemas.openxmlformats.org/presentationml/2006/main" xmlns:r="http://schemas.openxmlformats.org/officeDocument/2006/relationships">
+  <p:cSld>
+    <p:spTree>
+      <p:nvGrpSpPr>
+        <p:cNvPr id="1" name=""/>
+        <p:cNvGrpSpPr/>
+        <p:nvPr/>
+      </p:nvGrpSpPr>
+      <p:grpSpPr/>
+      <p:sp>
+        <p:nvSpPr>
+          <p:cNvPr id="2" name="Title 1"/>
+          <p:cNvSpPr>
+            <a:spLocks noGrp="1"/>
+          </p:cNvSpPr>
+          <p:nvPr>
+            <p:ph type="title"/>
+          </p:nvPr>
+        </p:nvSpPr>
+        <p:spPr>
+          <a:xfrm>
+            <a:off x="457200" y="621792"/>
+            <a:ext cx="11274552" cy="822960"/>
+          </a:xfrm>
+        </p:spPr>
+        <p:txBody>
+          <a:bodyPr wrap="square" anchor="t" lIns="45720" rIns="45720"/>
+          <a:lstStyle/>
+          <a:p>
+            <a:pPr algn="l"/>
+            <a:r>
+              <a:rPr sz="2800" b="1" i="0">
+                <a:solidFill>
+                  <a:srgbClr val="1F3A5F"/>
+                </a:solidFill>
+                <a:latin typeface="Calibri"/>
+              </a:rPr>
+              <a:t>Matriz 2×2 com quadrante destacado</a:t>
+            </a:r>
+          </a:p>
+        </p:txBody>
+      </p:sp>
+      <p:sp>
+        <p:nvSpPr>
+          <p:cNvPr id="3" name="TextBox 2"/>
+          <p:cNvSpPr txBox="1"/>
+          <p:nvPr/>
+        </p:nvSpPr>
+        <p:spPr>
+          <a:xfrm>
+            <a:off x="457200" y="91440"/>
+            <a:ext cx="7315200" cy="228600"/>
+          </a:xfrm>
+          <a:prstGeom prst="rect">
+            <a:avLst/>
+          </a:prstGeom>
+          <a:noFill/>
+        </p:spPr>
+        <p:txBody>
+          <a:bodyPr wrap="square" anchor="ctr" lIns="45720" rIns="45720" tIns="27432" bIns="27432">
+            <a:spAutoFit/>
+          </a:bodyPr>
+          <a:lstStyle/>
+          <a:p>
+            <a:pPr algn="l"/>
+            <a:r>
+              <a:rPr sz="900" b="1" i="0">
+                <a:solidFill>
+                  <a:srgbClr val="8C8C8C"/>
+                </a:solidFill>
+                <a:latin typeface="Calibri"/>
+              </a:rPr>
+              <a:t>EMPRESA EXEMPLO  |  CATÁLOGO DE MODELOS</a:t>
+            </a:r>
+          </a:p>
+        </p:txBody>
+      </p:sp>
+      <p:sp>
+        <p:nvSpPr>
+          <p:cNvPr id="4" name="TextBox 3"/>
+          <p:cNvSpPr txBox="1"/>
+          <p:nvPr/>
+        </p:nvSpPr>
+        <p:spPr>
+          <a:xfrm>
+            <a:off x="7772400" y="91440"/>
+            <a:ext cx="3959352" cy="228600"/>
+          </a:xfrm>
+          <a:prstGeom prst="rect">
+            <a:avLst/>
+          </a:prstGeom>
+          <a:noFill/>
+        </p:spPr>
+        <p:txBody>
+          <a:bodyPr wrap="square" anchor="ctr" lIns="45720" rIns="45720" tIns="27432" bIns="27432">
+            <a:spAutoFit/>
+          </a:bodyPr>
+          <a:lstStyle/>
+          <a:p>
+            <a:pPr algn="r"/>
+            <a:r>
+              <a:rPr sz="900" b="0" i="0">
+                <a:solidFill>
+                  <a:srgbClr val="8C8C8C"/>
+                </a:solidFill>
+                <a:latin typeface="Calibri"/>
+              </a:rPr>
+              <a:t>set/2026</a:t>
+            </a:r>
+          </a:p>
+        </p:txBody>
+      </p:sp>
+      <p:sp>
+        <p:nvSpPr>
+          <p:cNvPr id="5" name="TextBox 4"/>
+          <p:cNvSpPr txBox="1"/>
+          <p:nvPr/>
+        </p:nvSpPr>
+        <p:spPr>
+          <a:xfrm>
+            <a:off x="457200" y="384048"/>
+            <a:ext cx="11274552" cy="256032"/>
+          </a:xfrm>
+          <a:prstGeom prst="rect">
+            <a:avLst/>
+          </a:prstGeom>
+          <a:noFill/>
+        </p:spPr>
+        <p:txBody>
+          <a:bodyPr wrap="square" anchor="b" lIns="45720" rIns="45720" tIns="27432" bIns="27432">
+            <a:spAutoFit/>
+          </a:bodyPr>
+          <a:lstStyle/>
+          <a:p>
+            <a:pPr algn="l"/>
+            <a:r>
+              <a:rPr sz="1000" b="1" i="0">
+                <a:solidFill>
+                  <a:srgbClr val="4F81BD"/>
+                </a:solidFill>
+                <a:latin typeface="Calibri"/>
+              </a:rPr>
+              <a:t>MATRIZ</a:t>
+            </a:r>
+          </a:p>
+        </p:txBody>
+      </p:sp>
+      <p:sp>
+        <p:nvSpPr>
+          <p:cNvPr id="6" name="TextBox 5"/>
+          <p:cNvSpPr txBox="1"/>
+          <p:nvPr/>
+        </p:nvSpPr>
+        <p:spPr>
+          <a:xfrm>
+            <a:off x="457200" y="6217920"/>
+            <a:ext cx="8531352" cy="365760"/>
+          </a:xfrm>
+          <a:prstGeom prst="rect">
+            <a:avLst/>
+          </a:prstGeom>
+          <a:noFill/>
+        </p:spPr>
+        <p:txBody>
+          <a:bodyPr wrap="square" anchor="ctr" lIns="45720" rIns="45720" tIns="27432" bIns="27432">
+            <a:spAutoFit/>
+          </a:bodyPr>
+          <a:lstStyle/>
+          <a:p>
+            <a:pPr algn="l"/>
+            <a:r>
+              <a:rPr sz="1000" b="0" i="0">
+                <a:solidFill>
+                  <a:srgbClr val="8C8C8C"/>
+                </a:solidFill>
+                <a:latin typeface="Calibri"/>
+              </a:rPr>
+              <a:t>Uso interno</a:t>
+            </a:r>
+          </a:p>
+        </p:txBody>
+      </p:sp>
+      <p:sp>
+        <p:nvSpPr>
+          <p:cNvPr id="7" name="TextBox 6"/>
+          <p:cNvSpPr txBox="1"/>
+          <p:nvPr/>
+        </p:nvSpPr>
+        <p:spPr>
+          <a:xfrm>
+            <a:off x="10817352" y="6217920"/>
+            <a:ext cx="914400" cy="365760"/>
+          </a:xfrm>
+          <a:prstGeom prst="rect">
+            <a:avLst/>
+          </a:prstGeom>
+          <a:noFill/>
+        </p:spPr>
+        <p:txBody>
+          <a:bodyPr wrap="square" anchor="ctr" lIns="45720" rIns="45720" tIns="27432" bIns="27432">
+            <a:spAutoFit/>
+          </a:bodyPr>
+          <a:lstStyle/>
+          <a:p>
+            <a:pPr algn="r"/>
+            <a:r>
+              <a:rPr sz="1000" b="0" i="0">
+                <a:solidFill>
+                  <a:srgbClr val="8C8C8C"/>
+                </a:solidFill>
+                <a:latin typeface="Calibri"/>
+              </a:rPr>
+              <a:t>26</a:t>
             </a:r>
           </a:p>
         </p:txBody>
@@ -17148,7 +18343,7 @@
 </p:sld>
 </file>
 
-<file path=ppt/slides/slide25.xml><?xml version="1.0" encoding="utf-8"?>
+<file path=ppt/slides/slide27.xml><?xml version="1.0" encoding="utf-8"?>
 <p:sld xmlns:a="http://schemas.openxmlformats.org/drawingml/2006/main" xmlns:p="http://schemas.openxmlformats.org/presentationml/2006/main" xmlns:r="http://schemas.openxmlformats.org/officeDocument/2006/relationships">
   <p:cSld>
     <p:bg>
@@ -17279,7 +18474,7 @@
 </p:sld>
 </file>
 
-<file path=ppt/slides/slide26.xml><?xml version="1.0" encoding="utf-8"?>
+<file path=ppt/slides/slide28.xml><?xml version="1.0" encoding="utf-8"?>
 <p:sld xmlns:a="http://schemas.openxmlformats.org/drawingml/2006/main" xmlns:p="http://schemas.openxmlformats.org/presentationml/2006/main" xmlns:r="http://schemas.openxmlformats.org/officeDocument/2006/relationships">
   <p:cSld>
     <p:bg>
@@ -17399,7 +18594,7 @@
 </p:sld>
 </file>
 
-<file path=ppt/slides/slide27.xml><?xml version="1.0" encoding="utf-8"?>
+<file path=ppt/slides/slide29.xml><?xml version="1.0" encoding="utf-8"?>
 <p:sld xmlns:a="http://schemas.openxmlformats.org/drawingml/2006/main" xmlns:p="http://schemas.openxmlformats.org/presentationml/2006/main" xmlns:r="http://schemas.openxmlformats.org/officeDocument/2006/relationships">
   <p:cSld>
     <p:spTree>
@@ -17612,7 +18807,7 @@
                 </a:solidFill>
                 <a:latin typeface="Calibri"/>
               </a:rPr>
-              <a:t>27</a:t>
+              <a:t>29</a:t>
             </a:r>
           </a:p>
         </p:txBody>
@@ -18288,7 +19483,162 @@
 </p:sld>
 </file>
 
-<file path=ppt/slides/slide28.xml><?xml version="1.0" encoding="utf-8"?>
+<file path=ppt/slides/slide3.xml><?xml version="1.0" encoding="utf-8"?>
+<p:sld xmlns:a="http://schemas.openxmlformats.org/drawingml/2006/main" xmlns:p="http://schemas.openxmlformats.org/presentationml/2006/main" xmlns:r="http://schemas.openxmlformats.org/officeDocument/2006/relationships">
+  <p:cSld>
+    <p:bg>
+      <p:bgPr>
+        <a:solidFill>
+          <a:srgbClr val="1F3A5F"/>
+        </a:solidFill>
+        <a:effectLst/>
+      </p:bgPr>
+    </p:bg>
+    <p:spTree>
+      <p:nvGrpSpPr>
+        <p:cNvPr id="1" name=""/>
+        <p:cNvGrpSpPr/>
+        <p:nvPr/>
+      </p:nvGrpSpPr>
+      <p:grpSpPr/>
+      <p:sp>
+        <p:nvSpPr>
+          <p:cNvPr id="2" name="TextBox 1"/>
+          <p:cNvSpPr txBox="1"/>
+          <p:nvPr/>
+        </p:nvSpPr>
+        <p:spPr>
+          <a:xfrm>
+            <a:off x="731520" y="2011680"/>
+            <a:ext cx="1828800" cy="914400"/>
+          </a:xfrm>
+          <a:prstGeom prst="rect">
+            <a:avLst/>
+          </a:prstGeom>
+          <a:noFill/>
+        </p:spPr>
+        <p:txBody>
+          <a:bodyPr wrap="square" anchor="t" lIns="45720" rIns="45720" tIns="27432" bIns="27432">
+            <a:spAutoFit/>
+          </a:bodyPr>
+          <a:lstStyle/>
+          <a:p>
+            <a:pPr algn="l"/>
+            <a:r>
+              <a:rPr sz="6000" b="1" i="0">
+                <a:solidFill>
+                  <a:srgbClr val="F2A900"/>
+                </a:solidFill>
+                <a:latin typeface="Calibri"/>
+              </a:rPr>
+              <a:t>1</a:t>
+            </a:r>
+          </a:p>
+        </p:txBody>
+      </p:sp>
+      <p:sp>
+        <p:nvSpPr>
+          <p:cNvPr id="3" name="TextBox 2"/>
+          <p:cNvSpPr txBox="1"/>
+          <p:nvPr/>
+        </p:nvSpPr>
+        <p:spPr>
+          <a:xfrm>
+            <a:off x="731520" y="3017520"/>
+            <a:ext cx="10698480" cy="1097280"/>
+          </a:xfrm>
+          <a:prstGeom prst="rect">
+            <a:avLst/>
+          </a:prstGeom>
+          <a:noFill/>
+        </p:spPr>
+        <p:txBody>
+          <a:bodyPr wrap="square" anchor="t" lIns="45720" rIns="45720" tIns="27432" bIns="27432">
+            <a:spAutoFit/>
+          </a:bodyPr>
+          <a:lstStyle/>
+          <a:p>
+            <a:pPr algn="l"/>
+            <a:r>
+              <a:rPr sz="3600" b="1" i="0">
+                <a:solidFill>
+                  <a:srgbClr val="FFFFFF"/>
+                </a:solidFill>
+                <a:latin typeface="Calibri"/>
+              </a:rPr>
+              <a:t>Abertura</a:t>
+            </a:r>
+          </a:p>
+        </p:txBody>
+      </p:sp>
+      <p:pic>
+        <p:nvPicPr>
+          <p:cNvPr id="4" name="Picture 3" descr="logo-placeholder-light.png"/>
+          <p:cNvPicPr>
+            <a:picLocks noChangeAspect="1"/>
+          </p:cNvPicPr>
+          <p:nvPr/>
+        </p:nvPicPr>
+        <p:blipFill>
+          <a:blip r:embed="rId2"/>
+          <a:stretch>
+            <a:fillRect/>
+          </a:stretch>
+        </p:blipFill>
+        <p:spPr>
+          <a:xfrm>
+            <a:off x="10607040" y="457200"/>
+            <a:ext cx="1097280" cy="365760"/>
+          </a:xfrm>
+          <a:prstGeom prst="rect">
+            <a:avLst/>
+          </a:prstGeom>
+        </p:spPr>
+      </p:pic>
+      <p:sp>
+        <p:nvSpPr>
+          <p:cNvPr id="5" name="TextBox 4"/>
+          <p:cNvSpPr txBox="1"/>
+          <p:nvPr/>
+        </p:nvSpPr>
+        <p:spPr>
+          <a:xfrm>
+            <a:off x="731520" y="4114800"/>
+            <a:ext cx="10698480" cy="731520"/>
+          </a:xfrm>
+          <a:prstGeom prst="rect">
+            <a:avLst/>
+          </a:prstGeom>
+          <a:noFill/>
+        </p:spPr>
+        <p:txBody>
+          <a:bodyPr wrap="square" anchor="t" lIns="45720" rIns="45720" tIns="27432" bIns="27432">
+            <a:spAutoFit/>
+          </a:bodyPr>
+          <a:lstStyle/>
+          <a:p>
+            <a:pPr algn="l"/>
+            <a:r>
+              <a:rPr sz="1800" b="0" i="0">
+                <a:solidFill>
+                  <a:srgbClr val="D9E1EA"/>
+                </a:solidFill>
+                <a:latin typeface="Calibri"/>
+              </a:rPr>
+              <a:t>Sumário, KPIs e número grande</a:t>
+            </a:r>
+          </a:p>
+        </p:txBody>
+      </p:sp>
+    </p:spTree>
+  </p:cSld>
+  <p:clrMapOvr>
+    <a:masterClrMapping/>
+  </p:clrMapOvr>
+</p:sld>
+</file>
+
+<file path=ppt/slides/slide30.xml><?xml version="1.0" encoding="utf-8"?>
 <p:sld xmlns:a="http://schemas.openxmlformats.org/drawingml/2006/main" xmlns:p="http://schemas.openxmlformats.org/presentationml/2006/main" xmlns:r="http://schemas.openxmlformats.org/officeDocument/2006/relationships">
   <p:cSld>
     <p:spTree>
@@ -18501,7 +19851,7 @@
                 </a:solidFill>
                 <a:latin typeface="Calibri"/>
               </a:rPr>
-              <a:t>28</a:t>
+              <a:t>30</a:t>
             </a:r>
           </a:p>
         </p:txBody>
@@ -19194,7 +20544,7 @@
 </p:sld>
 </file>
 
-<file path=ppt/slides/slide29.xml><?xml version="1.0" encoding="utf-8"?>
+<file path=ppt/slides/slide31.xml><?xml version="1.0" encoding="utf-8"?>
 <p:sld xmlns:a="http://schemas.openxmlformats.org/drawingml/2006/main" xmlns:p="http://schemas.openxmlformats.org/presentationml/2006/main" xmlns:r="http://schemas.openxmlformats.org/officeDocument/2006/relationships">
   <p:cSld>
     <p:bg>
@@ -19350,161 +20700,6 @@
           </a:prstGeom>
         </p:spPr>
       </p:pic>
-    </p:spTree>
-  </p:cSld>
-  <p:clrMapOvr>
-    <a:masterClrMapping/>
-  </p:clrMapOvr>
-</p:sld>
-</file>
-
-<file path=ppt/slides/slide3.xml><?xml version="1.0" encoding="utf-8"?>
-<p:sld xmlns:a="http://schemas.openxmlformats.org/drawingml/2006/main" xmlns:p="http://schemas.openxmlformats.org/presentationml/2006/main" xmlns:r="http://schemas.openxmlformats.org/officeDocument/2006/relationships">
-  <p:cSld>
-    <p:bg>
-      <p:bgPr>
-        <a:solidFill>
-          <a:srgbClr val="1F3A5F"/>
-        </a:solidFill>
-        <a:effectLst/>
-      </p:bgPr>
-    </p:bg>
-    <p:spTree>
-      <p:nvGrpSpPr>
-        <p:cNvPr id="1" name=""/>
-        <p:cNvGrpSpPr/>
-        <p:nvPr/>
-      </p:nvGrpSpPr>
-      <p:grpSpPr/>
-      <p:sp>
-        <p:nvSpPr>
-          <p:cNvPr id="2" name="TextBox 1"/>
-          <p:cNvSpPr txBox="1"/>
-          <p:nvPr/>
-        </p:nvSpPr>
-        <p:spPr>
-          <a:xfrm>
-            <a:off x="731520" y="2011680"/>
-            <a:ext cx="1828800" cy="914400"/>
-          </a:xfrm>
-          <a:prstGeom prst="rect">
-            <a:avLst/>
-          </a:prstGeom>
-          <a:noFill/>
-        </p:spPr>
-        <p:txBody>
-          <a:bodyPr wrap="square" anchor="t" lIns="45720" rIns="45720" tIns="27432" bIns="27432">
-            <a:spAutoFit/>
-          </a:bodyPr>
-          <a:lstStyle/>
-          <a:p>
-            <a:pPr algn="l"/>
-            <a:r>
-              <a:rPr sz="6000" b="1" i="0">
-                <a:solidFill>
-                  <a:srgbClr val="F2A900"/>
-                </a:solidFill>
-                <a:latin typeface="Calibri"/>
-              </a:rPr>
-              <a:t>1</a:t>
-            </a:r>
-          </a:p>
-        </p:txBody>
-      </p:sp>
-      <p:sp>
-        <p:nvSpPr>
-          <p:cNvPr id="3" name="TextBox 2"/>
-          <p:cNvSpPr txBox="1"/>
-          <p:nvPr/>
-        </p:nvSpPr>
-        <p:spPr>
-          <a:xfrm>
-            <a:off x="731520" y="3017520"/>
-            <a:ext cx="10698480" cy="1097280"/>
-          </a:xfrm>
-          <a:prstGeom prst="rect">
-            <a:avLst/>
-          </a:prstGeom>
-          <a:noFill/>
-        </p:spPr>
-        <p:txBody>
-          <a:bodyPr wrap="square" anchor="t" lIns="45720" rIns="45720" tIns="27432" bIns="27432">
-            <a:spAutoFit/>
-          </a:bodyPr>
-          <a:lstStyle/>
-          <a:p>
-            <a:pPr algn="l"/>
-            <a:r>
-              <a:rPr sz="3600" b="1" i="0">
-                <a:solidFill>
-                  <a:srgbClr val="FFFFFF"/>
-                </a:solidFill>
-                <a:latin typeface="Calibri"/>
-              </a:rPr>
-              <a:t>Abertura</a:t>
-            </a:r>
-          </a:p>
-        </p:txBody>
-      </p:sp>
-      <p:pic>
-        <p:nvPicPr>
-          <p:cNvPr id="4" name="Picture 3" descr="logo-placeholder-light.png"/>
-          <p:cNvPicPr>
-            <a:picLocks noChangeAspect="1"/>
-          </p:cNvPicPr>
-          <p:nvPr/>
-        </p:nvPicPr>
-        <p:blipFill>
-          <a:blip r:embed="rId2"/>
-          <a:stretch>
-            <a:fillRect/>
-          </a:stretch>
-        </p:blipFill>
-        <p:spPr>
-          <a:xfrm>
-            <a:off x="10607040" y="457200"/>
-            <a:ext cx="1097280" cy="365760"/>
-          </a:xfrm>
-          <a:prstGeom prst="rect">
-            <a:avLst/>
-          </a:prstGeom>
-        </p:spPr>
-      </p:pic>
-      <p:sp>
-        <p:nvSpPr>
-          <p:cNvPr id="5" name="TextBox 4"/>
-          <p:cNvSpPr txBox="1"/>
-          <p:nvPr/>
-        </p:nvSpPr>
-        <p:spPr>
-          <a:xfrm>
-            <a:off x="731520" y="4114800"/>
-            <a:ext cx="10698480" cy="731520"/>
-          </a:xfrm>
-          <a:prstGeom prst="rect">
-            <a:avLst/>
-          </a:prstGeom>
-          <a:noFill/>
-        </p:spPr>
-        <p:txBody>
-          <a:bodyPr wrap="square" anchor="t" lIns="45720" rIns="45720" tIns="27432" bIns="27432">
-            <a:spAutoFit/>
-          </a:bodyPr>
-          <a:lstStyle/>
-          <a:p>
-            <a:pPr algn="l"/>
-            <a:r>
-              <a:rPr sz="1800" b="0" i="0">
-                <a:solidFill>
-                  <a:srgbClr val="D9E1EA"/>
-                </a:solidFill>
-                <a:latin typeface="Calibri"/>
-              </a:rPr>
-              <a:t>Sumário, KPIs e número grande</a:t>
-            </a:r>
-          </a:p>
-        </p:txBody>
-      </p:sp>
     </p:spTree>
   </p:cSld>
   <p:clrMapOvr>
@@ -23952,7 +25147,7 @@
       </p:pic>
       <p:graphicFrame>
         <p:nvGraphicFramePr>
-          <p:cNvPr id="10" name="Chart 9"/>
+          <p:cNvPr id="10" name="Chart 9" descr="Barras horizontais ordenadas com destaque em accent"/>
           <p:cNvGraphicFramePr>
             <a:graphicFrameLocks noGrp="1"/>
           </p:cNvGraphicFramePr>

--- a/examples/todos-os-modelos.pptx
+++ b/examples/todos-os-modelos.pptx
@@ -36,6 +36,10 @@
     <p:sldId id="284" r:id="rId36"/>
     <p:sldId id="285" r:id="rId37"/>
     <p:sldId id="286" r:id="rId38"/>
+    <p:sldId id="287" r:id="rId39"/>
+    <p:sldId id="288" r:id="rId40"/>
+    <p:sldId id="289" r:id="rId41"/>
+    <p:sldId id="290" r:id="rId42"/>
   </p:sldIdLst>
   <p:sldSz cx="12191695" cy="6858000" type="screen4x3"/>
   <p:notesSz cx="6858000" cy="9144000"/>
@@ -20545,6 +20549,4886 @@
 </file>
 
 <file path=ppt/slides/slide31.xml><?xml version="1.0" encoding="utf-8"?>
+<p:sld xmlns:a="http://schemas.openxmlformats.org/drawingml/2006/main" xmlns:p="http://schemas.openxmlformats.org/presentationml/2006/main" xmlns:r="http://schemas.openxmlformats.org/officeDocument/2006/relationships">
+  <p:cSld>
+    <p:bg>
+      <p:bgPr>
+        <a:solidFill>
+          <a:srgbClr val="1F3A5F"/>
+        </a:solidFill>
+        <a:effectLst/>
+      </p:bgPr>
+    </p:bg>
+    <p:spTree>
+      <p:nvGrpSpPr>
+        <p:cNvPr id="1" name=""/>
+        <p:cNvGrpSpPr/>
+        <p:nvPr/>
+      </p:nvGrpSpPr>
+      <p:grpSpPr/>
+      <p:sp>
+        <p:nvSpPr>
+          <p:cNvPr id="2" name="TextBox 1"/>
+          <p:cNvSpPr txBox="1"/>
+          <p:nvPr/>
+        </p:nvSpPr>
+        <p:spPr>
+          <a:xfrm>
+            <a:off x="731520" y="2011680"/>
+            <a:ext cx="1828800" cy="914400"/>
+          </a:xfrm>
+          <a:prstGeom prst="rect">
+            <a:avLst/>
+          </a:prstGeom>
+          <a:noFill/>
+        </p:spPr>
+        <p:txBody>
+          <a:bodyPr wrap="square" anchor="t" lIns="45720" rIns="45720" tIns="27432" bIns="27432">
+            <a:spAutoFit/>
+          </a:bodyPr>
+          <a:lstStyle/>
+          <a:p>
+            <a:pPr algn="l"/>
+            <a:r>
+              <a:rPr sz="6000" b="1" i="0">
+                <a:solidFill>
+                  <a:srgbClr val="F2A900"/>
+                </a:solidFill>
+                <a:latin typeface="Calibri"/>
+              </a:rPr>
+              <a:t>A</a:t>
+            </a:r>
+          </a:p>
+        </p:txBody>
+      </p:sp>
+      <p:sp>
+        <p:nvSpPr>
+          <p:cNvPr id="3" name="TextBox 2"/>
+          <p:cNvSpPr txBox="1"/>
+          <p:nvPr/>
+        </p:nvSpPr>
+        <p:spPr>
+          <a:xfrm>
+            <a:off x="731520" y="3017520"/>
+            <a:ext cx="10698480" cy="1097280"/>
+          </a:xfrm>
+          <a:prstGeom prst="rect">
+            <a:avLst/>
+          </a:prstGeom>
+          <a:noFill/>
+        </p:spPr>
+        <p:txBody>
+          <a:bodyPr wrap="square" anchor="t" lIns="45720" rIns="45720" tIns="27432" bIns="27432">
+            <a:spAutoFit/>
+          </a:bodyPr>
+          <a:lstStyle/>
+          <a:p>
+            <a:pPr algn="l"/>
+            <a:r>
+              <a:rPr sz="3600" b="1" i="0">
+                <a:solidFill>
+                  <a:srgbClr val="FFFFFF"/>
+                </a:solidFill>
+                <a:latin typeface="Calibri"/>
+              </a:rPr>
+              <a:t>Anexos</a:t>
+            </a:r>
+          </a:p>
+        </p:txBody>
+      </p:sp>
+      <p:pic>
+        <p:nvPicPr>
+          <p:cNvPr id="4" name="Picture 3" descr="logo-placeholder-light.png"/>
+          <p:cNvPicPr>
+            <a:picLocks noChangeAspect="1"/>
+          </p:cNvPicPr>
+          <p:nvPr/>
+        </p:nvPicPr>
+        <p:blipFill>
+          <a:blip r:embed="rId2"/>
+          <a:stretch>
+            <a:fillRect/>
+          </a:stretch>
+        </p:blipFill>
+        <p:spPr>
+          <a:xfrm>
+            <a:off x="10607040" y="457200"/>
+            <a:ext cx="1097280" cy="365760"/>
+          </a:xfrm>
+          <a:prstGeom prst="rect">
+            <a:avLst/>
+          </a:prstGeom>
+        </p:spPr>
+      </p:pic>
+    </p:spTree>
+  </p:cSld>
+  <p:clrMapOvr>
+    <a:masterClrMapping/>
+  </p:clrMapOvr>
+</p:sld>
+</file>
+
+<file path=ppt/slides/slide32.xml><?xml version="1.0" encoding="utf-8"?>
+<p:sld xmlns:a="http://schemas.openxmlformats.org/drawingml/2006/main" xmlns:p="http://schemas.openxmlformats.org/presentationml/2006/main" xmlns:r="http://schemas.openxmlformats.org/officeDocument/2006/relationships">
+  <p:cSld>
+    <p:spTree>
+      <p:nvGrpSpPr>
+        <p:cNvPr id="1" name=""/>
+        <p:cNvGrpSpPr/>
+        <p:nvPr/>
+      </p:nvGrpSpPr>
+      <p:grpSpPr/>
+      <p:sp>
+        <p:nvSpPr>
+          <p:cNvPr id="2" name="Title 1"/>
+          <p:cNvSpPr>
+            <a:spLocks noGrp="1"/>
+          </p:cNvSpPr>
+          <p:nvPr>
+            <p:ph type="title"/>
+          </p:nvPr>
+        </p:nvSpPr>
+        <p:spPr>
+          <a:xfrm>
+            <a:off x="457200" y="621792"/>
+            <a:ext cx="11274552" cy="822960"/>
+          </a:xfrm>
+        </p:spPr>
+        <p:txBody>
+          <a:bodyPr wrap="square" anchor="t" lIns="45720" rIns="45720"/>
+          <a:lstStyle/>
+          <a:p>
+            <a:pPr algn="l"/>
+            <a:r>
+              <a:rPr sz="2800" b="1" i="0">
+                <a:solidFill>
+                  <a:srgbClr val="1F3A5F"/>
+                </a:solidFill>
+                <a:latin typeface="Calibri"/>
+              </a:rPr>
+              <a:t>Tabela longa paginada automaticamente (25 linhas) (1/3)</a:t>
+            </a:r>
+          </a:p>
+        </p:txBody>
+      </p:sp>
+      <p:sp>
+        <p:nvSpPr>
+          <p:cNvPr id="3" name="TextBox 2"/>
+          <p:cNvSpPr txBox="1"/>
+          <p:nvPr/>
+        </p:nvSpPr>
+        <p:spPr>
+          <a:xfrm>
+            <a:off x="457200" y="91440"/>
+            <a:ext cx="7315200" cy="228600"/>
+          </a:xfrm>
+          <a:prstGeom prst="rect">
+            <a:avLst/>
+          </a:prstGeom>
+          <a:noFill/>
+        </p:spPr>
+        <p:txBody>
+          <a:bodyPr wrap="square" anchor="ctr" lIns="45720" rIns="45720" tIns="27432" bIns="27432">
+            <a:spAutoFit/>
+          </a:bodyPr>
+          <a:lstStyle/>
+          <a:p>
+            <a:pPr algn="l"/>
+            <a:r>
+              <a:rPr sz="900" b="1" i="0">
+                <a:solidFill>
+                  <a:srgbClr val="8C8C8C"/>
+                </a:solidFill>
+                <a:latin typeface="Calibri"/>
+              </a:rPr>
+              <a:t>EMPRESA EXEMPLO  |  CATÁLOGO DE MODELOS</a:t>
+            </a:r>
+          </a:p>
+        </p:txBody>
+      </p:sp>
+      <p:sp>
+        <p:nvSpPr>
+          <p:cNvPr id="4" name="TextBox 3"/>
+          <p:cNvSpPr txBox="1"/>
+          <p:nvPr/>
+        </p:nvSpPr>
+        <p:spPr>
+          <a:xfrm>
+            <a:off x="7772400" y="91440"/>
+            <a:ext cx="3959352" cy="228600"/>
+          </a:xfrm>
+          <a:prstGeom prst="rect">
+            <a:avLst/>
+          </a:prstGeom>
+          <a:noFill/>
+        </p:spPr>
+        <p:txBody>
+          <a:bodyPr wrap="square" anchor="ctr" lIns="45720" rIns="45720" tIns="27432" bIns="27432">
+            <a:spAutoFit/>
+          </a:bodyPr>
+          <a:lstStyle/>
+          <a:p>
+            <a:pPr algn="r"/>
+            <a:r>
+              <a:rPr sz="900" b="0" i="0">
+                <a:solidFill>
+                  <a:srgbClr val="8C8C8C"/>
+                </a:solidFill>
+                <a:latin typeface="Calibri"/>
+              </a:rPr>
+              <a:t>set/2026</a:t>
+            </a:r>
+          </a:p>
+        </p:txBody>
+      </p:sp>
+      <p:sp>
+        <p:nvSpPr>
+          <p:cNvPr id="5" name="TextBox 4"/>
+          <p:cNvSpPr txBox="1"/>
+          <p:nvPr/>
+        </p:nvSpPr>
+        <p:spPr>
+          <a:xfrm>
+            <a:off x="457200" y="384048"/>
+            <a:ext cx="11274552" cy="256032"/>
+          </a:xfrm>
+          <a:prstGeom prst="rect">
+            <a:avLst/>
+          </a:prstGeom>
+          <a:noFill/>
+        </p:spPr>
+        <p:txBody>
+          <a:bodyPr wrap="square" anchor="b" lIns="45720" rIns="45720" tIns="27432" bIns="27432">
+            <a:spAutoFit/>
+          </a:bodyPr>
+          <a:lstStyle/>
+          <a:p>
+            <a:pPr algn="l"/>
+            <a:r>
+              <a:rPr sz="1000" b="1" i="0">
+                <a:solidFill>
+                  <a:srgbClr val="4F81BD"/>
+                </a:solidFill>
+                <a:latin typeface="Calibri"/>
+              </a:rPr>
+              <a:t>ANEXO</a:t>
+            </a:r>
+          </a:p>
+        </p:txBody>
+      </p:sp>
+      <p:sp>
+        <p:nvSpPr>
+          <p:cNvPr id="6" name="TextBox 5"/>
+          <p:cNvSpPr txBox="1"/>
+          <p:nvPr/>
+        </p:nvSpPr>
+        <p:spPr>
+          <a:xfrm>
+            <a:off x="457200" y="6217920"/>
+            <a:ext cx="8531352" cy="365760"/>
+          </a:xfrm>
+          <a:prstGeom prst="rect">
+            <a:avLst/>
+          </a:prstGeom>
+          <a:noFill/>
+        </p:spPr>
+        <p:txBody>
+          <a:bodyPr wrap="square" anchor="ctr" lIns="45720" rIns="45720" tIns="27432" bIns="27432">
+            <a:spAutoFit/>
+          </a:bodyPr>
+          <a:lstStyle/>
+          <a:p>
+            <a:pPr algn="l"/>
+            <a:r>
+              <a:rPr sz="1000" b="0" i="0">
+                <a:solidFill>
+                  <a:srgbClr val="8C8C8C"/>
+                </a:solidFill>
+                <a:latin typeface="Calibri"/>
+              </a:rPr>
+              <a:t>Fonte: Base de portfólio (exemplo)   |   Uso interno</a:t>
+            </a:r>
+          </a:p>
+        </p:txBody>
+      </p:sp>
+      <p:sp>
+        <p:nvSpPr>
+          <p:cNvPr id="7" name="TextBox 6"/>
+          <p:cNvSpPr txBox="1"/>
+          <p:nvPr/>
+        </p:nvSpPr>
+        <p:spPr>
+          <a:xfrm>
+            <a:off x="10817352" y="6217920"/>
+            <a:ext cx="914400" cy="365760"/>
+          </a:xfrm>
+          <a:prstGeom prst="rect">
+            <a:avLst/>
+          </a:prstGeom>
+          <a:noFill/>
+        </p:spPr>
+        <p:txBody>
+          <a:bodyPr wrap="square" anchor="ctr" lIns="45720" rIns="45720" tIns="27432" bIns="27432">
+            <a:spAutoFit/>
+          </a:bodyPr>
+          <a:lstStyle/>
+          <a:p>
+            <a:pPr algn="r"/>
+            <a:r>
+              <a:rPr sz="1000" b="0" i="0">
+                <a:solidFill>
+                  <a:srgbClr val="8C8C8C"/>
+                </a:solidFill>
+                <a:latin typeface="Calibri"/>
+              </a:rPr>
+              <a:t>32</a:t>
+            </a:r>
+          </a:p>
+        </p:txBody>
+      </p:sp>
+      <p:pic>
+        <p:nvPicPr>
+          <p:cNvPr id="8" name="Picture 7" descr="logo-placeholder.png"/>
+          <p:cNvPicPr>
+            <a:picLocks noChangeAspect="1"/>
+          </p:cNvPicPr>
+          <p:nvPr/>
+        </p:nvPicPr>
+        <p:blipFill>
+          <a:blip r:embed="rId2"/>
+          <a:stretch>
+            <a:fillRect/>
+          </a:stretch>
+        </p:blipFill>
+        <p:spPr>
+          <a:xfrm>
+            <a:off x="9692640" y="6245352"/>
+            <a:ext cx="822960" cy="274320"/>
+          </a:xfrm>
+          <a:prstGeom prst="rect">
+            <a:avLst/>
+          </a:prstGeom>
+        </p:spPr>
+      </p:pic>
+      <p:graphicFrame>
+        <p:nvGraphicFramePr>
+          <p:cNvPr id="9" name="Table 8"/>
+          <p:cNvGraphicFramePr>
+            <a:graphicFrameLocks noGrp="1"/>
+          </p:cNvGraphicFramePr>
+          <p:nvPr/>
+        </p:nvGraphicFramePr>
+        <p:xfrm>
+          <a:off x="457200" y="1737360"/>
+          <a:ext cx="11274552" cy="4389120"/>
+        </p:xfrm>
+        <a:graphic>
+          <a:graphicData uri="http://schemas.openxmlformats.org/drawingml/2006/table">
+            <a:tbl>
+              <a:tblPr firstRow="1">
+                <a:tableStyleId>{5C22544A-7EE6-4342-B048-85BDC9FD1C3A}</a:tableStyleId>
+              </a:tblPr>
+              <a:tblGrid>
+                <a:gridCol w="1879092"/>
+                <a:gridCol w="1879092"/>
+                <a:gridCol w="1879092"/>
+                <a:gridCol w="1879092"/>
+                <a:gridCol w="1879092"/>
+                <a:gridCol w="1879092"/>
+              </a:tblGrid>
+              <a:tr h="399010">
+                <a:tc>
+                  <a:txBody>
+                    <a:bodyPr wrap="square"/>
+                    <a:lstStyle/>
+                    <a:p>
+                      <a:pPr algn="l"/>
+                      <a:r>
+                        <a:rPr sz="1200" b="1" i="0">
+                          <a:solidFill>
+                            <a:srgbClr val="FFFFFF"/>
+                          </a:solidFill>
+                          <a:latin typeface="Calibri"/>
+                        </a:rPr>
+                        <a:t>ID</a:t>
+                      </a:r>
+                    </a:p>
+                  </a:txBody>
+                  <a:tcPr marL="73152" marR="73152" marT="27432" marB="27432" anchor="ctr">
+                    <a:solidFill>
+                      <a:srgbClr val="1F3A5F"/>
+                    </a:solidFill>
+                  </a:tcPr>
+                </a:tc>
+                <a:tc>
+                  <a:txBody>
+                    <a:bodyPr wrap="square"/>
+                    <a:lstStyle/>
+                    <a:p>
+                      <a:pPr algn="l"/>
+                      <a:r>
+                        <a:rPr sz="1200" b="1" i="0">
+                          <a:solidFill>
+                            <a:srgbClr val="FFFFFF"/>
+                          </a:solidFill>
+                          <a:latin typeface="Calibri"/>
+                        </a:rPr>
+                        <a:t>Projeto</a:t>
+                      </a:r>
+                    </a:p>
+                  </a:txBody>
+                  <a:tcPr marL="73152" marR="73152" marT="27432" marB="27432" anchor="ctr">
+                    <a:solidFill>
+                      <a:srgbClr val="1F3A5F"/>
+                    </a:solidFill>
+                  </a:tcPr>
+                </a:tc>
+                <a:tc>
+                  <a:txBody>
+                    <a:bodyPr wrap="square"/>
+                    <a:lstStyle/>
+                    <a:p>
+                      <a:pPr algn="l"/>
+                      <a:r>
+                        <a:rPr sz="1200" b="1" i="0">
+                          <a:solidFill>
+                            <a:srgbClr val="FFFFFF"/>
+                          </a:solidFill>
+                          <a:latin typeface="Calibri"/>
+                        </a:rPr>
+                        <a:t>Status</a:t>
+                      </a:r>
+                    </a:p>
+                  </a:txBody>
+                  <a:tcPr marL="73152" marR="73152" marT="27432" marB="27432" anchor="ctr">
+                    <a:solidFill>
+                      <a:srgbClr val="1F3A5F"/>
+                    </a:solidFill>
+                  </a:tcPr>
+                </a:tc>
+                <a:tc>
+                  <a:txBody>
+                    <a:bodyPr wrap="square"/>
+                    <a:lstStyle/>
+                    <a:p>
+                      <a:pPr algn="ctr"/>
+                      <a:r>
+                        <a:rPr sz="1200" b="1" i="0">
+                          <a:solidFill>
+                            <a:srgbClr val="FFFFFF"/>
+                          </a:solidFill>
+                          <a:latin typeface="Calibri"/>
+                        </a:rPr>
+                        <a:t>Risco</a:t>
+                      </a:r>
+                    </a:p>
+                  </a:txBody>
+                  <a:tcPr marL="73152" marR="73152" marT="27432" marB="27432" anchor="ctr">
+                    <a:solidFill>
+                      <a:srgbClr val="1F3A5F"/>
+                    </a:solidFill>
+                  </a:tcPr>
+                </a:tc>
+                <a:tc>
+                  <a:txBody>
+                    <a:bodyPr wrap="square"/>
+                    <a:lstStyle/>
+                    <a:p>
+                      <a:pPr algn="r"/>
+                      <a:r>
+                        <a:rPr sz="1200" b="1" i="0">
+                          <a:solidFill>
+                            <a:srgbClr val="FFFFFF"/>
+                          </a:solidFill>
+                          <a:latin typeface="Calibri"/>
+                        </a:rPr>
+                        <a:t>Conclusão</a:t>
+                      </a:r>
+                    </a:p>
+                  </a:txBody>
+                  <a:tcPr marL="73152" marR="73152" marT="27432" marB="27432" anchor="ctr">
+                    <a:solidFill>
+                      <a:srgbClr val="1F3A5F"/>
+                    </a:solidFill>
+                  </a:tcPr>
+                </a:tc>
+                <a:tc>
+                  <a:txBody>
+                    <a:bodyPr wrap="square"/>
+                    <a:lstStyle/>
+                    <a:p>
+                      <a:pPr algn="r"/>
+                      <a:r>
+                        <a:rPr sz="1200" b="1" i="0">
+                          <a:solidFill>
+                            <a:srgbClr val="FFFFFF"/>
+                          </a:solidFill>
+                          <a:latin typeface="Calibri"/>
+                        </a:rPr>
+                        <a:t>Orçamento</a:t>
+                      </a:r>
+                    </a:p>
+                  </a:txBody>
+                  <a:tcPr marL="73152" marR="73152" marT="27432" marB="27432" anchor="ctr">
+                    <a:solidFill>
+                      <a:srgbClr val="1F3A5F"/>
+                    </a:solidFill>
+                  </a:tcPr>
+                </a:tc>
+              </a:tr>
+              <a:tr h="399010">
+                <a:tc>
+                  <a:txBody>
+                    <a:bodyPr wrap="square"/>
+                    <a:lstStyle/>
+                    <a:p>
+                      <a:pPr algn="l"/>
+                      <a:r>
+                        <a:rPr sz="1200" b="0" i="0">
+                          <a:solidFill>
+                            <a:srgbClr val="333333"/>
+                          </a:solidFill>
+                          <a:latin typeface="Calibri"/>
+                        </a:rPr>
+                        <a:t>P-001</a:t>
+                      </a:r>
+                    </a:p>
+                  </a:txBody>
+                  <a:tcPr marL="73152" marR="73152" marT="27432" marB="27432" anchor="ctr">
+                    <a:solidFill>
+                      <a:srgbClr val="FFFFFF"/>
+                    </a:solidFill>
+                  </a:tcPr>
+                </a:tc>
+                <a:tc>
+                  <a:txBody>
+                    <a:bodyPr wrap="square"/>
+                    <a:lstStyle/>
+                    <a:p>
+                      <a:pPr algn="l"/>
+                      <a:r>
+                        <a:rPr sz="1200" b="0" i="0">
+                          <a:solidFill>
+                            <a:srgbClr val="333333"/>
+                          </a:solidFill>
+                          <a:latin typeface="Calibri"/>
+                        </a:rPr>
+                        <a:t>Projeto 1</a:t>
+                      </a:r>
+                    </a:p>
+                  </a:txBody>
+                  <a:tcPr marL="73152" marR="73152" marT="27432" marB="27432" anchor="ctr">
+                    <a:solidFill>
+                      <a:srgbClr val="FFFFFF"/>
+                    </a:solidFill>
+                  </a:tcPr>
+                </a:tc>
+                <a:tc>
+                  <a:txBody>
+                    <a:bodyPr wrap="square"/>
+                    <a:lstStyle/>
+                    <a:p>
+                      <a:pPr algn="l"/>
+                      <a:r>
+                        <a:rPr sz="1200" b="0" i="0">
+                          <a:solidFill>
+                            <a:srgbClr val="333333"/>
+                          </a:solidFill>
+                          <a:latin typeface="Calibri"/>
+                        </a:rPr>
+                        <a:t>Em andamento</a:t>
+                      </a:r>
+                    </a:p>
+                  </a:txBody>
+                  <a:tcPr marL="73152" marR="73152" marT="27432" marB="27432" anchor="ctr">
+                    <a:solidFill>
+                      <a:srgbClr val="FFFFFF"/>
+                    </a:solidFill>
+                  </a:tcPr>
+                </a:tc>
+                <a:tc>
+                  <a:txBody>
+                    <a:bodyPr wrap="square"/>
+                    <a:lstStyle/>
+                    <a:p>
+                      <a:pPr algn="ctr"/>
+                      <a:r>
+                        <a:rPr sz="1200" b="1" i="0">
+                          <a:solidFill>
+                            <a:srgbClr val="FFFFFF"/>
+                          </a:solidFill>
+                          <a:latin typeface="Calibri"/>
+                        </a:rPr>
+                        <a:t>Médio</a:t>
+                      </a:r>
+                    </a:p>
+                  </a:txBody>
+                  <a:tcPr marL="73152" marR="73152" marT="27432" marB="27432" anchor="ctr">
+                    <a:solidFill>
+                      <a:srgbClr val="F9A825"/>
+                    </a:solidFill>
+                  </a:tcPr>
+                </a:tc>
+                <a:tc>
+                  <a:txBody>
+                    <a:bodyPr wrap="square"/>
+                    <a:lstStyle/>
+                    <a:p>
+                      <a:pPr algn="r"/>
+                      <a:r>
+                        <a:rPr sz="1200" b="0" i="0">
+                          <a:solidFill>
+                            <a:srgbClr val="333333"/>
+                          </a:solidFill>
+                          <a:latin typeface="Calibri"/>
+                        </a:rPr>
+                        <a:t>31%</a:t>
+                      </a:r>
+                    </a:p>
+                  </a:txBody>
+                  <a:tcPr marL="73152" marR="73152" marT="27432" marB="27432" anchor="ctr">
+                    <a:solidFill>
+                      <a:srgbClr val="FFFFFF"/>
+                    </a:solidFill>
+                  </a:tcPr>
+                </a:tc>
+                <a:tc>
+                  <a:txBody>
+                    <a:bodyPr wrap="square"/>
+                    <a:lstStyle/>
+                    <a:p>
+                      <a:pPr algn="r"/>
+                      <a:r>
+                        <a:rPr sz="1200" b="0" i="0">
+                          <a:solidFill>
+                            <a:srgbClr val="333333"/>
+                          </a:solidFill>
+                          <a:latin typeface="Calibri"/>
+                        </a:rPr>
+                        <a:t>R$ 1,1 mi</a:t>
+                      </a:r>
+                    </a:p>
+                  </a:txBody>
+                  <a:tcPr marL="73152" marR="73152" marT="27432" marB="27432" anchor="ctr">
+                    <a:solidFill>
+                      <a:srgbClr val="FFFFFF"/>
+                    </a:solidFill>
+                  </a:tcPr>
+                </a:tc>
+              </a:tr>
+              <a:tr h="399010">
+                <a:tc>
+                  <a:txBody>
+                    <a:bodyPr wrap="square"/>
+                    <a:lstStyle/>
+                    <a:p>
+                      <a:pPr algn="l"/>
+                      <a:r>
+                        <a:rPr sz="1200" b="0" i="0">
+                          <a:solidFill>
+                            <a:srgbClr val="333333"/>
+                          </a:solidFill>
+                          <a:latin typeface="Calibri"/>
+                        </a:rPr>
+                        <a:t>P-002</a:t>
+                      </a:r>
+                    </a:p>
+                  </a:txBody>
+                  <a:tcPr marL="73152" marR="73152" marT="27432" marB="27432" anchor="ctr">
+                    <a:solidFill>
+                      <a:srgbClr val="F2F2F2"/>
+                    </a:solidFill>
+                  </a:tcPr>
+                </a:tc>
+                <a:tc>
+                  <a:txBody>
+                    <a:bodyPr wrap="square"/>
+                    <a:lstStyle/>
+                    <a:p>
+                      <a:pPr algn="l"/>
+                      <a:r>
+                        <a:rPr sz="1200" b="0" i="0">
+                          <a:solidFill>
+                            <a:srgbClr val="333333"/>
+                          </a:solidFill>
+                          <a:latin typeface="Calibri"/>
+                        </a:rPr>
+                        <a:t>Projeto 2</a:t>
+                      </a:r>
+                    </a:p>
+                  </a:txBody>
+                  <a:tcPr marL="73152" marR="73152" marT="27432" marB="27432" anchor="ctr">
+                    <a:solidFill>
+                      <a:srgbClr val="F2F2F2"/>
+                    </a:solidFill>
+                  </a:tcPr>
+                </a:tc>
+                <a:tc>
+                  <a:txBody>
+                    <a:bodyPr wrap="square"/>
+                    <a:lstStyle/>
+                    <a:p>
+                      <a:pPr algn="l"/>
+                      <a:r>
+                        <a:rPr sz="1200" b="0" i="0">
+                          <a:solidFill>
+                            <a:srgbClr val="333333"/>
+                          </a:solidFill>
+                          <a:latin typeface="Calibri"/>
+                        </a:rPr>
+                        <a:t>Em andamento</a:t>
+                      </a:r>
+                    </a:p>
+                  </a:txBody>
+                  <a:tcPr marL="73152" marR="73152" marT="27432" marB="27432" anchor="ctr">
+                    <a:solidFill>
+                      <a:srgbClr val="F2F2F2"/>
+                    </a:solidFill>
+                  </a:tcPr>
+                </a:tc>
+                <a:tc>
+                  <a:txBody>
+                    <a:bodyPr wrap="square"/>
+                    <a:lstStyle/>
+                    <a:p>
+                      <a:pPr algn="ctr"/>
+                      <a:r>
+                        <a:rPr sz="1200" b="1" i="0">
+                          <a:solidFill>
+                            <a:srgbClr val="FFFFFF"/>
+                          </a:solidFill>
+                          <a:latin typeface="Calibri"/>
+                        </a:rPr>
+                        <a:t>Médio</a:t>
+                      </a:r>
+                    </a:p>
+                  </a:txBody>
+                  <a:tcPr marL="73152" marR="73152" marT="27432" marB="27432" anchor="ctr">
+                    <a:solidFill>
+                      <a:srgbClr val="F9A825"/>
+                    </a:solidFill>
+                  </a:tcPr>
+                </a:tc>
+                <a:tc>
+                  <a:txBody>
+                    <a:bodyPr wrap="square"/>
+                    <a:lstStyle/>
+                    <a:p>
+                      <a:pPr algn="r"/>
+                      <a:r>
+                        <a:rPr sz="1200" b="0" i="0">
+                          <a:solidFill>
+                            <a:srgbClr val="333333"/>
+                          </a:solidFill>
+                          <a:latin typeface="Calibri"/>
+                        </a:rPr>
+                        <a:t>32%</a:t>
+                      </a:r>
+                    </a:p>
+                  </a:txBody>
+                  <a:tcPr marL="73152" marR="73152" marT="27432" marB="27432" anchor="ctr">
+                    <a:solidFill>
+                      <a:srgbClr val="F2F2F2"/>
+                    </a:solidFill>
+                  </a:tcPr>
+                </a:tc>
+                <a:tc>
+                  <a:txBody>
+                    <a:bodyPr wrap="square"/>
+                    <a:lstStyle/>
+                    <a:p>
+                      <a:pPr algn="r"/>
+                      <a:r>
+                        <a:rPr sz="1200" b="0" i="0">
+                          <a:solidFill>
+                            <a:srgbClr val="333333"/>
+                          </a:solidFill>
+                          <a:latin typeface="Calibri"/>
+                        </a:rPr>
+                        <a:t>R$ 1,2 mi</a:t>
+                      </a:r>
+                    </a:p>
+                  </a:txBody>
+                  <a:tcPr marL="73152" marR="73152" marT="27432" marB="27432" anchor="ctr">
+                    <a:solidFill>
+                      <a:srgbClr val="F2F2F2"/>
+                    </a:solidFill>
+                  </a:tcPr>
+                </a:tc>
+              </a:tr>
+              <a:tr h="399010">
+                <a:tc>
+                  <a:txBody>
+                    <a:bodyPr wrap="square"/>
+                    <a:lstStyle/>
+                    <a:p>
+                      <a:pPr algn="l"/>
+                      <a:r>
+                        <a:rPr sz="1200" b="0" i="0">
+                          <a:solidFill>
+                            <a:srgbClr val="333333"/>
+                          </a:solidFill>
+                          <a:latin typeface="Calibri"/>
+                        </a:rPr>
+                        <a:t>P-003</a:t>
+                      </a:r>
+                    </a:p>
+                  </a:txBody>
+                  <a:tcPr marL="73152" marR="73152" marT="27432" marB="27432" anchor="ctr">
+                    <a:solidFill>
+                      <a:srgbClr val="FFFFFF"/>
+                    </a:solidFill>
+                  </a:tcPr>
+                </a:tc>
+                <a:tc>
+                  <a:txBody>
+                    <a:bodyPr wrap="square"/>
+                    <a:lstStyle/>
+                    <a:p>
+                      <a:pPr algn="l"/>
+                      <a:r>
+                        <a:rPr sz="1200" b="0" i="0">
+                          <a:solidFill>
+                            <a:srgbClr val="333333"/>
+                          </a:solidFill>
+                          <a:latin typeface="Calibri"/>
+                        </a:rPr>
+                        <a:t>Projeto 3</a:t>
+                      </a:r>
+                    </a:p>
+                  </a:txBody>
+                  <a:tcPr marL="73152" marR="73152" marT="27432" marB="27432" anchor="ctr">
+                    <a:solidFill>
+                      <a:srgbClr val="FFFFFF"/>
+                    </a:solidFill>
+                  </a:tcPr>
+                </a:tc>
+                <a:tc>
+                  <a:txBody>
+                    <a:bodyPr wrap="square"/>
+                    <a:lstStyle/>
+                    <a:p>
+                      <a:pPr algn="l"/>
+                      <a:r>
+                        <a:rPr sz="1200" b="0" i="0">
+                          <a:solidFill>
+                            <a:srgbClr val="333333"/>
+                          </a:solidFill>
+                          <a:latin typeface="Calibri"/>
+                        </a:rPr>
+                        <a:t>Validação</a:t>
+                      </a:r>
+                    </a:p>
+                  </a:txBody>
+                  <a:tcPr marL="73152" marR="73152" marT="27432" marB="27432" anchor="ctr">
+                    <a:solidFill>
+                      <a:srgbClr val="FFFFFF"/>
+                    </a:solidFill>
+                  </a:tcPr>
+                </a:tc>
+                <a:tc>
+                  <a:txBody>
+                    <a:bodyPr wrap="square"/>
+                    <a:lstStyle/>
+                    <a:p>
+                      <a:pPr algn="ctr"/>
+                      <a:r>
+                        <a:rPr sz="1200" b="1" i="0">
+                          <a:solidFill>
+                            <a:srgbClr val="FFFFFF"/>
+                          </a:solidFill>
+                          <a:latin typeface="Calibri"/>
+                        </a:rPr>
+                        <a:t>Médio</a:t>
+                      </a:r>
+                    </a:p>
+                  </a:txBody>
+                  <a:tcPr marL="73152" marR="73152" marT="27432" marB="27432" anchor="ctr">
+                    <a:solidFill>
+                      <a:srgbClr val="F9A825"/>
+                    </a:solidFill>
+                  </a:tcPr>
+                </a:tc>
+                <a:tc>
+                  <a:txBody>
+                    <a:bodyPr wrap="square"/>
+                    <a:lstStyle/>
+                    <a:p>
+                      <a:pPr algn="r"/>
+                      <a:r>
+                        <a:rPr sz="1200" b="0" i="0">
+                          <a:solidFill>
+                            <a:srgbClr val="333333"/>
+                          </a:solidFill>
+                          <a:latin typeface="Calibri"/>
+                        </a:rPr>
+                        <a:t>33%</a:t>
+                      </a:r>
+                    </a:p>
+                  </a:txBody>
+                  <a:tcPr marL="73152" marR="73152" marT="27432" marB="27432" anchor="ctr">
+                    <a:solidFill>
+                      <a:srgbClr val="FFFFFF"/>
+                    </a:solidFill>
+                  </a:tcPr>
+                </a:tc>
+                <a:tc>
+                  <a:txBody>
+                    <a:bodyPr wrap="square"/>
+                    <a:lstStyle/>
+                    <a:p>
+                      <a:pPr algn="r"/>
+                      <a:r>
+                        <a:rPr sz="1200" b="0" i="0">
+                          <a:solidFill>
+                            <a:srgbClr val="333333"/>
+                          </a:solidFill>
+                          <a:latin typeface="Calibri"/>
+                        </a:rPr>
+                        <a:t>R$ 1,3 mi</a:t>
+                      </a:r>
+                    </a:p>
+                  </a:txBody>
+                  <a:tcPr marL="73152" marR="73152" marT="27432" marB="27432" anchor="ctr">
+                    <a:solidFill>
+                      <a:srgbClr val="FFFFFF"/>
+                    </a:solidFill>
+                  </a:tcPr>
+                </a:tc>
+              </a:tr>
+              <a:tr h="399010">
+                <a:tc>
+                  <a:txBody>
+                    <a:bodyPr wrap="square"/>
+                    <a:lstStyle/>
+                    <a:p>
+                      <a:pPr algn="l"/>
+                      <a:r>
+                        <a:rPr sz="1200" b="0" i="0">
+                          <a:solidFill>
+                            <a:srgbClr val="333333"/>
+                          </a:solidFill>
+                          <a:latin typeface="Calibri"/>
+                        </a:rPr>
+                        <a:t>P-004</a:t>
+                      </a:r>
+                    </a:p>
+                  </a:txBody>
+                  <a:tcPr marL="73152" marR="73152" marT="27432" marB="27432" anchor="ctr">
+                    <a:solidFill>
+                      <a:srgbClr val="F2F2F2"/>
+                    </a:solidFill>
+                  </a:tcPr>
+                </a:tc>
+                <a:tc>
+                  <a:txBody>
+                    <a:bodyPr wrap="square"/>
+                    <a:lstStyle/>
+                    <a:p>
+                      <a:pPr algn="l"/>
+                      <a:r>
+                        <a:rPr sz="1200" b="0" i="0">
+                          <a:solidFill>
+                            <a:srgbClr val="333333"/>
+                          </a:solidFill>
+                          <a:latin typeface="Calibri"/>
+                        </a:rPr>
+                        <a:t>Projeto 4</a:t>
+                      </a:r>
+                    </a:p>
+                  </a:txBody>
+                  <a:tcPr marL="73152" marR="73152" marT="27432" marB="27432" anchor="ctr">
+                    <a:solidFill>
+                      <a:srgbClr val="F2F2F2"/>
+                    </a:solidFill>
+                  </a:tcPr>
+                </a:tc>
+                <a:tc>
+                  <a:txBody>
+                    <a:bodyPr wrap="square"/>
+                    <a:lstStyle/>
+                    <a:p>
+                      <a:pPr algn="l"/>
+                      <a:r>
+                        <a:rPr sz="1200" b="0" i="0">
+                          <a:solidFill>
+                            <a:srgbClr val="333333"/>
+                          </a:solidFill>
+                          <a:latin typeface="Calibri"/>
+                        </a:rPr>
+                        <a:t>Em andamento</a:t>
+                      </a:r>
+                    </a:p>
+                  </a:txBody>
+                  <a:tcPr marL="73152" marR="73152" marT="27432" marB="27432" anchor="ctr">
+                    <a:solidFill>
+                      <a:srgbClr val="F2F2F2"/>
+                    </a:solidFill>
+                  </a:tcPr>
+                </a:tc>
+                <a:tc>
+                  <a:txBody>
+                    <a:bodyPr wrap="square"/>
+                    <a:lstStyle/>
+                    <a:p>
+                      <a:pPr algn="ctr"/>
+                      <a:r>
+                        <a:rPr sz="1200" b="1" i="0">
+                          <a:solidFill>
+                            <a:srgbClr val="FFFFFF"/>
+                          </a:solidFill>
+                          <a:latin typeface="Calibri"/>
+                        </a:rPr>
+                        <a:t>Alto</a:t>
+                      </a:r>
+                    </a:p>
+                  </a:txBody>
+                  <a:tcPr marL="73152" marR="73152" marT="27432" marB="27432" anchor="ctr">
+                    <a:solidFill>
+                      <a:srgbClr val="C62828"/>
+                    </a:solidFill>
+                  </a:tcPr>
+                </a:tc>
+                <a:tc>
+                  <a:txBody>
+                    <a:bodyPr wrap="square"/>
+                    <a:lstStyle/>
+                    <a:p>
+                      <a:pPr algn="r"/>
+                      <a:r>
+                        <a:rPr sz="1200" b="0" i="0">
+                          <a:solidFill>
+                            <a:srgbClr val="333333"/>
+                          </a:solidFill>
+                          <a:latin typeface="Calibri"/>
+                        </a:rPr>
+                        <a:t>34%</a:t>
+                      </a:r>
+                    </a:p>
+                  </a:txBody>
+                  <a:tcPr marL="73152" marR="73152" marT="27432" marB="27432" anchor="ctr">
+                    <a:solidFill>
+                      <a:srgbClr val="F2F2F2"/>
+                    </a:solidFill>
+                  </a:tcPr>
+                </a:tc>
+                <a:tc>
+                  <a:txBody>
+                    <a:bodyPr wrap="square"/>
+                    <a:lstStyle/>
+                    <a:p>
+                      <a:pPr algn="r"/>
+                      <a:r>
+                        <a:rPr sz="1200" b="0" i="0">
+                          <a:solidFill>
+                            <a:srgbClr val="333333"/>
+                          </a:solidFill>
+                          <a:latin typeface="Calibri"/>
+                        </a:rPr>
+                        <a:t>R$ 1,4 mi</a:t>
+                      </a:r>
+                    </a:p>
+                  </a:txBody>
+                  <a:tcPr marL="73152" marR="73152" marT="27432" marB="27432" anchor="ctr">
+                    <a:solidFill>
+                      <a:srgbClr val="F2F2F2"/>
+                    </a:solidFill>
+                  </a:tcPr>
+                </a:tc>
+              </a:tr>
+              <a:tr h="399010">
+                <a:tc>
+                  <a:txBody>
+                    <a:bodyPr wrap="square"/>
+                    <a:lstStyle/>
+                    <a:p>
+                      <a:pPr algn="l"/>
+                      <a:r>
+                        <a:rPr sz="1200" b="0" i="0">
+                          <a:solidFill>
+                            <a:srgbClr val="333333"/>
+                          </a:solidFill>
+                          <a:latin typeface="Calibri"/>
+                        </a:rPr>
+                        <a:t>P-005</a:t>
+                      </a:r>
+                    </a:p>
+                  </a:txBody>
+                  <a:tcPr marL="73152" marR="73152" marT="27432" marB="27432" anchor="ctr">
+                    <a:solidFill>
+                      <a:srgbClr val="FFFFFF"/>
+                    </a:solidFill>
+                  </a:tcPr>
+                </a:tc>
+                <a:tc>
+                  <a:txBody>
+                    <a:bodyPr wrap="square"/>
+                    <a:lstStyle/>
+                    <a:p>
+                      <a:pPr algn="l"/>
+                      <a:r>
+                        <a:rPr sz="1200" b="0" i="0">
+                          <a:solidFill>
+                            <a:srgbClr val="333333"/>
+                          </a:solidFill>
+                          <a:latin typeface="Calibri"/>
+                        </a:rPr>
+                        <a:t>Projeto 5</a:t>
+                      </a:r>
+                    </a:p>
+                  </a:txBody>
+                  <a:tcPr marL="73152" marR="73152" marT="27432" marB="27432" anchor="ctr">
+                    <a:solidFill>
+                      <a:srgbClr val="FFFFFF"/>
+                    </a:solidFill>
+                  </a:tcPr>
+                </a:tc>
+                <a:tc>
+                  <a:txBody>
+                    <a:bodyPr wrap="square"/>
+                    <a:lstStyle/>
+                    <a:p>
+                      <a:pPr algn="l"/>
+                      <a:r>
+                        <a:rPr sz="1200" b="0" i="0">
+                          <a:solidFill>
+                            <a:srgbClr val="333333"/>
+                          </a:solidFill>
+                          <a:latin typeface="Calibri"/>
+                        </a:rPr>
+                        <a:t>Em andamento</a:t>
+                      </a:r>
+                    </a:p>
+                  </a:txBody>
+                  <a:tcPr marL="73152" marR="73152" marT="27432" marB="27432" anchor="ctr">
+                    <a:solidFill>
+                      <a:srgbClr val="FFFFFF"/>
+                    </a:solidFill>
+                  </a:tcPr>
+                </a:tc>
+                <a:tc>
+                  <a:txBody>
+                    <a:bodyPr wrap="square"/>
+                    <a:lstStyle/>
+                    <a:p>
+                      <a:pPr algn="ctr"/>
+                      <a:r>
+                        <a:rPr sz="1200" b="1" i="0">
+                          <a:solidFill>
+                            <a:srgbClr val="FFFFFF"/>
+                          </a:solidFill>
+                          <a:latin typeface="Calibri"/>
+                        </a:rPr>
+                        <a:t>Médio</a:t>
+                      </a:r>
+                    </a:p>
+                  </a:txBody>
+                  <a:tcPr marL="73152" marR="73152" marT="27432" marB="27432" anchor="ctr">
+                    <a:solidFill>
+                      <a:srgbClr val="F9A825"/>
+                    </a:solidFill>
+                  </a:tcPr>
+                </a:tc>
+                <a:tc>
+                  <a:txBody>
+                    <a:bodyPr wrap="square"/>
+                    <a:lstStyle/>
+                    <a:p>
+                      <a:pPr algn="r"/>
+                      <a:r>
+                        <a:rPr sz="1200" b="0" i="0">
+                          <a:solidFill>
+                            <a:srgbClr val="333333"/>
+                          </a:solidFill>
+                          <a:latin typeface="Calibri"/>
+                        </a:rPr>
+                        <a:t>35%</a:t>
+                      </a:r>
+                    </a:p>
+                  </a:txBody>
+                  <a:tcPr marL="73152" marR="73152" marT="27432" marB="27432" anchor="ctr">
+                    <a:solidFill>
+                      <a:srgbClr val="FFFFFF"/>
+                    </a:solidFill>
+                  </a:tcPr>
+                </a:tc>
+                <a:tc>
+                  <a:txBody>
+                    <a:bodyPr wrap="square"/>
+                    <a:lstStyle/>
+                    <a:p>
+                      <a:pPr algn="r"/>
+                      <a:r>
+                        <a:rPr sz="1200" b="0" i="0">
+                          <a:solidFill>
+                            <a:srgbClr val="333333"/>
+                          </a:solidFill>
+                          <a:latin typeface="Calibri"/>
+                        </a:rPr>
+                        <a:t>R$ 1,5 mi</a:t>
+                      </a:r>
+                    </a:p>
+                  </a:txBody>
+                  <a:tcPr marL="73152" marR="73152" marT="27432" marB="27432" anchor="ctr">
+                    <a:solidFill>
+                      <a:srgbClr val="FFFFFF"/>
+                    </a:solidFill>
+                  </a:tcPr>
+                </a:tc>
+              </a:tr>
+              <a:tr h="399010">
+                <a:tc>
+                  <a:txBody>
+                    <a:bodyPr wrap="square"/>
+                    <a:lstStyle/>
+                    <a:p>
+                      <a:pPr algn="l"/>
+                      <a:r>
+                        <a:rPr sz="1200" b="0" i="0">
+                          <a:solidFill>
+                            <a:srgbClr val="333333"/>
+                          </a:solidFill>
+                          <a:latin typeface="Calibri"/>
+                        </a:rPr>
+                        <a:t>P-006</a:t>
+                      </a:r>
+                    </a:p>
+                  </a:txBody>
+                  <a:tcPr marL="73152" marR="73152" marT="27432" marB="27432" anchor="ctr">
+                    <a:solidFill>
+                      <a:srgbClr val="F2F2F2"/>
+                    </a:solidFill>
+                  </a:tcPr>
+                </a:tc>
+                <a:tc>
+                  <a:txBody>
+                    <a:bodyPr wrap="square"/>
+                    <a:lstStyle/>
+                    <a:p>
+                      <a:pPr algn="l"/>
+                      <a:r>
+                        <a:rPr sz="1200" b="0" i="0">
+                          <a:solidFill>
+                            <a:srgbClr val="333333"/>
+                          </a:solidFill>
+                          <a:latin typeface="Calibri"/>
+                        </a:rPr>
+                        <a:t>Projeto 6</a:t>
+                      </a:r>
+                    </a:p>
+                  </a:txBody>
+                  <a:tcPr marL="73152" marR="73152" marT="27432" marB="27432" anchor="ctr">
+                    <a:solidFill>
+                      <a:srgbClr val="F2F2F2"/>
+                    </a:solidFill>
+                  </a:tcPr>
+                </a:tc>
+                <a:tc>
+                  <a:txBody>
+                    <a:bodyPr wrap="square"/>
+                    <a:lstStyle/>
+                    <a:p>
+                      <a:pPr algn="l"/>
+                      <a:r>
+                        <a:rPr sz="1200" b="0" i="0">
+                          <a:solidFill>
+                            <a:srgbClr val="333333"/>
+                          </a:solidFill>
+                          <a:latin typeface="Calibri"/>
+                        </a:rPr>
+                        <a:t>Validação</a:t>
+                      </a:r>
+                    </a:p>
+                  </a:txBody>
+                  <a:tcPr marL="73152" marR="73152" marT="27432" marB="27432" anchor="ctr">
+                    <a:solidFill>
+                      <a:srgbClr val="F2F2F2"/>
+                    </a:solidFill>
+                  </a:tcPr>
+                </a:tc>
+                <a:tc>
+                  <a:txBody>
+                    <a:bodyPr wrap="square"/>
+                    <a:lstStyle/>
+                    <a:p>
+                      <a:pPr algn="ctr"/>
+                      <a:r>
+                        <a:rPr sz="1200" b="1" i="0">
+                          <a:solidFill>
+                            <a:srgbClr val="FFFFFF"/>
+                          </a:solidFill>
+                          <a:latin typeface="Calibri"/>
+                        </a:rPr>
+                        <a:t>Médio</a:t>
+                      </a:r>
+                    </a:p>
+                  </a:txBody>
+                  <a:tcPr marL="73152" marR="73152" marT="27432" marB="27432" anchor="ctr">
+                    <a:solidFill>
+                      <a:srgbClr val="F9A825"/>
+                    </a:solidFill>
+                  </a:tcPr>
+                </a:tc>
+                <a:tc>
+                  <a:txBody>
+                    <a:bodyPr wrap="square"/>
+                    <a:lstStyle/>
+                    <a:p>
+                      <a:pPr algn="r"/>
+                      <a:r>
+                        <a:rPr sz="1200" b="0" i="0">
+                          <a:solidFill>
+                            <a:srgbClr val="333333"/>
+                          </a:solidFill>
+                          <a:latin typeface="Calibri"/>
+                        </a:rPr>
+                        <a:t>36%</a:t>
+                      </a:r>
+                    </a:p>
+                  </a:txBody>
+                  <a:tcPr marL="73152" marR="73152" marT="27432" marB="27432" anchor="ctr">
+                    <a:solidFill>
+                      <a:srgbClr val="F2F2F2"/>
+                    </a:solidFill>
+                  </a:tcPr>
+                </a:tc>
+                <a:tc>
+                  <a:txBody>
+                    <a:bodyPr wrap="square"/>
+                    <a:lstStyle/>
+                    <a:p>
+                      <a:pPr algn="r"/>
+                      <a:r>
+                        <a:rPr sz="1200" b="0" i="0">
+                          <a:solidFill>
+                            <a:srgbClr val="333333"/>
+                          </a:solidFill>
+                          <a:latin typeface="Calibri"/>
+                        </a:rPr>
+                        <a:t>R$ 1,6 mi</a:t>
+                      </a:r>
+                    </a:p>
+                  </a:txBody>
+                  <a:tcPr marL="73152" marR="73152" marT="27432" marB="27432" anchor="ctr">
+                    <a:solidFill>
+                      <a:srgbClr val="F2F2F2"/>
+                    </a:solidFill>
+                  </a:tcPr>
+                </a:tc>
+              </a:tr>
+              <a:tr h="399010">
+                <a:tc>
+                  <a:txBody>
+                    <a:bodyPr wrap="square"/>
+                    <a:lstStyle/>
+                    <a:p>
+                      <a:pPr algn="l"/>
+                      <a:r>
+                        <a:rPr sz="1200" b="0" i="0">
+                          <a:solidFill>
+                            <a:srgbClr val="333333"/>
+                          </a:solidFill>
+                          <a:latin typeface="Calibri"/>
+                        </a:rPr>
+                        <a:t>P-007</a:t>
+                      </a:r>
+                    </a:p>
+                  </a:txBody>
+                  <a:tcPr marL="73152" marR="73152" marT="27432" marB="27432" anchor="ctr">
+                    <a:solidFill>
+                      <a:srgbClr val="FFFFFF"/>
+                    </a:solidFill>
+                  </a:tcPr>
+                </a:tc>
+                <a:tc>
+                  <a:txBody>
+                    <a:bodyPr wrap="square"/>
+                    <a:lstStyle/>
+                    <a:p>
+                      <a:pPr algn="l"/>
+                      <a:r>
+                        <a:rPr sz="1200" b="0" i="0">
+                          <a:solidFill>
+                            <a:srgbClr val="333333"/>
+                          </a:solidFill>
+                          <a:latin typeface="Calibri"/>
+                        </a:rPr>
+                        <a:t>Projeto 7</a:t>
+                      </a:r>
+                    </a:p>
+                  </a:txBody>
+                  <a:tcPr marL="73152" marR="73152" marT="27432" marB="27432" anchor="ctr">
+                    <a:solidFill>
+                      <a:srgbClr val="FFFFFF"/>
+                    </a:solidFill>
+                  </a:tcPr>
+                </a:tc>
+                <a:tc>
+                  <a:txBody>
+                    <a:bodyPr wrap="square"/>
+                    <a:lstStyle/>
+                    <a:p>
+                      <a:pPr algn="l"/>
+                      <a:r>
+                        <a:rPr sz="1200" b="0" i="0">
+                          <a:solidFill>
+                            <a:srgbClr val="333333"/>
+                          </a:solidFill>
+                          <a:latin typeface="Calibri"/>
+                        </a:rPr>
+                        <a:t>Em andamento</a:t>
+                      </a:r>
+                    </a:p>
+                  </a:txBody>
+                  <a:tcPr marL="73152" marR="73152" marT="27432" marB="27432" anchor="ctr">
+                    <a:solidFill>
+                      <a:srgbClr val="FFFFFF"/>
+                    </a:solidFill>
+                  </a:tcPr>
+                </a:tc>
+                <a:tc>
+                  <a:txBody>
+                    <a:bodyPr wrap="square"/>
+                    <a:lstStyle/>
+                    <a:p>
+                      <a:pPr algn="ctr"/>
+                      <a:r>
+                        <a:rPr sz="1200" b="1" i="0">
+                          <a:solidFill>
+                            <a:srgbClr val="FFFFFF"/>
+                          </a:solidFill>
+                          <a:latin typeface="Calibri"/>
+                        </a:rPr>
+                        <a:t>Médio</a:t>
+                      </a:r>
+                    </a:p>
+                  </a:txBody>
+                  <a:tcPr marL="73152" marR="73152" marT="27432" marB="27432" anchor="ctr">
+                    <a:solidFill>
+                      <a:srgbClr val="F9A825"/>
+                    </a:solidFill>
+                  </a:tcPr>
+                </a:tc>
+                <a:tc>
+                  <a:txBody>
+                    <a:bodyPr wrap="square"/>
+                    <a:lstStyle/>
+                    <a:p>
+                      <a:pPr algn="r"/>
+                      <a:r>
+                        <a:rPr sz="1200" b="0" i="0">
+                          <a:solidFill>
+                            <a:srgbClr val="333333"/>
+                          </a:solidFill>
+                          <a:latin typeface="Calibri"/>
+                        </a:rPr>
+                        <a:t>37%</a:t>
+                      </a:r>
+                    </a:p>
+                  </a:txBody>
+                  <a:tcPr marL="73152" marR="73152" marT="27432" marB="27432" anchor="ctr">
+                    <a:solidFill>
+                      <a:srgbClr val="FFFFFF"/>
+                    </a:solidFill>
+                  </a:tcPr>
+                </a:tc>
+                <a:tc>
+                  <a:txBody>
+                    <a:bodyPr wrap="square"/>
+                    <a:lstStyle/>
+                    <a:p>
+                      <a:pPr algn="r"/>
+                      <a:r>
+                        <a:rPr sz="1200" b="0" i="0">
+                          <a:solidFill>
+                            <a:srgbClr val="333333"/>
+                          </a:solidFill>
+                          <a:latin typeface="Calibri"/>
+                        </a:rPr>
+                        <a:t>R$ 1,7 mi</a:t>
+                      </a:r>
+                    </a:p>
+                  </a:txBody>
+                  <a:tcPr marL="73152" marR="73152" marT="27432" marB="27432" anchor="ctr">
+                    <a:solidFill>
+                      <a:srgbClr val="FFFFFF"/>
+                    </a:solidFill>
+                  </a:tcPr>
+                </a:tc>
+              </a:tr>
+              <a:tr h="399010">
+                <a:tc>
+                  <a:txBody>
+                    <a:bodyPr wrap="square"/>
+                    <a:lstStyle/>
+                    <a:p>
+                      <a:pPr algn="l"/>
+                      <a:r>
+                        <a:rPr sz="1200" b="0" i="0">
+                          <a:solidFill>
+                            <a:srgbClr val="333333"/>
+                          </a:solidFill>
+                          <a:latin typeface="Calibri"/>
+                        </a:rPr>
+                        <a:t>P-008</a:t>
+                      </a:r>
+                    </a:p>
+                  </a:txBody>
+                  <a:tcPr marL="73152" marR="73152" marT="27432" marB="27432" anchor="ctr">
+                    <a:solidFill>
+                      <a:srgbClr val="F2F2F2"/>
+                    </a:solidFill>
+                  </a:tcPr>
+                </a:tc>
+                <a:tc>
+                  <a:txBody>
+                    <a:bodyPr wrap="square"/>
+                    <a:lstStyle/>
+                    <a:p>
+                      <a:pPr algn="l"/>
+                      <a:r>
+                        <a:rPr sz="1200" b="0" i="0">
+                          <a:solidFill>
+                            <a:srgbClr val="333333"/>
+                          </a:solidFill>
+                          <a:latin typeface="Calibri"/>
+                        </a:rPr>
+                        <a:t>Projeto 8</a:t>
+                      </a:r>
+                    </a:p>
+                  </a:txBody>
+                  <a:tcPr marL="73152" marR="73152" marT="27432" marB="27432" anchor="ctr">
+                    <a:solidFill>
+                      <a:srgbClr val="F2F2F2"/>
+                    </a:solidFill>
+                  </a:tcPr>
+                </a:tc>
+                <a:tc>
+                  <a:txBody>
+                    <a:bodyPr wrap="square"/>
+                    <a:lstStyle/>
+                    <a:p>
+                      <a:pPr algn="l"/>
+                      <a:r>
+                        <a:rPr sz="1200" b="0" i="0">
+                          <a:solidFill>
+                            <a:srgbClr val="333333"/>
+                          </a:solidFill>
+                          <a:latin typeface="Calibri"/>
+                        </a:rPr>
+                        <a:t>Em andamento</a:t>
+                      </a:r>
+                    </a:p>
+                  </a:txBody>
+                  <a:tcPr marL="73152" marR="73152" marT="27432" marB="27432" anchor="ctr">
+                    <a:solidFill>
+                      <a:srgbClr val="F2F2F2"/>
+                    </a:solidFill>
+                  </a:tcPr>
+                </a:tc>
+                <a:tc>
+                  <a:txBody>
+                    <a:bodyPr wrap="square"/>
+                    <a:lstStyle/>
+                    <a:p>
+                      <a:pPr algn="ctr"/>
+                      <a:r>
+                        <a:rPr sz="1200" b="1" i="0">
+                          <a:solidFill>
+                            <a:srgbClr val="FFFFFF"/>
+                          </a:solidFill>
+                          <a:latin typeface="Calibri"/>
+                        </a:rPr>
+                        <a:t>Alto</a:t>
+                      </a:r>
+                    </a:p>
+                  </a:txBody>
+                  <a:tcPr marL="73152" marR="73152" marT="27432" marB="27432" anchor="ctr">
+                    <a:solidFill>
+                      <a:srgbClr val="C62828"/>
+                    </a:solidFill>
+                  </a:tcPr>
+                </a:tc>
+                <a:tc>
+                  <a:txBody>
+                    <a:bodyPr wrap="square"/>
+                    <a:lstStyle/>
+                    <a:p>
+                      <a:pPr algn="r"/>
+                      <a:r>
+                        <a:rPr sz="1200" b="0" i="0">
+                          <a:solidFill>
+                            <a:srgbClr val="333333"/>
+                          </a:solidFill>
+                          <a:latin typeface="Calibri"/>
+                        </a:rPr>
+                        <a:t>38%</a:t>
+                      </a:r>
+                    </a:p>
+                  </a:txBody>
+                  <a:tcPr marL="73152" marR="73152" marT="27432" marB="27432" anchor="ctr">
+                    <a:solidFill>
+                      <a:srgbClr val="F2F2F2"/>
+                    </a:solidFill>
+                  </a:tcPr>
+                </a:tc>
+                <a:tc>
+                  <a:txBody>
+                    <a:bodyPr wrap="square"/>
+                    <a:lstStyle/>
+                    <a:p>
+                      <a:pPr algn="r"/>
+                      <a:r>
+                        <a:rPr sz="1200" b="0" i="0">
+                          <a:solidFill>
+                            <a:srgbClr val="333333"/>
+                          </a:solidFill>
+                          <a:latin typeface="Calibri"/>
+                        </a:rPr>
+                        <a:t>R$ 1,8 mi</a:t>
+                      </a:r>
+                    </a:p>
+                  </a:txBody>
+                  <a:tcPr marL="73152" marR="73152" marT="27432" marB="27432" anchor="ctr">
+                    <a:solidFill>
+                      <a:srgbClr val="F2F2F2"/>
+                    </a:solidFill>
+                  </a:tcPr>
+                </a:tc>
+              </a:tr>
+              <a:tr h="399010">
+                <a:tc>
+                  <a:txBody>
+                    <a:bodyPr wrap="square"/>
+                    <a:lstStyle/>
+                    <a:p>
+                      <a:pPr algn="l"/>
+                      <a:r>
+                        <a:rPr sz="1200" b="0" i="0">
+                          <a:solidFill>
+                            <a:srgbClr val="333333"/>
+                          </a:solidFill>
+                          <a:latin typeface="Calibri"/>
+                        </a:rPr>
+                        <a:t>P-009</a:t>
+                      </a:r>
+                    </a:p>
+                  </a:txBody>
+                  <a:tcPr marL="73152" marR="73152" marT="27432" marB="27432" anchor="ctr">
+                    <a:solidFill>
+                      <a:srgbClr val="FFFFFF"/>
+                    </a:solidFill>
+                  </a:tcPr>
+                </a:tc>
+                <a:tc>
+                  <a:txBody>
+                    <a:bodyPr wrap="square"/>
+                    <a:lstStyle/>
+                    <a:p>
+                      <a:pPr algn="l"/>
+                      <a:r>
+                        <a:rPr sz="1200" b="0" i="0">
+                          <a:solidFill>
+                            <a:srgbClr val="333333"/>
+                          </a:solidFill>
+                          <a:latin typeface="Calibri"/>
+                        </a:rPr>
+                        <a:t>Projeto 9</a:t>
+                      </a:r>
+                    </a:p>
+                  </a:txBody>
+                  <a:tcPr marL="73152" marR="73152" marT="27432" marB="27432" anchor="ctr">
+                    <a:solidFill>
+                      <a:srgbClr val="FFFFFF"/>
+                    </a:solidFill>
+                  </a:tcPr>
+                </a:tc>
+                <a:tc>
+                  <a:txBody>
+                    <a:bodyPr wrap="square"/>
+                    <a:lstStyle/>
+                    <a:p>
+                      <a:pPr algn="l"/>
+                      <a:r>
+                        <a:rPr sz="1200" b="0" i="0">
+                          <a:solidFill>
+                            <a:srgbClr val="333333"/>
+                          </a:solidFill>
+                          <a:latin typeface="Calibri"/>
+                        </a:rPr>
+                        <a:t>Validação</a:t>
+                      </a:r>
+                    </a:p>
+                  </a:txBody>
+                  <a:tcPr marL="73152" marR="73152" marT="27432" marB="27432" anchor="ctr">
+                    <a:solidFill>
+                      <a:srgbClr val="FFFFFF"/>
+                    </a:solidFill>
+                  </a:tcPr>
+                </a:tc>
+                <a:tc>
+                  <a:txBody>
+                    <a:bodyPr wrap="square"/>
+                    <a:lstStyle/>
+                    <a:p>
+                      <a:pPr algn="ctr"/>
+                      <a:r>
+                        <a:rPr sz="1200" b="1" i="0">
+                          <a:solidFill>
+                            <a:srgbClr val="FFFFFF"/>
+                          </a:solidFill>
+                          <a:latin typeface="Calibri"/>
+                        </a:rPr>
+                        <a:t>Médio</a:t>
+                      </a:r>
+                    </a:p>
+                  </a:txBody>
+                  <a:tcPr marL="73152" marR="73152" marT="27432" marB="27432" anchor="ctr">
+                    <a:solidFill>
+                      <a:srgbClr val="F9A825"/>
+                    </a:solidFill>
+                  </a:tcPr>
+                </a:tc>
+                <a:tc>
+                  <a:txBody>
+                    <a:bodyPr wrap="square"/>
+                    <a:lstStyle/>
+                    <a:p>
+                      <a:pPr algn="r"/>
+                      <a:r>
+                        <a:rPr sz="1200" b="0" i="0">
+                          <a:solidFill>
+                            <a:srgbClr val="333333"/>
+                          </a:solidFill>
+                          <a:latin typeface="Calibri"/>
+                        </a:rPr>
+                        <a:t>39%</a:t>
+                      </a:r>
+                    </a:p>
+                  </a:txBody>
+                  <a:tcPr marL="73152" marR="73152" marT="27432" marB="27432" anchor="ctr">
+                    <a:solidFill>
+                      <a:srgbClr val="FFFFFF"/>
+                    </a:solidFill>
+                  </a:tcPr>
+                </a:tc>
+                <a:tc>
+                  <a:txBody>
+                    <a:bodyPr wrap="square"/>
+                    <a:lstStyle/>
+                    <a:p>
+                      <a:pPr algn="r"/>
+                      <a:r>
+                        <a:rPr sz="1200" b="0" i="0">
+                          <a:solidFill>
+                            <a:srgbClr val="333333"/>
+                          </a:solidFill>
+                          <a:latin typeface="Calibri"/>
+                        </a:rPr>
+                        <a:t>R$ 1,9 mi</a:t>
+                      </a:r>
+                    </a:p>
+                  </a:txBody>
+                  <a:tcPr marL="73152" marR="73152" marT="27432" marB="27432" anchor="ctr">
+                    <a:solidFill>
+                      <a:srgbClr val="FFFFFF"/>
+                    </a:solidFill>
+                  </a:tcPr>
+                </a:tc>
+              </a:tr>
+              <a:tr h="399020">
+                <a:tc>
+                  <a:txBody>
+                    <a:bodyPr wrap="square"/>
+                    <a:lstStyle/>
+                    <a:p>
+                      <a:pPr algn="l"/>
+                      <a:r>
+                        <a:rPr sz="1200" b="0" i="0">
+                          <a:solidFill>
+                            <a:srgbClr val="333333"/>
+                          </a:solidFill>
+                          <a:latin typeface="Calibri"/>
+                        </a:rPr>
+                        <a:t>P-010</a:t>
+                      </a:r>
+                    </a:p>
+                  </a:txBody>
+                  <a:tcPr marL="73152" marR="73152" marT="27432" marB="27432" anchor="ctr">
+                    <a:solidFill>
+                      <a:srgbClr val="F2F2F2"/>
+                    </a:solidFill>
+                  </a:tcPr>
+                </a:tc>
+                <a:tc>
+                  <a:txBody>
+                    <a:bodyPr wrap="square"/>
+                    <a:lstStyle/>
+                    <a:p>
+                      <a:pPr algn="l"/>
+                      <a:r>
+                        <a:rPr sz="1200" b="0" i="0">
+                          <a:solidFill>
+                            <a:srgbClr val="333333"/>
+                          </a:solidFill>
+                          <a:latin typeface="Calibri"/>
+                        </a:rPr>
+                        <a:t>Projeto 10</a:t>
+                      </a:r>
+                    </a:p>
+                  </a:txBody>
+                  <a:tcPr marL="73152" marR="73152" marT="27432" marB="27432" anchor="ctr">
+                    <a:solidFill>
+                      <a:srgbClr val="F2F2F2"/>
+                    </a:solidFill>
+                  </a:tcPr>
+                </a:tc>
+                <a:tc>
+                  <a:txBody>
+                    <a:bodyPr wrap="square"/>
+                    <a:lstStyle/>
+                    <a:p>
+                      <a:pPr algn="l"/>
+                      <a:r>
+                        <a:rPr sz="1200" b="0" i="0">
+                          <a:solidFill>
+                            <a:srgbClr val="333333"/>
+                          </a:solidFill>
+                          <a:latin typeface="Calibri"/>
+                        </a:rPr>
+                        <a:t>Em andamento</a:t>
+                      </a:r>
+                    </a:p>
+                  </a:txBody>
+                  <a:tcPr marL="73152" marR="73152" marT="27432" marB="27432" anchor="ctr">
+                    <a:solidFill>
+                      <a:srgbClr val="F2F2F2"/>
+                    </a:solidFill>
+                  </a:tcPr>
+                </a:tc>
+                <a:tc>
+                  <a:txBody>
+                    <a:bodyPr wrap="square"/>
+                    <a:lstStyle/>
+                    <a:p>
+                      <a:pPr algn="ctr"/>
+                      <a:r>
+                        <a:rPr sz="1200" b="1" i="0">
+                          <a:solidFill>
+                            <a:srgbClr val="FFFFFF"/>
+                          </a:solidFill>
+                          <a:latin typeface="Calibri"/>
+                        </a:rPr>
+                        <a:t>Médio</a:t>
+                      </a:r>
+                    </a:p>
+                  </a:txBody>
+                  <a:tcPr marL="73152" marR="73152" marT="27432" marB="27432" anchor="ctr">
+                    <a:solidFill>
+                      <a:srgbClr val="F9A825"/>
+                    </a:solidFill>
+                  </a:tcPr>
+                </a:tc>
+                <a:tc>
+                  <a:txBody>
+                    <a:bodyPr wrap="square"/>
+                    <a:lstStyle/>
+                    <a:p>
+                      <a:pPr algn="r"/>
+                      <a:r>
+                        <a:rPr sz="1200" b="0" i="0">
+                          <a:solidFill>
+                            <a:srgbClr val="333333"/>
+                          </a:solidFill>
+                          <a:latin typeface="Calibri"/>
+                        </a:rPr>
+                        <a:t>40%</a:t>
+                      </a:r>
+                    </a:p>
+                  </a:txBody>
+                  <a:tcPr marL="73152" marR="73152" marT="27432" marB="27432" anchor="ctr">
+                    <a:solidFill>
+                      <a:srgbClr val="F2F2F2"/>
+                    </a:solidFill>
+                  </a:tcPr>
+                </a:tc>
+                <a:tc>
+                  <a:txBody>
+                    <a:bodyPr wrap="square"/>
+                    <a:lstStyle/>
+                    <a:p>
+                      <a:pPr algn="r"/>
+                      <a:r>
+                        <a:rPr sz="1200" b="0" i="0">
+                          <a:solidFill>
+                            <a:srgbClr val="333333"/>
+                          </a:solidFill>
+                          <a:latin typeface="Calibri"/>
+                        </a:rPr>
+                        <a:t>R$ 2,0 mi</a:t>
+                      </a:r>
+                    </a:p>
+                  </a:txBody>
+                  <a:tcPr marL="73152" marR="73152" marT="27432" marB="27432" anchor="ctr">
+                    <a:solidFill>
+                      <a:srgbClr val="F2F2F2"/>
+                    </a:solidFill>
+                  </a:tcPr>
+                </a:tc>
+              </a:tr>
+            </a:tbl>
+          </a:graphicData>
+        </a:graphic>
+      </p:graphicFrame>
+    </p:spTree>
+  </p:cSld>
+  <p:clrMapOvr>
+    <a:masterClrMapping/>
+  </p:clrMapOvr>
+</p:sld>
+</file>
+
+<file path=ppt/slides/slide33.xml><?xml version="1.0" encoding="utf-8"?>
+<p:sld xmlns:a="http://schemas.openxmlformats.org/drawingml/2006/main" xmlns:p="http://schemas.openxmlformats.org/presentationml/2006/main" xmlns:r="http://schemas.openxmlformats.org/officeDocument/2006/relationships">
+  <p:cSld>
+    <p:spTree>
+      <p:nvGrpSpPr>
+        <p:cNvPr id="1" name=""/>
+        <p:cNvGrpSpPr/>
+        <p:nvPr/>
+      </p:nvGrpSpPr>
+      <p:grpSpPr/>
+      <p:sp>
+        <p:nvSpPr>
+          <p:cNvPr id="2" name="Title 1"/>
+          <p:cNvSpPr>
+            <a:spLocks noGrp="1"/>
+          </p:cNvSpPr>
+          <p:nvPr>
+            <p:ph type="title"/>
+          </p:nvPr>
+        </p:nvSpPr>
+        <p:spPr>
+          <a:xfrm>
+            <a:off x="457200" y="621792"/>
+            <a:ext cx="11274552" cy="822960"/>
+          </a:xfrm>
+        </p:spPr>
+        <p:txBody>
+          <a:bodyPr wrap="square" anchor="t" lIns="45720" rIns="45720"/>
+          <a:lstStyle/>
+          <a:p>
+            <a:pPr algn="l"/>
+            <a:r>
+              <a:rPr sz="2800" b="1" i="0">
+                <a:solidFill>
+                  <a:srgbClr val="1F3A5F"/>
+                </a:solidFill>
+                <a:latin typeface="Calibri"/>
+              </a:rPr>
+              <a:t>Tabela longa paginada automaticamente (25 linhas) (2/3)</a:t>
+            </a:r>
+          </a:p>
+        </p:txBody>
+      </p:sp>
+      <p:sp>
+        <p:nvSpPr>
+          <p:cNvPr id="3" name="TextBox 2"/>
+          <p:cNvSpPr txBox="1"/>
+          <p:nvPr/>
+        </p:nvSpPr>
+        <p:spPr>
+          <a:xfrm>
+            <a:off x="457200" y="91440"/>
+            <a:ext cx="7315200" cy="228600"/>
+          </a:xfrm>
+          <a:prstGeom prst="rect">
+            <a:avLst/>
+          </a:prstGeom>
+          <a:noFill/>
+        </p:spPr>
+        <p:txBody>
+          <a:bodyPr wrap="square" anchor="ctr" lIns="45720" rIns="45720" tIns="27432" bIns="27432">
+            <a:spAutoFit/>
+          </a:bodyPr>
+          <a:lstStyle/>
+          <a:p>
+            <a:pPr algn="l"/>
+            <a:r>
+              <a:rPr sz="900" b="1" i="0">
+                <a:solidFill>
+                  <a:srgbClr val="8C8C8C"/>
+                </a:solidFill>
+                <a:latin typeface="Calibri"/>
+              </a:rPr>
+              <a:t>EMPRESA EXEMPLO  |  CATÁLOGO DE MODELOS</a:t>
+            </a:r>
+          </a:p>
+        </p:txBody>
+      </p:sp>
+      <p:sp>
+        <p:nvSpPr>
+          <p:cNvPr id="4" name="TextBox 3"/>
+          <p:cNvSpPr txBox="1"/>
+          <p:nvPr/>
+        </p:nvSpPr>
+        <p:spPr>
+          <a:xfrm>
+            <a:off x="7772400" y="91440"/>
+            <a:ext cx="3959352" cy="228600"/>
+          </a:xfrm>
+          <a:prstGeom prst="rect">
+            <a:avLst/>
+          </a:prstGeom>
+          <a:noFill/>
+        </p:spPr>
+        <p:txBody>
+          <a:bodyPr wrap="square" anchor="ctr" lIns="45720" rIns="45720" tIns="27432" bIns="27432">
+            <a:spAutoFit/>
+          </a:bodyPr>
+          <a:lstStyle/>
+          <a:p>
+            <a:pPr algn="r"/>
+            <a:r>
+              <a:rPr sz="900" b="0" i="0">
+                <a:solidFill>
+                  <a:srgbClr val="8C8C8C"/>
+                </a:solidFill>
+                <a:latin typeface="Calibri"/>
+              </a:rPr>
+              <a:t>set/2026</a:t>
+            </a:r>
+          </a:p>
+        </p:txBody>
+      </p:sp>
+      <p:sp>
+        <p:nvSpPr>
+          <p:cNvPr id="5" name="TextBox 4"/>
+          <p:cNvSpPr txBox="1"/>
+          <p:nvPr/>
+        </p:nvSpPr>
+        <p:spPr>
+          <a:xfrm>
+            <a:off x="457200" y="384048"/>
+            <a:ext cx="11274552" cy="256032"/>
+          </a:xfrm>
+          <a:prstGeom prst="rect">
+            <a:avLst/>
+          </a:prstGeom>
+          <a:noFill/>
+        </p:spPr>
+        <p:txBody>
+          <a:bodyPr wrap="square" anchor="b" lIns="45720" rIns="45720" tIns="27432" bIns="27432">
+            <a:spAutoFit/>
+          </a:bodyPr>
+          <a:lstStyle/>
+          <a:p>
+            <a:pPr algn="l"/>
+            <a:r>
+              <a:rPr sz="1000" b="1" i="0">
+                <a:solidFill>
+                  <a:srgbClr val="4F81BD"/>
+                </a:solidFill>
+                <a:latin typeface="Calibri"/>
+              </a:rPr>
+              <a:t>ANEXO</a:t>
+            </a:r>
+          </a:p>
+        </p:txBody>
+      </p:sp>
+      <p:sp>
+        <p:nvSpPr>
+          <p:cNvPr id="6" name="TextBox 5"/>
+          <p:cNvSpPr txBox="1"/>
+          <p:nvPr/>
+        </p:nvSpPr>
+        <p:spPr>
+          <a:xfrm>
+            <a:off x="457200" y="6217920"/>
+            <a:ext cx="8531352" cy="365760"/>
+          </a:xfrm>
+          <a:prstGeom prst="rect">
+            <a:avLst/>
+          </a:prstGeom>
+          <a:noFill/>
+        </p:spPr>
+        <p:txBody>
+          <a:bodyPr wrap="square" anchor="ctr" lIns="45720" rIns="45720" tIns="27432" bIns="27432">
+            <a:spAutoFit/>
+          </a:bodyPr>
+          <a:lstStyle/>
+          <a:p>
+            <a:pPr algn="l"/>
+            <a:r>
+              <a:rPr sz="1000" b="0" i="0">
+                <a:solidFill>
+                  <a:srgbClr val="8C8C8C"/>
+                </a:solidFill>
+                <a:latin typeface="Calibri"/>
+              </a:rPr>
+              <a:t>Fonte: Base de portfólio (exemplo)   |   Uso interno</a:t>
+            </a:r>
+          </a:p>
+        </p:txBody>
+      </p:sp>
+      <p:sp>
+        <p:nvSpPr>
+          <p:cNvPr id="7" name="TextBox 6"/>
+          <p:cNvSpPr txBox="1"/>
+          <p:nvPr/>
+        </p:nvSpPr>
+        <p:spPr>
+          <a:xfrm>
+            <a:off x="10817352" y="6217920"/>
+            <a:ext cx="914400" cy="365760"/>
+          </a:xfrm>
+          <a:prstGeom prst="rect">
+            <a:avLst/>
+          </a:prstGeom>
+          <a:noFill/>
+        </p:spPr>
+        <p:txBody>
+          <a:bodyPr wrap="square" anchor="ctr" lIns="45720" rIns="45720" tIns="27432" bIns="27432">
+            <a:spAutoFit/>
+          </a:bodyPr>
+          <a:lstStyle/>
+          <a:p>
+            <a:pPr algn="r"/>
+            <a:r>
+              <a:rPr sz="1000" b="0" i="0">
+                <a:solidFill>
+                  <a:srgbClr val="8C8C8C"/>
+                </a:solidFill>
+                <a:latin typeface="Calibri"/>
+              </a:rPr>
+              <a:t>33</a:t>
+            </a:r>
+          </a:p>
+        </p:txBody>
+      </p:sp>
+      <p:pic>
+        <p:nvPicPr>
+          <p:cNvPr id="8" name="Picture 7" descr="logo-placeholder.png"/>
+          <p:cNvPicPr>
+            <a:picLocks noChangeAspect="1"/>
+          </p:cNvPicPr>
+          <p:nvPr/>
+        </p:nvPicPr>
+        <p:blipFill>
+          <a:blip r:embed="rId2"/>
+          <a:stretch>
+            <a:fillRect/>
+          </a:stretch>
+        </p:blipFill>
+        <p:spPr>
+          <a:xfrm>
+            <a:off x="9692640" y="6245352"/>
+            <a:ext cx="822960" cy="274320"/>
+          </a:xfrm>
+          <a:prstGeom prst="rect">
+            <a:avLst/>
+          </a:prstGeom>
+        </p:spPr>
+      </p:pic>
+      <p:graphicFrame>
+        <p:nvGraphicFramePr>
+          <p:cNvPr id="9" name="Table 8"/>
+          <p:cNvGraphicFramePr>
+            <a:graphicFrameLocks noGrp="1"/>
+          </p:cNvGraphicFramePr>
+          <p:nvPr/>
+        </p:nvGraphicFramePr>
+        <p:xfrm>
+          <a:off x="457200" y="1737360"/>
+          <a:ext cx="11274552" cy="4389120"/>
+        </p:xfrm>
+        <a:graphic>
+          <a:graphicData uri="http://schemas.openxmlformats.org/drawingml/2006/table">
+            <a:tbl>
+              <a:tblPr firstRow="1">
+                <a:tableStyleId>{5C22544A-7EE6-4342-B048-85BDC9FD1C3A}</a:tableStyleId>
+              </a:tblPr>
+              <a:tblGrid>
+                <a:gridCol w="1879092"/>
+                <a:gridCol w="1879092"/>
+                <a:gridCol w="1879092"/>
+                <a:gridCol w="1879092"/>
+                <a:gridCol w="1879092"/>
+                <a:gridCol w="1879092"/>
+              </a:tblGrid>
+              <a:tr h="399010">
+                <a:tc>
+                  <a:txBody>
+                    <a:bodyPr wrap="square"/>
+                    <a:lstStyle/>
+                    <a:p>
+                      <a:pPr algn="l"/>
+                      <a:r>
+                        <a:rPr sz="1200" b="1" i="0">
+                          <a:solidFill>
+                            <a:srgbClr val="FFFFFF"/>
+                          </a:solidFill>
+                          <a:latin typeface="Calibri"/>
+                        </a:rPr>
+                        <a:t>ID</a:t>
+                      </a:r>
+                    </a:p>
+                  </a:txBody>
+                  <a:tcPr marL="73152" marR="73152" marT="27432" marB="27432" anchor="ctr">
+                    <a:solidFill>
+                      <a:srgbClr val="1F3A5F"/>
+                    </a:solidFill>
+                  </a:tcPr>
+                </a:tc>
+                <a:tc>
+                  <a:txBody>
+                    <a:bodyPr wrap="square"/>
+                    <a:lstStyle/>
+                    <a:p>
+                      <a:pPr algn="l"/>
+                      <a:r>
+                        <a:rPr sz="1200" b="1" i="0">
+                          <a:solidFill>
+                            <a:srgbClr val="FFFFFF"/>
+                          </a:solidFill>
+                          <a:latin typeface="Calibri"/>
+                        </a:rPr>
+                        <a:t>Projeto</a:t>
+                      </a:r>
+                    </a:p>
+                  </a:txBody>
+                  <a:tcPr marL="73152" marR="73152" marT="27432" marB="27432" anchor="ctr">
+                    <a:solidFill>
+                      <a:srgbClr val="1F3A5F"/>
+                    </a:solidFill>
+                  </a:tcPr>
+                </a:tc>
+                <a:tc>
+                  <a:txBody>
+                    <a:bodyPr wrap="square"/>
+                    <a:lstStyle/>
+                    <a:p>
+                      <a:pPr algn="l"/>
+                      <a:r>
+                        <a:rPr sz="1200" b="1" i="0">
+                          <a:solidFill>
+                            <a:srgbClr val="FFFFFF"/>
+                          </a:solidFill>
+                          <a:latin typeface="Calibri"/>
+                        </a:rPr>
+                        <a:t>Status</a:t>
+                      </a:r>
+                    </a:p>
+                  </a:txBody>
+                  <a:tcPr marL="73152" marR="73152" marT="27432" marB="27432" anchor="ctr">
+                    <a:solidFill>
+                      <a:srgbClr val="1F3A5F"/>
+                    </a:solidFill>
+                  </a:tcPr>
+                </a:tc>
+                <a:tc>
+                  <a:txBody>
+                    <a:bodyPr wrap="square"/>
+                    <a:lstStyle/>
+                    <a:p>
+                      <a:pPr algn="ctr"/>
+                      <a:r>
+                        <a:rPr sz="1200" b="1" i="0">
+                          <a:solidFill>
+                            <a:srgbClr val="FFFFFF"/>
+                          </a:solidFill>
+                          <a:latin typeface="Calibri"/>
+                        </a:rPr>
+                        <a:t>Risco</a:t>
+                      </a:r>
+                    </a:p>
+                  </a:txBody>
+                  <a:tcPr marL="73152" marR="73152" marT="27432" marB="27432" anchor="ctr">
+                    <a:solidFill>
+                      <a:srgbClr val="1F3A5F"/>
+                    </a:solidFill>
+                  </a:tcPr>
+                </a:tc>
+                <a:tc>
+                  <a:txBody>
+                    <a:bodyPr wrap="square"/>
+                    <a:lstStyle/>
+                    <a:p>
+                      <a:pPr algn="r"/>
+                      <a:r>
+                        <a:rPr sz="1200" b="1" i="0">
+                          <a:solidFill>
+                            <a:srgbClr val="FFFFFF"/>
+                          </a:solidFill>
+                          <a:latin typeface="Calibri"/>
+                        </a:rPr>
+                        <a:t>Conclusão</a:t>
+                      </a:r>
+                    </a:p>
+                  </a:txBody>
+                  <a:tcPr marL="73152" marR="73152" marT="27432" marB="27432" anchor="ctr">
+                    <a:solidFill>
+                      <a:srgbClr val="1F3A5F"/>
+                    </a:solidFill>
+                  </a:tcPr>
+                </a:tc>
+                <a:tc>
+                  <a:txBody>
+                    <a:bodyPr wrap="square"/>
+                    <a:lstStyle/>
+                    <a:p>
+                      <a:pPr algn="r"/>
+                      <a:r>
+                        <a:rPr sz="1200" b="1" i="0">
+                          <a:solidFill>
+                            <a:srgbClr val="FFFFFF"/>
+                          </a:solidFill>
+                          <a:latin typeface="Calibri"/>
+                        </a:rPr>
+                        <a:t>Orçamento</a:t>
+                      </a:r>
+                    </a:p>
+                  </a:txBody>
+                  <a:tcPr marL="73152" marR="73152" marT="27432" marB="27432" anchor="ctr">
+                    <a:solidFill>
+                      <a:srgbClr val="1F3A5F"/>
+                    </a:solidFill>
+                  </a:tcPr>
+                </a:tc>
+              </a:tr>
+              <a:tr h="399010">
+                <a:tc>
+                  <a:txBody>
+                    <a:bodyPr wrap="square"/>
+                    <a:lstStyle/>
+                    <a:p>
+                      <a:pPr algn="l"/>
+                      <a:r>
+                        <a:rPr sz="1200" b="0" i="0">
+                          <a:solidFill>
+                            <a:srgbClr val="333333"/>
+                          </a:solidFill>
+                          <a:latin typeface="Calibri"/>
+                        </a:rPr>
+                        <a:t>P-011</a:t>
+                      </a:r>
+                    </a:p>
+                  </a:txBody>
+                  <a:tcPr marL="73152" marR="73152" marT="27432" marB="27432" anchor="ctr">
+                    <a:solidFill>
+                      <a:srgbClr val="FFFFFF"/>
+                    </a:solidFill>
+                  </a:tcPr>
+                </a:tc>
+                <a:tc>
+                  <a:txBody>
+                    <a:bodyPr wrap="square"/>
+                    <a:lstStyle/>
+                    <a:p>
+                      <a:pPr algn="l"/>
+                      <a:r>
+                        <a:rPr sz="1200" b="0" i="0">
+                          <a:solidFill>
+                            <a:srgbClr val="333333"/>
+                          </a:solidFill>
+                          <a:latin typeface="Calibri"/>
+                        </a:rPr>
+                        <a:t>Projeto 11</a:t>
+                      </a:r>
+                    </a:p>
+                  </a:txBody>
+                  <a:tcPr marL="73152" marR="73152" marT="27432" marB="27432" anchor="ctr">
+                    <a:solidFill>
+                      <a:srgbClr val="FFFFFF"/>
+                    </a:solidFill>
+                  </a:tcPr>
+                </a:tc>
+                <a:tc>
+                  <a:txBody>
+                    <a:bodyPr wrap="square"/>
+                    <a:lstStyle/>
+                    <a:p>
+                      <a:pPr algn="l"/>
+                      <a:r>
+                        <a:rPr sz="1200" b="0" i="0">
+                          <a:solidFill>
+                            <a:srgbClr val="333333"/>
+                          </a:solidFill>
+                          <a:latin typeface="Calibri"/>
+                        </a:rPr>
+                        <a:t>Em andamento</a:t>
+                      </a:r>
+                    </a:p>
+                  </a:txBody>
+                  <a:tcPr marL="73152" marR="73152" marT="27432" marB="27432" anchor="ctr">
+                    <a:solidFill>
+                      <a:srgbClr val="FFFFFF"/>
+                    </a:solidFill>
+                  </a:tcPr>
+                </a:tc>
+                <a:tc>
+                  <a:txBody>
+                    <a:bodyPr wrap="square"/>
+                    <a:lstStyle/>
+                    <a:p>
+                      <a:pPr algn="ctr"/>
+                      <a:r>
+                        <a:rPr sz="1200" b="1" i="0">
+                          <a:solidFill>
+                            <a:srgbClr val="FFFFFF"/>
+                          </a:solidFill>
+                          <a:latin typeface="Calibri"/>
+                        </a:rPr>
+                        <a:t>Médio</a:t>
+                      </a:r>
+                    </a:p>
+                  </a:txBody>
+                  <a:tcPr marL="73152" marR="73152" marT="27432" marB="27432" anchor="ctr">
+                    <a:solidFill>
+                      <a:srgbClr val="F9A825"/>
+                    </a:solidFill>
+                  </a:tcPr>
+                </a:tc>
+                <a:tc>
+                  <a:txBody>
+                    <a:bodyPr wrap="square"/>
+                    <a:lstStyle/>
+                    <a:p>
+                      <a:pPr algn="r"/>
+                      <a:r>
+                        <a:rPr sz="1200" b="0" i="0">
+                          <a:solidFill>
+                            <a:srgbClr val="333333"/>
+                          </a:solidFill>
+                          <a:latin typeface="Calibri"/>
+                        </a:rPr>
+                        <a:t>41%</a:t>
+                      </a:r>
+                    </a:p>
+                  </a:txBody>
+                  <a:tcPr marL="73152" marR="73152" marT="27432" marB="27432" anchor="ctr">
+                    <a:solidFill>
+                      <a:srgbClr val="FFFFFF"/>
+                    </a:solidFill>
+                  </a:tcPr>
+                </a:tc>
+                <a:tc>
+                  <a:txBody>
+                    <a:bodyPr wrap="square"/>
+                    <a:lstStyle/>
+                    <a:p>
+                      <a:pPr algn="r"/>
+                      <a:r>
+                        <a:rPr sz="1200" b="0" i="0">
+                          <a:solidFill>
+                            <a:srgbClr val="333333"/>
+                          </a:solidFill>
+                          <a:latin typeface="Calibri"/>
+                        </a:rPr>
+                        <a:t>R$ 2,1 mi</a:t>
+                      </a:r>
+                    </a:p>
+                  </a:txBody>
+                  <a:tcPr marL="73152" marR="73152" marT="27432" marB="27432" anchor="ctr">
+                    <a:solidFill>
+                      <a:srgbClr val="FFFFFF"/>
+                    </a:solidFill>
+                  </a:tcPr>
+                </a:tc>
+              </a:tr>
+              <a:tr h="399010">
+                <a:tc>
+                  <a:txBody>
+                    <a:bodyPr wrap="square"/>
+                    <a:lstStyle/>
+                    <a:p>
+                      <a:pPr algn="l"/>
+                      <a:r>
+                        <a:rPr sz="1200" b="0" i="0">
+                          <a:solidFill>
+                            <a:srgbClr val="333333"/>
+                          </a:solidFill>
+                          <a:latin typeface="Calibri"/>
+                        </a:rPr>
+                        <a:t>P-012</a:t>
+                      </a:r>
+                    </a:p>
+                  </a:txBody>
+                  <a:tcPr marL="73152" marR="73152" marT="27432" marB="27432" anchor="ctr">
+                    <a:solidFill>
+                      <a:srgbClr val="F2F2F2"/>
+                    </a:solidFill>
+                  </a:tcPr>
+                </a:tc>
+                <a:tc>
+                  <a:txBody>
+                    <a:bodyPr wrap="square"/>
+                    <a:lstStyle/>
+                    <a:p>
+                      <a:pPr algn="l"/>
+                      <a:r>
+                        <a:rPr sz="1200" b="0" i="0">
+                          <a:solidFill>
+                            <a:srgbClr val="333333"/>
+                          </a:solidFill>
+                          <a:latin typeface="Calibri"/>
+                        </a:rPr>
+                        <a:t>Projeto 12</a:t>
+                      </a:r>
+                    </a:p>
+                  </a:txBody>
+                  <a:tcPr marL="73152" marR="73152" marT="27432" marB="27432" anchor="ctr">
+                    <a:solidFill>
+                      <a:srgbClr val="F2F2F2"/>
+                    </a:solidFill>
+                  </a:tcPr>
+                </a:tc>
+                <a:tc>
+                  <a:txBody>
+                    <a:bodyPr wrap="square"/>
+                    <a:lstStyle/>
+                    <a:p>
+                      <a:pPr algn="l"/>
+                      <a:r>
+                        <a:rPr sz="1200" b="0" i="0">
+                          <a:solidFill>
+                            <a:srgbClr val="333333"/>
+                          </a:solidFill>
+                          <a:latin typeface="Calibri"/>
+                        </a:rPr>
+                        <a:t>Validação</a:t>
+                      </a:r>
+                    </a:p>
+                  </a:txBody>
+                  <a:tcPr marL="73152" marR="73152" marT="27432" marB="27432" anchor="ctr">
+                    <a:solidFill>
+                      <a:srgbClr val="F2F2F2"/>
+                    </a:solidFill>
+                  </a:tcPr>
+                </a:tc>
+                <a:tc>
+                  <a:txBody>
+                    <a:bodyPr wrap="square"/>
+                    <a:lstStyle/>
+                    <a:p>
+                      <a:pPr algn="ctr"/>
+                      <a:r>
+                        <a:rPr sz="1200" b="1" i="0">
+                          <a:solidFill>
+                            <a:srgbClr val="FFFFFF"/>
+                          </a:solidFill>
+                          <a:latin typeface="Calibri"/>
+                        </a:rPr>
+                        <a:t>Alto</a:t>
+                      </a:r>
+                    </a:p>
+                  </a:txBody>
+                  <a:tcPr marL="73152" marR="73152" marT="27432" marB="27432" anchor="ctr">
+                    <a:solidFill>
+                      <a:srgbClr val="C62828"/>
+                    </a:solidFill>
+                  </a:tcPr>
+                </a:tc>
+                <a:tc>
+                  <a:txBody>
+                    <a:bodyPr wrap="square"/>
+                    <a:lstStyle/>
+                    <a:p>
+                      <a:pPr algn="r"/>
+                      <a:r>
+                        <a:rPr sz="1200" b="0" i="0">
+                          <a:solidFill>
+                            <a:srgbClr val="333333"/>
+                          </a:solidFill>
+                          <a:latin typeface="Calibri"/>
+                        </a:rPr>
+                        <a:t>42%</a:t>
+                      </a:r>
+                    </a:p>
+                  </a:txBody>
+                  <a:tcPr marL="73152" marR="73152" marT="27432" marB="27432" anchor="ctr">
+                    <a:solidFill>
+                      <a:srgbClr val="F2F2F2"/>
+                    </a:solidFill>
+                  </a:tcPr>
+                </a:tc>
+                <a:tc>
+                  <a:txBody>
+                    <a:bodyPr wrap="square"/>
+                    <a:lstStyle/>
+                    <a:p>
+                      <a:pPr algn="r"/>
+                      <a:r>
+                        <a:rPr sz="1200" b="0" i="0">
+                          <a:solidFill>
+                            <a:srgbClr val="333333"/>
+                          </a:solidFill>
+                          <a:latin typeface="Calibri"/>
+                        </a:rPr>
+                        <a:t>R$ 2,2 mi</a:t>
+                      </a:r>
+                    </a:p>
+                  </a:txBody>
+                  <a:tcPr marL="73152" marR="73152" marT="27432" marB="27432" anchor="ctr">
+                    <a:solidFill>
+                      <a:srgbClr val="F2F2F2"/>
+                    </a:solidFill>
+                  </a:tcPr>
+                </a:tc>
+              </a:tr>
+              <a:tr h="399010">
+                <a:tc>
+                  <a:txBody>
+                    <a:bodyPr wrap="square"/>
+                    <a:lstStyle/>
+                    <a:p>
+                      <a:pPr algn="l"/>
+                      <a:r>
+                        <a:rPr sz="1200" b="0" i="0">
+                          <a:solidFill>
+                            <a:srgbClr val="333333"/>
+                          </a:solidFill>
+                          <a:latin typeface="Calibri"/>
+                        </a:rPr>
+                        <a:t>P-013</a:t>
+                      </a:r>
+                    </a:p>
+                  </a:txBody>
+                  <a:tcPr marL="73152" marR="73152" marT="27432" marB="27432" anchor="ctr">
+                    <a:solidFill>
+                      <a:srgbClr val="FFFFFF"/>
+                    </a:solidFill>
+                  </a:tcPr>
+                </a:tc>
+                <a:tc>
+                  <a:txBody>
+                    <a:bodyPr wrap="square"/>
+                    <a:lstStyle/>
+                    <a:p>
+                      <a:pPr algn="l"/>
+                      <a:r>
+                        <a:rPr sz="1200" b="0" i="0">
+                          <a:solidFill>
+                            <a:srgbClr val="333333"/>
+                          </a:solidFill>
+                          <a:latin typeface="Calibri"/>
+                        </a:rPr>
+                        <a:t>Projeto 13</a:t>
+                      </a:r>
+                    </a:p>
+                  </a:txBody>
+                  <a:tcPr marL="73152" marR="73152" marT="27432" marB="27432" anchor="ctr">
+                    <a:solidFill>
+                      <a:srgbClr val="FFFFFF"/>
+                    </a:solidFill>
+                  </a:tcPr>
+                </a:tc>
+                <a:tc>
+                  <a:txBody>
+                    <a:bodyPr wrap="square"/>
+                    <a:lstStyle/>
+                    <a:p>
+                      <a:pPr algn="l"/>
+                      <a:r>
+                        <a:rPr sz="1200" b="0" i="0">
+                          <a:solidFill>
+                            <a:srgbClr val="333333"/>
+                          </a:solidFill>
+                          <a:latin typeface="Calibri"/>
+                        </a:rPr>
+                        <a:t>Em andamento</a:t>
+                      </a:r>
+                    </a:p>
+                  </a:txBody>
+                  <a:tcPr marL="73152" marR="73152" marT="27432" marB="27432" anchor="ctr">
+                    <a:solidFill>
+                      <a:srgbClr val="FFFFFF"/>
+                    </a:solidFill>
+                  </a:tcPr>
+                </a:tc>
+                <a:tc>
+                  <a:txBody>
+                    <a:bodyPr wrap="square"/>
+                    <a:lstStyle/>
+                    <a:p>
+                      <a:pPr algn="ctr"/>
+                      <a:r>
+                        <a:rPr sz="1200" b="1" i="0">
+                          <a:solidFill>
+                            <a:srgbClr val="FFFFFF"/>
+                          </a:solidFill>
+                          <a:latin typeface="Calibri"/>
+                        </a:rPr>
+                        <a:t>Médio</a:t>
+                      </a:r>
+                    </a:p>
+                  </a:txBody>
+                  <a:tcPr marL="73152" marR="73152" marT="27432" marB="27432" anchor="ctr">
+                    <a:solidFill>
+                      <a:srgbClr val="F9A825"/>
+                    </a:solidFill>
+                  </a:tcPr>
+                </a:tc>
+                <a:tc>
+                  <a:txBody>
+                    <a:bodyPr wrap="square"/>
+                    <a:lstStyle/>
+                    <a:p>
+                      <a:pPr algn="r"/>
+                      <a:r>
+                        <a:rPr sz="1200" b="0" i="0">
+                          <a:solidFill>
+                            <a:srgbClr val="333333"/>
+                          </a:solidFill>
+                          <a:latin typeface="Calibri"/>
+                        </a:rPr>
+                        <a:t>43%</a:t>
+                      </a:r>
+                    </a:p>
+                  </a:txBody>
+                  <a:tcPr marL="73152" marR="73152" marT="27432" marB="27432" anchor="ctr">
+                    <a:solidFill>
+                      <a:srgbClr val="FFFFFF"/>
+                    </a:solidFill>
+                  </a:tcPr>
+                </a:tc>
+                <a:tc>
+                  <a:txBody>
+                    <a:bodyPr wrap="square"/>
+                    <a:lstStyle/>
+                    <a:p>
+                      <a:pPr algn="r"/>
+                      <a:r>
+                        <a:rPr sz="1200" b="0" i="0">
+                          <a:solidFill>
+                            <a:srgbClr val="333333"/>
+                          </a:solidFill>
+                          <a:latin typeface="Calibri"/>
+                        </a:rPr>
+                        <a:t>R$ 2,3 mi</a:t>
+                      </a:r>
+                    </a:p>
+                  </a:txBody>
+                  <a:tcPr marL="73152" marR="73152" marT="27432" marB="27432" anchor="ctr">
+                    <a:solidFill>
+                      <a:srgbClr val="FFFFFF"/>
+                    </a:solidFill>
+                  </a:tcPr>
+                </a:tc>
+              </a:tr>
+              <a:tr h="399010">
+                <a:tc>
+                  <a:txBody>
+                    <a:bodyPr wrap="square"/>
+                    <a:lstStyle/>
+                    <a:p>
+                      <a:pPr algn="l"/>
+                      <a:r>
+                        <a:rPr sz="1200" b="0" i="0">
+                          <a:solidFill>
+                            <a:srgbClr val="333333"/>
+                          </a:solidFill>
+                          <a:latin typeface="Calibri"/>
+                        </a:rPr>
+                        <a:t>P-014</a:t>
+                      </a:r>
+                    </a:p>
+                  </a:txBody>
+                  <a:tcPr marL="73152" marR="73152" marT="27432" marB="27432" anchor="ctr">
+                    <a:solidFill>
+                      <a:srgbClr val="F2F2F2"/>
+                    </a:solidFill>
+                  </a:tcPr>
+                </a:tc>
+                <a:tc>
+                  <a:txBody>
+                    <a:bodyPr wrap="square"/>
+                    <a:lstStyle/>
+                    <a:p>
+                      <a:pPr algn="l"/>
+                      <a:r>
+                        <a:rPr sz="1200" b="0" i="0">
+                          <a:solidFill>
+                            <a:srgbClr val="333333"/>
+                          </a:solidFill>
+                          <a:latin typeface="Calibri"/>
+                        </a:rPr>
+                        <a:t>Projeto 14</a:t>
+                      </a:r>
+                    </a:p>
+                  </a:txBody>
+                  <a:tcPr marL="73152" marR="73152" marT="27432" marB="27432" anchor="ctr">
+                    <a:solidFill>
+                      <a:srgbClr val="F2F2F2"/>
+                    </a:solidFill>
+                  </a:tcPr>
+                </a:tc>
+                <a:tc>
+                  <a:txBody>
+                    <a:bodyPr wrap="square"/>
+                    <a:lstStyle/>
+                    <a:p>
+                      <a:pPr algn="l"/>
+                      <a:r>
+                        <a:rPr sz="1200" b="0" i="0">
+                          <a:solidFill>
+                            <a:srgbClr val="333333"/>
+                          </a:solidFill>
+                          <a:latin typeface="Calibri"/>
+                        </a:rPr>
+                        <a:t>Em andamento</a:t>
+                      </a:r>
+                    </a:p>
+                  </a:txBody>
+                  <a:tcPr marL="73152" marR="73152" marT="27432" marB="27432" anchor="ctr">
+                    <a:solidFill>
+                      <a:srgbClr val="F2F2F2"/>
+                    </a:solidFill>
+                  </a:tcPr>
+                </a:tc>
+                <a:tc>
+                  <a:txBody>
+                    <a:bodyPr wrap="square"/>
+                    <a:lstStyle/>
+                    <a:p>
+                      <a:pPr algn="ctr"/>
+                      <a:r>
+                        <a:rPr sz="1200" b="1" i="0">
+                          <a:solidFill>
+                            <a:srgbClr val="FFFFFF"/>
+                          </a:solidFill>
+                          <a:latin typeface="Calibri"/>
+                        </a:rPr>
+                        <a:t>Médio</a:t>
+                      </a:r>
+                    </a:p>
+                  </a:txBody>
+                  <a:tcPr marL="73152" marR="73152" marT="27432" marB="27432" anchor="ctr">
+                    <a:solidFill>
+                      <a:srgbClr val="F9A825"/>
+                    </a:solidFill>
+                  </a:tcPr>
+                </a:tc>
+                <a:tc>
+                  <a:txBody>
+                    <a:bodyPr wrap="square"/>
+                    <a:lstStyle/>
+                    <a:p>
+                      <a:pPr algn="r"/>
+                      <a:r>
+                        <a:rPr sz="1200" b="0" i="0">
+                          <a:solidFill>
+                            <a:srgbClr val="333333"/>
+                          </a:solidFill>
+                          <a:latin typeface="Calibri"/>
+                        </a:rPr>
+                        <a:t>44%</a:t>
+                      </a:r>
+                    </a:p>
+                  </a:txBody>
+                  <a:tcPr marL="73152" marR="73152" marT="27432" marB="27432" anchor="ctr">
+                    <a:solidFill>
+                      <a:srgbClr val="F2F2F2"/>
+                    </a:solidFill>
+                  </a:tcPr>
+                </a:tc>
+                <a:tc>
+                  <a:txBody>
+                    <a:bodyPr wrap="square"/>
+                    <a:lstStyle/>
+                    <a:p>
+                      <a:pPr algn="r"/>
+                      <a:r>
+                        <a:rPr sz="1200" b="0" i="0">
+                          <a:solidFill>
+                            <a:srgbClr val="333333"/>
+                          </a:solidFill>
+                          <a:latin typeface="Calibri"/>
+                        </a:rPr>
+                        <a:t>R$ 2,4 mi</a:t>
+                      </a:r>
+                    </a:p>
+                  </a:txBody>
+                  <a:tcPr marL="73152" marR="73152" marT="27432" marB="27432" anchor="ctr">
+                    <a:solidFill>
+                      <a:srgbClr val="F2F2F2"/>
+                    </a:solidFill>
+                  </a:tcPr>
+                </a:tc>
+              </a:tr>
+              <a:tr h="399010">
+                <a:tc>
+                  <a:txBody>
+                    <a:bodyPr wrap="square"/>
+                    <a:lstStyle/>
+                    <a:p>
+                      <a:pPr algn="l"/>
+                      <a:r>
+                        <a:rPr sz="1200" b="0" i="0">
+                          <a:solidFill>
+                            <a:srgbClr val="333333"/>
+                          </a:solidFill>
+                          <a:latin typeface="Calibri"/>
+                        </a:rPr>
+                        <a:t>P-015</a:t>
+                      </a:r>
+                    </a:p>
+                  </a:txBody>
+                  <a:tcPr marL="73152" marR="73152" marT="27432" marB="27432" anchor="ctr">
+                    <a:solidFill>
+                      <a:srgbClr val="FFFFFF"/>
+                    </a:solidFill>
+                  </a:tcPr>
+                </a:tc>
+                <a:tc>
+                  <a:txBody>
+                    <a:bodyPr wrap="square"/>
+                    <a:lstStyle/>
+                    <a:p>
+                      <a:pPr algn="l"/>
+                      <a:r>
+                        <a:rPr sz="1200" b="0" i="0">
+                          <a:solidFill>
+                            <a:srgbClr val="333333"/>
+                          </a:solidFill>
+                          <a:latin typeface="Calibri"/>
+                        </a:rPr>
+                        <a:t>Projeto 15</a:t>
+                      </a:r>
+                    </a:p>
+                  </a:txBody>
+                  <a:tcPr marL="73152" marR="73152" marT="27432" marB="27432" anchor="ctr">
+                    <a:solidFill>
+                      <a:srgbClr val="FFFFFF"/>
+                    </a:solidFill>
+                  </a:tcPr>
+                </a:tc>
+                <a:tc>
+                  <a:txBody>
+                    <a:bodyPr wrap="square"/>
+                    <a:lstStyle/>
+                    <a:p>
+                      <a:pPr algn="l"/>
+                      <a:r>
+                        <a:rPr sz="1200" b="0" i="0">
+                          <a:solidFill>
+                            <a:srgbClr val="333333"/>
+                          </a:solidFill>
+                          <a:latin typeface="Calibri"/>
+                        </a:rPr>
+                        <a:t>Validação</a:t>
+                      </a:r>
+                    </a:p>
+                  </a:txBody>
+                  <a:tcPr marL="73152" marR="73152" marT="27432" marB="27432" anchor="ctr">
+                    <a:solidFill>
+                      <a:srgbClr val="FFFFFF"/>
+                    </a:solidFill>
+                  </a:tcPr>
+                </a:tc>
+                <a:tc>
+                  <a:txBody>
+                    <a:bodyPr wrap="square"/>
+                    <a:lstStyle/>
+                    <a:p>
+                      <a:pPr algn="ctr"/>
+                      <a:r>
+                        <a:rPr sz="1200" b="1" i="0">
+                          <a:solidFill>
+                            <a:srgbClr val="FFFFFF"/>
+                          </a:solidFill>
+                          <a:latin typeface="Calibri"/>
+                        </a:rPr>
+                        <a:t>Médio</a:t>
+                      </a:r>
+                    </a:p>
+                  </a:txBody>
+                  <a:tcPr marL="73152" marR="73152" marT="27432" marB="27432" anchor="ctr">
+                    <a:solidFill>
+                      <a:srgbClr val="F9A825"/>
+                    </a:solidFill>
+                  </a:tcPr>
+                </a:tc>
+                <a:tc>
+                  <a:txBody>
+                    <a:bodyPr wrap="square"/>
+                    <a:lstStyle/>
+                    <a:p>
+                      <a:pPr algn="r"/>
+                      <a:r>
+                        <a:rPr sz="1200" b="0" i="0">
+                          <a:solidFill>
+                            <a:srgbClr val="333333"/>
+                          </a:solidFill>
+                          <a:latin typeface="Calibri"/>
+                        </a:rPr>
+                        <a:t>45%</a:t>
+                      </a:r>
+                    </a:p>
+                  </a:txBody>
+                  <a:tcPr marL="73152" marR="73152" marT="27432" marB="27432" anchor="ctr">
+                    <a:solidFill>
+                      <a:srgbClr val="FFFFFF"/>
+                    </a:solidFill>
+                  </a:tcPr>
+                </a:tc>
+                <a:tc>
+                  <a:txBody>
+                    <a:bodyPr wrap="square"/>
+                    <a:lstStyle/>
+                    <a:p>
+                      <a:pPr algn="r"/>
+                      <a:r>
+                        <a:rPr sz="1200" b="0" i="0">
+                          <a:solidFill>
+                            <a:srgbClr val="333333"/>
+                          </a:solidFill>
+                          <a:latin typeface="Calibri"/>
+                        </a:rPr>
+                        <a:t>R$ 2,5 mi</a:t>
+                      </a:r>
+                    </a:p>
+                  </a:txBody>
+                  <a:tcPr marL="73152" marR="73152" marT="27432" marB="27432" anchor="ctr">
+                    <a:solidFill>
+                      <a:srgbClr val="FFFFFF"/>
+                    </a:solidFill>
+                  </a:tcPr>
+                </a:tc>
+              </a:tr>
+              <a:tr h="399010">
+                <a:tc>
+                  <a:txBody>
+                    <a:bodyPr wrap="square"/>
+                    <a:lstStyle/>
+                    <a:p>
+                      <a:pPr algn="l"/>
+                      <a:r>
+                        <a:rPr sz="1200" b="0" i="0">
+                          <a:solidFill>
+                            <a:srgbClr val="333333"/>
+                          </a:solidFill>
+                          <a:latin typeface="Calibri"/>
+                        </a:rPr>
+                        <a:t>P-016</a:t>
+                      </a:r>
+                    </a:p>
+                  </a:txBody>
+                  <a:tcPr marL="73152" marR="73152" marT="27432" marB="27432" anchor="ctr">
+                    <a:solidFill>
+                      <a:srgbClr val="F2F2F2"/>
+                    </a:solidFill>
+                  </a:tcPr>
+                </a:tc>
+                <a:tc>
+                  <a:txBody>
+                    <a:bodyPr wrap="square"/>
+                    <a:lstStyle/>
+                    <a:p>
+                      <a:pPr algn="l"/>
+                      <a:r>
+                        <a:rPr sz="1200" b="0" i="0">
+                          <a:solidFill>
+                            <a:srgbClr val="333333"/>
+                          </a:solidFill>
+                          <a:latin typeface="Calibri"/>
+                        </a:rPr>
+                        <a:t>Projeto 16</a:t>
+                      </a:r>
+                    </a:p>
+                  </a:txBody>
+                  <a:tcPr marL="73152" marR="73152" marT="27432" marB="27432" anchor="ctr">
+                    <a:solidFill>
+                      <a:srgbClr val="F2F2F2"/>
+                    </a:solidFill>
+                  </a:tcPr>
+                </a:tc>
+                <a:tc>
+                  <a:txBody>
+                    <a:bodyPr wrap="square"/>
+                    <a:lstStyle/>
+                    <a:p>
+                      <a:pPr algn="l"/>
+                      <a:r>
+                        <a:rPr sz="1200" b="0" i="0">
+                          <a:solidFill>
+                            <a:srgbClr val="333333"/>
+                          </a:solidFill>
+                          <a:latin typeface="Calibri"/>
+                        </a:rPr>
+                        <a:t>Em andamento</a:t>
+                      </a:r>
+                    </a:p>
+                  </a:txBody>
+                  <a:tcPr marL="73152" marR="73152" marT="27432" marB="27432" anchor="ctr">
+                    <a:solidFill>
+                      <a:srgbClr val="F2F2F2"/>
+                    </a:solidFill>
+                  </a:tcPr>
+                </a:tc>
+                <a:tc>
+                  <a:txBody>
+                    <a:bodyPr wrap="square"/>
+                    <a:lstStyle/>
+                    <a:p>
+                      <a:pPr algn="ctr"/>
+                      <a:r>
+                        <a:rPr sz="1200" b="1" i="0">
+                          <a:solidFill>
+                            <a:srgbClr val="FFFFFF"/>
+                          </a:solidFill>
+                          <a:latin typeface="Calibri"/>
+                        </a:rPr>
+                        <a:t>Alto</a:t>
+                      </a:r>
+                    </a:p>
+                  </a:txBody>
+                  <a:tcPr marL="73152" marR="73152" marT="27432" marB="27432" anchor="ctr">
+                    <a:solidFill>
+                      <a:srgbClr val="C62828"/>
+                    </a:solidFill>
+                  </a:tcPr>
+                </a:tc>
+                <a:tc>
+                  <a:txBody>
+                    <a:bodyPr wrap="square"/>
+                    <a:lstStyle/>
+                    <a:p>
+                      <a:pPr algn="r"/>
+                      <a:r>
+                        <a:rPr sz="1200" b="0" i="0">
+                          <a:solidFill>
+                            <a:srgbClr val="333333"/>
+                          </a:solidFill>
+                          <a:latin typeface="Calibri"/>
+                        </a:rPr>
+                        <a:t>46%</a:t>
+                      </a:r>
+                    </a:p>
+                  </a:txBody>
+                  <a:tcPr marL="73152" marR="73152" marT="27432" marB="27432" anchor="ctr">
+                    <a:solidFill>
+                      <a:srgbClr val="F2F2F2"/>
+                    </a:solidFill>
+                  </a:tcPr>
+                </a:tc>
+                <a:tc>
+                  <a:txBody>
+                    <a:bodyPr wrap="square"/>
+                    <a:lstStyle/>
+                    <a:p>
+                      <a:pPr algn="r"/>
+                      <a:r>
+                        <a:rPr sz="1200" b="0" i="0">
+                          <a:solidFill>
+                            <a:srgbClr val="333333"/>
+                          </a:solidFill>
+                          <a:latin typeface="Calibri"/>
+                        </a:rPr>
+                        <a:t>R$ 2,6 mi</a:t>
+                      </a:r>
+                    </a:p>
+                  </a:txBody>
+                  <a:tcPr marL="73152" marR="73152" marT="27432" marB="27432" anchor="ctr">
+                    <a:solidFill>
+                      <a:srgbClr val="F2F2F2"/>
+                    </a:solidFill>
+                  </a:tcPr>
+                </a:tc>
+              </a:tr>
+              <a:tr h="399010">
+                <a:tc>
+                  <a:txBody>
+                    <a:bodyPr wrap="square"/>
+                    <a:lstStyle/>
+                    <a:p>
+                      <a:pPr algn="l"/>
+                      <a:r>
+                        <a:rPr sz="1200" b="0" i="0">
+                          <a:solidFill>
+                            <a:srgbClr val="333333"/>
+                          </a:solidFill>
+                          <a:latin typeface="Calibri"/>
+                        </a:rPr>
+                        <a:t>P-017</a:t>
+                      </a:r>
+                    </a:p>
+                  </a:txBody>
+                  <a:tcPr marL="73152" marR="73152" marT="27432" marB="27432" anchor="ctr">
+                    <a:solidFill>
+                      <a:srgbClr val="FFFFFF"/>
+                    </a:solidFill>
+                  </a:tcPr>
+                </a:tc>
+                <a:tc>
+                  <a:txBody>
+                    <a:bodyPr wrap="square"/>
+                    <a:lstStyle/>
+                    <a:p>
+                      <a:pPr algn="l"/>
+                      <a:r>
+                        <a:rPr sz="1200" b="0" i="0">
+                          <a:solidFill>
+                            <a:srgbClr val="333333"/>
+                          </a:solidFill>
+                          <a:latin typeface="Calibri"/>
+                        </a:rPr>
+                        <a:t>Projeto 17</a:t>
+                      </a:r>
+                    </a:p>
+                  </a:txBody>
+                  <a:tcPr marL="73152" marR="73152" marT="27432" marB="27432" anchor="ctr">
+                    <a:solidFill>
+                      <a:srgbClr val="FFFFFF"/>
+                    </a:solidFill>
+                  </a:tcPr>
+                </a:tc>
+                <a:tc>
+                  <a:txBody>
+                    <a:bodyPr wrap="square"/>
+                    <a:lstStyle/>
+                    <a:p>
+                      <a:pPr algn="l"/>
+                      <a:r>
+                        <a:rPr sz="1200" b="0" i="0">
+                          <a:solidFill>
+                            <a:srgbClr val="333333"/>
+                          </a:solidFill>
+                          <a:latin typeface="Calibri"/>
+                        </a:rPr>
+                        <a:t>Em andamento</a:t>
+                      </a:r>
+                    </a:p>
+                  </a:txBody>
+                  <a:tcPr marL="73152" marR="73152" marT="27432" marB="27432" anchor="ctr">
+                    <a:solidFill>
+                      <a:srgbClr val="FFFFFF"/>
+                    </a:solidFill>
+                  </a:tcPr>
+                </a:tc>
+                <a:tc>
+                  <a:txBody>
+                    <a:bodyPr wrap="square"/>
+                    <a:lstStyle/>
+                    <a:p>
+                      <a:pPr algn="ctr"/>
+                      <a:r>
+                        <a:rPr sz="1200" b="1" i="0">
+                          <a:solidFill>
+                            <a:srgbClr val="FFFFFF"/>
+                          </a:solidFill>
+                          <a:latin typeface="Calibri"/>
+                        </a:rPr>
+                        <a:t>Médio</a:t>
+                      </a:r>
+                    </a:p>
+                  </a:txBody>
+                  <a:tcPr marL="73152" marR="73152" marT="27432" marB="27432" anchor="ctr">
+                    <a:solidFill>
+                      <a:srgbClr val="F9A825"/>
+                    </a:solidFill>
+                  </a:tcPr>
+                </a:tc>
+                <a:tc>
+                  <a:txBody>
+                    <a:bodyPr wrap="square"/>
+                    <a:lstStyle/>
+                    <a:p>
+                      <a:pPr algn="r"/>
+                      <a:r>
+                        <a:rPr sz="1200" b="0" i="0">
+                          <a:solidFill>
+                            <a:srgbClr val="333333"/>
+                          </a:solidFill>
+                          <a:latin typeface="Calibri"/>
+                        </a:rPr>
+                        <a:t>47%</a:t>
+                      </a:r>
+                    </a:p>
+                  </a:txBody>
+                  <a:tcPr marL="73152" marR="73152" marT="27432" marB="27432" anchor="ctr">
+                    <a:solidFill>
+                      <a:srgbClr val="FFFFFF"/>
+                    </a:solidFill>
+                  </a:tcPr>
+                </a:tc>
+                <a:tc>
+                  <a:txBody>
+                    <a:bodyPr wrap="square"/>
+                    <a:lstStyle/>
+                    <a:p>
+                      <a:pPr algn="r"/>
+                      <a:r>
+                        <a:rPr sz="1200" b="0" i="0">
+                          <a:solidFill>
+                            <a:srgbClr val="333333"/>
+                          </a:solidFill>
+                          <a:latin typeface="Calibri"/>
+                        </a:rPr>
+                        <a:t>R$ 2,7 mi</a:t>
+                      </a:r>
+                    </a:p>
+                  </a:txBody>
+                  <a:tcPr marL="73152" marR="73152" marT="27432" marB="27432" anchor="ctr">
+                    <a:solidFill>
+                      <a:srgbClr val="FFFFFF"/>
+                    </a:solidFill>
+                  </a:tcPr>
+                </a:tc>
+              </a:tr>
+              <a:tr h="399010">
+                <a:tc>
+                  <a:txBody>
+                    <a:bodyPr wrap="square"/>
+                    <a:lstStyle/>
+                    <a:p>
+                      <a:pPr algn="l"/>
+                      <a:r>
+                        <a:rPr sz="1200" b="0" i="0">
+                          <a:solidFill>
+                            <a:srgbClr val="333333"/>
+                          </a:solidFill>
+                          <a:latin typeface="Calibri"/>
+                        </a:rPr>
+                        <a:t>P-018</a:t>
+                      </a:r>
+                    </a:p>
+                  </a:txBody>
+                  <a:tcPr marL="73152" marR="73152" marT="27432" marB="27432" anchor="ctr">
+                    <a:solidFill>
+                      <a:srgbClr val="F2F2F2"/>
+                    </a:solidFill>
+                  </a:tcPr>
+                </a:tc>
+                <a:tc>
+                  <a:txBody>
+                    <a:bodyPr wrap="square"/>
+                    <a:lstStyle/>
+                    <a:p>
+                      <a:pPr algn="l"/>
+                      <a:r>
+                        <a:rPr sz="1200" b="0" i="0">
+                          <a:solidFill>
+                            <a:srgbClr val="333333"/>
+                          </a:solidFill>
+                          <a:latin typeface="Calibri"/>
+                        </a:rPr>
+                        <a:t>Projeto 18</a:t>
+                      </a:r>
+                    </a:p>
+                  </a:txBody>
+                  <a:tcPr marL="73152" marR="73152" marT="27432" marB="27432" anchor="ctr">
+                    <a:solidFill>
+                      <a:srgbClr val="F2F2F2"/>
+                    </a:solidFill>
+                  </a:tcPr>
+                </a:tc>
+                <a:tc>
+                  <a:txBody>
+                    <a:bodyPr wrap="square"/>
+                    <a:lstStyle/>
+                    <a:p>
+                      <a:pPr algn="l"/>
+                      <a:r>
+                        <a:rPr sz="1200" b="0" i="0">
+                          <a:solidFill>
+                            <a:srgbClr val="333333"/>
+                          </a:solidFill>
+                          <a:latin typeface="Calibri"/>
+                        </a:rPr>
+                        <a:t>Validação</a:t>
+                      </a:r>
+                    </a:p>
+                  </a:txBody>
+                  <a:tcPr marL="73152" marR="73152" marT="27432" marB="27432" anchor="ctr">
+                    <a:solidFill>
+                      <a:srgbClr val="F2F2F2"/>
+                    </a:solidFill>
+                  </a:tcPr>
+                </a:tc>
+                <a:tc>
+                  <a:txBody>
+                    <a:bodyPr wrap="square"/>
+                    <a:lstStyle/>
+                    <a:p>
+                      <a:pPr algn="ctr"/>
+                      <a:r>
+                        <a:rPr sz="1200" b="1" i="0">
+                          <a:solidFill>
+                            <a:srgbClr val="FFFFFF"/>
+                          </a:solidFill>
+                          <a:latin typeface="Calibri"/>
+                        </a:rPr>
+                        <a:t>Médio</a:t>
+                      </a:r>
+                    </a:p>
+                  </a:txBody>
+                  <a:tcPr marL="73152" marR="73152" marT="27432" marB="27432" anchor="ctr">
+                    <a:solidFill>
+                      <a:srgbClr val="F9A825"/>
+                    </a:solidFill>
+                  </a:tcPr>
+                </a:tc>
+                <a:tc>
+                  <a:txBody>
+                    <a:bodyPr wrap="square"/>
+                    <a:lstStyle/>
+                    <a:p>
+                      <a:pPr algn="r"/>
+                      <a:r>
+                        <a:rPr sz="1200" b="0" i="0">
+                          <a:solidFill>
+                            <a:srgbClr val="333333"/>
+                          </a:solidFill>
+                          <a:latin typeface="Calibri"/>
+                        </a:rPr>
+                        <a:t>48%</a:t>
+                      </a:r>
+                    </a:p>
+                  </a:txBody>
+                  <a:tcPr marL="73152" marR="73152" marT="27432" marB="27432" anchor="ctr">
+                    <a:solidFill>
+                      <a:srgbClr val="F2F2F2"/>
+                    </a:solidFill>
+                  </a:tcPr>
+                </a:tc>
+                <a:tc>
+                  <a:txBody>
+                    <a:bodyPr wrap="square"/>
+                    <a:lstStyle/>
+                    <a:p>
+                      <a:pPr algn="r"/>
+                      <a:r>
+                        <a:rPr sz="1200" b="0" i="0">
+                          <a:solidFill>
+                            <a:srgbClr val="333333"/>
+                          </a:solidFill>
+                          <a:latin typeface="Calibri"/>
+                        </a:rPr>
+                        <a:t>R$ 2,8 mi</a:t>
+                      </a:r>
+                    </a:p>
+                  </a:txBody>
+                  <a:tcPr marL="73152" marR="73152" marT="27432" marB="27432" anchor="ctr">
+                    <a:solidFill>
+                      <a:srgbClr val="F2F2F2"/>
+                    </a:solidFill>
+                  </a:tcPr>
+                </a:tc>
+              </a:tr>
+              <a:tr h="399010">
+                <a:tc>
+                  <a:txBody>
+                    <a:bodyPr wrap="square"/>
+                    <a:lstStyle/>
+                    <a:p>
+                      <a:pPr algn="l"/>
+                      <a:r>
+                        <a:rPr sz="1200" b="0" i="0">
+                          <a:solidFill>
+                            <a:srgbClr val="333333"/>
+                          </a:solidFill>
+                          <a:latin typeface="Calibri"/>
+                        </a:rPr>
+                        <a:t>P-019</a:t>
+                      </a:r>
+                    </a:p>
+                  </a:txBody>
+                  <a:tcPr marL="73152" marR="73152" marT="27432" marB="27432" anchor="ctr">
+                    <a:solidFill>
+                      <a:srgbClr val="FFFFFF"/>
+                    </a:solidFill>
+                  </a:tcPr>
+                </a:tc>
+                <a:tc>
+                  <a:txBody>
+                    <a:bodyPr wrap="square"/>
+                    <a:lstStyle/>
+                    <a:p>
+                      <a:pPr algn="l"/>
+                      <a:r>
+                        <a:rPr sz="1200" b="0" i="0">
+                          <a:solidFill>
+                            <a:srgbClr val="333333"/>
+                          </a:solidFill>
+                          <a:latin typeface="Calibri"/>
+                        </a:rPr>
+                        <a:t>Projeto 19</a:t>
+                      </a:r>
+                    </a:p>
+                  </a:txBody>
+                  <a:tcPr marL="73152" marR="73152" marT="27432" marB="27432" anchor="ctr">
+                    <a:solidFill>
+                      <a:srgbClr val="FFFFFF"/>
+                    </a:solidFill>
+                  </a:tcPr>
+                </a:tc>
+                <a:tc>
+                  <a:txBody>
+                    <a:bodyPr wrap="square"/>
+                    <a:lstStyle/>
+                    <a:p>
+                      <a:pPr algn="l"/>
+                      <a:r>
+                        <a:rPr sz="1200" b="0" i="0">
+                          <a:solidFill>
+                            <a:srgbClr val="333333"/>
+                          </a:solidFill>
+                          <a:latin typeface="Calibri"/>
+                        </a:rPr>
+                        <a:t>Em andamento</a:t>
+                      </a:r>
+                    </a:p>
+                  </a:txBody>
+                  <a:tcPr marL="73152" marR="73152" marT="27432" marB="27432" anchor="ctr">
+                    <a:solidFill>
+                      <a:srgbClr val="FFFFFF"/>
+                    </a:solidFill>
+                  </a:tcPr>
+                </a:tc>
+                <a:tc>
+                  <a:txBody>
+                    <a:bodyPr wrap="square"/>
+                    <a:lstStyle/>
+                    <a:p>
+                      <a:pPr algn="ctr"/>
+                      <a:r>
+                        <a:rPr sz="1200" b="1" i="0">
+                          <a:solidFill>
+                            <a:srgbClr val="FFFFFF"/>
+                          </a:solidFill>
+                          <a:latin typeface="Calibri"/>
+                        </a:rPr>
+                        <a:t>Médio</a:t>
+                      </a:r>
+                    </a:p>
+                  </a:txBody>
+                  <a:tcPr marL="73152" marR="73152" marT="27432" marB="27432" anchor="ctr">
+                    <a:solidFill>
+                      <a:srgbClr val="F9A825"/>
+                    </a:solidFill>
+                  </a:tcPr>
+                </a:tc>
+                <a:tc>
+                  <a:txBody>
+                    <a:bodyPr wrap="square"/>
+                    <a:lstStyle/>
+                    <a:p>
+                      <a:pPr algn="r"/>
+                      <a:r>
+                        <a:rPr sz="1200" b="0" i="0">
+                          <a:solidFill>
+                            <a:srgbClr val="333333"/>
+                          </a:solidFill>
+                          <a:latin typeface="Calibri"/>
+                        </a:rPr>
+                        <a:t>49%</a:t>
+                      </a:r>
+                    </a:p>
+                  </a:txBody>
+                  <a:tcPr marL="73152" marR="73152" marT="27432" marB="27432" anchor="ctr">
+                    <a:solidFill>
+                      <a:srgbClr val="FFFFFF"/>
+                    </a:solidFill>
+                  </a:tcPr>
+                </a:tc>
+                <a:tc>
+                  <a:txBody>
+                    <a:bodyPr wrap="square"/>
+                    <a:lstStyle/>
+                    <a:p>
+                      <a:pPr algn="r"/>
+                      <a:r>
+                        <a:rPr sz="1200" b="0" i="0">
+                          <a:solidFill>
+                            <a:srgbClr val="333333"/>
+                          </a:solidFill>
+                          <a:latin typeface="Calibri"/>
+                        </a:rPr>
+                        <a:t>R$ 2,9 mi</a:t>
+                      </a:r>
+                    </a:p>
+                  </a:txBody>
+                  <a:tcPr marL="73152" marR="73152" marT="27432" marB="27432" anchor="ctr">
+                    <a:solidFill>
+                      <a:srgbClr val="FFFFFF"/>
+                    </a:solidFill>
+                  </a:tcPr>
+                </a:tc>
+              </a:tr>
+              <a:tr h="399020">
+                <a:tc>
+                  <a:txBody>
+                    <a:bodyPr wrap="square"/>
+                    <a:lstStyle/>
+                    <a:p>
+                      <a:pPr algn="l"/>
+                      <a:r>
+                        <a:rPr sz="1200" b="0" i="0">
+                          <a:solidFill>
+                            <a:srgbClr val="333333"/>
+                          </a:solidFill>
+                          <a:latin typeface="Calibri"/>
+                        </a:rPr>
+                        <a:t>P-020</a:t>
+                      </a:r>
+                    </a:p>
+                  </a:txBody>
+                  <a:tcPr marL="73152" marR="73152" marT="27432" marB="27432" anchor="ctr">
+                    <a:solidFill>
+                      <a:srgbClr val="F2F2F2"/>
+                    </a:solidFill>
+                  </a:tcPr>
+                </a:tc>
+                <a:tc>
+                  <a:txBody>
+                    <a:bodyPr wrap="square"/>
+                    <a:lstStyle/>
+                    <a:p>
+                      <a:pPr algn="l"/>
+                      <a:r>
+                        <a:rPr sz="1200" b="0" i="0">
+                          <a:solidFill>
+                            <a:srgbClr val="333333"/>
+                          </a:solidFill>
+                          <a:latin typeface="Calibri"/>
+                        </a:rPr>
+                        <a:t>Projeto 20</a:t>
+                      </a:r>
+                    </a:p>
+                  </a:txBody>
+                  <a:tcPr marL="73152" marR="73152" marT="27432" marB="27432" anchor="ctr">
+                    <a:solidFill>
+                      <a:srgbClr val="F2F2F2"/>
+                    </a:solidFill>
+                  </a:tcPr>
+                </a:tc>
+                <a:tc>
+                  <a:txBody>
+                    <a:bodyPr wrap="square"/>
+                    <a:lstStyle/>
+                    <a:p>
+                      <a:pPr algn="l"/>
+                      <a:r>
+                        <a:rPr sz="1200" b="0" i="0">
+                          <a:solidFill>
+                            <a:srgbClr val="333333"/>
+                          </a:solidFill>
+                          <a:latin typeface="Calibri"/>
+                        </a:rPr>
+                        <a:t>Em andamento</a:t>
+                      </a:r>
+                    </a:p>
+                  </a:txBody>
+                  <a:tcPr marL="73152" marR="73152" marT="27432" marB="27432" anchor="ctr">
+                    <a:solidFill>
+                      <a:srgbClr val="F2F2F2"/>
+                    </a:solidFill>
+                  </a:tcPr>
+                </a:tc>
+                <a:tc>
+                  <a:txBody>
+                    <a:bodyPr wrap="square"/>
+                    <a:lstStyle/>
+                    <a:p>
+                      <a:pPr algn="ctr"/>
+                      <a:r>
+                        <a:rPr sz="1200" b="1" i="0">
+                          <a:solidFill>
+                            <a:srgbClr val="FFFFFF"/>
+                          </a:solidFill>
+                          <a:latin typeface="Calibri"/>
+                        </a:rPr>
+                        <a:t>Alto</a:t>
+                      </a:r>
+                    </a:p>
+                  </a:txBody>
+                  <a:tcPr marL="73152" marR="73152" marT="27432" marB="27432" anchor="ctr">
+                    <a:solidFill>
+                      <a:srgbClr val="C62828"/>
+                    </a:solidFill>
+                  </a:tcPr>
+                </a:tc>
+                <a:tc>
+                  <a:txBody>
+                    <a:bodyPr wrap="square"/>
+                    <a:lstStyle/>
+                    <a:p>
+                      <a:pPr algn="r"/>
+                      <a:r>
+                        <a:rPr sz="1200" b="0" i="0">
+                          <a:solidFill>
+                            <a:srgbClr val="333333"/>
+                          </a:solidFill>
+                          <a:latin typeface="Calibri"/>
+                        </a:rPr>
+                        <a:t>50%</a:t>
+                      </a:r>
+                    </a:p>
+                  </a:txBody>
+                  <a:tcPr marL="73152" marR="73152" marT="27432" marB="27432" anchor="ctr">
+                    <a:solidFill>
+                      <a:srgbClr val="F2F2F2"/>
+                    </a:solidFill>
+                  </a:tcPr>
+                </a:tc>
+                <a:tc>
+                  <a:txBody>
+                    <a:bodyPr wrap="square"/>
+                    <a:lstStyle/>
+                    <a:p>
+                      <a:pPr algn="r"/>
+                      <a:r>
+                        <a:rPr sz="1200" b="0" i="0">
+                          <a:solidFill>
+                            <a:srgbClr val="333333"/>
+                          </a:solidFill>
+                          <a:latin typeface="Calibri"/>
+                        </a:rPr>
+                        <a:t>R$ 3,0 mi</a:t>
+                      </a:r>
+                    </a:p>
+                  </a:txBody>
+                  <a:tcPr marL="73152" marR="73152" marT="27432" marB="27432" anchor="ctr">
+                    <a:solidFill>
+                      <a:srgbClr val="F2F2F2"/>
+                    </a:solidFill>
+                  </a:tcPr>
+                </a:tc>
+              </a:tr>
+            </a:tbl>
+          </a:graphicData>
+        </a:graphic>
+      </p:graphicFrame>
+    </p:spTree>
+  </p:cSld>
+  <p:clrMapOvr>
+    <a:masterClrMapping/>
+  </p:clrMapOvr>
+</p:sld>
+</file>
+
+<file path=ppt/slides/slide34.xml><?xml version="1.0" encoding="utf-8"?>
+<p:sld xmlns:a="http://schemas.openxmlformats.org/drawingml/2006/main" xmlns:p="http://schemas.openxmlformats.org/presentationml/2006/main" xmlns:r="http://schemas.openxmlformats.org/officeDocument/2006/relationships">
+  <p:cSld>
+    <p:spTree>
+      <p:nvGrpSpPr>
+        <p:cNvPr id="1" name=""/>
+        <p:cNvGrpSpPr/>
+        <p:nvPr/>
+      </p:nvGrpSpPr>
+      <p:grpSpPr/>
+      <p:sp>
+        <p:nvSpPr>
+          <p:cNvPr id="2" name="Title 1"/>
+          <p:cNvSpPr>
+            <a:spLocks noGrp="1"/>
+          </p:cNvSpPr>
+          <p:nvPr>
+            <p:ph type="title"/>
+          </p:nvPr>
+        </p:nvSpPr>
+        <p:spPr>
+          <a:xfrm>
+            <a:off x="457200" y="621792"/>
+            <a:ext cx="11274552" cy="822960"/>
+          </a:xfrm>
+        </p:spPr>
+        <p:txBody>
+          <a:bodyPr wrap="square" anchor="t" lIns="45720" rIns="45720"/>
+          <a:lstStyle/>
+          <a:p>
+            <a:pPr algn="l"/>
+            <a:r>
+              <a:rPr sz="2800" b="1" i="0">
+                <a:solidFill>
+                  <a:srgbClr val="1F3A5F"/>
+                </a:solidFill>
+                <a:latin typeface="Calibri"/>
+              </a:rPr>
+              <a:t>Tabela longa paginada automaticamente (25 linhas) (3/3)</a:t>
+            </a:r>
+          </a:p>
+        </p:txBody>
+      </p:sp>
+      <p:sp>
+        <p:nvSpPr>
+          <p:cNvPr id="3" name="TextBox 2"/>
+          <p:cNvSpPr txBox="1"/>
+          <p:nvPr/>
+        </p:nvSpPr>
+        <p:spPr>
+          <a:xfrm>
+            <a:off x="457200" y="91440"/>
+            <a:ext cx="7315200" cy="228600"/>
+          </a:xfrm>
+          <a:prstGeom prst="rect">
+            <a:avLst/>
+          </a:prstGeom>
+          <a:noFill/>
+        </p:spPr>
+        <p:txBody>
+          <a:bodyPr wrap="square" anchor="ctr" lIns="45720" rIns="45720" tIns="27432" bIns="27432">
+            <a:spAutoFit/>
+          </a:bodyPr>
+          <a:lstStyle/>
+          <a:p>
+            <a:pPr algn="l"/>
+            <a:r>
+              <a:rPr sz="900" b="1" i="0">
+                <a:solidFill>
+                  <a:srgbClr val="8C8C8C"/>
+                </a:solidFill>
+                <a:latin typeface="Calibri"/>
+              </a:rPr>
+              <a:t>EMPRESA EXEMPLO  |  CATÁLOGO DE MODELOS</a:t>
+            </a:r>
+          </a:p>
+        </p:txBody>
+      </p:sp>
+      <p:sp>
+        <p:nvSpPr>
+          <p:cNvPr id="4" name="TextBox 3"/>
+          <p:cNvSpPr txBox="1"/>
+          <p:nvPr/>
+        </p:nvSpPr>
+        <p:spPr>
+          <a:xfrm>
+            <a:off x="7772400" y="91440"/>
+            <a:ext cx="3959352" cy="228600"/>
+          </a:xfrm>
+          <a:prstGeom prst="rect">
+            <a:avLst/>
+          </a:prstGeom>
+          <a:noFill/>
+        </p:spPr>
+        <p:txBody>
+          <a:bodyPr wrap="square" anchor="ctr" lIns="45720" rIns="45720" tIns="27432" bIns="27432">
+            <a:spAutoFit/>
+          </a:bodyPr>
+          <a:lstStyle/>
+          <a:p>
+            <a:pPr algn="r"/>
+            <a:r>
+              <a:rPr sz="900" b="0" i="0">
+                <a:solidFill>
+                  <a:srgbClr val="8C8C8C"/>
+                </a:solidFill>
+                <a:latin typeface="Calibri"/>
+              </a:rPr>
+              <a:t>set/2026</a:t>
+            </a:r>
+          </a:p>
+        </p:txBody>
+      </p:sp>
+      <p:sp>
+        <p:nvSpPr>
+          <p:cNvPr id="5" name="TextBox 4"/>
+          <p:cNvSpPr txBox="1"/>
+          <p:nvPr/>
+        </p:nvSpPr>
+        <p:spPr>
+          <a:xfrm>
+            <a:off x="457200" y="384048"/>
+            <a:ext cx="11274552" cy="256032"/>
+          </a:xfrm>
+          <a:prstGeom prst="rect">
+            <a:avLst/>
+          </a:prstGeom>
+          <a:noFill/>
+        </p:spPr>
+        <p:txBody>
+          <a:bodyPr wrap="square" anchor="b" lIns="45720" rIns="45720" tIns="27432" bIns="27432">
+            <a:spAutoFit/>
+          </a:bodyPr>
+          <a:lstStyle/>
+          <a:p>
+            <a:pPr algn="l"/>
+            <a:r>
+              <a:rPr sz="1000" b="1" i="0">
+                <a:solidFill>
+                  <a:srgbClr val="4F81BD"/>
+                </a:solidFill>
+                <a:latin typeface="Calibri"/>
+              </a:rPr>
+              <a:t>ANEXO</a:t>
+            </a:r>
+          </a:p>
+        </p:txBody>
+      </p:sp>
+      <p:sp>
+        <p:nvSpPr>
+          <p:cNvPr id="6" name="TextBox 5"/>
+          <p:cNvSpPr txBox="1"/>
+          <p:nvPr/>
+        </p:nvSpPr>
+        <p:spPr>
+          <a:xfrm>
+            <a:off x="457200" y="6217920"/>
+            <a:ext cx="8531352" cy="365760"/>
+          </a:xfrm>
+          <a:prstGeom prst="rect">
+            <a:avLst/>
+          </a:prstGeom>
+          <a:noFill/>
+        </p:spPr>
+        <p:txBody>
+          <a:bodyPr wrap="square" anchor="ctr" lIns="45720" rIns="45720" tIns="27432" bIns="27432">
+            <a:spAutoFit/>
+          </a:bodyPr>
+          <a:lstStyle/>
+          <a:p>
+            <a:pPr algn="l"/>
+            <a:r>
+              <a:rPr sz="1000" b="0" i="0">
+                <a:solidFill>
+                  <a:srgbClr val="8C8C8C"/>
+                </a:solidFill>
+                <a:latin typeface="Calibri"/>
+              </a:rPr>
+              <a:t>Fonte: Base de portfólio (exemplo)   |   Uso interno</a:t>
+            </a:r>
+          </a:p>
+        </p:txBody>
+      </p:sp>
+      <p:sp>
+        <p:nvSpPr>
+          <p:cNvPr id="7" name="TextBox 6"/>
+          <p:cNvSpPr txBox="1"/>
+          <p:nvPr/>
+        </p:nvSpPr>
+        <p:spPr>
+          <a:xfrm>
+            <a:off x="10817352" y="6217920"/>
+            <a:ext cx="914400" cy="365760"/>
+          </a:xfrm>
+          <a:prstGeom prst="rect">
+            <a:avLst/>
+          </a:prstGeom>
+          <a:noFill/>
+        </p:spPr>
+        <p:txBody>
+          <a:bodyPr wrap="square" anchor="ctr" lIns="45720" rIns="45720" tIns="27432" bIns="27432">
+            <a:spAutoFit/>
+          </a:bodyPr>
+          <a:lstStyle/>
+          <a:p>
+            <a:pPr algn="r"/>
+            <a:r>
+              <a:rPr sz="1000" b="0" i="0">
+                <a:solidFill>
+                  <a:srgbClr val="8C8C8C"/>
+                </a:solidFill>
+                <a:latin typeface="Calibri"/>
+              </a:rPr>
+              <a:t>34</a:t>
+            </a:r>
+          </a:p>
+        </p:txBody>
+      </p:sp>
+      <p:pic>
+        <p:nvPicPr>
+          <p:cNvPr id="8" name="Picture 7" descr="logo-placeholder.png"/>
+          <p:cNvPicPr>
+            <a:picLocks noChangeAspect="1"/>
+          </p:cNvPicPr>
+          <p:nvPr/>
+        </p:nvPicPr>
+        <p:blipFill>
+          <a:blip r:embed="rId2"/>
+          <a:stretch>
+            <a:fillRect/>
+          </a:stretch>
+        </p:blipFill>
+        <p:spPr>
+          <a:xfrm>
+            <a:off x="9692640" y="6245352"/>
+            <a:ext cx="822960" cy="274320"/>
+          </a:xfrm>
+          <a:prstGeom prst="rect">
+            <a:avLst/>
+          </a:prstGeom>
+        </p:spPr>
+      </p:pic>
+      <p:graphicFrame>
+        <p:nvGraphicFramePr>
+          <p:cNvPr id="9" name="Table 8"/>
+          <p:cNvGraphicFramePr>
+            <a:graphicFrameLocks noGrp="1"/>
+          </p:cNvGraphicFramePr>
+          <p:nvPr/>
+        </p:nvGraphicFramePr>
+        <p:xfrm>
+          <a:off x="457200" y="1737360"/>
+          <a:ext cx="11274552" cy="2743200"/>
+        </p:xfrm>
+        <a:graphic>
+          <a:graphicData uri="http://schemas.openxmlformats.org/drawingml/2006/table">
+            <a:tbl>
+              <a:tblPr firstRow="1">
+                <a:tableStyleId>{5C22544A-7EE6-4342-B048-85BDC9FD1C3A}</a:tableStyleId>
+              </a:tblPr>
+              <a:tblGrid>
+                <a:gridCol w="1879092"/>
+                <a:gridCol w="1879092"/>
+                <a:gridCol w="1879092"/>
+                <a:gridCol w="1879092"/>
+                <a:gridCol w="1879092"/>
+                <a:gridCol w="1879092"/>
+              </a:tblGrid>
+              <a:tr h="457200">
+                <a:tc>
+                  <a:txBody>
+                    <a:bodyPr wrap="square"/>
+                    <a:lstStyle/>
+                    <a:p>
+                      <a:pPr algn="l"/>
+                      <a:r>
+                        <a:rPr sz="1200" b="1" i="0">
+                          <a:solidFill>
+                            <a:srgbClr val="FFFFFF"/>
+                          </a:solidFill>
+                          <a:latin typeface="Calibri"/>
+                        </a:rPr>
+                        <a:t>ID</a:t>
+                      </a:r>
+                    </a:p>
+                  </a:txBody>
+                  <a:tcPr marL="73152" marR="73152" marT="27432" marB="27432" anchor="ctr">
+                    <a:solidFill>
+                      <a:srgbClr val="1F3A5F"/>
+                    </a:solidFill>
+                  </a:tcPr>
+                </a:tc>
+                <a:tc>
+                  <a:txBody>
+                    <a:bodyPr wrap="square"/>
+                    <a:lstStyle/>
+                    <a:p>
+                      <a:pPr algn="l"/>
+                      <a:r>
+                        <a:rPr sz="1200" b="1" i="0">
+                          <a:solidFill>
+                            <a:srgbClr val="FFFFFF"/>
+                          </a:solidFill>
+                          <a:latin typeface="Calibri"/>
+                        </a:rPr>
+                        <a:t>Projeto</a:t>
+                      </a:r>
+                    </a:p>
+                  </a:txBody>
+                  <a:tcPr marL="73152" marR="73152" marT="27432" marB="27432" anchor="ctr">
+                    <a:solidFill>
+                      <a:srgbClr val="1F3A5F"/>
+                    </a:solidFill>
+                  </a:tcPr>
+                </a:tc>
+                <a:tc>
+                  <a:txBody>
+                    <a:bodyPr wrap="square"/>
+                    <a:lstStyle/>
+                    <a:p>
+                      <a:pPr algn="l"/>
+                      <a:r>
+                        <a:rPr sz="1200" b="1" i="0">
+                          <a:solidFill>
+                            <a:srgbClr val="FFFFFF"/>
+                          </a:solidFill>
+                          <a:latin typeface="Calibri"/>
+                        </a:rPr>
+                        <a:t>Status</a:t>
+                      </a:r>
+                    </a:p>
+                  </a:txBody>
+                  <a:tcPr marL="73152" marR="73152" marT="27432" marB="27432" anchor="ctr">
+                    <a:solidFill>
+                      <a:srgbClr val="1F3A5F"/>
+                    </a:solidFill>
+                  </a:tcPr>
+                </a:tc>
+                <a:tc>
+                  <a:txBody>
+                    <a:bodyPr wrap="square"/>
+                    <a:lstStyle/>
+                    <a:p>
+                      <a:pPr algn="ctr"/>
+                      <a:r>
+                        <a:rPr sz="1200" b="1" i="0">
+                          <a:solidFill>
+                            <a:srgbClr val="FFFFFF"/>
+                          </a:solidFill>
+                          <a:latin typeface="Calibri"/>
+                        </a:rPr>
+                        <a:t>Risco</a:t>
+                      </a:r>
+                    </a:p>
+                  </a:txBody>
+                  <a:tcPr marL="73152" marR="73152" marT="27432" marB="27432" anchor="ctr">
+                    <a:solidFill>
+                      <a:srgbClr val="1F3A5F"/>
+                    </a:solidFill>
+                  </a:tcPr>
+                </a:tc>
+                <a:tc>
+                  <a:txBody>
+                    <a:bodyPr wrap="square"/>
+                    <a:lstStyle/>
+                    <a:p>
+                      <a:pPr algn="r"/>
+                      <a:r>
+                        <a:rPr sz="1200" b="1" i="0">
+                          <a:solidFill>
+                            <a:srgbClr val="FFFFFF"/>
+                          </a:solidFill>
+                          <a:latin typeface="Calibri"/>
+                        </a:rPr>
+                        <a:t>Conclusão</a:t>
+                      </a:r>
+                    </a:p>
+                  </a:txBody>
+                  <a:tcPr marL="73152" marR="73152" marT="27432" marB="27432" anchor="ctr">
+                    <a:solidFill>
+                      <a:srgbClr val="1F3A5F"/>
+                    </a:solidFill>
+                  </a:tcPr>
+                </a:tc>
+                <a:tc>
+                  <a:txBody>
+                    <a:bodyPr wrap="square"/>
+                    <a:lstStyle/>
+                    <a:p>
+                      <a:pPr algn="r"/>
+                      <a:r>
+                        <a:rPr sz="1200" b="1" i="0">
+                          <a:solidFill>
+                            <a:srgbClr val="FFFFFF"/>
+                          </a:solidFill>
+                          <a:latin typeface="Calibri"/>
+                        </a:rPr>
+                        <a:t>Orçamento</a:t>
+                      </a:r>
+                    </a:p>
+                  </a:txBody>
+                  <a:tcPr marL="73152" marR="73152" marT="27432" marB="27432" anchor="ctr">
+                    <a:solidFill>
+                      <a:srgbClr val="1F3A5F"/>
+                    </a:solidFill>
+                  </a:tcPr>
+                </a:tc>
+              </a:tr>
+              <a:tr h="457200">
+                <a:tc>
+                  <a:txBody>
+                    <a:bodyPr wrap="square"/>
+                    <a:lstStyle/>
+                    <a:p>
+                      <a:pPr algn="l"/>
+                      <a:r>
+                        <a:rPr sz="1200" b="0" i="0">
+                          <a:solidFill>
+                            <a:srgbClr val="333333"/>
+                          </a:solidFill>
+                          <a:latin typeface="Calibri"/>
+                        </a:rPr>
+                        <a:t>P-021</a:t>
+                      </a:r>
+                    </a:p>
+                  </a:txBody>
+                  <a:tcPr marL="73152" marR="73152" marT="27432" marB="27432" anchor="ctr">
+                    <a:solidFill>
+                      <a:srgbClr val="FFFFFF"/>
+                    </a:solidFill>
+                  </a:tcPr>
+                </a:tc>
+                <a:tc>
+                  <a:txBody>
+                    <a:bodyPr wrap="square"/>
+                    <a:lstStyle/>
+                    <a:p>
+                      <a:pPr algn="l"/>
+                      <a:r>
+                        <a:rPr sz="1200" b="0" i="0">
+                          <a:solidFill>
+                            <a:srgbClr val="333333"/>
+                          </a:solidFill>
+                          <a:latin typeface="Calibri"/>
+                        </a:rPr>
+                        <a:t>Projeto 21</a:t>
+                      </a:r>
+                    </a:p>
+                  </a:txBody>
+                  <a:tcPr marL="73152" marR="73152" marT="27432" marB="27432" anchor="ctr">
+                    <a:solidFill>
+                      <a:srgbClr val="FFFFFF"/>
+                    </a:solidFill>
+                  </a:tcPr>
+                </a:tc>
+                <a:tc>
+                  <a:txBody>
+                    <a:bodyPr wrap="square"/>
+                    <a:lstStyle/>
+                    <a:p>
+                      <a:pPr algn="l"/>
+                      <a:r>
+                        <a:rPr sz="1200" b="0" i="0">
+                          <a:solidFill>
+                            <a:srgbClr val="333333"/>
+                          </a:solidFill>
+                          <a:latin typeface="Calibri"/>
+                        </a:rPr>
+                        <a:t>Validação</a:t>
+                      </a:r>
+                    </a:p>
+                  </a:txBody>
+                  <a:tcPr marL="73152" marR="73152" marT="27432" marB="27432" anchor="ctr">
+                    <a:solidFill>
+                      <a:srgbClr val="FFFFFF"/>
+                    </a:solidFill>
+                  </a:tcPr>
+                </a:tc>
+                <a:tc>
+                  <a:txBody>
+                    <a:bodyPr wrap="square"/>
+                    <a:lstStyle/>
+                    <a:p>
+                      <a:pPr algn="ctr"/>
+                      <a:r>
+                        <a:rPr sz="1200" b="1" i="0">
+                          <a:solidFill>
+                            <a:srgbClr val="FFFFFF"/>
+                          </a:solidFill>
+                          <a:latin typeface="Calibri"/>
+                        </a:rPr>
+                        <a:t>Médio</a:t>
+                      </a:r>
+                    </a:p>
+                  </a:txBody>
+                  <a:tcPr marL="73152" marR="73152" marT="27432" marB="27432" anchor="ctr">
+                    <a:solidFill>
+                      <a:srgbClr val="F9A825"/>
+                    </a:solidFill>
+                  </a:tcPr>
+                </a:tc>
+                <a:tc>
+                  <a:txBody>
+                    <a:bodyPr wrap="square"/>
+                    <a:lstStyle/>
+                    <a:p>
+                      <a:pPr algn="r"/>
+                      <a:r>
+                        <a:rPr sz="1200" b="0" i="0">
+                          <a:solidFill>
+                            <a:srgbClr val="333333"/>
+                          </a:solidFill>
+                          <a:latin typeface="Calibri"/>
+                        </a:rPr>
+                        <a:t>51%</a:t>
+                      </a:r>
+                    </a:p>
+                  </a:txBody>
+                  <a:tcPr marL="73152" marR="73152" marT="27432" marB="27432" anchor="ctr">
+                    <a:solidFill>
+                      <a:srgbClr val="FFFFFF"/>
+                    </a:solidFill>
+                  </a:tcPr>
+                </a:tc>
+                <a:tc>
+                  <a:txBody>
+                    <a:bodyPr wrap="square"/>
+                    <a:lstStyle/>
+                    <a:p>
+                      <a:pPr algn="r"/>
+                      <a:r>
+                        <a:rPr sz="1200" b="0" i="0">
+                          <a:solidFill>
+                            <a:srgbClr val="333333"/>
+                          </a:solidFill>
+                          <a:latin typeface="Calibri"/>
+                        </a:rPr>
+                        <a:t>R$ 3,1 mi</a:t>
+                      </a:r>
+                    </a:p>
+                  </a:txBody>
+                  <a:tcPr marL="73152" marR="73152" marT="27432" marB="27432" anchor="ctr">
+                    <a:solidFill>
+                      <a:srgbClr val="FFFFFF"/>
+                    </a:solidFill>
+                  </a:tcPr>
+                </a:tc>
+              </a:tr>
+              <a:tr h="457200">
+                <a:tc>
+                  <a:txBody>
+                    <a:bodyPr wrap="square"/>
+                    <a:lstStyle/>
+                    <a:p>
+                      <a:pPr algn="l"/>
+                      <a:r>
+                        <a:rPr sz="1200" b="0" i="0">
+                          <a:solidFill>
+                            <a:srgbClr val="333333"/>
+                          </a:solidFill>
+                          <a:latin typeface="Calibri"/>
+                        </a:rPr>
+                        <a:t>P-022</a:t>
+                      </a:r>
+                    </a:p>
+                  </a:txBody>
+                  <a:tcPr marL="73152" marR="73152" marT="27432" marB="27432" anchor="ctr">
+                    <a:solidFill>
+                      <a:srgbClr val="F2F2F2"/>
+                    </a:solidFill>
+                  </a:tcPr>
+                </a:tc>
+                <a:tc>
+                  <a:txBody>
+                    <a:bodyPr wrap="square"/>
+                    <a:lstStyle/>
+                    <a:p>
+                      <a:pPr algn="l"/>
+                      <a:r>
+                        <a:rPr sz="1200" b="0" i="0">
+                          <a:solidFill>
+                            <a:srgbClr val="333333"/>
+                          </a:solidFill>
+                          <a:latin typeface="Calibri"/>
+                        </a:rPr>
+                        <a:t>Projeto 22</a:t>
+                      </a:r>
+                    </a:p>
+                  </a:txBody>
+                  <a:tcPr marL="73152" marR="73152" marT="27432" marB="27432" anchor="ctr">
+                    <a:solidFill>
+                      <a:srgbClr val="F2F2F2"/>
+                    </a:solidFill>
+                  </a:tcPr>
+                </a:tc>
+                <a:tc>
+                  <a:txBody>
+                    <a:bodyPr wrap="square"/>
+                    <a:lstStyle/>
+                    <a:p>
+                      <a:pPr algn="l"/>
+                      <a:r>
+                        <a:rPr sz="1200" b="0" i="0">
+                          <a:solidFill>
+                            <a:srgbClr val="333333"/>
+                          </a:solidFill>
+                          <a:latin typeface="Calibri"/>
+                        </a:rPr>
+                        <a:t>Em andamento</a:t>
+                      </a:r>
+                    </a:p>
+                  </a:txBody>
+                  <a:tcPr marL="73152" marR="73152" marT="27432" marB="27432" anchor="ctr">
+                    <a:solidFill>
+                      <a:srgbClr val="F2F2F2"/>
+                    </a:solidFill>
+                  </a:tcPr>
+                </a:tc>
+                <a:tc>
+                  <a:txBody>
+                    <a:bodyPr wrap="square"/>
+                    <a:lstStyle/>
+                    <a:p>
+                      <a:pPr algn="ctr"/>
+                      <a:r>
+                        <a:rPr sz="1200" b="1" i="0">
+                          <a:solidFill>
+                            <a:srgbClr val="FFFFFF"/>
+                          </a:solidFill>
+                          <a:latin typeface="Calibri"/>
+                        </a:rPr>
+                        <a:t>Médio</a:t>
+                      </a:r>
+                    </a:p>
+                  </a:txBody>
+                  <a:tcPr marL="73152" marR="73152" marT="27432" marB="27432" anchor="ctr">
+                    <a:solidFill>
+                      <a:srgbClr val="F9A825"/>
+                    </a:solidFill>
+                  </a:tcPr>
+                </a:tc>
+                <a:tc>
+                  <a:txBody>
+                    <a:bodyPr wrap="square"/>
+                    <a:lstStyle/>
+                    <a:p>
+                      <a:pPr algn="r"/>
+                      <a:r>
+                        <a:rPr sz="1200" b="0" i="0">
+                          <a:solidFill>
+                            <a:srgbClr val="333333"/>
+                          </a:solidFill>
+                          <a:latin typeface="Calibri"/>
+                        </a:rPr>
+                        <a:t>52%</a:t>
+                      </a:r>
+                    </a:p>
+                  </a:txBody>
+                  <a:tcPr marL="73152" marR="73152" marT="27432" marB="27432" anchor="ctr">
+                    <a:solidFill>
+                      <a:srgbClr val="F2F2F2"/>
+                    </a:solidFill>
+                  </a:tcPr>
+                </a:tc>
+                <a:tc>
+                  <a:txBody>
+                    <a:bodyPr wrap="square"/>
+                    <a:lstStyle/>
+                    <a:p>
+                      <a:pPr algn="r"/>
+                      <a:r>
+                        <a:rPr sz="1200" b="0" i="0">
+                          <a:solidFill>
+                            <a:srgbClr val="333333"/>
+                          </a:solidFill>
+                          <a:latin typeface="Calibri"/>
+                        </a:rPr>
+                        <a:t>R$ 3,2 mi</a:t>
+                      </a:r>
+                    </a:p>
+                  </a:txBody>
+                  <a:tcPr marL="73152" marR="73152" marT="27432" marB="27432" anchor="ctr">
+                    <a:solidFill>
+                      <a:srgbClr val="F2F2F2"/>
+                    </a:solidFill>
+                  </a:tcPr>
+                </a:tc>
+              </a:tr>
+              <a:tr h="457200">
+                <a:tc>
+                  <a:txBody>
+                    <a:bodyPr wrap="square"/>
+                    <a:lstStyle/>
+                    <a:p>
+                      <a:pPr algn="l"/>
+                      <a:r>
+                        <a:rPr sz="1200" b="0" i="0">
+                          <a:solidFill>
+                            <a:srgbClr val="333333"/>
+                          </a:solidFill>
+                          <a:latin typeface="Calibri"/>
+                        </a:rPr>
+                        <a:t>P-023</a:t>
+                      </a:r>
+                    </a:p>
+                  </a:txBody>
+                  <a:tcPr marL="73152" marR="73152" marT="27432" marB="27432" anchor="ctr">
+                    <a:solidFill>
+                      <a:srgbClr val="FFFFFF"/>
+                    </a:solidFill>
+                  </a:tcPr>
+                </a:tc>
+                <a:tc>
+                  <a:txBody>
+                    <a:bodyPr wrap="square"/>
+                    <a:lstStyle/>
+                    <a:p>
+                      <a:pPr algn="l"/>
+                      <a:r>
+                        <a:rPr sz="1200" b="0" i="0">
+                          <a:solidFill>
+                            <a:srgbClr val="333333"/>
+                          </a:solidFill>
+                          <a:latin typeface="Calibri"/>
+                        </a:rPr>
+                        <a:t>Projeto 23</a:t>
+                      </a:r>
+                    </a:p>
+                  </a:txBody>
+                  <a:tcPr marL="73152" marR="73152" marT="27432" marB="27432" anchor="ctr">
+                    <a:solidFill>
+                      <a:srgbClr val="FFFFFF"/>
+                    </a:solidFill>
+                  </a:tcPr>
+                </a:tc>
+                <a:tc>
+                  <a:txBody>
+                    <a:bodyPr wrap="square"/>
+                    <a:lstStyle/>
+                    <a:p>
+                      <a:pPr algn="l"/>
+                      <a:r>
+                        <a:rPr sz="1200" b="0" i="0">
+                          <a:solidFill>
+                            <a:srgbClr val="333333"/>
+                          </a:solidFill>
+                          <a:latin typeface="Calibri"/>
+                        </a:rPr>
+                        <a:t>Em andamento</a:t>
+                      </a:r>
+                    </a:p>
+                  </a:txBody>
+                  <a:tcPr marL="73152" marR="73152" marT="27432" marB="27432" anchor="ctr">
+                    <a:solidFill>
+                      <a:srgbClr val="FFFFFF"/>
+                    </a:solidFill>
+                  </a:tcPr>
+                </a:tc>
+                <a:tc>
+                  <a:txBody>
+                    <a:bodyPr wrap="square"/>
+                    <a:lstStyle/>
+                    <a:p>
+                      <a:pPr algn="ctr"/>
+                      <a:r>
+                        <a:rPr sz="1200" b="1" i="0">
+                          <a:solidFill>
+                            <a:srgbClr val="FFFFFF"/>
+                          </a:solidFill>
+                          <a:latin typeface="Calibri"/>
+                        </a:rPr>
+                        <a:t>Médio</a:t>
+                      </a:r>
+                    </a:p>
+                  </a:txBody>
+                  <a:tcPr marL="73152" marR="73152" marT="27432" marB="27432" anchor="ctr">
+                    <a:solidFill>
+                      <a:srgbClr val="F9A825"/>
+                    </a:solidFill>
+                  </a:tcPr>
+                </a:tc>
+                <a:tc>
+                  <a:txBody>
+                    <a:bodyPr wrap="square"/>
+                    <a:lstStyle/>
+                    <a:p>
+                      <a:pPr algn="r"/>
+                      <a:r>
+                        <a:rPr sz="1200" b="0" i="0">
+                          <a:solidFill>
+                            <a:srgbClr val="333333"/>
+                          </a:solidFill>
+                          <a:latin typeface="Calibri"/>
+                        </a:rPr>
+                        <a:t>53%</a:t>
+                      </a:r>
+                    </a:p>
+                  </a:txBody>
+                  <a:tcPr marL="73152" marR="73152" marT="27432" marB="27432" anchor="ctr">
+                    <a:solidFill>
+                      <a:srgbClr val="FFFFFF"/>
+                    </a:solidFill>
+                  </a:tcPr>
+                </a:tc>
+                <a:tc>
+                  <a:txBody>
+                    <a:bodyPr wrap="square"/>
+                    <a:lstStyle/>
+                    <a:p>
+                      <a:pPr algn="r"/>
+                      <a:r>
+                        <a:rPr sz="1200" b="0" i="0">
+                          <a:solidFill>
+                            <a:srgbClr val="333333"/>
+                          </a:solidFill>
+                          <a:latin typeface="Calibri"/>
+                        </a:rPr>
+                        <a:t>R$ 3,3 mi</a:t>
+                      </a:r>
+                    </a:p>
+                  </a:txBody>
+                  <a:tcPr marL="73152" marR="73152" marT="27432" marB="27432" anchor="ctr">
+                    <a:solidFill>
+                      <a:srgbClr val="FFFFFF"/>
+                    </a:solidFill>
+                  </a:tcPr>
+                </a:tc>
+              </a:tr>
+              <a:tr h="457200">
+                <a:tc>
+                  <a:txBody>
+                    <a:bodyPr wrap="square"/>
+                    <a:lstStyle/>
+                    <a:p>
+                      <a:pPr algn="l"/>
+                      <a:r>
+                        <a:rPr sz="1200" b="0" i="0">
+                          <a:solidFill>
+                            <a:srgbClr val="333333"/>
+                          </a:solidFill>
+                          <a:latin typeface="Calibri"/>
+                        </a:rPr>
+                        <a:t>P-024</a:t>
+                      </a:r>
+                    </a:p>
+                  </a:txBody>
+                  <a:tcPr marL="73152" marR="73152" marT="27432" marB="27432" anchor="ctr">
+                    <a:solidFill>
+                      <a:srgbClr val="F2F2F2"/>
+                    </a:solidFill>
+                  </a:tcPr>
+                </a:tc>
+                <a:tc>
+                  <a:txBody>
+                    <a:bodyPr wrap="square"/>
+                    <a:lstStyle/>
+                    <a:p>
+                      <a:pPr algn="l"/>
+                      <a:r>
+                        <a:rPr sz="1200" b="0" i="0">
+                          <a:solidFill>
+                            <a:srgbClr val="333333"/>
+                          </a:solidFill>
+                          <a:latin typeface="Calibri"/>
+                        </a:rPr>
+                        <a:t>Projeto 24</a:t>
+                      </a:r>
+                    </a:p>
+                  </a:txBody>
+                  <a:tcPr marL="73152" marR="73152" marT="27432" marB="27432" anchor="ctr">
+                    <a:solidFill>
+                      <a:srgbClr val="F2F2F2"/>
+                    </a:solidFill>
+                  </a:tcPr>
+                </a:tc>
+                <a:tc>
+                  <a:txBody>
+                    <a:bodyPr wrap="square"/>
+                    <a:lstStyle/>
+                    <a:p>
+                      <a:pPr algn="l"/>
+                      <a:r>
+                        <a:rPr sz="1200" b="0" i="0">
+                          <a:solidFill>
+                            <a:srgbClr val="333333"/>
+                          </a:solidFill>
+                          <a:latin typeface="Calibri"/>
+                        </a:rPr>
+                        <a:t>Validação</a:t>
+                      </a:r>
+                    </a:p>
+                  </a:txBody>
+                  <a:tcPr marL="73152" marR="73152" marT="27432" marB="27432" anchor="ctr">
+                    <a:solidFill>
+                      <a:srgbClr val="F2F2F2"/>
+                    </a:solidFill>
+                  </a:tcPr>
+                </a:tc>
+                <a:tc>
+                  <a:txBody>
+                    <a:bodyPr wrap="square"/>
+                    <a:lstStyle/>
+                    <a:p>
+                      <a:pPr algn="ctr"/>
+                      <a:r>
+                        <a:rPr sz="1200" b="1" i="0">
+                          <a:solidFill>
+                            <a:srgbClr val="FFFFFF"/>
+                          </a:solidFill>
+                          <a:latin typeface="Calibri"/>
+                        </a:rPr>
+                        <a:t>Alto</a:t>
+                      </a:r>
+                    </a:p>
+                  </a:txBody>
+                  <a:tcPr marL="73152" marR="73152" marT="27432" marB="27432" anchor="ctr">
+                    <a:solidFill>
+                      <a:srgbClr val="C62828"/>
+                    </a:solidFill>
+                  </a:tcPr>
+                </a:tc>
+                <a:tc>
+                  <a:txBody>
+                    <a:bodyPr wrap="square"/>
+                    <a:lstStyle/>
+                    <a:p>
+                      <a:pPr algn="r"/>
+                      <a:r>
+                        <a:rPr sz="1200" b="0" i="0">
+                          <a:solidFill>
+                            <a:srgbClr val="333333"/>
+                          </a:solidFill>
+                          <a:latin typeface="Calibri"/>
+                        </a:rPr>
+                        <a:t>54%</a:t>
+                      </a:r>
+                    </a:p>
+                  </a:txBody>
+                  <a:tcPr marL="73152" marR="73152" marT="27432" marB="27432" anchor="ctr">
+                    <a:solidFill>
+                      <a:srgbClr val="F2F2F2"/>
+                    </a:solidFill>
+                  </a:tcPr>
+                </a:tc>
+                <a:tc>
+                  <a:txBody>
+                    <a:bodyPr wrap="square"/>
+                    <a:lstStyle/>
+                    <a:p>
+                      <a:pPr algn="r"/>
+                      <a:r>
+                        <a:rPr sz="1200" b="0" i="0">
+                          <a:solidFill>
+                            <a:srgbClr val="333333"/>
+                          </a:solidFill>
+                          <a:latin typeface="Calibri"/>
+                        </a:rPr>
+                        <a:t>R$ 3,4 mi</a:t>
+                      </a:r>
+                    </a:p>
+                  </a:txBody>
+                  <a:tcPr marL="73152" marR="73152" marT="27432" marB="27432" anchor="ctr">
+                    <a:solidFill>
+                      <a:srgbClr val="F2F2F2"/>
+                    </a:solidFill>
+                  </a:tcPr>
+                </a:tc>
+              </a:tr>
+              <a:tr h="457200">
+                <a:tc>
+                  <a:txBody>
+                    <a:bodyPr wrap="square"/>
+                    <a:lstStyle/>
+                    <a:p>
+                      <a:pPr algn="l"/>
+                      <a:r>
+                        <a:rPr sz="1200" b="0" i="0">
+                          <a:solidFill>
+                            <a:srgbClr val="333333"/>
+                          </a:solidFill>
+                          <a:latin typeface="Calibri"/>
+                        </a:rPr>
+                        <a:t>P-025</a:t>
+                      </a:r>
+                    </a:p>
+                  </a:txBody>
+                  <a:tcPr marL="73152" marR="73152" marT="27432" marB="27432" anchor="ctr">
+                    <a:solidFill>
+                      <a:srgbClr val="FFFFFF"/>
+                    </a:solidFill>
+                  </a:tcPr>
+                </a:tc>
+                <a:tc>
+                  <a:txBody>
+                    <a:bodyPr wrap="square"/>
+                    <a:lstStyle/>
+                    <a:p>
+                      <a:pPr algn="l"/>
+                      <a:r>
+                        <a:rPr sz="1200" b="0" i="0">
+                          <a:solidFill>
+                            <a:srgbClr val="333333"/>
+                          </a:solidFill>
+                          <a:latin typeface="Calibri"/>
+                        </a:rPr>
+                        <a:t>Projeto 25</a:t>
+                      </a:r>
+                    </a:p>
+                  </a:txBody>
+                  <a:tcPr marL="73152" marR="73152" marT="27432" marB="27432" anchor="ctr">
+                    <a:solidFill>
+                      <a:srgbClr val="FFFFFF"/>
+                    </a:solidFill>
+                  </a:tcPr>
+                </a:tc>
+                <a:tc>
+                  <a:txBody>
+                    <a:bodyPr wrap="square"/>
+                    <a:lstStyle/>
+                    <a:p>
+                      <a:pPr algn="l"/>
+                      <a:r>
+                        <a:rPr sz="1200" b="0" i="0">
+                          <a:solidFill>
+                            <a:srgbClr val="333333"/>
+                          </a:solidFill>
+                          <a:latin typeface="Calibri"/>
+                        </a:rPr>
+                        <a:t>Em andamento</a:t>
+                      </a:r>
+                    </a:p>
+                  </a:txBody>
+                  <a:tcPr marL="73152" marR="73152" marT="27432" marB="27432" anchor="ctr">
+                    <a:solidFill>
+                      <a:srgbClr val="FFFFFF"/>
+                    </a:solidFill>
+                  </a:tcPr>
+                </a:tc>
+                <a:tc>
+                  <a:txBody>
+                    <a:bodyPr wrap="square"/>
+                    <a:lstStyle/>
+                    <a:p>
+                      <a:pPr algn="ctr"/>
+                      <a:r>
+                        <a:rPr sz="1200" b="1" i="0">
+                          <a:solidFill>
+                            <a:srgbClr val="FFFFFF"/>
+                          </a:solidFill>
+                          <a:latin typeface="Calibri"/>
+                        </a:rPr>
+                        <a:t>Médio</a:t>
+                      </a:r>
+                    </a:p>
+                  </a:txBody>
+                  <a:tcPr marL="73152" marR="73152" marT="27432" marB="27432" anchor="ctr">
+                    <a:solidFill>
+                      <a:srgbClr val="F9A825"/>
+                    </a:solidFill>
+                  </a:tcPr>
+                </a:tc>
+                <a:tc>
+                  <a:txBody>
+                    <a:bodyPr wrap="square"/>
+                    <a:lstStyle/>
+                    <a:p>
+                      <a:pPr algn="r"/>
+                      <a:r>
+                        <a:rPr sz="1200" b="0" i="0">
+                          <a:solidFill>
+                            <a:srgbClr val="333333"/>
+                          </a:solidFill>
+                          <a:latin typeface="Calibri"/>
+                        </a:rPr>
+                        <a:t>55%</a:t>
+                      </a:r>
+                    </a:p>
+                  </a:txBody>
+                  <a:tcPr marL="73152" marR="73152" marT="27432" marB="27432" anchor="ctr">
+                    <a:solidFill>
+                      <a:srgbClr val="FFFFFF"/>
+                    </a:solidFill>
+                  </a:tcPr>
+                </a:tc>
+                <a:tc>
+                  <a:txBody>
+                    <a:bodyPr wrap="square"/>
+                    <a:lstStyle/>
+                    <a:p>
+                      <a:pPr algn="r"/>
+                      <a:r>
+                        <a:rPr sz="1200" b="0" i="0">
+                          <a:solidFill>
+                            <a:srgbClr val="333333"/>
+                          </a:solidFill>
+                          <a:latin typeface="Calibri"/>
+                        </a:rPr>
+                        <a:t>R$ 3,5 mi</a:t>
+                      </a:r>
+                    </a:p>
+                  </a:txBody>
+                  <a:tcPr marL="73152" marR="73152" marT="27432" marB="27432" anchor="ctr">
+                    <a:solidFill>
+                      <a:srgbClr val="FFFFFF"/>
+                    </a:solidFill>
+                  </a:tcPr>
+                </a:tc>
+              </a:tr>
+            </a:tbl>
+          </a:graphicData>
+        </a:graphic>
+      </p:graphicFrame>
+    </p:spTree>
+  </p:cSld>
+  <p:clrMapOvr>
+    <a:masterClrMapping/>
+  </p:clrMapOvr>
+</p:sld>
+</file>
+
+<file path=ppt/slides/slide35.xml><?xml version="1.0" encoding="utf-8"?>
 <p:sld xmlns:a="http://schemas.openxmlformats.org/drawingml/2006/main" xmlns:p="http://schemas.openxmlformats.org/presentationml/2006/main" xmlns:r="http://schemas.openxmlformats.org/officeDocument/2006/relationships">
   <p:cSld>
     <p:bg>
